--- a/public/downloads/praesentation/M11.pptx
+++ b/public/downloads/praesentation/M11.pptx
@@ -17,6 +17,10 @@
     <p:sldId id="265" r:id="rId16"/>
     <p:sldId id="266" r:id="rId17"/>
     <p:sldId id="267" r:id="rId18"/>
+    <p:sldId id="268" r:id="rId19"/>
+    <p:sldId id="269" r:id="rId20"/>
+    <p:sldId id="270" r:id="rId21"/>
+    <p:sldId id="271" r:id="rId22"/>
   </p:sldIdLst>
   <p:sldSz cx="12188952" cy="6858000" type="screen4x3"/>
   <p:notesSz cx="6858000" cy="9144000"/>
@@ -3158,8 +3162,8 @@
         </p:nvSpPr>
         <p:spPr>
           <a:xfrm>
-            <a:off x="365760" y="365760"/>
-            <a:ext cx="11430000" cy="457200"/>
+            <a:off x="365760" y="320040"/>
+            <a:ext cx="11430000" cy="411480"/>
           </a:xfrm>
           <a:prstGeom prst="rect">
             <a:avLst/>
@@ -3174,13 +3178,13 @@
           <a:p>
             <a:pPr algn="l"/>
             <a:r>
-              <a:rPr sz="1100" b="0">
-                <a:solidFill>
-                  <a:srgbClr val="FFFFFF"/>
+              <a:rPr sz="1100" b="0" i="0">
+                <a:solidFill>
+                  <a:srgbClr val="BBCCEE"/>
                 </a:solidFill>
                 <a:latin typeface="Arial"/>
               </a:rPr>
-              <a:t>M11  ·  K-03 Gesprächsführung &amp; Beratung  ·  Sparring  ·  90 Min.</a:t>
+              <a:t>M11  ·  K-03 Gesprächsführung &amp; Beratung  ·  Zielstufe: Sparring  ·  90 Min.</a:t>
             </a:r>
           </a:p>
         </p:txBody>
@@ -3193,14 +3197,14 @@
         </p:nvSpPr>
         <p:spPr>
           <a:xfrm>
-            <a:off x="365760" y="868680"/>
-            <a:ext cx="7315200" cy="27432"/>
+            <a:off x="365760" y="804672"/>
+            <a:ext cx="8229600" cy="22860"/>
           </a:xfrm>
           <a:prstGeom prst="rect">
             <a:avLst/>
           </a:prstGeom>
           <a:solidFill>
-            <a:srgbClr val="FFFFFF"/>
+            <a:srgbClr val="335CC0"/>
           </a:solidFill>
           <a:ln>
             <a:noFill/>
@@ -3236,8 +3240,8 @@
         </p:nvSpPr>
         <p:spPr>
           <a:xfrm>
-            <a:off x="365760" y="1097280"/>
-            <a:ext cx="11430000" cy="2286000"/>
+            <a:off x="365760" y="1005840"/>
+            <a:ext cx="11430000" cy="2560320"/>
           </a:xfrm>
           <a:prstGeom prst="rect">
             <a:avLst/>
@@ -3252,7 +3256,7 @@
           <a:p>
             <a:pPr algn="l"/>
             <a:r>
-              <a:rPr sz="4000" b="1">
+              <a:rPr sz="4200" b="1" i="0">
                 <a:solidFill>
                   <a:srgbClr val="FFFFFF"/>
                 </a:solidFill>
@@ -3271,8 +3275,8 @@
         </p:nvSpPr>
         <p:spPr>
           <a:xfrm>
-            <a:off x="365760" y="3200400"/>
-            <a:ext cx="9144000" cy="914400"/>
+            <a:off x="365760" y="3383280"/>
+            <a:ext cx="10058400" cy="822960"/>
           </a:xfrm>
           <a:prstGeom prst="rect">
             <a:avLst/>
@@ -3287,7 +3291,7 @@
           <a:p>
             <a:pPr algn="l"/>
             <a:r>
-              <a:rPr sz="2000" b="0">
+              <a:rPr sz="2000" b="0" i="1">
                 <a:solidFill>
                   <a:srgbClr val="CCD6F0"/>
                 </a:solidFill>
@@ -3306,8 +3310,8 @@
         </p:nvSpPr>
         <p:spPr>
           <a:xfrm>
-            <a:off x="365760" y="6217920"/>
-            <a:ext cx="11430000" cy="457200"/>
+            <a:off x="365760" y="6309360"/>
+            <a:ext cx="11430000" cy="365760"/>
           </a:xfrm>
           <a:prstGeom prst="rect">
             <a:avLst/>
@@ -3322,9 +3326,9 @@
           <a:p>
             <a:pPr algn="l"/>
             <a:r>
-              <a:rPr sz="1000" b="0">
-                <a:solidFill>
-                  <a:srgbClr val="99AACC"/>
+              <a:rPr sz="900" b="0" i="0">
+                <a:solidFill>
+                  <a:srgbClr val="889ACC"/>
                 </a:solidFill>
                 <a:latin typeface="Arial"/>
               </a:rPr>
@@ -3342,6 +3346,313 @@
 </file>
 
 <file path=ppt/slides/slide10.xml><?xml version="1.0" encoding="utf-8"?>
+<p:sld xmlns:a="http://schemas.openxmlformats.org/drawingml/2006/main" xmlns:p="http://schemas.openxmlformats.org/presentationml/2006/main" xmlns:r="http://schemas.openxmlformats.org/officeDocument/2006/relationships">
+  <p:cSld>
+    <p:bg>
+      <p:bgPr>
+        <a:solidFill>
+          <a:srgbClr val="FFFFFF"/>
+        </a:solidFill>
+        <a:effectLst/>
+      </p:bgPr>
+    </p:bg>
+    <p:spTree>
+      <p:nvGrpSpPr>
+        <p:cNvPr id="1" name=""/>
+        <p:cNvGrpSpPr/>
+        <p:nvPr/>
+      </p:nvGrpSpPr>
+      <p:grpSpPr/>
+      <p:sp>
+        <p:nvSpPr>
+          <p:cNvPr id="2" name="Rectangle 1"/>
+          <p:cNvSpPr/>
+          <p:nvPr/>
+        </p:nvSpPr>
+        <p:spPr>
+          <a:xfrm>
+            <a:off x="0" y="0"/>
+            <a:ext cx="73152" cy="6858000"/>
+          </a:xfrm>
+          <a:prstGeom prst="rect">
+            <a:avLst/>
+          </a:prstGeom>
+          <a:solidFill>
+            <a:srgbClr val="003DA5"/>
+          </a:solidFill>
+          <a:ln>
+            <a:noFill/>
+          </a:ln>
+        </p:spPr>
+        <p:style>
+          <a:lnRef idx="1">
+            <a:schemeClr val="accent1"/>
+          </a:lnRef>
+          <a:fillRef idx="3">
+            <a:schemeClr val="accent1"/>
+          </a:fillRef>
+          <a:effectRef idx="2">
+            <a:schemeClr val="accent1"/>
+          </a:effectRef>
+          <a:fontRef idx="minor">
+            <a:schemeClr val="lt1"/>
+          </a:fontRef>
+        </p:style>
+        <p:txBody>
+          <a:bodyPr rtlCol="0" anchor="ctr"/>
+          <a:lstStyle/>
+          <a:p>
+            <a:pPr algn="ctr"/>
+          </a:p>
+        </p:txBody>
+      </p:sp>
+      <p:sp>
+        <p:nvSpPr>
+          <p:cNvPr id="3" name="TextBox 2"/>
+          <p:cNvSpPr txBox="1"/>
+          <p:nvPr/>
+        </p:nvSpPr>
+        <p:spPr>
+          <a:xfrm>
+            <a:off x="228600" y="182880"/>
+            <a:ext cx="11430000" cy="320040"/>
+          </a:xfrm>
+          <a:prstGeom prst="rect">
+            <a:avLst/>
+          </a:prstGeom>
+          <a:noFill/>
+        </p:spPr>
+        <p:txBody>
+          <a:bodyPr wrap="square">
+            <a:spAutoFit/>
+          </a:bodyPr>
+          <a:lstStyle/>
+          <a:p>
+            <a:pPr algn="l"/>
+            <a:r>
+              <a:rPr sz="900" b="0" i="0">
+                <a:solidFill>
+                  <a:srgbClr val="556575"/>
+                </a:solidFill>
+                <a:latin typeface="Arial"/>
+              </a:rPr>
+              <a:t>M11 · 4.2 SPIN – Das Fragetechnik-System für tiefe Bedarfe</a:t>
+            </a:r>
+          </a:p>
+        </p:txBody>
+      </p:sp>
+      <p:sp>
+        <p:nvSpPr>
+          <p:cNvPr id="4" name="TextBox 3"/>
+          <p:cNvSpPr txBox="1"/>
+          <p:nvPr/>
+        </p:nvSpPr>
+        <p:spPr>
+          <a:xfrm>
+            <a:off x="365760" y="274320"/>
+            <a:ext cx="11430000" cy="777240"/>
+          </a:xfrm>
+          <a:prstGeom prst="rect">
+            <a:avLst/>
+          </a:prstGeom>
+          <a:noFill/>
+        </p:spPr>
+        <p:txBody>
+          <a:bodyPr wrap="square">
+            <a:spAutoFit/>
+          </a:bodyPr>
+          <a:lstStyle/>
+          <a:p>
+            <a:pPr algn="l"/>
+            <a:r>
+              <a:rPr sz="2200" b="1" i="0">
+                <a:solidFill>
+                  <a:srgbClr val="003DA5"/>
+                </a:solidFill>
+                <a:latin typeface="Arial"/>
+              </a:rPr>
+              <a:t>Fragetechnik in der Praxis: Drei Tiefen-Ebenen</a:t>
+            </a:r>
+          </a:p>
+        </p:txBody>
+      </p:sp>
+      <p:sp>
+        <p:nvSpPr>
+          <p:cNvPr id="5" name="Rectangle 4"/>
+          <p:cNvSpPr/>
+          <p:nvPr/>
+        </p:nvSpPr>
+        <p:spPr>
+          <a:xfrm>
+            <a:off x="365760" y="1005840"/>
+            <a:ext cx="11430000" cy="27432"/>
+          </a:xfrm>
+          <a:prstGeom prst="rect">
+            <a:avLst/>
+          </a:prstGeom>
+          <a:solidFill>
+            <a:srgbClr val="D1D5DB"/>
+          </a:solidFill>
+          <a:ln>
+            <a:noFill/>
+          </a:ln>
+        </p:spPr>
+        <p:style>
+          <a:lnRef idx="1">
+            <a:schemeClr val="accent1"/>
+          </a:lnRef>
+          <a:fillRef idx="3">
+            <a:schemeClr val="accent1"/>
+          </a:fillRef>
+          <a:effectRef idx="2">
+            <a:schemeClr val="accent1"/>
+          </a:effectRef>
+          <a:fontRef idx="minor">
+            <a:schemeClr val="lt1"/>
+          </a:fontRef>
+        </p:style>
+        <p:txBody>
+          <a:bodyPr rtlCol="0" anchor="ctr"/>
+          <a:lstStyle/>
+          <a:p>
+            <a:pPr algn="ctr"/>
+          </a:p>
+        </p:txBody>
+      </p:sp>
+      <p:sp>
+        <p:nvSpPr>
+          <p:cNvPr id="6" name="TextBox 5"/>
+          <p:cNvSpPr txBox="1"/>
+          <p:nvPr/>
+        </p:nvSpPr>
+        <p:spPr>
+          <a:xfrm>
+            <a:off x="365760" y="1143000"/>
+            <a:ext cx="11430000" cy="5212080"/>
+          </a:xfrm>
+          <a:prstGeom prst="rect">
+            <a:avLst/>
+          </a:prstGeom>
+          <a:noFill/>
+        </p:spPr>
+        <p:txBody>
+          <a:bodyPr wrap="square">
+            <a:spAutoFit/>
+          </a:bodyPr>
+          <a:lstStyle/>
+          <a:p>
+            <a:pPr>
+              <a:spcBef>
+                <a:spcPts val="500"/>
+              </a:spcBef>
+            </a:pPr>
+            <a:r>
+              <a:rPr sz="1500">
+                <a:solidFill>
+                  <a:srgbClr val="003DA5"/>
+                </a:solidFill>
+                <a:latin typeface="Arial"/>
+              </a:rPr>
+              <a:t>▪  </a:t>
+            </a:r>
+            <a:r>
+              <a:rPr sz="1700" b="1">
+                <a:solidFill>
+                  <a:srgbClr val="003DA5"/>
+                </a:solidFill>
+                <a:latin typeface="Arial"/>
+              </a:rPr>
+              <a:t>Ebene 1 – Thema: </a:t>
+            </a:r>
+            <a:r>
+              <a:rPr sz="1700">
+                <a:solidFill>
+                  <a:srgbClr val="1A1A1A"/>
+                </a:solidFill>
+                <a:latin typeface="Arial"/>
+              </a:rPr>
+              <a:t>(Was ist das Gesprächsthema?) &gt; „Wie läuft das Geschäft aktuell?"</a:t>
+            </a:r>
+          </a:p>
+          <a:p>
+            <a:pPr>
+              <a:spcBef>
+                <a:spcPts val="500"/>
+              </a:spcBef>
+            </a:pPr>
+            <a:r>
+              <a:rPr sz="1500">
+                <a:solidFill>
+                  <a:srgbClr val="003DA5"/>
+                </a:solidFill>
+                <a:latin typeface="Arial"/>
+              </a:rPr>
+              <a:t>▪  </a:t>
+            </a:r>
+            <a:r>
+              <a:rPr sz="1700" b="1">
+                <a:solidFill>
+                  <a:srgbClr val="003DA5"/>
+                </a:solidFill>
+                <a:latin typeface="Arial"/>
+              </a:rPr>
+              <a:t>Ebene 2 – Problem: </a:t>
+            </a:r>
+            <a:r>
+              <a:rPr sz="1700">
+                <a:solidFill>
+                  <a:srgbClr val="1A1A1A"/>
+                </a:solidFill>
+                <a:latin typeface="Arial"/>
+              </a:rPr>
+              <a:t>(Wo drückt der Schuh?) &gt; „Sie sagten, die Personalkosten steigen. Was steckt dahinter?"</a:t>
+            </a:r>
+          </a:p>
+          <a:p>
+            <a:pPr>
+              <a:spcBef>
+                <a:spcPts val="500"/>
+              </a:spcBef>
+            </a:pPr>
+            <a:r>
+              <a:rPr sz="1500">
+                <a:solidFill>
+                  <a:srgbClr val="003DA5"/>
+                </a:solidFill>
+                <a:latin typeface="Arial"/>
+              </a:rPr>
+              <a:t>▪  </a:t>
+            </a:r>
+            <a:r>
+              <a:rPr sz="1700" b="1">
+                <a:solidFill>
+                  <a:srgbClr val="003DA5"/>
+                </a:solidFill>
+                <a:latin typeface="Arial"/>
+              </a:rPr>
+              <a:t>Ebene 3 – Bedeutung: </a:t>
+            </a:r>
+            <a:r>
+              <a:rPr sz="1700">
+                <a:solidFill>
+                  <a:srgbClr val="1A1A1A"/>
+                </a:solidFill>
+                <a:latin typeface="Arial"/>
+              </a:rPr>
+              <a:t>(Was steht auf dem Spiel?) &gt; „Wenn sich das fortsetzt: Was bedeutet das für Ihre Pläne für die nächsten fünf Jahre?"</a:t>
+            </a:r>
+          </a:p>
+        </p:txBody>
+      </p:sp>
+    </p:spTree>
+  </p:cSld>
+  <p:clrMapOvr>
+    <a:masterClrMapping/>
+  </p:clrMapOvr>
+</p:sld>
+</file>
+
+<file path=ppt/slides/slide11.xml><?xml version="1.0" encoding="utf-8"?>
 <p:sld xmlns:a="http://schemas.openxmlformats.org/drawingml/2006/main" xmlns:p="http://schemas.openxmlformats.org/presentationml/2006/main" xmlns:r="http://schemas.openxmlformats.org/officeDocument/2006/relationships">
   <p:cSld>
     <p:bg>
@@ -3410,8 +3721,8 @@
         </p:nvSpPr>
         <p:spPr>
           <a:xfrm>
-            <a:off x="365760" y="2286000"/>
-            <a:ext cx="11430000" cy="1828800"/>
+            <a:off x="365760" y="2011680"/>
+            <a:ext cx="11430000" cy="2011680"/>
           </a:xfrm>
           <a:prstGeom prst="rect">
             <a:avLst/>
@@ -3426,13 +3737,13 @@
           <a:p>
             <a:pPr algn="l"/>
             <a:r>
-              <a:rPr sz="3600" b="1">
+              <a:rPr sz="3600" b="1" i="0">
                 <a:solidFill>
                   <a:srgbClr val="FFFFFF"/>
                 </a:solidFill>
                 <a:latin typeface="Arial"/>
               </a:rPr>
-              <a:t>Ergänzend</a:t>
+              <a:t>Übung im Plenum: „Was höre ich wirklich?"</a:t>
             </a:r>
           </a:p>
         </p:txBody>
@@ -3445,7 +3756,7 @@
 </p:sld>
 </file>
 
-<file path=ppt/slides/slide11.xml><?xml version="1.0" encoding="utf-8"?>
+<file path=ppt/slides/slide12.xml><?xml version="1.0" encoding="utf-8"?>
 <p:sld xmlns:a="http://schemas.openxmlformats.org/drawingml/2006/main" xmlns:p="http://schemas.openxmlformats.org/presentationml/2006/main" xmlns:r="http://schemas.openxmlformats.org/officeDocument/2006/relationships">
   <p:cSld>
     <p:bg>
@@ -3514,8 +3825,8 @@
         </p:nvSpPr>
         <p:spPr>
           <a:xfrm>
-            <a:off x="365760" y="2286000"/>
-            <a:ext cx="11430000" cy="1828800"/>
+            <a:off x="365760" y="2011680"/>
+            <a:ext cx="11430000" cy="2011680"/>
           </a:xfrm>
           <a:prstGeom prst="rect">
             <a:avLst/>
@@ -3530,13 +3841,13 @@
           <a:p>
             <a:pPr algn="l"/>
             <a:r>
-              <a:rPr sz="3600" b="1">
+              <a:rPr sz="3600" b="1" i="0">
                 <a:solidFill>
                   <a:srgbClr val="FFFFFF"/>
                 </a:solidFill>
                 <a:latin typeface="Arial"/>
               </a:rPr>
-              <a:t>Praxismaterialien</a:t>
+              <a:t>Arbeitsblatt A: SPIN-Fragen vorbereiten</a:t>
             </a:r>
           </a:p>
         </p:txBody>
@@ -3549,13 +3860,562 @@
 </p:sld>
 </file>
 
-<file path=ppt/slides/slide12.xml><?xml version="1.0" encoding="utf-8"?>
+<file path=ppt/slides/slide13.xml><?xml version="1.0" encoding="utf-8"?>
 <p:sld xmlns:a="http://schemas.openxmlformats.org/drawingml/2006/main" xmlns:p="http://schemas.openxmlformats.org/presentationml/2006/main" xmlns:r="http://schemas.openxmlformats.org/officeDocument/2006/relationships">
   <p:cSld>
     <p:bg>
       <p:bgPr>
         <a:solidFill>
-          <a:srgbClr val="003DA5"/>
+          <a:srgbClr val="FFFFFF"/>
+        </a:solidFill>
+        <a:effectLst/>
+      </p:bgPr>
+    </p:bg>
+    <p:spTree>
+      <p:nvGrpSpPr>
+        <p:cNvPr id="1" name=""/>
+        <p:cNvGrpSpPr/>
+        <p:nvPr/>
+      </p:nvGrpSpPr>
+      <p:grpSpPr/>
+      <p:sp>
+        <p:nvSpPr>
+          <p:cNvPr id="2" name="Rectangle 1"/>
+          <p:cNvSpPr/>
+          <p:nvPr/>
+        </p:nvSpPr>
+        <p:spPr>
+          <a:xfrm>
+            <a:off x="0" y="0"/>
+            <a:ext cx="73152" cy="6858000"/>
+          </a:xfrm>
+          <a:prstGeom prst="rect">
+            <a:avLst/>
+          </a:prstGeom>
+          <a:solidFill>
+            <a:srgbClr val="003DA5"/>
+          </a:solidFill>
+          <a:ln>
+            <a:noFill/>
+          </a:ln>
+        </p:spPr>
+        <p:style>
+          <a:lnRef idx="1">
+            <a:schemeClr val="accent1"/>
+          </a:lnRef>
+          <a:fillRef idx="3">
+            <a:schemeClr val="accent1"/>
+          </a:fillRef>
+          <a:effectRef idx="2">
+            <a:schemeClr val="accent1"/>
+          </a:effectRef>
+          <a:fontRef idx="minor">
+            <a:schemeClr val="lt1"/>
+          </a:fontRef>
+        </p:style>
+        <p:txBody>
+          <a:bodyPr rtlCol="0" anchor="ctr"/>
+          <a:lstStyle/>
+          <a:p>
+            <a:pPr algn="ctr"/>
+          </a:p>
+        </p:txBody>
+      </p:sp>
+      <p:sp>
+        <p:nvSpPr>
+          <p:cNvPr id="3" name="TextBox 2"/>
+          <p:cNvSpPr txBox="1"/>
+          <p:nvPr/>
+        </p:nvSpPr>
+        <p:spPr>
+          <a:xfrm>
+            <a:off x="228600" y="182880"/>
+            <a:ext cx="11430000" cy="320040"/>
+          </a:xfrm>
+          <a:prstGeom prst="rect">
+            <a:avLst/>
+          </a:prstGeom>
+          <a:noFill/>
+        </p:spPr>
+        <p:txBody>
+          <a:bodyPr wrap="square">
+            <a:spAutoFit/>
+          </a:bodyPr>
+          <a:lstStyle/>
+          <a:p>
+            <a:pPr algn="l"/>
+            <a:r>
+              <a:rPr sz="900" b="0" i="0">
+                <a:solidFill>
+                  <a:srgbClr val="556575"/>
+                </a:solidFill>
+                <a:latin typeface="Arial"/>
+              </a:rPr>
+              <a:t>M11 · 4.6 Arbeitsblätter</a:t>
+            </a:r>
+          </a:p>
+        </p:txBody>
+      </p:sp>
+      <p:sp>
+        <p:nvSpPr>
+          <p:cNvPr id="4" name="TextBox 3"/>
+          <p:cNvSpPr txBox="1"/>
+          <p:nvPr/>
+        </p:nvSpPr>
+        <p:spPr>
+          <a:xfrm>
+            <a:off x="365760" y="274320"/>
+            <a:ext cx="11430000" cy="777240"/>
+          </a:xfrm>
+          <a:prstGeom prst="rect">
+            <a:avLst/>
+          </a:prstGeom>
+          <a:noFill/>
+        </p:spPr>
+        <p:txBody>
+          <a:bodyPr wrap="square">
+            <a:spAutoFit/>
+          </a:bodyPr>
+          <a:lstStyle/>
+          <a:p>
+            <a:pPr algn="l"/>
+            <a:r>
+              <a:rPr sz="2200" b="1" i="0">
+                <a:solidFill>
+                  <a:srgbClr val="003DA5"/>
+                </a:solidFill>
+                <a:latin typeface="Arial"/>
+              </a:rPr>
+              <a:t>Arbeitsblatt A: SPIN-Fragen vorbereiten</a:t>
+            </a:r>
+          </a:p>
+        </p:txBody>
+      </p:sp>
+      <p:sp>
+        <p:nvSpPr>
+          <p:cNvPr id="5" name="Rectangle 4"/>
+          <p:cNvSpPr/>
+          <p:nvPr/>
+        </p:nvSpPr>
+        <p:spPr>
+          <a:xfrm>
+            <a:off x="365760" y="1005840"/>
+            <a:ext cx="11430000" cy="27432"/>
+          </a:xfrm>
+          <a:prstGeom prst="rect">
+            <a:avLst/>
+          </a:prstGeom>
+          <a:solidFill>
+            <a:srgbClr val="D1D5DB"/>
+          </a:solidFill>
+          <a:ln>
+            <a:noFill/>
+          </a:ln>
+        </p:spPr>
+        <p:style>
+          <a:lnRef idx="1">
+            <a:schemeClr val="accent1"/>
+          </a:lnRef>
+          <a:fillRef idx="3">
+            <a:schemeClr val="accent1"/>
+          </a:fillRef>
+          <a:effectRef idx="2">
+            <a:schemeClr val="accent1"/>
+          </a:effectRef>
+          <a:fontRef idx="minor">
+            <a:schemeClr val="lt1"/>
+          </a:fontRef>
+        </p:style>
+        <p:txBody>
+          <a:bodyPr rtlCol="0" anchor="ctr"/>
+          <a:lstStyle/>
+          <a:p>
+            <a:pPr algn="ctr"/>
+          </a:p>
+        </p:txBody>
+      </p:sp>
+      <p:graphicFrame>
+        <p:nvGraphicFramePr>
+          <p:cNvPr id="6" name="Table 5"/>
+          <p:cNvGraphicFramePr>
+            <a:graphicFrameLocks noGrp="1"/>
+          </p:cNvGraphicFramePr>
+          <p:nvPr/>
+        </p:nvGraphicFramePr>
+        <p:xfrm>
+          <a:off x="365760" y="1143000"/>
+          <a:ext cx="11430000" cy="2377440"/>
+        </p:xfrm>
+        <a:graphic>
+          <a:graphicData uri="http://schemas.openxmlformats.org/drawingml/2006/table">
+            <a:tbl>
+              <a:tblPr firstRow="1" bandRow="1">
+                <a:tableStyleId>{5C22544A-7EE6-4342-B048-85BDC9FD1C3A}</a:tableStyleId>
+              </a:tblPr>
+              <a:tblGrid>
+                <a:gridCol w="3810000"/>
+                <a:gridCol w="3810000"/>
+                <a:gridCol w="3810000"/>
+              </a:tblGrid>
+              <a:tr h="475488">
+                <a:tc>
+                  <a:txBody>
+                    <a:bodyPr wrap="square"/>
+                    <a:lstStyle/>
+                    <a:p>
+                      <a:r>
+                        <a:rPr sz="1100" b="1">
+                          <a:solidFill>
+                            <a:srgbClr val="FFFFFF"/>
+                          </a:solidFill>
+                          <a:latin typeface="Arial"/>
+                        </a:rPr>
+                        <a:t>Fragetyp</a:t>
+                      </a:r>
+                    </a:p>
+                  </a:txBody>
+                  <a:tcPr>
+                    <a:solidFill>
+                      <a:srgbClr val="003DA5"/>
+                    </a:solidFill>
+                  </a:tcPr>
+                </a:tc>
+                <a:tc>
+                  <a:txBody>
+                    <a:bodyPr wrap="square"/>
+                    <a:lstStyle/>
+                    <a:p>
+                      <a:r>
+                        <a:rPr sz="1100" b="1">
+                          <a:solidFill>
+                            <a:srgbClr val="FFFFFF"/>
+                          </a:solidFill>
+                          <a:latin typeface="Arial"/>
+                        </a:rPr>
+                        <a:t>Meine Frage 1</a:t>
+                      </a:r>
+                    </a:p>
+                  </a:txBody>
+                  <a:tcPr>
+                    <a:solidFill>
+                      <a:srgbClr val="003DA5"/>
+                    </a:solidFill>
+                  </a:tcPr>
+                </a:tc>
+                <a:tc>
+                  <a:txBody>
+                    <a:bodyPr wrap="square"/>
+                    <a:lstStyle/>
+                    <a:p>
+                      <a:r>
+                        <a:rPr sz="1100" b="1">
+                          <a:solidFill>
+                            <a:srgbClr val="FFFFFF"/>
+                          </a:solidFill>
+                          <a:latin typeface="Arial"/>
+                        </a:rPr>
+                        <a:t>Meine Frage 2</a:t>
+                      </a:r>
+                    </a:p>
+                  </a:txBody>
+                  <a:tcPr>
+                    <a:solidFill>
+                      <a:srgbClr val="003DA5"/>
+                    </a:solidFill>
+                  </a:tcPr>
+                </a:tc>
+              </a:tr>
+              <a:tr h="475488">
+                <a:tc>
+                  <a:txBody>
+                    <a:bodyPr wrap="square"/>
+                    <a:lstStyle/>
+                    <a:p>
+                      <a:r>
+                        <a:rPr sz="1100" b="0">
+                          <a:solidFill>
+                            <a:srgbClr val="1A1A1A"/>
+                          </a:solidFill>
+                          <a:latin typeface="Arial"/>
+                        </a:rPr>
+                        <a:t>Situationsfrage</a:t>
+                      </a:r>
+                    </a:p>
+                  </a:txBody>
+                  <a:tcPr>
+                    <a:solidFill>
+                      <a:srgbClr val="FFFFFF"/>
+                    </a:solidFill>
+                  </a:tcPr>
+                </a:tc>
+                <a:tc>
+                  <a:txBody>
+                    <a:bodyPr wrap="square"/>
+                    <a:lstStyle/>
+                    <a:p>
+                      <a:r>
+                        <a:rPr sz="1100" b="0">
+                          <a:solidFill>
+                            <a:srgbClr val="1A1A1A"/>
+                          </a:solidFill>
+                          <a:latin typeface="Arial"/>
+                        </a:rPr>
+                        <a:t/>
+                      </a:r>
+                    </a:p>
+                  </a:txBody>
+                  <a:tcPr>
+                    <a:solidFill>
+                      <a:srgbClr val="FFFFFF"/>
+                    </a:solidFill>
+                  </a:tcPr>
+                </a:tc>
+                <a:tc>
+                  <a:txBody>
+                    <a:bodyPr wrap="square"/>
+                    <a:lstStyle/>
+                    <a:p>
+                      <a:r>
+                        <a:rPr sz="1100" b="0">
+                          <a:solidFill>
+                            <a:srgbClr val="1A1A1A"/>
+                          </a:solidFill>
+                          <a:latin typeface="Arial"/>
+                        </a:rPr>
+                        <a:t/>
+                      </a:r>
+                    </a:p>
+                  </a:txBody>
+                  <a:tcPr>
+                    <a:solidFill>
+                      <a:srgbClr val="FFFFFF"/>
+                    </a:solidFill>
+                  </a:tcPr>
+                </a:tc>
+              </a:tr>
+              <a:tr h="475488">
+                <a:tc>
+                  <a:txBody>
+                    <a:bodyPr wrap="square"/>
+                    <a:lstStyle/>
+                    <a:p>
+                      <a:r>
+                        <a:rPr sz="1100" b="0">
+                          <a:solidFill>
+                            <a:srgbClr val="1A1A1A"/>
+                          </a:solidFill>
+                          <a:latin typeface="Arial"/>
+                        </a:rPr>
+                        <a:t>Problemfrage</a:t>
+                      </a:r>
+                    </a:p>
+                  </a:txBody>
+                  <a:tcPr>
+                    <a:solidFill>
+                      <a:srgbClr val="F4F6FA"/>
+                    </a:solidFill>
+                  </a:tcPr>
+                </a:tc>
+                <a:tc>
+                  <a:txBody>
+                    <a:bodyPr wrap="square"/>
+                    <a:lstStyle/>
+                    <a:p>
+                      <a:r>
+                        <a:rPr sz="1100" b="0">
+                          <a:solidFill>
+                            <a:srgbClr val="1A1A1A"/>
+                          </a:solidFill>
+                          <a:latin typeface="Arial"/>
+                        </a:rPr>
+                        <a:t/>
+                      </a:r>
+                    </a:p>
+                  </a:txBody>
+                  <a:tcPr>
+                    <a:solidFill>
+                      <a:srgbClr val="F4F6FA"/>
+                    </a:solidFill>
+                  </a:tcPr>
+                </a:tc>
+                <a:tc>
+                  <a:txBody>
+                    <a:bodyPr wrap="square"/>
+                    <a:lstStyle/>
+                    <a:p>
+                      <a:r>
+                        <a:rPr sz="1100" b="0">
+                          <a:solidFill>
+                            <a:srgbClr val="1A1A1A"/>
+                          </a:solidFill>
+                          <a:latin typeface="Arial"/>
+                        </a:rPr>
+                        <a:t/>
+                      </a:r>
+                    </a:p>
+                  </a:txBody>
+                  <a:tcPr>
+                    <a:solidFill>
+                      <a:srgbClr val="F4F6FA"/>
+                    </a:solidFill>
+                  </a:tcPr>
+                </a:tc>
+              </a:tr>
+              <a:tr h="475488">
+                <a:tc>
+                  <a:txBody>
+                    <a:bodyPr wrap="square"/>
+                    <a:lstStyle/>
+                    <a:p>
+                      <a:r>
+                        <a:rPr sz="1100" b="0">
+                          <a:solidFill>
+                            <a:srgbClr val="1A1A1A"/>
+                          </a:solidFill>
+                          <a:latin typeface="Arial"/>
+                        </a:rPr>
+                        <a:t>Implikationsfrage</a:t>
+                      </a:r>
+                    </a:p>
+                  </a:txBody>
+                  <a:tcPr>
+                    <a:solidFill>
+                      <a:srgbClr val="FFFFFF"/>
+                    </a:solidFill>
+                  </a:tcPr>
+                </a:tc>
+                <a:tc>
+                  <a:txBody>
+                    <a:bodyPr wrap="square"/>
+                    <a:lstStyle/>
+                    <a:p>
+                      <a:r>
+                        <a:rPr sz="1100" b="0">
+                          <a:solidFill>
+                            <a:srgbClr val="1A1A1A"/>
+                          </a:solidFill>
+                          <a:latin typeface="Arial"/>
+                        </a:rPr>
+                        <a:t/>
+                      </a:r>
+                    </a:p>
+                  </a:txBody>
+                  <a:tcPr>
+                    <a:solidFill>
+                      <a:srgbClr val="FFFFFF"/>
+                    </a:solidFill>
+                  </a:tcPr>
+                </a:tc>
+                <a:tc>
+                  <a:txBody>
+                    <a:bodyPr wrap="square"/>
+                    <a:lstStyle/>
+                    <a:p>
+                      <a:r>
+                        <a:rPr sz="1100" b="0">
+                          <a:solidFill>
+                            <a:srgbClr val="1A1A1A"/>
+                          </a:solidFill>
+                          <a:latin typeface="Arial"/>
+                        </a:rPr>
+                        <a:t/>
+                      </a:r>
+                    </a:p>
+                  </a:txBody>
+                  <a:tcPr>
+                    <a:solidFill>
+                      <a:srgbClr val="FFFFFF"/>
+                    </a:solidFill>
+                  </a:tcPr>
+                </a:tc>
+              </a:tr>
+              <a:tr h="475488">
+                <a:tc>
+                  <a:txBody>
+                    <a:bodyPr wrap="square"/>
+                    <a:lstStyle/>
+                    <a:p>
+                      <a:r>
+                        <a:rPr sz="1100" b="0">
+                          <a:solidFill>
+                            <a:srgbClr val="1A1A1A"/>
+                          </a:solidFill>
+                          <a:latin typeface="Arial"/>
+                        </a:rPr>
+                        <a:t>Nutzenfrage</a:t>
+                      </a:r>
+                    </a:p>
+                  </a:txBody>
+                  <a:tcPr>
+                    <a:solidFill>
+                      <a:srgbClr val="F4F6FA"/>
+                    </a:solidFill>
+                  </a:tcPr>
+                </a:tc>
+                <a:tc>
+                  <a:txBody>
+                    <a:bodyPr wrap="square"/>
+                    <a:lstStyle/>
+                    <a:p>
+                      <a:r>
+                        <a:rPr sz="1100" b="0">
+                          <a:solidFill>
+                            <a:srgbClr val="1A1A1A"/>
+                          </a:solidFill>
+                          <a:latin typeface="Arial"/>
+                        </a:rPr>
+                        <a:t/>
+                      </a:r>
+                    </a:p>
+                  </a:txBody>
+                  <a:tcPr>
+                    <a:solidFill>
+                      <a:srgbClr val="F4F6FA"/>
+                    </a:solidFill>
+                  </a:tcPr>
+                </a:tc>
+                <a:tc>
+                  <a:txBody>
+                    <a:bodyPr wrap="square"/>
+                    <a:lstStyle/>
+                    <a:p>
+                      <a:r>
+                        <a:rPr sz="1100" b="0">
+                          <a:solidFill>
+                            <a:srgbClr val="1A1A1A"/>
+                          </a:solidFill>
+                          <a:latin typeface="Arial"/>
+                        </a:rPr>
+                        <a:t/>
+                      </a:r>
+                    </a:p>
+                  </a:txBody>
+                  <a:tcPr>
+                    <a:solidFill>
+                      <a:srgbClr val="F4F6FA"/>
+                    </a:solidFill>
+                  </a:tcPr>
+                </a:tc>
+              </a:tr>
+            </a:tbl>
+          </a:graphicData>
+        </a:graphic>
+      </p:graphicFrame>
+    </p:spTree>
+  </p:cSld>
+  <p:clrMapOvr>
+    <a:masterClrMapping/>
+  </p:clrMapOvr>
+</p:sld>
+</file>
+
+<file path=ppt/slides/slide14.xml><?xml version="1.0" encoding="utf-8"?>
+<p:sld xmlns:a="http://schemas.openxmlformats.org/drawingml/2006/main" xmlns:p="http://schemas.openxmlformats.org/presentationml/2006/main" xmlns:r="http://schemas.openxmlformats.org/officeDocument/2006/relationships">
+  <p:cSld>
+    <p:bg>
+      <p:bgPr>
+        <a:solidFill>
+          <a:srgbClr val="1A1A1A"/>
         </a:solidFill>
         <a:effectLst/>
       </p:bgPr>
@@ -3618,8 +4478,8 @@
         </p:nvSpPr>
         <p:spPr>
           <a:xfrm>
-            <a:off x="365760" y="365760"/>
-            <a:ext cx="5486400" cy="365760"/>
+            <a:off x="365760" y="2011680"/>
+            <a:ext cx="11430000" cy="2011680"/>
           </a:xfrm>
           <a:prstGeom prst="rect">
             <a:avLst/>
@@ -3634,199 +4494,13 @@
           <a:p>
             <a:pPr algn="l"/>
             <a:r>
-              <a:rPr sz="1000" b="1">
-                <a:solidFill>
-                  <a:srgbClr val="CCD6F0"/>
+              <a:rPr sz="3600" b="1" i="0">
+                <a:solidFill>
+                  <a:srgbClr val="FFFFFF"/>
                 </a:solidFill>
                 <a:latin typeface="Arial"/>
               </a:rPr>
-              <a:t>PRAXISTRANSFER</a:t>
-            </a:r>
-          </a:p>
-        </p:txBody>
-      </p:sp>
-      <p:sp>
-        <p:nvSpPr>
-          <p:cNvPr id="4" name="TextBox 3"/>
-          <p:cNvSpPr txBox="1"/>
-          <p:nvPr/>
-        </p:nvSpPr>
-        <p:spPr>
-          <a:xfrm>
-            <a:off x="365760" y="640080"/>
-            <a:ext cx="9144000" cy="914400"/>
-          </a:xfrm>
-          <a:prstGeom prst="rect">
-            <a:avLst/>
-          </a:prstGeom>
-          <a:noFill/>
-        </p:spPr>
-        <p:txBody>
-          <a:bodyPr wrap="square">
-            <a:spAutoFit/>
-          </a:bodyPr>
-          <a:lstStyle/>
-          <a:p>
-            <a:pPr algn="l"/>
-            <a:r>
-              <a:rPr sz="2800" b="1">
-                <a:solidFill>
-                  <a:srgbClr val="FFFFFF"/>
-                </a:solidFill>
-                <a:latin typeface="Arial"/>
-              </a:rPr>
-              <a:t>Was nehmen Sie mit?</a:t>
-            </a:r>
-          </a:p>
-        </p:txBody>
-      </p:sp>
-      <p:sp>
-        <p:nvSpPr>
-          <p:cNvPr id="5" name="Rectangle 4"/>
-          <p:cNvSpPr/>
-          <p:nvPr/>
-        </p:nvSpPr>
-        <p:spPr>
-          <a:xfrm>
-            <a:off x="365760" y="1463040"/>
-            <a:ext cx="7315200" cy="27432"/>
-          </a:xfrm>
-          <a:prstGeom prst="rect">
-            <a:avLst/>
-          </a:prstGeom>
-          <a:solidFill>
-            <a:srgbClr val="335CC0"/>
-          </a:solidFill>
-          <a:ln>
-            <a:noFill/>
-          </a:ln>
-        </p:spPr>
-        <p:style>
-          <a:lnRef idx="1">
-            <a:schemeClr val="accent1"/>
-          </a:lnRef>
-          <a:fillRef idx="3">
-            <a:schemeClr val="accent1"/>
-          </a:fillRef>
-          <a:effectRef idx="2">
-            <a:schemeClr val="accent1"/>
-          </a:effectRef>
-          <a:fontRef idx="minor">
-            <a:schemeClr val="lt1"/>
-          </a:fontRef>
-        </p:style>
-        <p:txBody>
-          <a:bodyPr rtlCol="0" anchor="ctr"/>
-          <a:lstStyle/>
-          <a:p>
-            <a:pPr algn="ctr"/>
-          </a:p>
-        </p:txBody>
-      </p:sp>
-      <p:sp>
-        <p:nvSpPr>
-          <p:cNvPr id="6" name="TextBox 5"/>
-          <p:cNvSpPr txBox="1"/>
-          <p:nvPr/>
-        </p:nvSpPr>
-        <p:spPr>
-          <a:xfrm>
-            <a:off x="365760" y="1645920"/>
-            <a:ext cx="11430000" cy="4114800"/>
-          </a:xfrm>
-          <a:prstGeom prst="rect">
-            <a:avLst/>
-          </a:prstGeom>
-          <a:noFill/>
-        </p:spPr>
-        <p:txBody>
-          <a:bodyPr wrap="square">
-            <a:spAutoFit/>
-          </a:bodyPr>
-          <a:lstStyle/>
-          <a:p>
-            <a:pPr>
-              <a:spcBef>
-                <a:spcPts val="400"/>
-              </a:spcBef>
-            </a:pPr>
-            <a:r>
-              <a:rPr sz="1600">
-                <a:solidFill>
-                  <a:srgbClr val="E05B00"/>
-                </a:solidFill>
-                <a:latin typeface="Arial"/>
-              </a:rPr>
-              <a:t>▪  </a:t>
-            </a:r>
-            <a:r>
-              <a:rPr sz="1800">
-                <a:solidFill>
-                  <a:srgbClr val="FFFFFF"/>
-                </a:solidFill>
-                <a:latin typeface="Arial"/>
-              </a:rPr>
-              <a:t>Transferaufgabe: Wenden Sie das Gelernte in den nächsten 14 Tagen bei einem konkreten Kunden an.</a:t>
-            </a:r>
-          </a:p>
-          <a:p>
-            <a:pPr>
-              <a:spcBef>
-                <a:spcPts val="400"/>
-              </a:spcBef>
-            </a:pPr>
-            <a:r>
-              <a:rPr sz="1600">
-                <a:solidFill>
-                  <a:srgbClr val="E05B00"/>
-                </a:solidFill>
-                <a:latin typeface="Arial"/>
-              </a:rPr>
-              <a:t>▪  </a:t>
-            </a:r>
-            <a:r>
-              <a:rPr sz="1800">
-                <a:solidFill>
-                  <a:srgbClr val="FFFFFF"/>
-                </a:solidFill>
-                <a:latin typeface="Arial"/>
-              </a:rPr>
-              <a:t>Selbstcheck nach 4 Wochen: Was hat sich verändert?</a:t>
-            </a:r>
-          </a:p>
-        </p:txBody>
-      </p:sp>
-      <p:sp>
-        <p:nvSpPr>
-          <p:cNvPr id="7" name="TextBox 6"/>
-          <p:cNvSpPr txBox="1"/>
-          <p:nvPr/>
-        </p:nvSpPr>
-        <p:spPr>
-          <a:xfrm>
-            <a:off x="365760" y="6309360"/>
-            <a:ext cx="11430000" cy="365760"/>
-          </a:xfrm>
-          <a:prstGeom prst="rect">
-            <a:avLst/>
-          </a:prstGeom>
-          <a:noFill/>
-        </p:spPr>
-        <p:txBody>
-          <a:bodyPr wrap="square">
-            <a:spAutoFit/>
-          </a:bodyPr>
-          <a:lstStyle/>
-          <a:p>
-            <a:pPr algn="l"/>
-            <a:r>
-              <a:rPr sz="900" b="0">
-                <a:solidFill>
-                  <a:srgbClr val="99AACC"/>
-                </a:solidFill>
-                <a:latin typeface="Arial"/>
-              </a:rPr>
-              <a:t>M11 · Latente Bedarfe erkennen  ·  v0.2  ·  Benedikt Zoller Coaching</a:t>
+              <a:t>Arbeitsblatt B: Beobachtungsbogen Rollenspiel</a:t>
             </a:r>
           </a:p>
         </p:txBody>
@@ -3839,13 +4513,13 @@
 </p:sld>
 </file>
 
-<file path=ppt/slides/slide2.xml><?xml version="1.0" encoding="utf-8"?>
+<file path=ppt/slides/slide15.xml><?xml version="1.0" encoding="utf-8"?>
 <p:sld xmlns:a="http://schemas.openxmlformats.org/drawingml/2006/main" xmlns:p="http://schemas.openxmlformats.org/presentationml/2006/main" xmlns:r="http://schemas.openxmlformats.org/officeDocument/2006/relationships">
   <p:cSld>
     <p:bg>
       <p:bgPr>
         <a:solidFill>
-          <a:srgbClr val="F5F7FA"/>
+          <a:srgbClr val="FFFFFF"/>
         </a:solidFill>
         <a:effectLst/>
       </p:bgPr>
@@ -3902,20 +4576,90 @@
       </p:sp>
       <p:sp>
         <p:nvSpPr>
-          <p:cNvPr id="3" name="Rectangle 2"/>
+          <p:cNvPr id="3" name="TextBox 2"/>
+          <p:cNvSpPr txBox="1"/>
+          <p:nvPr/>
+        </p:nvSpPr>
+        <p:spPr>
+          <a:xfrm>
+            <a:off x="228600" y="182880"/>
+            <a:ext cx="11430000" cy="320040"/>
+          </a:xfrm>
+          <a:prstGeom prst="rect">
+            <a:avLst/>
+          </a:prstGeom>
+          <a:noFill/>
+        </p:spPr>
+        <p:txBody>
+          <a:bodyPr wrap="square">
+            <a:spAutoFit/>
+          </a:bodyPr>
+          <a:lstStyle/>
+          <a:p>
+            <a:pPr algn="l"/>
+            <a:r>
+              <a:rPr sz="900" b="0" i="0">
+                <a:solidFill>
+                  <a:srgbClr val="556575"/>
+                </a:solidFill>
+                <a:latin typeface="Arial"/>
+              </a:rPr>
+              <a:t>M11 · 4.6 Arbeitsblätter</a:t>
+            </a:r>
+          </a:p>
+        </p:txBody>
+      </p:sp>
+      <p:sp>
+        <p:nvSpPr>
+          <p:cNvPr id="4" name="TextBox 3"/>
+          <p:cNvSpPr txBox="1"/>
+          <p:nvPr/>
+        </p:nvSpPr>
+        <p:spPr>
+          <a:xfrm>
+            <a:off x="365760" y="274320"/>
+            <a:ext cx="11430000" cy="777240"/>
+          </a:xfrm>
+          <a:prstGeom prst="rect">
+            <a:avLst/>
+          </a:prstGeom>
+          <a:noFill/>
+        </p:spPr>
+        <p:txBody>
+          <a:bodyPr wrap="square">
+            <a:spAutoFit/>
+          </a:bodyPr>
+          <a:lstStyle/>
+          <a:p>
+            <a:pPr algn="l"/>
+            <a:r>
+              <a:rPr sz="2200" b="1" i="0">
+                <a:solidFill>
+                  <a:srgbClr val="003DA5"/>
+                </a:solidFill>
+                <a:latin typeface="Arial"/>
+              </a:rPr>
+              <a:t>Arbeitsblatt B: Beobachtungsbogen Rollenspiel</a:t>
+            </a:r>
+          </a:p>
+        </p:txBody>
+      </p:sp>
+      <p:sp>
+        <p:nvSpPr>
+          <p:cNvPr id="5" name="Rectangle 4"/>
           <p:cNvSpPr/>
           <p:nvPr/>
         </p:nvSpPr>
         <p:spPr>
           <a:xfrm>
-            <a:off x="365760" y="868680"/>
-            <a:ext cx="7315200" cy="27432"/>
+            <a:off x="365760" y="1005840"/>
+            <a:ext cx="11430000" cy="27432"/>
           </a:xfrm>
           <a:prstGeom prst="rect">
             <a:avLst/>
           </a:prstGeom>
           <a:solidFill>
-            <a:srgbClr val="E5E7EB"/>
+            <a:srgbClr val="D1D5DB"/>
           </a:solidFill>
           <a:ln>
             <a:noFill/>
@@ -3943,224 +4687,931 @@
           </a:p>
         </p:txBody>
       </p:sp>
-      <p:sp>
-        <p:nvSpPr>
-          <p:cNvPr id="4" name="TextBox 3"/>
-          <p:cNvSpPr txBox="1"/>
+      <p:graphicFrame>
+        <p:nvGraphicFramePr>
+          <p:cNvPr id="6" name="Table 5"/>
+          <p:cNvGraphicFramePr>
+            <a:graphicFrameLocks noGrp="1"/>
+          </p:cNvGraphicFramePr>
           <p:nvPr/>
-        </p:nvSpPr>
-        <p:spPr>
-          <a:xfrm>
-            <a:off x="365760" y="320040"/>
-            <a:ext cx="3657600" cy="365760"/>
-          </a:xfrm>
-          <a:prstGeom prst="rect">
-            <a:avLst/>
-          </a:prstGeom>
-          <a:noFill/>
-        </p:spPr>
-        <p:txBody>
-          <a:bodyPr wrap="square">
-            <a:spAutoFit/>
-          </a:bodyPr>
-          <a:lstStyle/>
-          <a:p>
-            <a:pPr algn="l"/>
-            <a:r>
-              <a:rPr sz="1000" b="1">
-                <a:solidFill>
-                  <a:srgbClr val="003DA5"/>
-                </a:solidFill>
-                <a:latin typeface="Arial"/>
-              </a:rPr>
-              <a:t>LERNZIELE</a:t>
-            </a:r>
-          </a:p>
-        </p:txBody>
-      </p:sp>
-      <p:sp>
-        <p:nvSpPr>
-          <p:cNvPr id="5" name="TextBox 4"/>
-          <p:cNvSpPr txBox="1"/>
-          <p:nvPr/>
-        </p:nvSpPr>
-        <p:spPr>
-          <a:xfrm>
-            <a:off x="365760" y="502920"/>
-            <a:ext cx="9144000" cy="548640"/>
-          </a:xfrm>
-          <a:prstGeom prst="rect">
-            <a:avLst/>
-          </a:prstGeom>
-          <a:noFill/>
-        </p:spPr>
-        <p:txBody>
-          <a:bodyPr wrap="square">
-            <a:spAutoFit/>
-          </a:bodyPr>
-          <a:lstStyle/>
-          <a:p>
-            <a:pPr algn="l"/>
-            <a:r>
-              <a:rPr sz="2200" b="1">
-                <a:solidFill>
-                  <a:srgbClr val="1A1A1A"/>
-                </a:solidFill>
-                <a:latin typeface="Arial"/>
-              </a:rPr>
-              <a:t>Was Sie nach diesem Modul können.</a:t>
-            </a:r>
-          </a:p>
-        </p:txBody>
-      </p:sp>
-      <p:sp>
-        <p:nvSpPr>
-          <p:cNvPr id="6" name="TextBox 5"/>
-          <p:cNvSpPr txBox="1"/>
-          <p:nvPr/>
-        </p:nvSpPr>
-        <p:spPr>
-          <a:xfrm>
-            <a:off x="365760" y="1188720"/>
-            <a:ext cx="11430000" cy="5303520"/>
-          </a:xfrm>
-          <a:prstGeom prst="rect">
-            <a:avLst/>
-          </a:prstGeom>
-          <a:noFill/>
-        </p:spPr>
-        <p:txBody>
-          <a:bodyPr wrap="square">
-            <a:spAutoFit/>
-          </a:bodyPr>
-          <a:lstStyle/>
-          <a:p>
-            <a:pPr>
-              <a:spcBef>
-                <a:spcPts val="400"/>
-              </a:spcBef>
-            </a:pPr>
-            <a:r>
-              <a:rPr sz="1400">
-                <a:solidFill>
-                  <a:srgbClr val="003DA5"/>
-                </a:solidFill>
-                <a:latin typeface="Arial"/>
-              </a:rPr>
-              <a:t>▪  </a:t>
-            </a:r>
-            <a:r>
-              <a:rPr sz="1600">
-                <a:solidFill>
-                  <a:srgbClr val="1A1A1A"/>
-                </a:solidFill>
-                <a:latin typeface="Arial"/>
-              </a:rPr>
-              <a:t>Explizite von latenten Bedarfen anhand konkreter Gesprächsbeispiele unterscheiden und Kundensignale systematisch zuordnen</a:t>
-            </a:r>
-          </a:p>
-          <a:p>
-            <a:pPr>
-              <a:spcBef>
-                <a:spcPts val="400"/>
-              </a:spcBef>
-            </a:pPr>
-            <a:r>
-              <a:rPr sz="1400">
-                <a:solidFill>
-                  <a:srgbClr val="003DA5"/>
-                </a:solidFill>
-                <a:latin typeface="Arial"/>
-              </a:rPr>
-              <a:t>▪  </a:t>
-            </a:r>
-            <a:r>
-              <a:rPr sz="1600">
-                <a:solidFill>
-                  <a:srgbClr val="1A1A1A"/>
-                </a:solidFill>
-                <a:latin typeface="Arial"/>
-              </a:rPr>
-              <a:t>Die SPIN-Fragetechnik in simulierten Kundengesprächen anwenden und implizite Problemformulierungen in explizite Bedarfsaussagen überführen</a:t>
-            </a:r>
-          </a:p>
-          <a:p>
-            <a:pPr>
-              <a:spcBef>
-                <a:spcPts val="400"/>
-              </a:spcBef>
-            </a:pPr>
-            <a:r>
-              <a:rPr sz="1400">
-                <a:solidFill>
-                  <a:srgbClr val="003DA5"/>
-                </a:solidFill>
-                <a:latin typeface="Arial"/>
-              </a:rPr>
-              <a:t>▪  </a:t>
-            </a:r>
-            <a:r>
-              <a:rPr sz="1600">
-                <a:solidFill>
-                  <a:srgbClr val="1A1A1A"/>
-                </a:solidFill>
-                <a:latin typeface="Arial"/>
-              </a:rPr>
-              <a:t>Gesprächsverläufe auf latente Signale (verbal, paraverbal, nonverbal) analysieren und den wahrscheinlichen Hintergrundbedarf benennen</a:t>
-            </a:r>
-          </a:p>
-          <a:p>
-            <a:pPr>
-              <a:spcBef>
-                <a:spcPts val="400"/>
-              </a:spcBef>
-            </a:pPr>
-            <a:r>
-              <a:rPr sz="1400">
-                <a:solidFill>
-                  <a:srgbClr val="003DA5"/>
-                </a:solidFill>
-                <a:latin typeface="Arial"/>
-              </a:rPr>
-              <a:t>▪  </a:t>
-            </a:r>
-            <a:r>
-              <a:rPr sz="1600">
-                <a:solidFill>
-                  <a:srgbClr val="1A1A1A"/>
-                </a:solidFill>
-                <a:latin typeface="Arial"/>
-              </a:rPr>
-              <a:t>Die Qualität des eigenen Frageverhaltens in Rollenspielen bewerten und konkrete Verbesserungsschritte ableiten</a:t>
-            </a:r>
-          </a:p>
-          <a:p>
-            <a:pPr>
-              <a:spcBef>
-                <a:spcPts val="400"/>
-              </a:spcBef>
-            </a:pPr>
-            <a:r>
-              <a:rPr sz="1400">
-                <a:solidFill>
-                  <a:srgbClr val="003DA5"/>
-                </a:solidFill>
-                <a:latin typeface="Arial"/>
-              </a:rPr>
-              <a:t>▪  </a:t>
-            </a:r>
-            <a:r>
-              <a:rPr sz="1600">
-                <a:solidFill>
-                  <a:srgbClr val="1A1A1A"/>
-                </a:solidFill>
-                <a:latin typeface="Arial"/>
-              </a:rPr>
-              <a:t>Situationsgerecht zwischen verschiedenen Fragetechniken wählen und die Wahl begründen</a:t>
-            </a:r>
-          </a:p>
-        </p:txBody>
-      </p:sp>
+        </p:nvGraphicFramePr>
+        <p:xfrm>
+          <a:off x="365760" y="1143000"/>
+          <a:ext cx="11430000" cy="3803904"/>
+        </p:xfrm>
+        <a:graphic>
+          <a:graphicData uri="http://schemas.openxmlformats.org/drawingml/2006/table">
+            <a:tbl>
+              <a:tblPr firstRow="1" bandRow="1">
+                <a:tableStyleId>{5C22544A-7EE6-4342-B048-85BDC9FD1C3A}</a:tableStyleId>
+              </a:tblPr>
+              <a:tblGrid>
+                <a:gridCol w="2286000"/>
+                <a:gridCol w="2286000"/>
+                <a:gridCol w="2286000"/>
+                <a:gridCol w="2286000"/>
+                <a:gridCol w="2286000"/>
+              </a:tblGrid>
+              <a:tr h="475488">
+                <a:tc>
+                  <a:txBody>
+                    <a:bodyPr wrap="square"/>
+                    <a:lstStyle/>
+                    <a:p>
+                      <a:r>
+                        <a:rPr sz="1100" b="1">
+                          <a:solidFill>
+                            <a:srgbClr val="FFFFFF"/>
+                          </a:solidFill>
+                          <a:latin typeface="Arial"/>
+                        </a:rPr>
+                        <a:t>Beobachtungskriterium</a:t>
+                      </a:r>
+                    </a:p>
+                  </a:txBody>
+                  <a:tcPr>
+                    <a:solidFill>
+                      <a:srgbClr val="003DA5"/>
+                    </a:solidFill>
+                  </a:tcPr>
+                </a:tc>
+                <a:tc>
+                  <a:txBody>
+                    <a:bodyPr wrap="square"/>
+                    <a:lstStyle/>
+                    <a:p>
+                      <a:r>
+                        <a:rPr sz="1100" b="1">
+                          <a:solidFill>
+                            <a:srgbClr val="FFFFFF"/>
+                          </a:solidFill>
+                          <a:latin typeface="Arial"/>
+                        </a:rPr>
+                        <a:t>Sehr gut (3)</a:t>
+                      </a:r>
+                    </a:p>
+                  </a:txBody>
+                  <a:tcPr>
+                    <a:solidFill>
+                      <a:srgbClr val="003DA5"/>
+                    </a:solidFill>
+                  </a:tcPr>
+                </a:tc>
+                <a:tc>
+                  <a:txBody>
+                    <a:bodyPr wrap="square"/>
+                    <a:lstStyle/>
+                    <a:p>
+                      <a:r>
+                        <a:rPr sz="1100" b="1">
+                          <a:solidFill>
+                            <a:srgbClr val="FFFFFF"/>
+                          </a:solidFill>
+                          <a:latin typeface="Arial"/>
+                        </a:rPr>
+                        <a:t>Gut (2)</a:t>
+                      </a:r>
+                    </a:p>
+                  </a:txBody>
+                  <a:tcPr>
+                    <a:solidFill>
+                      <a:srgbClr val="003DA5"/>
+                    </a:solidFill>
+                  </a:tcPr>
+                </a:tc>
+                <a:tc>
+                  <a:txBody>
+                    <a:bodyPr wrap="square"/>
+                    <a:lstStyle/>
+                    <a:p>
+                      <a:r>
+                        <a:rPr sz="1100" b="1">
+                          <a:solidFill>
+                            <a:srgbClr val="FFFFFF"/>
+                          </a:solidFill>
+                          <a:latin typeface="Arial"/>
+                        </a:rPr>
+                        <a:t>Ausbaufähig (1)</a:t>
+                      </a:r>
+                    </a:p>
+                  </a:txBody>
+                  <a:tcPr>
+                    <a:solidFill>
+                      <a:srgbClr val="003DA5"/>
+                    </a:solidFill>
+                  </a:tcPr>
+                </a:tc>
+                <a:tc>
+                  <a:txBody>
+                    <a:bodyPr wrap="square"/>
+                    <a:lstStyle/>
+                    <a:p>
+                      <a:r>
+                        <a:rPr sz="1100" b="1">
+                          <a:solidFill>
+                            <a:srgbClr val="FFFFFF"/>
+                          </a:solidFill>
+                          <a:latin typeface="Arial"/>
+                        </a:rPr>
+                        <a:t>Nicht beobachtet</a:t>
+                      </a:r>
+                    </a:p>
+                  </a:txBody>
+                  <a:tcPr>
+                    <a:solidFill>
+                      <a:srgbClr val="003DA5"/>
+                    </a:solidFill>
+                  </a:tcPr>
+                </a:tc>
+              </a:tr>
+              <a:tr h="475488">
+                <a:tc>
+                  <a:txBody>
+                    <a:bodyPr wrap="square"/>
+                    <a:lstStyle/>
+                    <a:p>
+                      <a:r>
+                        <a:rPr sz="1100" b="0">
+                          <a:solidFill>
+                            <a:srgbClr val="1A1A1A"/>
+                          </a:solidFill>
+                          <a:latin typeface="Arial"/>
+                        </a:rPr>
+                        <a:t>Offene Einstiegsfragen gestellt</a:t>
+                      </a:r>
+                    </a:p>
+                  </a:txBody>
+                  <a:tcPr>
+                    <a:solidFill>
+                      <a:srgbClr val="FFFFFF"/>
+                    </a:solidFill>
+                  </a:tcPr>
+                </a:tc>
+                <a:tc>
+                  <a:txBody>
+                    <a:bodyPr wrap="square"/>
+                    <a:lstStyle/>
+                    <a:p>
+                      <a:r>
+                        <a:rPr sz="1100" b="0">
+                          <a:solidFill>
+                            <a:srgbClr val="1A1A1A"/>
+                          </a:solidFill>
+                          <a:latin typeface="Arial"/>
+                        </a:rPr>
+                        <a:t>☐</a:t>
+                      </a:r>
+                    </a:p>
+                  </a:txBody>
+                  <a:tcPr>
+                    <a:solidFill>
+                      <a:srgbClr val="FFFFFF"/>
+                    </a:solidFill>
+                  </a:tcPr>
+                </a:tc>
+                <a:tc>
+                  <a:txBody>
+                    <a:bodyPr wrap="square"/>
+                    <a:lstStyle/>
+                    <a:p>
+                      <a:r>
+                        <a:rPr sz="1100" b="0">
+                          <a:solidFill>
+                            <a:srgbClr val="1A1A1A"/>
+                          </a:solidFill>
+                          <a:latin typeface="Arial"/>
+                        </a:rPr>
+                        <a:t>☐</a:t>
+                      </a:r>
+                    </a:p>
+                  </a:txBody>
+                  <a:tcPr>
+                    <a:solidFill>
+                      <a:srgbClr val="FFFFFF"/>
+                    </a:solidFill>
+                  </a:tcPr>
+                </a:tc>
+                <a:tc>
+                  <a:txBody>
+                    <a:bodyPr wrap="square"/>
+                    <a:lstStyle/>
+                    <a:p>
+                      <a:r>
+                        <a:rPr sz="1100" b="0">
+                          <a:solidFill>
+                            <a:srgbClr val="1A1A1A"/>
+                          </a:solidFill>
+                          <a:latin typeface="Arial"/>
+                        </a:rPr>
+                        <a:t>☐</a:t>
+                      </a:r>
+                    </a:p>
+                  </a:txBody>
+                  <a:tcPr>
+                    <a:solidFill>
+                      <a:srgbClr val="FFFFFF"/>
+                    </a:solidFill>
+                  </a:tcPr>
+                </a:tc>
+                <a:tc>
+                  <a:txBody>
+                    <a:bodyPr wrap="square"/>
+                    <a:lstStyle/>
+                    <a:p>
+                      <a:r>
+                        <a:rPr sz="1100" b="0">
+                          <a:solidFill>
+                            <a:srgbClr val="1A1A1A"/>
+                          </a:solidFill>
+                          <a:latin typeface="Arial"/>
+                        </a:rPr>
+                        <a:t>☐</a:t>
+                      </a:r>
+                    </a:p>
+                  </a:txBody>
+                  <a:tcPr>
+                    <a:solidFill>
+                      <a:srgbClr val="FFFFFF"/>
+                    </a:solidFill>
+                  </a:tcPr>
+                </a:tc>
+              </a:tr>
+              <a:tr h="475488">
+                <a:tc>
+                  <a:txBody>
+                    <a:bodyPr wrap="square"/>
+                    <a:lstStyle/>
+                    <a:p>
+                      <a:r>
+                        <a:rPr sz="1100" b="0">
+                          <a:solidFill>
+                            <a:srgbClr val="1A1A1A"/>
+                          </a:solidFill>
+                          <a:latin typeface="Arial"/>
+                        </a:rPr>
+                        <a:t>Problemfragen aktiv eingesetzt</a:t>
+                      </a:r>
+                    </a:p>
+                  </a:txBody>
+                  <a:tcPr>
+                    <a:solidFill>
+                      <a:srgbClr val="F4F6FA"/>
+                    </a:solidFill>
+                  </a:tcPr>
+                </a:tc>
+                <a:tc>
+                  <a:txBody>
+                    <a:bodyPr wrap="square"/>
+                    <a:lstStyle/>
+                    <a:p>
+                      <a:r>
+                        <a:rPr sz="1100" b="0">
+                          <a:solidFill>
+                            <a:srgbClr val="1A1A1A"/>
+                          </a:solidFill>
+                          <a:latin typeface="Arial"/>
+                        </a:rPr>
+                        <a:t>☐</a:t>
+                      </a:r>
+                    </a:p>
+                  </a:txBody>
+                  <a:tcPr>
+                    <a:solidFill>
+                      <a:srgbClr val="F4F6FA"/>
+                    </a:solidFill>
+                  </a:tcPr>
+                </a:tc>
+                <a:tc>
+                  <a:txBody>
+                    <a:bodyPr wrap="square"/>
+                    <a:lstStyle/>
+                    <a:p>
+                      <a:r>
+                        <a:rPr sz="1100" b="0">
+                          <a:solidFill>
+                            <a:srgbClr val="1A1A1A"/>
+                          </a:solidFill>
+                          <a:latin typeface="Arial"/>
+                        </a:rPr>
+                        <a:t>☐</a:t>
+                      </a:r>
+                    </a:p>
+                  </a:txBody>
+                  <a:tcPr>
+                    <a:solidFill>
+                      <a:srgbClr val="F4F6FA"/>
+                    </a:solidFill>
+                  </a:tcPr>
+                </a:tc>
+                <a:tc>
+                  <a:txBody>
+                    <a:bodyPr wrap="square"/>
+                    <a:lstStyle/>
+                    <a:p>
+                      <a:r>
+                        <a:rPr sz="1100" b="0">
+                          <a:solidFill>
+                            <a:srgbClr val="1A1A1A"/>
+                          </a:solidFill>
+                          <a:latin typeface="Arial"/>
+                        </a:rPr>
+                        <a:t>☐</a:t>
+                      </a:r>
+                    </a:p>
+                  </a:txBody>
+                  <a:tcPr>
+                    <a:solidFill>
+                      <a:srgbClr val="F4F6FA"/>
+                    </a:solidFill>
+                  </a:tcPr>
+                </a:tc>
+                <a:tc>
+                  <a:txBody>
+                    <a:bodyPr wrap="square"/>
+                    <a:lstStyle/>
+                    <a:p>
+                      <a:r>
+                        <a:rPr sz="1100" b="0">
+                          <a:solidFill>
+                            <a:srgbClr val="1A1A1A"/>
+                          </a:solidFill>
+                          <a:latin typeface="Arial"/>
+                        </a:rPr>
+                        <a:t>☐</a:t>
+                      </a:r>
+                    </a:p>
+                  </a:txBody>
+                  <a:tcPr>
+                    <a:solidFill>
+                      <a:srgbClr val="F4F6FA"/>
+                    </a:solidFill>
+                  </a:tcPr>
+                </a:tc>
+              </a:tr>
+              <a:tr h="475488">
+                <a:tc>
+                  <a:txBody>
+                    <a:bodyPr wrap="square"/>
+                    <a:lstStyle/>
+                    <a:p>
+                      <a:r>
+                        <a:rPr sz="1100" b="0">
+                          <a:solidFill>
+                            <a:srgbClr val="1A1A1A"/>
+                          </a:solidFill>
+                          <a:latin typeface="Arial"/>
+                        </a:rPr>
+                        <a:t>Implikationsfragen verwendet</a:t>
+                      </a:r>
+                    </a:p>
+                  </a:txBody>
+                  <a:tcPr>
+                    <a:solidFill>
+                      <a:srgbClr val="FFFFFF"/>
+                    </a:solidFill>
+                  </a:tcPr>
+                </a:tc>
+                <a:tc>
+                  <a:txBody>
+                    <a:bodyPr wrap="square"/>
+                    <a:lstStyle/>
+                    <a:p>
+                      <a:r>
+                        <a:rPr sz="1100" b="0">
+                          <a:solidFill>
+                            <a:srgbClr val="1A1A1A"/>
+                          </a:solidFill>
+                          <a:latin typeface="Arial"/>
+                        </a:rPr>
+                        <a:t>☐</a:t>
+                      </a:r>
+                    </a:p>
+                  </a:txBody>
+                  <a:tcPr>
+                    <a:solidFill>
+                      <a:srgbClr val="FFFFFF"/>
+                    </a:solidFill>
+                  </a:tcPr>
+                </a:tc>
+                <a:tc>
+                  <a:txBody>
+                    <a:bodyPr wrap="square"/>
+                    <a:lstStyle/>
+                    <a:p>
+                      <a:r>
+                        <a:rPr sz="1100" b="0">
+                          <a:solidFill>
+                            <a:srgbClr val="1A1A1A"/>
+                          </a:solidFill>
+                          <a:latin typeface="Arial"/>
+                        </a:rPr>
+                        <a:t>☐</a:t>
+                      </a:r>
+                    </a:p>
+                  </a:txBody>
+                  <a:tcPr>
+                    <a:solidFill>
+                      <a:srgbClr val="FFFFFF"/>
+                    </a:solidFill>
+                  </a:tcPr>
+                </a:tc>
+                <a:tc>
+                  <a:txBody>
+                    <a:bodyPr wrap="square"/>
+                    <a:lstStyle/>
+                    <a:p>
+                      <a:r>
+                        <a:rPr sz="1100" b="0">
+                          <a:solidFill>
+                            <a:srgbClr val="1A1A1A"/>
+                          </a:solidFill>
+                          <a:latin typeface="Arial"/>
+                        </a:rPr>
+                        <a:t>☐</a:t>
+                      </a:r>
+                    </a:p>
+                  </a:txBody>
+                  <a:tcPr>
+                    <a:solidFill>
+                      <a:srgbClr val="FFFFFF"/>
+                    </a:solidFill>
+                  </a:tcPr>
+                </a:tc>
+                <a:tc>
+                  <a:txBody>
+                    <a:bodyPr wrap="square"/>
+                    <a:lstStyle/>
+                    <a:p>
+                      <a:r>
+                        <a:rPr sz="1100" b="0">
+                          <a:solidFill>
+                            <a:srgbClr val="1A1A1A"/>
+                          </a:solidFill>
+                          <a:latin typeface="Arial"/>
+                        </a:rPr>
+                        <a:t>☐</a:t>
+                      </a:r>
+                    </a:p>
+                  </a:txBody>
+                  <a:tcPr>
+                    <a:solidFill>
+                      <a:srgbClr val="FFFFFF"/>
+                    </a:solidFill>
+                  </a:tcPr>
+                </a:tc>
+              </a:tr>
+              <a:tr h="475488">
+                <a:tc>
+                  <a:txBody>
+                    <a:bodyPr wrap="square"/>
+                    <a:lstStyle/>
+                    <a:p>
+                      <a:r>
+                        <a:rPr sz="1100" b="0">
+                          <a:solidFill>
+                            <a:srgbClr val="1A1A1A"/>
+                          </a:solidFill>
+                          <a:latin typeface="Arial"/>
+                        </a:rPr>
+                        <a:t>Latente Signale aufgegriffen</a:t>
+                      </a:r>
+                    </a:p>
+                  </a:txBody>
+                  <a:tcPr>
+                    <a:solidFill>
+                      <a:srgbClr val="F4F6FA"/>
+                    </a:solidFill>
+                  </a:tcPr>
+                </a:tc>
+                <a:tc>
+                  <a:txBody>
+                    <a:bodyPr wrap="square"/>
+                    <a:lstStyle/>
+                    <a:p>
+                      <a:r>
+                        <a:rPr sz="1100" b="0">
+                          <a:solidFill>
+                            <a:srgbClr val="1A1A1A"/>
+                          </a:solidFill>
+                          <a:latin typeface="Arial"/>
+                        </a:rPr>
+                        <a:t>☐</a:t>
+                      </a:r>
+                    </a:p>
+                  </a:txBody>
+                  <a:tcPr>
+                    <a:solidFill>
+                      <a:srgbClr val="F4F6FA"/>
+                    </a:solidFill>
+                  </a:tcPr>
+                </a:tc>
+                <a:tc>
+                  <a:txBody>
+                    <a:bodyPr wrap="square"/>
+                    <a:lstStyle/>
+                    <a:p>
+                      <a:r>
+                        <a:rPr sz="1100" b="0">
+                          <a:solidFill>
+                            <a:srgbClr val="1A1A1A"/>
+                          </a:solidFill>
+                          <a:latin typeface="Arial"/>
+                        </a:rPr>
+                        <a:t>☐</a:t>
+                      </a:r>
+                    </a:p>
+                  </a:txBody>
+                  <a:tcPr>
+                    <a:solidFill>
+                      <a:srgbClr val="F4F6FA"/>
+                    </a:solidFill>
+                  </a:tcPr>
+                </a:tc>
+                <a:tc>
+                  <a:txBody>
+                    <a:bodyPr wrap="square"/>
+                    <a:lstStyle/>
+                    <a:p>
+                      <a:r>
+                        <a:rPr sz="1100" b="0">
+                          <a:solidFill>
+                            <a:srgbClr val="1A1A1A"/>
+                          </a:solidFill>
+                          <a:latin typeface="Arial"/>
+                        </a:rPr>
+                        <a:t>☐</a:t>
+                      </a:r>
+                    </a:p>
+                  </a:txBody>
+                  <a:tcPr>
+                    <a:solidFill>
+                      <a:srgbClr val="F4F6FA"/>
+                    </a:solidFill>
+                  </a:tcPr>
+                </a:tc>
+                <a:tc>
+                  <a:txBody>
+                    <a:bodyPr wrap="square"/>
+                    <a:lstStyle/>
+                    <a:p>
+                      <a:r>
+                        <a:rPr sz="1100" b="0">
+                          <a:solidFill>
+                            <a:srgbClr val="1A1A1A"/>
+                          </a:solidFill>
+                          <a:latin typeface="Arial"/>
+                        </a:rPr>
+                        <a:t>☐</a:t>
+                      </a:r>
+                    </a:p>
+                  </a:txBody>
+                  <a:tcPr>
+                    <a:solidFill>
+                      <a:srgbClr val="F4F6FA"/>
+                    </a:solidFill>
+                  </a:tcPr>
+                </a:tc>
+              </a:tr>
+              <a:tr h="475488">
+                <a:tc>
+                  <a:txBody>
+                    <a:bodyPr wrap="square"/>
+                    <a:lstStyle/>
+                    <a:p>
+                      <a:r>
+                        <a:rPr sz="1100" b="0">
+                          <a:solidFill>
+                            <a:srgbClr val="1A1A1A"/>
+                          </a:solidFill>
+                          <a:latin typeface="Arial"/>
+                        </a:rPr>
+                        <a:t>Schweigen ausgehalten</a:t>
+                      </a:r>
+                    </a:p>
+                  </a:txBody>
+                  <a:tcPr>
+                    <a:solidFill>
+                      <a:srgbClr val="FFFFFF"/>
+                    </a:solidFill>
+                  </a:tcPr>
+                </a:tc>
+                <a:tc>
+                  <a:txBody>
+                    <a:bodyPr wrap="square"/>
+                    <a:lstStyle/>
+                    <a:p>
+                      <a:r>
+                        <a:rPr sz="1100" b="0">
+                          <a:solidFill>
+                            <a:srgbClr val="1A1A1A"/>
+                          </a:solidFill>
+                          <a:latin typeface="Arial"/>
+                        </a:rPr>
+                        <a:t>☐</a:t>
+                      </a:r>
+                    </a:p>
+                  </a:txBody>
+                  <a:tcPr>
+                    <a:solidFill>
+                      <a:srgbClr val="FFFFFF"/>
+                    </a:solidFill>
+                  </a:tcPr>
+                </a:tc>
+                <a:tc>
+                  <a:txBody>
+                    <a:bodyPr wrap="square"/>
+                    <a:lstStyle/>
+                    <a:p>
+                      <a:r>
+                        <a:rPr sz="1100" b="0">
+                          <a:solidFill>
+                            <a:srgbClr val="1A1A1A"/>
+                          </a:solidFill>
+                          <a:latin typeface="Arial"/>
+                        </a:rPr>
+                        <a:t>☐</a:t>
+                      </a:r>
+                    </a:p>
+                  </a:txBody>
+                  <a:tcPr>
+                    <a:solidFill>
+                      <a:srgbClr val="FFFFFF"/>
+                    </a:solidFill>
+                  </a:tcPr>
+                </a:tc>
+                <a:tc>
+                  <a:txBody>
+                    <a:bodyPr wrap="square"/>
+                    <a:lstStyle/>
+                    <a:p>
+                      <a:r>
+                        <a:rPr sz="1100" b="0">
+                          <a:solidFill>
+                            <a:srgbClr val="1A1A1A"/>
+                          </a:solidFill>
+                          <a:latin typeface="Arial"/>
+                        </a:rPr>
+                        <a:t>☐</a:t>
+                      </a:r>
+                    </a:p>
+                  </a:txBody>
+                  <a:tcPr>
+                    <a:solidFill>
+                      <a:srgbClr val="FFFFFF"/>
+                    </a:solidFill>
+                  </a:tcPr>
+                </a:tc>
+                <a:tc>
+                  <a:txBody>
+                    <a:bodyPr wrap="square"/>
+                    <a:lstStyle/>
+                    <a:p>
+                      <a:r>
+                        <a:rPr sz="1100" b="0">
+                          <a:solidFill>
+                            <a:srgbClr val="1A1A1A"/>
+                          </a:solidFill>
+                          <a:latin typeface="Arial"/>
+                        </a:rPr>
+                        <a:t>☐</a:t>
+                      </a:r>
+                    </a:p>
+                  </a:txBody>
+                  <a:tcPr>
+                    <a:solidFill>
+                      <a:srgbClr val="FFFFFF"/>
+                    </a:solidFill>
+                  </a:tcPr>
+                </a:tc>
+              </a:tr>
+              <a:tr h="475488">
+                <a:tc>
+                  <a:txBody>
+                    <a:bodyPr wrap="square"/>
+                    <a:lstStyle/>
+                    <a:p>
+                      <a:r>
+                        <a:rPr sz="1100" b="0">
+                          <a:solidFill>
+                            <a:srgbClr val="1A1A1A"/>
+                          </a:solidFill>
+                          <a:latin typeface="Arial"/>
+                        </a:rPr>
+                        <a:t>Paraphrase/Zusammenfassung eingesetzt</a:t>
+                      </a:r>
+                    </a:p>
+                  </a:txBody>
+                  <a:tcPr>
+                    <a:solidFill>
+                      <a:srgbClr val="F4F6FA"/>
+                    </a:solidFill>
+                  </a:tcPr>
+                </a:tc>
+                <a:tc>
+                  <a:txBody>
+                    <a:bodyPr wrap="square"/>
+                    <a:lstStyle/>
+                    <a:p>
+                      <a:r>
+                        <a:rPr sz="1100" b="0">
+                          <a:solidFill>
+                            <a:srgbClr val="1A1A1A"/>
+                          </a:solidFill>
+                          <a:latin typeface="Arial"/>
+                        </a:rPr>
+                        <a:t>☐</a:t>
+                      </a:r>
+                    </a:p>
+                  </a:txBody>
+                  <a:tcPr>
+                    <a:solidFill>
+                      <a:srgbClr val="F4F6FA"/>
+                    </a:solidFill>
+                  </a:tcPr>
+                </a:tc>
+                <a:tc>
+                  <a:txBody>
+                    <a:bodyPr wrap="square"/>
+                    <a:lstStyle/>
+                    <a:p>
+                      <a:r>
+                        <a:rPr sz="1100" b="0">
+                          <a:solidFill>
+                            <a:srgbClr val="1A1A1A"/>
+                          </a:solidFill>
+                          <a:latin typeface="Arial"/>
+                        </a:rPr>
+                        <a:t>☐</a:t>
+                      </a:r>
+                    </a:p>
+                  </a:txBody>
+                  <a:tcPr>
+                    <a:solidFill>
+                      <a:srgbClr val="F4F6FA"/>
+                    </a:solidFill>
+                  </a:tcPr>
+                </a:tc>
+                <a:tc>
+                  <a:txBody>
+                    <a:bodyPr wrap="square"/>
+                    <a:lstStyle/>
+                    <a:p>
+                      <a:r>
+                        <a:rPr sz="1100" b="0">
+                          <a:solidFill>
+                            <a:srgbClr val="1A1A1A"/>
+                          </a:solidFill>
+                          <a:latin typeface="Arial"/>
+                        </a:rPr>
+                        <a:t>☐</a:t>
+                      </a:r>
+                    </a:p>
+                  </a:txBody>
+                  <a:tcPr>
+                    <a:solidFill>
+                      <a:srgbClr val="F4F6FA"/>
+                    </a:solidFill>
+                  </a:tcPr>
+                </a:tc>
+                <a:tc>
+                  <a:txBody>
+                    <a:bodyPr wrap="square"/>
+                    <a:lstStyle/>
+                    <a:p>
+                      <a:r>
+                        <a:rPr sz="1100" b="0">
+                          <a:solidFill>
+                            <a:srgbClr val="1A1A1A"/>
+                          </a:solidFill>
+                          <a:latin typeface="Arial"/>
+                        </a:rPr>
+                        <a:t>☐</a:t>
+                      </a:r>
+                    </a:p>
+                  </a:txBody>
+                  <a:tcPr>
+                    <a:solidFill>
+                      <a:srgbClr val="F4F6FA"/>
+                    </a:solidFill>
+                  </a:tcPr>
+                </a:tc>
+              </a:tr>
+              <a:tr h="475488">
+                <a:tc>
+                  <a:txBody>
+                    <a:bodyPr wrap="square"/>
+                    <a:lstStyle/>
+                    <a:p>
+                      <a:r>
+                        <a:rPr sz="1100" b="0">
+                          <a:solidFill>
+                            <a:srgbClr val="1A1A1A"/>
+                          </a:solidFill>
+                          <a:latin typeface="Arial"/>
+                        </a:rPr>
+                        <a:t>Zu früh zu Produkten gewechselt (neg.)</a:t>
+                      </a:r>
+                    </a:p>
+                  </a:txBody>
+                  <a:tcPr>
+                    <a:solidFill>
+                      <a:srgbClr val="FFFFFF"/>
+                    </a:solidFill>
+                  </a:tcPr>
+                </a:tc>
+                <a:tc>
+                  <a:txBody>
+                    <a:bodyPr wrap="square"/>
+                    <a:lstStyle/>
+                    <a:p>
+                      <a:r>
+                        <a:rPr sz="1100" b="0">
+                          <a:solidFill>
+                            <a:srgbClr val="1A1A1A"/>
+                          </a:solidFill>
+                          <a:latin typeface="Arial"/>
+                        </a:rPr>
+                        <a:t>☐</a:t>
+                      </a:r>
+                    </a:p>
+                  </a:txBody>
+                  <a:tcPr>
+                    <a:solidFill>
+                      <a:srgbClr val="FFFFFF"/>
+                    </a:solidFill>
+                  </a:tcPr>
+                </a:tc>
+                <a:tc>
+                  <a:txBody>
+                    <a:bodyPr wrap="square"/>
+                    <a:lstStyle/>
+                    <a:p>
+                      <a:r>
+                        <a:rPr sz="1100" b="0">
+                          <a:solidFill>
+                            <a:srgbClr val="1A1A1A"/>
+                          </a:solidFill>
+                          <a:latin typeface="Arial"/>
+                        </a:rPr>
+                        <a:t>☐</a:t>
+                      </a:r>
+                    </a:p>
+                  </a:txBody>
+                  <a:tcPr>
+                    <a:solidFill>
+                      <a:srgbClr val="FFFFFF"/>
+                    </a:solidFill>
+                  </a:tcPr>
+                </a:tc>
+                <a:tc>
+                  <a:txBody>
+                    <a:bodyPr wrap="square"/>
+                    <a:lstStyle/>
+                    <a:p>
+                      <a:r>
+                        <a:rPr sz="1100" b="0">
+                          <a:solidFill>
+                            <a:srgbClr val="1A1A1A"/>
+                          </a:solidFill>
+                          <a:latin typeface="Arial"/>
+                        </a:rPr>
+                        <a:t>☐</a:t>
+                      </a:r>
+                    </a:p>
+                  </a:txBody>
+                  <a:tcPr>
+                    <a:solidFill>
+                      <a:srgbClr val="FFFFFF"/>
+                    </a:solidFill>
+                  </a:tcPr>
+                </a:tc>
+                <a:tc>
+                  <a:txBody>
+                    <a:bodyPr wrap="square"/>
+                    <a:lstStyle/>
+                    <a:p>
+                      <a:r>
+                        <a:rPr sz="1100" b="0">
+                          <a:solidFill>
+                            <a:srgbClr val="1A1A1A"/>
+                          </a:solidFill>
+                          <a:latin typeface="Arial"/>
+                        </a:rPr>
+                        <a:t>☐</a:t>
+                      </a:r>
+                    </a:p>
+                  </a:txBody>
+                  <a:tcPr>
+                    <a:solidFill>
+                      <a:srgbClr val="FFFFFF"/>
+                    </a:solidFill>
+                  </a:tcPr>
+                </a:tc>
+              </a:tr>
+            </a:tbl>
+          </a:graphicData>
+        </a:graphic>
+      </p:graphicFrame>
     </p:spTree>
   </p:cSld>
   <p:clrMapOvr>
@@ -4169,13 +5620,13 @@
 </p:sld>
 </file>
 
-<file path=ppt/slides/slide3.xml><?xml version="1.0" encoding="utf-8"?>
+<file path=ppt/slides/slide16.xml><?xml version="1.0" encoding="utf-8"?>
 <p:sld xmlns:a="http://schemas.openxmlformats.org/drawingml/2006/main" xmlns:p="http://schemas.openxmlformats.org/presentationml/2006/main" xmlns:r="http://schemas.openxmlformats.org/officeDocument/2006/relationships">
   <p:cSld>
     <p:bg>
       <p:bgPr>
         <a:solidFill>
-          <a:srgbClr val="1A1A1A"/>
+          <a:srgbClr val="003DA5"/>
         </a:solidFill>
         <a:effectLst/>
       </p:bgPr>
@@ -4238,8 +5689,8 @@
         </p:nvSpPr>
         <p:spPr>
           <a:xfrm>
-            <a:off x="365760" y="2286000"/>
-            <a:ext cx="11430000" cy="1828800"/>
+            <a:off x="365760" y="347472"/>
+            <a:ext cx="7315200" cy="384048"/>
           </a:xfrm>
           <a:prstGeom prst="rect">
             <a:avLst/>
@@ -4254,13 +5705,224 @@
           <a:p>
             <a:pPr algn="l"/>
             <a:r>
-              <a:rPr sz="3600" b="1">
-                <a:solidFill>
-                  <a:srgbClr val="FFFFFF"/>
+              <a:rPr sz="900" b="1" i="0">
+                <a:solidFill>
+                  <a:srgbClr val="CCD6F0"/>
                 </a:solidFill>
                 <a:latin typeface="Arial"/>
               </a:rPr>
-              <a:t>Das Eisberg-Modell der Kundenbedürfnisse</a:t>
+              <a:t>PRAXISTRANSFER &amp; NÄCHSTE SCHRITTE</a:t>
+            </a:r>
+          </a:p>
+        </p:txBody>
+      </p:sp>
+      <p:sp>
+        <p:nvSpPr>
+          <p:cNvPr id="4" name="Rectangle 3"/>
+          <p:cNvSpPr/>
+          <p:nvPr/>
+        </p:nvSpPr>
+        <p:spPr>
+          <a:xfrm>
+            <a:off x="365760" y="804672"/>
+            <a:ext cx="8229600" cy="22860"/>
+          </a:xfrm>
+          <a:prstGeom prst="rect">
+            <a:avLst/>
+          </a:prstGeom>
+          <a:solidFill>
+            <a:srgbClr val="335CC0"/>
+          </a:solidFill>
+          <a:ln>
+            <a:noFill/>
+          </a:ln>
+        </p:spPr>
+        <p:style>
+          <a:lnRef idx="1">
+            <a:schemeClr val="accent1"/>
+          </a:lnRef>
+          <a:fillRef idx="3">
+            <a:schemeClr val="accent1"/>
+          </a:fillRef>
+          <a:effectRef idx="2">
+            <a:schemeClr val="accent1"/>
+          </a:effectRef>
+          <a:fontRef idx="minor">
+            <a:schemeClr val="lt1"/>
+          </a:fontRef>
+        </p:style>
+        <p:txBody>
+          <a:bodyPr rtlCol="0" anchor="ctr"/>
+          <a:lstStyle/>
+          <a:p>
+            <a:pPr algn="ctr"/>
+          </a:p>
+        </p:txBody>
+      </p:sp>
+      <p:sp>
+        <p:nvSpPr>
+          <p:cNvPr id="5" name="TextBox 4"/>
+          <p:cNvSpPr txBox="1"/>
+          <p:nvPr/>
+        </p:nvSpPr>
+        <p:spPr>
+          <a:xfrm>
+            <a:off x="365760" y="960120"/>
+            <a:ext cx="9144000" cy="914400"/>
+          </a:xfrm>
+          <a:prstGeom prst="rect">
+            <a:avLst/>
+          </a:prstGeom>
+          <a:noFill/>
+        </p:spPr>
+        <p:txBody>
+          <a:bodyPr wrap="square">
+            <a:spAutoFit/>
+          </a:bodyPr>
+          <a:lstStyle/>
+          <a:p>
+            <a:pPr algn="l"/>
+            <a:r>
+              <a:rPr sz="3000" b="1" i="0">
+                <a:solidFill>
+                  <a:srgbClr val="FFFFFF"/>
+                </a:solidFill>
+                <a:latin typeface="Arial"/>
+              </a:rPr>
+              <a:t>Was nehmen Sie mit?</a:t>
+            </a:r>
+          </a:p>
+        </p:txBody>
+      </p:sp>
+      <p:sp>
+        <p:nvSpPr>
+          <p:cNvPr id="6" name="TextBox 5"/>
+          <p:cNvSpPr txBox="1"/>
+          <p:nvPr/>
+        </p:nvSpPr>
+        <p:spPr>
+          <a:xfrm>
+            <a:off x="365760" y="2103120"/>
+            <a:ext cx="11430000" cy="4114800"/>
+          </a:xfrm>
+          <a:prstGeom prst="rect">
+            <a:avLst/>
+          </a:prstGeom>
+          <a:noFill/>
+        </p:spPr>
+        <p:txBody>
+          <a:bodyPr wrap="square">
+            <a:spAutoFit/>
+          </a:bodyPr>
+          <a:lstStyle/>
+          <a:p>
+            <a:pPr>
+              <a:spcBef>
+                <a:spcPts val="500"/>
+              </a:spcBef>
+            </a:pPr>
+            <a:r>
+              <a:rPr sz="1600">
+                <a:solidFill>
+                  <a:srgbClr val="E05B00"/>
+                </a:solidFill>
+                <a:latin typeface="Arial"/>
+              </a:rPr>
+              <a:t>▪  </a:t>
+            </a:r>
+            <a:r>
+              <a:rPr sz="1800">
+                <a:solidFill>
+                  <a:srgbClr val="FFFFFF"/>
+                </a:solidFill>
+                <a:latin typeface="Arial"/>
+              </a:rPr>
+              <a:t>Transferaufgabe: Wenden Sie das Gelernte in den nächsten 14 Tagen bei einem konkreten Kunden an.</a:t>
+            </a:r>
+          </a:p>
+          <a:p>
+            <a:pPr>
+              <a:spcBef>
+                <a:spcPts val="500"/>
+              </a:spcBef>
+            </a:pPr>
+            <a:r>
+              <a:rPr sz="1600">
+                <a:solidFill>
+                  <a:srgbClr val="E05B00"/>
+                </a:solidFill>
+                <a:latin typeface="Arial"/>
+              </a:rPr>
+              <a:t>▪  </a:t>
+            </a:r>
+            <a:r>
+              <a:rPr sz="1800">
+                <a:solidFill>
+                  <a:srgbClr val="FFFFFF"/>
+                </a:solidFill>
+                <a:latin typeface="Arial"/>
+              </a:rPr>
+              <a:t>Selbstcheck nach 4 Wochen: Bewerten Sie Ihre Fortschritte ehrlich.</a:t>
+            </a:r>
+          </a:p>
+          <a:p>
+            <a:pPr>
+              <a:spcBef>
+                <a:spcPts val="500"/>
+              </a:spcBef>
+            </a:pPr>
+            <a:r>
+              <a:rPr sz="1600">
+                <a:solidFill>
+                  <a:srgbClr val="E05B00"/>
+                </a:solidFill>
+                <a:latin typeface="Arial"/>
+              </a:rPr>
+              <a:t>▪  </a:t>
+            </a:r>
+            <a:r>
+              <a:rPr sz="1800">
+                <a:solidFill>
+                  <a:srgbClr val="FFFFFF"/>
+                </a:solidFill>
+                <a:latin typeface="Arial"/>
+              </a:rPr>
+              <a:t>Nächste Module: M12</a:t>
+            </a:r>
+          </a:p>
+        </p:txBody>
+      </p:sp>
+      <p:sp>
+        <p:nvSpPr>
+          <p:cNvPr id="7" name="TextBox 6"/>
+          <p:cNvSpPr txBox="1"/>
+          <p:nvPr/>
+        </p:nvSpPr>
+        <p:spPr>
+          <a:xfrm>
+            <a:off x="365760" y="6309360"/>
+            <a:ext cx="11430000" cy="365760"/>
+          </a:xfrm>
+          <a:prstGeom prst="rect">
+            <a:avLst/>
+          </a:prstGeom>
+          <a:noFill/>
+        </p:spPr>
+        <p:txBody>
+          <a:bodyPr wrap="square">
+            <a:spAutoFit/>
+          </a:bodyPr>
+          <a:lstStyle/>
+          <a:p>
+            <a:pPr algn="l"/>
+            <a:r>
+              <a:rPr sz="900" b="0" i="0">
+                <a:solidFill>
+                  <a:srgbClr val="889ACC"/>
+                </a:solidFill>
+                <a:latin typeface="Arial"/>
+              </a:rPr>
+              <a:t>M11 · Latente Bedarfe erkennen  ·  v0.2  ·  Benedikt Zoller Coaching</a:t>
             </a:r>
           </a:p>
         </p:txBody>
@@ -4273,7 +5935,337 @@
 </p:sld>
 </file>
 
-<file path=ppt/slides/slide4.xml><?xml version="1.0" encoding="utf-8"?>
+<file path=ppt/slides/slide2.xml><?xml version="1.0" encoding="utf-8"?>
+<p:sld xmlns:a="http://schemas.openxmlformats.org/drawingml/2006/main" xmlns:p="http://schemas.openxmlformats.org/presentationml/2006/main" xmlns:r="http://schemas.openxmlformats.org/officeDocument/2006/relationships">
+  <p:cSld>
+    <p:bg>
+      <p:bgPr>
+        <a:solidFill>
+          <a:srgbClr val="F4F6FA"/>
+        </a:solidFill>
+        <a:effectLst/>
+      </p:bgPr>
+    </p:bg>
+    <p:spTree>
+      <p:nvGrpSpPr>
+        <p:cNvPr id="1" name=""/>
+        <p:cNvGrpSpPr/>
+        <p:nvPr/>
+      </p:nvGrpSpPr>
+      <p:grpSpPr/>
+      <p:sp>
+        <p:nvSpPr>
+          <p:cNvPr id="2" name="Rectangle 1"/>
+          <p:cNvSpPr/>
+          <p:nvPr/>
+        </p:nvSpPr>
+        <p:spPr>
+          <a:xfrm>
+            <a:off x="0" y="0"/>
+            <a:ext cx="73152" cy="6858000"/>
+          </a:xfrm>
+          <a:prstGeom prst="rect">
+            <a:avLst/>
+          </a:prstGeom>
+          <a:solidFill>
+            <a:srgbClr val="003DA5"/>
+          </a:solidFill>
+          <a:ln>
+            <a:noFill/>
+          </a:ln>
+        </p:spPr>
+        <p:style>
+          <a:lnRef idx="1">
+            <a:schemeClr val="accent1"/>
+          </a:lnRef>
+          <a:fillRef idx="3">
+            <a:schemeClr val="accent1"/>
+          </a:fillRef>
+          <a:effectRef idx="2">
+            <a:schemeClr val="accent1"/>
+          </a:effectRef>
+          <a:fontRef idx="minor">
+            <a:schemeClr val="lt1"/>
+          </a:fontRef>
+        </p:style>
+        <p:txBody>
+          <a:bodyPr rtlCol="0" anchor="ctr"/>
+          <a:lstStyle/>
+          <a:p>
+            <a:pPr algn="ctr"/>
+          </a:p>
+        </p:txBody>
+      </p:sp>
+      <p:sp>
+        <p:nvSpPr>
+          <p:cNvPr id="3" name="Rectangle 2"/>
+          <p:cNvSpPr/>
+          <p:nvPr/>
+        </p:nvSpPr>
+        <p:spPr>
+          <a:xfrm>
+            <a:off x="228600" y="804672"/>
+            <a:ext cx="11612880" cy="22860"/>
+          </a:xfrm>
+          <a:prstGeom prst="rect">
+            <a:avLst/>
+          </a:prstGeom>
+          <a:solidFill>
+            <a:srgbClr val="D1D5DB"/>
+          </a:solidFill>
+          <a:ln>
+            <a:noFill/>
+          </a:ln>
+        </p:spPr>
+        <p:style>
+          <a:lnRef idx="1">
+            <a:schemeClr val="accent1"/>
+          </a:lnRef>
+          <a:fillRef idx="3">
+            <a:schemeClr val="accent1"/>
+          </a:fillRef>
+          <a:effectRef idx="2">
+            <a:schemeClr val="accent1"/>
+          </a:effectRef>
+          <a:fontRef idx="minor">
+            <a:schemeClr val="lt1"/>
+          </a:fontRef>
+        </p:style>
+        <p:txBody>
+          <a:bodyPr rtlCol="0" anchor="ctr"/>
+          <a:lstStyle/>
+          <a:p>
+            <a:pPr algn="ctr"/>
+          </a:p>
+        </p:txBody>
+      </p:sp>
+      <p:sp>
+        <p:nvSpPr>
+          <p:cNvPr id="4" name="TextBox 3"/>
+          <p:cNvSpPr txBox="1"/>
+          <p:nvPr/>
+        </p:nvSpPr>
+        <p:spPr>
+          <a:xfrm>
+            <a:off x="365760" y="320040"/>
+            <a:ext cx="4572000" cy="347472"/>
+          </a:xfrm>
+          <a:prstGeom prst="rect">
+            <a:avLst/>
+          </a:prstGeom>
+          <a:noFill/>
+        </p:spPr>
+        <p:txBody>
+          <a:bodyPr wrap="square">
+            <a:spAutoFit/>
+          </a:bodyPr>
+          <a:lstStyle/>
+          <a:p>
+            <a:pPr algn="l"/>
+            <a:r>
+              <a:rPr sz="900" b="1" i="0">
+                <a:solidFill>
+                  <a:srgbClr val="003DA5"/>
+                </a:solidFill>
+                <a:latin typeface="Arial"/>
+              </a:rPr>
+              <a:t>LERNZIELE</a:t>
+            </a:r>
+          </a:p>
+        </p:txBody>
+      </p:sp>
+      <p:sp>
+        <p:nvSpPr>
+          <p:cNvPr id="5" name="TextBox 4"/>
+          <p:cNvSpPr txBox="1"/>
+          <p:nvPr/>
+        </p:nvSpPr>
+        <p:spPr>
+          <a:xfrm>
+            <a:off x="365760" y="502920"/>
+            <a:ext cx="10058400" cy="640080"/>
+          </a:xfrm>
+          <a:prstGeom prst="rect">
+            <a:avLst/>
+          </a:prstGeom>
+          <a:noFill/>
+        </p:spPr>
+        <p:txBody>
+          <a:bodyPr wrap="square">
+            <a:spAutoFit/>
+          </a:bodyPr>
+          <a:lstStyle/>
+          <a:p>
+            <a:pPr algn="l"/>
+            <a:r>
+              <a:rPr sz="2400" b="1" i="0">
+                <a:solidFill>
+                  <a:srgbClr val="1A1A1A"/>
+                </a:solidFill>
+                <a:latin typeface="Arial"/>
+              </a:rPr>
+              <a:t>Was Sie nach diesem Modul können.</a:t>
+            </a:r>
+          </a:p>
+        </p:txBody>
+      </p:sp>
+      <p:sp>
+        <p:nvSpPr>
+          <p:cNvPr id="6" name="TextBox 5"/>
+          <p:cNvSpPr txBox="1"/>
+          <p:nvPr/>
+        </p:nvSpPr>
+        <p:spPr>
+          <a:xfrm>
+            <a:off x="365760" y="1234440"/>
+            <a:ext cx="11430000" cy="5303520"/>
+          </a:xfrm>
+          <a:prstGeom prst="rect">
+            <a:avLst/>
+          </a:prstGeom>
+          <a:noFill/>
+        </p:spPr>
+        <p:txBody>
+          <a:bodyPr wrap="square">
+            <a:spAutoFit/>
+          </a:bodyPr>
+          <a:lstStyle/>
+          <a:p>
+            <a:pPr>
+              <a:spcBef>
+                <a:spcPts val="500"/>
+              </a:spcBef>
+            </a:pPr>
+            <a:r>
+              <a:rPr sz="1500">
+                <a:solidFill>
+                  <a:srgbClr val="003DA5"/>
+                </a:solidFill>
+                <a:latin typeface="Arial"/>
+              </a:rPr>
+              <a:t>▪  </a:t>
+            </a:r>
+            <a:r>
+              <a:rPr sz="1700">
+                <a:solidFill>
+                  <a:srgbClr val="1A1A1A"/>
+                </a:solidFill>
+                <a:latin typeface="Arial"/>
+              </a:rPr>
+              <a:t>Explizite von latenten Bedarfen anhand konkreter Gesprächsbeispiele unterscheiden und Kundensignale systematisch zuordnen</a:t>
+            </a:r>
+          </a:p>
+          <a:p>
+            <a:pPr>
+              <a:spcBef>
+                <a:spcPts val="500"/>
+              </a:spcBef>
+            </a:pPr>
+            <a:r>
+              <a:rPr sz="1500">
+                <a:solidFill>
+                  <a:srgbClr val="003DA5"/>
+                </a:solidFill>
+                <a:latin typeface="Arial"/>
+              </a:rPr>
+              <a:t>▪  </a:t>
+            </a:r>
+            <a:r>
+              <a:rPr sz="1700">
+                <a:solidFill>
+                  <a:srgbClr val="1A1A1A"/>
+                </a:solidFill>
+                <a:latin typeface="Arial"/>
+              </a:rPr>
+              <a:t>Die SPIN-Fragetechnik in simulierten Kundengesprächen anwenden und implizite Problemformulierungen in explizite Bedarfsaussagen überführen</a:t>
+            </a:r>
+          </a:p>
+          <a:p>
+            <a:pPr>
+              <a:spcBef>
+                <a:spcPts val="500"/>
+              </a:spcBef>
+            </a:pPr>
+            <a:r>
+              <a:rPr sz="1500">
+                <a:solidFill>
+                  <a:srgbClr val="003DA5"/>
+                </a:solidFill>
+                <a:latin typeface="Arial"/>
+              </a:rPr>
+              <a:t>▪  </a:t>
+            </a:r>
+            <a:r>
+              <a:rPr sz="1700">
+                <a:solidFill>
+                  <a:srgbClr val="1A1A1A"/>
+                </a:solidFill>
+                <a:latin typeface="Arial"/>
+              </a:rPr>
+              <a:t>Gesprächsverläufe auf latente Signale (verbal, paraverbal, nonverbal) analysieren und den wahrscheinlichen Hintergrundbedarf benennen</a:t>
+            </a:r>
+          </a:p>
+          <a:p>
+            <a:pPr>
+              <a:spcBef>
+                <a:spcPts val="500"/>
+              </a:spcBef>
+            </a:pPr>
+            <a:r>
+              <a:rPr sz="1500">
+                <a:solidFill>
+                  <a:srgbClr val="003DA5"/>
+                </a:solidFill>
+                <a:latin typeface="Arial"/>
+              </a:rPr>
+              <a:t>▪  </a:t>
+            </a:r>
+            <a:r>
+              <a:rPr sz="1700">
+                <a:solidFill>
+                  <a:srgbClr val="1A1A1A"/>
+                </a:solidFill>
+                <a:latin typeface="Arial"/>
+              </a:rPr>
+              <a:t>Die Qualität des eigenen Frageverhaltens in Rollenspielen bewerten und konkrete Verbesserungsschritte ableiten</a:t>
+            </a:r>
+          </a:p>
+          <a:p>
+            <a:pPr>
+              <a:spcBef>
+                <a:spcPts val="500"/>
+              </a:spcBef>
+            </a:pPr>
+            <a:r>
+              <a:rPr sz="1500">
+                <a:solidFill>
+                  <a:srgbClr val="003DA5"/>
+                </a:solidFill>
+                <a:latin typeface="Arial"/>
+              </a:rPr>
+              <a:t>▪  </a:t>
+            </a:r>
+            <a:r>
+              <a:rPr sz="1700">
+                <a:solidFill>
+                  <a:srgbClr val="1A1A1A"/>
+                </a:solidFill>
+                <a:latin typeface="Arial"/>
+              </a:rPr>
+              <a:t>Situationsgerecht zwischen verschiedenen Fragetechniken wählen und die Wahl begründen</a:t>
+            </a:r>
+          </a:p>
+        </p:txBody>
+      </p:sp>
+    </p:spTree>
+  </p:cSld>
+  <p:clrMapOvr>
+    <a:masterClrMapping/>
+  </p:clrMapOvr>
+</p:sld>
+</file>
+
+<file path=ppt/slides/slide3.xml><?xml version="1.0" encoding="utf-8"?>
 <p:sld xmlns:a="http://schemas.openxmlformats.org/drawingml/2006/main" xmlns:p="http://schemas.openxmlformats.org/presentationml/2006/main" xmlns:r="http://schemas.openxmlformats.org/officeDocument/2006/relationships">
   <p:cSld>
     <p:bg>
@@ -4342,8 +6334,8 @@
         </p:nvSpPr>
         <p:spPr>
           <a:xfrm>
-            <a:off x="365760" y="2286000"/>
-            <a:ext cx="11430000" cy="1828800"/>
+            <a:off x="365760" y="2011680"/>
+            <a:ext cx="11430000" cy="2011680"/>
           </a:xfrm>
           <a:prstGeom prst="rect">
             <a:avLst/>
@@ -4358,13 +6350,286 @@
           <a:p>
             <a:pPr algn="l"/>
             <a:r>
-              <a:rPr sz="3600" b="1">
+              <a:rPr sz="3600" b="1" i="0">
                 <a:solidFill>
                   <a:srgbClr val="FFFFFF"/>
                 </a:solidFill>
                 <a:latin typeface="Arial"/>
               </a:rPr>
-              <a:t>Warum Kunden latente Bedarfe nicht artikulieren</a:t>
+              <a:t>Das Eisberg-Modell der Kundenbedürfnisse</a:t>
+            </a:r>
+          </a:p>
+        </p:txBody>
+      </p:sp>
+    </p:spTree>
+  </p:cSld>
+  <p:clrMapOvr>
+    <a:masterClrMapping/>
+  </p:clrMapOvr>
+</p:sld>
+</file>
+
+<file path=ppt/slides/slide4.xml><?xml version="1.0" encoding="utf-8"?>
+<p:sld xmlns:a="http://schemas.openxmlformats.org/drawingml/2006/main" xmlns:p="http://schemas.openxmlformats.org/presentationml/2006/main" xmlns:r="http://schemas.openxmlformats.org/officeDocument/2006/relationships">
+  <p:cSld>
+    <p:bg>
+      <p:bgPr>
+        <a:solidFill>
+          <a:srgbClr val="FFFFFF"/>
+        </a:solidFill>
+        <a:effectLst/>
+      </p:bgPr>
+    </p:bg>
+    <p:spTree>
+      <p:nvGrpSpPr>
+        <p:cNvPr id="1" name=""/>
+        <p:cNvGrpSpPr/>
+        <p:nvPr/>
+      </p:nvGrpSpPr>
+      <p:grpSpPr/>
+      <p:sp>
+        <p:nvSpPr>
+          <p:cNvPr id="2" name="Rectangle 1"/>
+          <p:cNvSpPr/>
+          <p:nvPr/>
+        </p:nvSpPr>
+        <p:spPr>
+          <a:xfrm>
+            <a:off x="0" y="0"/>
+            <a:ext cx="73152" cy="6858000"/>
+          </a:xfrm>
+          <a:prstGeom prst="rect">
+            <a:avLst/>
+          </a:prstGeom>
+          <a:solidFill>
+            <a:srgbClr val="003DA5"/>
+          </a:solidFill>
+          <a:ln>
+            <a:noFill/>
+          </a:ln>
+        </p:spPr>
+        <p:style>
+          <a:lnRef idx="1">
+            <a:schemeClr val="accent1"/>
+          </a:lnRef>
+          <a:fillRef idx="3">
+            <a:schemeClr val="accent1"/>
+          </a:fillRef>
+          <a:effectRef idx="2">
+            <a:schemeClr val="accent1"/>
+          </a:effectRef>
+          <a:fontRef idx="minor">
+            <a:schemeClr val="lt1"/>
+          </a:fontRef>
+        </p:style>
+        <p:txBody>
+          <a:bodyPr rtlCol="0" anchor="ctr"/>
+          <a:lstStyle/>
+          <a:p>
+            <a:pPr algn="ctr"/>
+          </a:p>
+        </p:txBody>
+      </p:sp>
+      <p:sp>
+        <p:nvSpPr>
+          <p:cNvPr id="3" name="TextBox 2"/>
+          <p:cNvSpPr txBox="1"/>
+          <p:nvPr/>
+        </p:nvSpPr>
+        <p:spPr>
+          <a:xfrm>
+            <a:off x="228600" y="182880"/>
+            <a:ext cx="11430000" cy="320040"/>
+          </a:xfrm>
+          <a:prstGeom prst="rect">
+            <a:avLst/>
+          </a:prstGeom>
+          <a:noFill/>
+        </p:spPr>
+        <p:txBody>
+          <a:bodyPr wrap="square">
+            <a:spAutoFit/>
+          </a:bodyPr>
+          <a:lstStyle/>
+          <a:p>
+            <a:pPr algn="l"/>
+            <a:r>
+              <a:rPr sz="900" b="0" i="0">
+                <a:solidFill>
+                  <a:srgbClr val="556575"/>
+                </a:solidFill>
+                <a:latin typeface="Arial"/>
+              </a:rPr>
+              <a:t>M11 · Modulinhalte</a:t>
+            </a:r>
+          </a:p>
+        </p:txBody>
+      </p:sp>
+      <p:sp>
+        <p:nvSpPr>
+          <p:cNvPr id="4" name="TextBox 3"/>
+          <p:cNvSpPr txBox="1"/>
+          <p:nvPr/>
+        </p:nvSpPr>
+        <p:spPr>
+          <a:xfrm>
+            <a:off x="365760" y="274320"/>
+            <a:ext cx="11430000" cy="777240"/>
+          </a:xfrm>
+          <a:prstGeom prst="rect">
+            <a:avLst/>
+          </a:prstGeom>
+          <a:noFill/>
+        </p:spPr>
+        <p:txBody>
+          <a:bodyPr wrap="square">
+            <a:spAutoFit/>
+          </a:bodyPr>
+          <a:lstStyle/>
+          <a:p>
+            <a:pPr algn="l"/>
+            <a:r>
+              <a:rPr sz="2200" b="1" i="0">
+                <a:solidFill>
+                  <a:srgbClr val="003DA5"/>
+                </a:solidFill>
+                <a:latin typeface="Arial"/>
+              </a:rPr>
+              <a:t>Das Eisberg-Modell der Kundenbedürfnisse</a:t>
+            </a:r>
+          </a:p>
+        </p:txBody>
+      </p:sp>
+      <p:sp>
+        <p:nvSpPr>
+          <p:cNvPr id="5" name="Rectangle 4"/>
+          <p:cNvSpPr/>
+          <p:nvPr/>
+        </p:nvSpPr>
+        <p:spPr>
+          <a:xfrm>
+            <a:off x="365760" y="1005840"/>
+            <a:ext cx="11430000" cy="27432"/>
+          </a:xfrm>
+          <a:prstGeom prst="rect">
+            <a:avLst/>
+          </a:prstGeom>
+          <a:solidFill>
+            <a:srgbClr val="D1D5DB"/>
+          </a:solidFill>
+          <a:ln>
+            <a:noFill/>
+          </a:ln>
+        </p:spPr>
+        <p:style>
+          <a:lnRef idx="1">
+            <a:schemeClr val="accent1"/>
+          </a:lnRef>
+          <a:fillRef idx="3">
+            <a:schemeClr val="accent1"/>
+          </a:fillRef>
+          <a:effectRef idx="2">
+            <a:schemeClr val="accent1"/>
+          </a:effectRef>
+          <a:fontRef idx="minor">
+            <a:schemeClr val="lt1"/>
+          </a:fontRef>
+        </p:style>
+        <p:txBody>
+          <a:bodyPr rtlCol="0" anchor="ctr"/>
+          <a:lstStyle/>
+          <a:p>
+            <a:pPr algn="ctr"/>
+          </a:p>
+        </p:txBody>
+      </p:sp>
+      <p:sp>
+        <p:nvSpPr>
+          <p:cNvPr id="6" name="TextBox 5"/>
+          <p:cNvSpPr txBox="1"/>
+          <p:nvPr/>
+        </p:nvSpPr>
+        <p:spPr>
+          <a:xfrm>
+            <a:off x="365760" y="1143000"/>
+            <a:ext cx="11430000" cy="5212080"/>
+          </a:xfrm>
+          <a:prstGeom prst="rect">
+            <a:avLst/>
+          </a:prstGeom>
+          <a:noFill/>
+        </p:spPr>
+        <p:txBody>
+          <a:bodyPr wrap="square">
+            <a:spAutoFit/>
+          </a:bodyPr>
+          <a:lstStyle/>
+          <a:p>
+            <a:pPr>
+              <a:spcBef>
+                <a:spcPts val="500"/>
+              </a:spcBef>
+            </a:pPr>
+            <a:r>
+              <a:rPr sz="1500">
+                <a:solidFill>
+                  <a:srgbClr val="003DA5"/>
+                </a:solidFill>
+                <a:latin typeface="Arial"/>
+              </a:rPr>
+              <a:t>▪  </a:t>
+            </a:r>
+            <a:r>
+              <a:rPr sz="1700" b="1">
+                <a:solidFill>
+                  <a:srgbClr val="003DA5"/>
+                </a:solidFill>
+                <a:latin typeface="Arial"/>
+              </a:rPr>
+              <a:t>Explizite Bedarfe: </a:t>
+            </a:r>
+            <a:r>
+              <a:rPr sz="1700">
+                <a:solidFill>
+                  <a:srgbClr val="1A1A1A"/>
+                </a:solidFill>
+                <a:latin typeface="Arial"/>
+              </a:rPr>
+              <a:t>Der Kunde benennt klar, was er will. „Ich brauche eine Anschlussfinanzierung für meine Maschine." Explizite Bedarfe entstehen, wenn der Kunde seine Situation analysiert und eine…</a:t>
+            </a:r>
+          </a:p>
+          <a:p>
+            <a:pPr>
+              <a:spcBef>
+                <a:spcPts val="500"/>
+              </a:spcBef>
+            </a:pPr>
+            <a:r>
+              <a:rPr sz="1500">
+                <a:solidFill>
+                  <a:srgbClr val="003DA5"/>
+                </a:solidFill>
+                <a:latin typeface="Arial"/>
+              </a:rPr>
+              <a:t>▪  </a:t>
+            </a:r>
+            <a:r>
+              <a:rPr sz="1700" b="1">
+                <a:solidFill>
+                  <a:srgbClr val="003DA5"/>
+                </a:solidFill>
+                <a:latin typeface="Arial"/>
+              </a:rPr>
+              <a:t>Implizite (latente) Bedarfe: </a:t>
+            </a:r>
+            <a:r>
+              <a:rPr sz="1700">
+                <a:solidFill>
+                  <a:srgbClr val="1A1A1A"/>
+                </a:solidFill>
+                <a:latin typeface="Arial"/>
+              </a:rPr>
+              <a:t>Der Kunde beschreibt ein Problem, einen Schmerz oder eine Unzufriedenheit, ohne eine Lösung zu benennen. „Unsere Abschreibungen sind dieses Jahr sehr hoch." Oder: „Ich mache mir…</a:t>
             </a:r>
           </a:p>
         </p:txBody>
@@ -4446,8 +6711,8 @@
         </p:nvSpPr>
         <p:spPr>
           <a:xfrm>
-            <a:off x="365760" y="2286000"/>
-            <a:ext cx="11430000" cy="1828800"/>
+            <a:off x="365760" y="2011680"/>
+            <a:ext cx="11430000" cy="2011680"/>
           </a:xfrm>
           <a:prstGeom prst="rect">
             <a:avLst/>
@@ -4462,13 +6727,13 @@
           <a:p>
             <a:pPr algn="l"/>
             <a:r>
-              <a:rPr sz="3600" b="1">
+              <a:rPr sz="3600" b="1" i="0">
                 <a:solidFill>
                   <a:srgbClr val="FFFFFF"/>
                 </a:solidFill>
                 <a:latin typeface="Arial"/>
               </a:rPr>
-              <a:t>Typische latente Bedarfsfelder im Firmenkunden-Alltag</a:t>
+              <a:t>Warum Kunden latente Bedarfe nicht artikulieren</a:t>
             </a:r>
           </a:p>
         </p:txBody>
@@ -4482,6 +6747,381 @@
 </file>
 
 <file path=ppt/slides/slide6.xml><?xml version="1.0" encoding="utf-8"?>
+<p:sld xmlns:a="http://schemas.openxmlformats.org/drawingml/2006/main" xmlns:p="http://schemas.openxmlformats.org/presentationml/2006/main" xmlns:r="http://schemas.openxmlformats.org/officeDocument/2006/relationships">
+  <p:cSld>
+    <p:bg>
+      <p:bgPr>
+        <a:solidFill>
+          <a:srgbClr val="FFFFFF"/>
+        </a:solidFill>
+        <a:effectLst/>
+      </p:bgPr>
+    </p:bg>
+    <p:spTree>
+      <p:nvGrpSpPr>
+        <p:cNvPr id="1" name=""/>
+        <p:cNvGrpSpPr/>
+        <p:nvPr/>
+      </p:nvGrpSpPr>
+      <p:grpSpPr/>
+      <p:sp>
+        <p:nvSpPr>
+          <p:cNvPr id="2" name="Rectangle 1"/>
+          <p:cNvSpPr/>
+          <p:nvPr/>
+        </p:nvSpPr>
+        <p:spPr>
+          <a:xfrm>
+            <a:off x="0" y="0"/>
+            <a:ext cx="73152" cy="6858000"/>
+          </a:xfrm>
+          <a:prstGeom prst="rect">
+            <a:avLst/>
+          </a:prstGeom>
+          <a:solidFill>
+            <a:srgbClr val="003DA5"/>
+          </a:solidFill>
+          <a:ln>
+            <a:noFill/>
+          </a:ln>
+        </p:spPr>
+        <p:style>
+          <a:lnRef idx="1">
+            <a:schemeClr val="accent1"/>
+          </a:lnRef>
+          <a:fillRef idx="3">
+            <a:schemeClr val="accent1"/>
+          </a:fillRef>
+          <a:effectRef idx="2">
+            <a:schemeClr val="accent1"/>
+          </a:effectRef>
+          <a:fontRef idx="minor">
+            <a:schemeClr val="lt1"/>
+          </a:fontRef>
+        </p:style>
+        <p:txBody>
+          <a:bodyPr rtlCol="0" anchor="ctr"/>
+          <a:lstStyle/>
+          <a:p>
+            <a:pPr algn="ctr"/>
+          </a:p>
+        </p:txBody>
+      </p:sp>
+      <p:sp>
+        <p:nvSpPr>
+          <p:cNvPr id="3" name="TextBox 2"/>
+          <p:cNvSpPr txBox="1"/>
+          <p:nvPr/>
+        </p:nvSpPr>
+        <p:spPr>
+          <a:xfrm>
+            <a:off x="228600" y="182880"/>
+            <a:ext cx="11430000" cy="320040"/>
+          </a:xfrm>
+          <a:prstGeom prst="rect">
+            <a:avLst/>
+          </a:prstGeom>
+          <a:noFill/>
+        </p:spPr>
+        <p:txBody>
+          <a:bodyPr wrap="square">
+            <a:spAutoFit/>
+          </a:bodyPr>
+          <a:lstStyle/>
+          <a:p>
+            <a:pPr algn="l"/>
+            <a:r>
+              <a:rPr sz="900" b="0" i="0">
+                <a:solidFill>
+                  <a:srgbClr val="556575"/>
+                </a:solidFill>
+                <a:latin typeface="Arial"/>
+              </a:rPr>
+              <a:t>M11 · Modulinhalte</a:t>
+            </a:r>
+          </a:p>
+        </p:txBody>
+      </p:sp>
+      <p:sp>
+        <p:nvSpPr>
+          <p:cNvPr id="4" name="TextBox 3"/>
+          <p:cNvSpPr txBox="1"/>
+          <p:nvPr/>
+        </p:nvSpPr>
+        <p:spPr>
+          <a:xfrm>
+            <a:off x="365760" y="274320"/>
+            <a:ext cx="11430000" cy="777240"/>
+          </a:xfrm>
+          <a:prstGeom prst="rect">
+            <a:avLst/>
+          </a:prstGeom>
+          <a:noFill/>
+        </p:spPr>
+        <p:txBody>
+          <a:bodyPr wrap="square">
+            <a:spAutoFit/>
+          </a:bodyPr>
+          <a:lstStyle/>
+          <a:p>
+            <a:pPr algn="l"/>
+            <a:r>
+              <a:rPr sz="2200" b="1" i="0">
+                <a:solidFill>
+                  <a:srgbClr val="003DA5"/>
+                </a:solidFill>
+                <a:latin typeface="Arial"/>
+              </a:rPr>
+              <a:t>Warum Kunden latente Bedarfe nicht artikulieren</a:t>
+            </a:r>
+          </a:p>
+        </p:txBody>
+      </p:sp>
+      <p:sp>
+        <p:nvSpPr>
+          <p:cNvPr id="5" name="Rectangle 4"/>
+          <p:cNvSpPr/>
+          <p:nvPr/>
+        </p:nvSpPr>
+        <p:spPr>
+          <a:xfrm>
+            <a:off x="365760" y="1005840"/>
+            <a:ext cx="11430000" cy="27432"/>
+          </a:xfrm>
+          <a:prstGeom prst="rect">
+            <a:avLst/>
+          </a:prstGeom>
+          <a:solidFill>
+            <a:srgbClr val="D1D5DB"/>
+          </a:solidFill>
+          <a:ln>
+            <a:noFill/>
+          </a:ln>
+        </p:spPr>
+        <p:style>
+          <a:lnRef idx="1">
+            <a:schemeClr val="accent1"/>
+          </a:lnRef>
+          <a:fillRef idx="3">
+            <a:schemeClr val="accent1"/>
+          </a:fillRef>
+          <a:effectRef idx="2">
+            <a:schemeClr val="accent1"/>
+          </a:effectRef>
+          <a:fontRef idx="minor">
+            <a:schemeClr val="lt1"/>
+          </a:fontRef>
+        </p:style>
+        <p:txBody>
+          <a:bodyPr rtlCol="0" anchor="ctr"/>
+          <a:lstStyle/>
+          <a:p>
+            <a:pPr algn="ctr"/>
+          </a:p>
+        </p:txBody>
+      </p:sp>
+      <p:sp>
+        <p:nvSpPr>
+          <p:cNvPr id="6" name="TextBox 5"/>
+          <p:cNvSpPr txBox="1"/>
+          <p:nvPr/>
+        </p:nvSpPr>
+        <p:spPr>
+          <a:xfrm>
+            <a:off x="365760" y="1143000"/>
+            <a:ext cx="11430000" cy="5212080"/>
+          </a:xfrm>
+          <a:prstGeom prst="rect">
+            <a:avLst/>
+          </a:prstGeom>
+          <a:noFill/>
+        </p:spPr>
+        <p:txBody>
+          <a:bodyPr wrap="square">
+            <a:spAutoFit/>
+          </a:bodyPr>
+          <a:lstStyle/>
+          <a:p>
+            <a:pPr>
+              <a:spcBef>
+                <a:spcPts val="500"/>
+              </a:spcBef>
+            </a:pPr>
+            <a:r>
+              <a:rPr sz="1500">
+                <a:solidFill>
+                  <a:srgbClr val="003DA5"/>
+                </a:solidFill>
+                <a:latin typeface="Arial"/>
+              </a:rPr>
+              <a:t>▪  </a:t>
+            </a:r>
+            <a:r>
+              <a:rPr sz="1700" b="1">
+                <a:solidFill>
+                  <a:srgbClr val="003DA5"/>
+                </a:solidFill>
+                <a:latin typeface="Arial"/>
+              </a:rPr>
+              <a:t>Unbewusstheit: </a:t>
+            </a:r>
+            <a:r>
+              <a:rPr sz="1700">
+                <a:solidFill>
+                  <a:srgbClr val="1A1A1A"/>
+                </a:solidFill>
+                <a:latin typeface="Arial"/>
+              </a:rPr>
+              <a:t>Der Bedarf ist noch nicht als solcher erkannt. Der Kunde spürt das Problem, hat es aber nicht als lösungswürdig eingeordnet. 2.</a:t>
+            </a:r>
+          </a:p>
+          <a:p>
+            <a:pPr>
+              <a:spcBef>
+                <a:spcPts val="500"/>
+              </a:spcBef>
+            </a:pPr>
+            <a:r>
+              <a:rPr sz="1500">
+                <a:solidFill>
+                  <a:srgbClr val="003DA5"/>
+                </a:solidFill>
+                <a:latin typeface="Arial"/>
+              </a:rPr>
+              <a:t>▪  </a:t>
+            </a:r>
+            <a:r>
+              <a:rPr sz="1700" b="1">
+                <a:solidFill>
+                  <a:srgbClr val="003DA5"/>
+                </a:solidFill>
+                <a:latin typeface="Arial"/>
+              </a:rPr>
+              <a:t>Schambarriere: </a:t>
+            </a:r>
+            <a:r>
+              <a:rPr sz="1700">
+                <a:solidFill>
+                  <a:srgbClr val="1A1A1A"/>
+                </a:solidFill>
+                <a:latin typeface="Arial"/>
+              </a:rPr>
+              <a:t>Sensitive Themen wie Nachfolge, Unternehmenskrise oder Privatsphäre werden nicht freiwillig angesprochen. 3.</a:t>
+            </a:r>
+          </a:p>
+          <a:p>
+            <a:pPr>
+              <a:spcBef>
+                <a:spcPts val="500"/>
+              </a:spcBef>
+            </a:pPr>
+            <a:r>
+              <a:rPr sz="1500">
+                <a:solidFill>
+                  <a:srgbClr val="003DA5"/>
+                </a:solidFill>
+                <a:latin typeface="Arial"/>
+              </a:rPr>
+              <a:t>▪  </a:t>
+            </a:r>
+            <a:r>
+              <a:rPr sz="1700" b="1">
+                <a:solidFill>
+                  <a:srgbClr val="003DA5"/>
+                </a:solidFill>
+                <a:latin typeface="Arial"/>
+              </a:rPr>
+              <a:t>Fehlende Sicherheit: </a:t>
+            </a:r>
+            <a:r>
+              <a:rPr sz="1700">
+                <a:solidFill>
+                  <a:srgbClr val="1A1A1A"/>
+                </a:solidFill>
+                <a:latin typeface="Arial"/>
+              </a:rPr>
+              <a:t>Der Kunde weiß nicht, ob der Berater kompetent genug ist für das eigentliche Thema. Im Volksbankenalltag kommt ein verstärkender Faktor hinzu: Häufige Beraterwechsel. Wer…</a:t>
+            </a:r>
+          </a:p>
+          <a:p>
+            <a:pPr>
+              <a:spcBef>
+                <a:spcPts val="500"/>
+              </a:spcBef>
+            </a:pPr>
+            <a:r>
+              <a:rPr sz="1500">
+                <a:solidFill>
+                  <a:srgbClr val="003DA5"/>
+                </a:solidFill>
+                <a:latin typeface="Arial"/>
+              </a:rPr>
+              <a:t>▪  </a:t>
+            </a:r>
+            <a:r>
+              <a:rPr sz="1700" b="1">
+                <a:solidFill>
+                  <a:srgbClr val="003DA5"/>
+                </a:solidFill>
+                <a:latin typeface="Arial"/>
+              </a:rPr>
+              <a:t>Praxistipp: </a:t>
+            </a:r>
+            <a:r>
+              <a:rPr sz="1700">
+                <a:solidFill>
+                  <a:srgbClr val="1A1A1A"/>
+                </a:solidFill>
+                <a:latin typeface="Arial"/>
+              </a:rPr>
+              <a:t>Eigene Erfahrungen kurz einbringen öffnet schneller als jede Frage – „Ich habe das bei einem anderen Kunden ähnlich erlebt, wie er das gelöst hat, war interessant…" signalisiert…</a:t>
+            </a:r>
+          </a:p>
+          <a:p>
+            <a:pPr>
+              <a:spcBef>
+                <a:spcPts val="500"/>
+              </a:spcBef>
+            </a:pPr>
+            <a:r>
+              <a:rPr sz="1500">
+                <a:solidFill>
+                  <a:srgbClr val="003DA5"/>
+                </a:solidFill>
+                <a:latin typeface="Arial"/>
+              </a:rPr>
+              <a:t>▪  </a:t>
+            </a:r>
+            <a:r>
+              <a:rPr sz="1700" b="1">
+                <a:solidFill>
+                  <a:srgbClr val="003DA5"/>
+                </a:solidFill>
+                <a:latin typeface="Arial"/>
+              </a:rPr>
+              <a:t>Gewohnheit: </a:t>
+            </a:r>
+            <a:r>
+              <a:rPr sz="1700">
+                <a:solidFill>
+                  <a:srgbClr val="1A1A1A"/>
+                </a:solidFill>
+                <a:latin typeface="Arial"/>
+              </a:rPr>
+              <a:t>Der Kunde ist es gewohnt, dass Bankgespräche Produktgespräche sind – er stellt sich selbst anders ein.</a:t>
+            </a:r>
+          </a:p>
+        </p:txBody>
+      </p:sp>
+    </p:spTree>
+  </p:cSld>
+  <p:clrMapOvr>
+    <a:masterClrMapping/>
+  </p:clrMapOvr>
+</p:sld>
+</file>
+
+<file path=ppt/slides/slide7.xml><?xml version="1.0" encoding="utf-8"?>
 <p:sld xmlns:a="http://schemas.openxmlformats.org/drawingml/2006/main" xmlns:p="http://schemas.openxmlformats.org/presentationml/2006/main" xmlns:r="http://schemas.openxmlformats.org/officeDocument/2006/relationships">
   <p:cSld>
     <p:bg>
@@ -4550,8 +7190,8 @@
         </p:nvSpPr>
         <p:spPr>
           <a:xfrm>
-            <a:off x="365760" y="2286000"/>
-            <a:ext cx="11430000" cy="1828800"/>
+            <a:off x="365760" y="2011680"/>
+            <a:ext cx="11430000" cy="2011680"/>
           </a:xfrm>
           <a:prstGeom prst="rect">
             <a:avLst/>
@@ -4566,13 +7206,13 @@
           <a:p>
             <a:pPr algn="l"/>
             <a:r>
-              <a:rPr sz="3600" b="1">
+              <a:rPr sz="3600" b="1" i="0">
                 <a:solidFill>
                   <a:srgbClr val="FFFFFF"/>
                 </a:solidFill>
                 <a:latin typeface="Arial"/>
               </a:rPr>
-              <a:t>Fragetechnik in der Praxis: Drei Tiefen-Ebenen</a:t>
+              <a:t>Typische latente Bedarfsfelder im Firmenkunden-Alltag</a:t>
             </a:r>
           </a:p>
         </p:txBody>
@@ -4585,7 +7225,556 @@
 </p:sld>
 </file>
 
-<file path=ppt/slides/slide7.xml><?xml version="1.0" encoding="utf-8"?>
+<file path=ppt/slides/slide8.xml><?xml version="1.0" encoding="utf-8"?>
+<p:sld xmlns:a="http://schemas.openxmlformats.org/drawingml/2006/main" xmlns:p="http://schemas.openxmlformats.org/presentationml/2006/main" xmlns:r="http://schemas.openxmlformats.org/officeDocument/2006/relationships">
+  <p:cSld>
+    <p:bg>
+      <p:bgPr>
+        <a:solidFill>
+          <a:srgbClr val="FFFFFF"/>
+        </a:solidFill>
+        <a:effectLst/>
+      </p:bgPr>
+    </p:bg>
+    <p:spTree>
+      <p:nvGrpSpPr>
+        <p:cNvPr id="1" name=""/>
+        <p:cNvGrpSpPr/>
+        <p:nvPr/>
+      </p:nvGrpSpPr>
+      <p:grpSpPr/>
+      <p:sp>
+        <p:nvSpPr>
+          <p:cNvPr id="2" name="Rectangle 1"/>
+          <p:cNvSpPr/>
+          <p:nvPr/>
+        </p:nvSpPr>
+        <p:spPr>
+          <a:xfrm>
+            <a:off x="0" y="0"/>
+            <a:ext cx="73152" cy="6858000"/>
+          </a:xfrm>
+          <a:prstGeom prst="rect">
+            <a:avLst/>
+          </a:prstGeom>
+          <a:solidFill>
+            <a:srgbClr val="003DA5"/>
+          </a:solidFill>
+          <a:ln>
+            <a:noFill/>
+          </a:ln>
+        </p:spPr>
+        <p:style>
+          <a:lnRef idx="1">
+            <a:schemeClr val="accent1"/>
+          </a:lnRef>
+          <a:fillRef idx="3">
+            <a:schemeClr val="accent1"/>
+          </a:fillRef>
+          <a:effectRef idx="2">
+            <a:schemeClr val="accent1"/>
+          </a:effectRef>
+          <a:fontRef idx="minor">
+            <a:schemeClr val="lt1"/>
+          </a:fontRef>
+        </p:style>
+        <p:txBody>
+          <a:bodyPr rtlCol="0" anchor="ctr"/>
+          <a:lstStyle/>
+          <a:p>
+            <a:pPr algn="ctr"/>
+          </a:p>
+        </p:txBody>
+      </p:sp>
+      <p:sp>
+        <p:nvSpPr>
+          <p:cNvPr id="3" name="TextBox 2"/>
+          <p:cNvSpPr txBox="1"/>
+          <p:nvPr/>
+        </p:nvSpPr>
+        <p:spPr>
+          <a:xfrm>
+            <a:off x="228600" y="182880"/>
+            <a:ext cx="11430000" cy="320040"/>
+          </a:xfrm>
+          <a:prstGeom prst="rect">
+            <a:avLst/>
+          </a:prstGeom>
+          <a:noFill/>
+        </p:spPr>
+        <p:txBody>
+          <a:bodyPr wrap="square">
+            <a:spAutoFit/>
+          </a:bodyPr>
+          <a:lstStyle/>
+          <a:p>
+            <a:pPr algn="l"/>
+            <a:r>
+              <a:rPr sz="900" b="0" i="0">
+                <a:solidFill>
+                  <a:srgbClr val="556575"/>
+                </a:solidFill>
+                <a:latin typeface="Arial"/>
+              </a:rPr>
+              <a:t>M11 · Modulinhalte</a:t>
+            </a:r>
+          </a:p>
+        </p:txBody>
+      </p:sp>
+      <p:sp>
+        <p:nvSpPr>
+          <p:cNvPr id="4" name="TextBox 3"/>
+          <p:cNvSpPr txBox="1"/>
+          <p:nvPr/>
+        </p:nvSpPr>
+        <p:spPr>
+          <a:xfrm>
+            <a:off x="365760" y="274320"/>
+            <a:ext cx="11430000" cy="777240"/>
+          </a:xfrm>
+          <a:prstGeom prst="rect">
+            <a:avLst/>
+          </a:prstGeom>
+          <a:noFill/>
+        </p:spPr>
+        <p:txBody>
+          <a:bodyPr wrap="square">
+            <a:spAutoFit/>
+          </a:bodyPr>
+          <a:lstStyle/>
+          <a:p>
+            <a:pPr algn="l"/>
+            <a:r>
+              <a:rPr sz="2200" b="1" i="0">
+                <a:solidFill>
+                  <a:srgbClr val="003DA5"/>
+                </a:solidFill>
+                <a:latin typeface="Arial"/>
+              </a:rPr>
+              <a:t>Typische latente Bedarfsfelder im Firmenkunden-Alltag</a:t>
+            </a:r>
+          </a:p>
+        </p:txBody>
+      </p:sp>
+      <p:sp>
+        <p:nvSpPr>
+          <p:cNvPr id="5" name="Rectangle 4"/>
+          <p:cNvSpPr/>
+          <p:nvPr/>
+        </p:nvSpPr>
+        <p:spPr>
+          <a:xfrm>
+            <a:off x="365760" y="1005840"/>
+            <a:ext cx="11430000" cy="27432"/>
+          </a:xfrm>
+          <a:prstGeom prst="rect">
+            <a:avLst/>
+          </a:prstGeom>
+          <a:solidFill>
+            <a:srgbClr val="D1D5DB"/>
+          </a:solidFill>
+          <a:ln>
+            <a:noFill/>
+          </a:ln>
+        </p:spPr>
+        <p:style>
+          <a:lnRef idx="1">
+            <a:schemeClr val="accent1"/>
+          </a:lnRef>
+          <a:fillRef idx="3">
+            <a:schemeClr val="accent1"/>
+          </a:fillRef>
+          <a:effectRef idx="2">
+            <a:schemeClr val="accent1"/>
+          </a:effectRef>
+          <a:fontRef idx="minor">
+            <a:schemeClr val="lt1"/>
+          </a:fontRef>
+        </p:style>
+        <p:txBody>
+          <a:bodyPr rtlCol="0" anchor="ctr"/>
+          <a:lstStyle/>
+          <a:p>
+            <a:pPr algn="ctr"/>
+          </a:p>
+        </p:txBody>
+      </p:sp>
+      <p:graphicFrame>
+        <p:nvGraphicFramePr>
+          <p:cNvPr id="6" name="Table 5"/>
+          <p:cNvGraphicFramePr>
+            <a:graphicFrameLocks noGrp="1"/>
+          </p:cNvGraphicFramePr>
+          <p:nvPr/>
+        </p:nvGraphicFramePr>
+        <p:xfrm>
+          <a:off x="365760" y="1143000"/>
+          <a:ext cx="11430000" cy="2377440"/>
+        </p:xfrm>
+        <a:graphic>
+          <a:graphicData uri="http://schemas.openxmlformats.org/drawingml/2006/table">
+            <a:tbl>
+              <a:tblPr firstRow="1" bandRow="1">
+                <a:tableStyleId>{5C22544A-7EE6-4342-B048-85BDC9FD1C3A}</a:tableStyleId>
+              </a:tblPr>
+              <a:tblGrid>
+                <a:gridCol w="3810000"/>
+                <a:gridCol w="3810000"/>
+                <a:gridCol w="3810000"/>
+              </a:tblGrid>
+              <a:tr h="475488">
+                <a:tc>
+                  <a:txBody>
+                    <a:bodyPr wrap="square"/>
+                    <a:lstStyle/>
+                    <a:p>
+                      <a:r>
+                        <a:rPr sz="1100" b="1">
+                          <a:solidFill>
+                            <a:srgbClr val="FFFFFF"/>
+                          </a:solidFill>
+                          <a:latin typeface="Arial"/>
+                        </a:rPr>
+                        <a:t>Bedarfsfeld</a:t>
+                      </a:r>
+                    </a:p>
+                  </a:txBody>
+                  <a:tcPr>
+                    <a:solidFill>
+                      <a:srgbClr val="003DA5"/>
+                    </a:solidFill>
+                  </a:tcPr>
+                </a:tc>
+                <a:tc>
+                  <a:txBody>
+                    <a:bodyPr wrap="square"/>
+                    <a:lstStyle/>
+                    <a:p>
+                      <a:r>
+                        <a:rPr sz="1100" b="1">
+                          <a:solidFill>
+                            <a:srgbClr val="FFFFFF"/>
+                          </a:solidFill>
+                          <a:latin typeface="Arial"/>
+                        </a:rPr>
+                        <a:t>Typisches Kundensignal</a:t>
+                      </a:r>
+                    </a:p>
+                  </a:txBody>
+                  <a:tcPr>
+                    <a:solidFill>
+                      <a:srgbClr val="003DA5"/>
+                    </a:solidFill>
+                  </a:tcPr>
+                </a:tc>
+                <a:tc>
+                  <a:txBody>
+                    <a:bodyPr wrap="square"/>
+                    <a:lstStyle/>
+                    <a:p>
+                      <a:r>
+                        <a:rPr sz="1100" b="1">
+                          <a:solidFill>
+                            <a:srgbClr val="FFFFFF"/>
+                          </a:solidFill>
+                          <a:latin typeface="Arial"/>
+                        </a:rPr>
+                        <a:t>Einstiegsfrage</a:t>
+                      </a:r>
+                    </a:p>
+                  </a:txBody>
+                  <a:tcPr>
+                    <a:solidFill>
+                      <a:srgbClr val="003DA5"/>
+                    </a:solidFill>
+                  </a:tcPr>
+                </a:tc>
+              </a:tr>
+              <a:tr h="475488">
+                <a:tc>
+                  <a:txBody>
+                    <a:bodyPr wrap="square"/>
+                    <a:lstStyle/>
+                    <a:p>
+                      <a:r>
+                        <a:rPr sz="1100" b="0">
+                          <a:solidFill>
+                            <a:srgbClr val="1A1A1A"/>
+                          </a:solidFill>
+                          <a:latin typeface="Arial"/>
+                        </a:rPr>
+                        <a:t>Nachfolge / Übergabe</a:t>
+                      </a:r>
+                    </a:p>
+                  </a:txBody>
+                  <a:tcPr>
+                    <a:solidFill>
+                      <a:srgbClr val="FFFFFF"/>
+                    </a:solidFill>
+                  </a:tcPr>
+                </a:tc>
+                <a:tc>
+                  <a:txBody>
+                    <a:bodyPr wrap="square"/>
+                    <a:lstStyle/>
+                    <a:p>
+                      <a:r>
+                        <a:rPr sz="1100" b="0">
+                          <a:solidFill>
+                            <a:srgbClr val="1A1A1A"/>
+                          </a:solidFill>
+                          <a:latin typeface="Arial"/>
+                        </a:rPr>
+                        <a:t>„Mein Sohn ist dabei, aber…" · „Irgendwann mache ich kürzer…" · Abgelenktes Auftreten im Jahresgespräch</a:t>
+                      </a:r>
+                    </a:p>
+                  </a:txBody>
+                  <a:tcPr>
+                    <a:solidFill>
+                      <a:srgbClr val="FFFFFF"/>
+                    </a:solidFill>
+                  </a:tcPr>
+                </a:tc>
+                <a:tc>
+                  <a:txBody>
+                    <a:bodyPr wrap="square"/>
+                    <a:lstStyle/>
+                    <a:p>
+                      <a:r>
+                        <a:rPr sz="1100" b="0">
+                          <a:solidFill>
+                            <a:srgbClr val="1A1A1A"/>
+                          </a:solidFill>
+                          <a:latin typeface="Arial"/>
+                        </a:rPr>
+                        <a:t>„Wer führt das Unternehmen, wenn Sie morgen ausfallen?"</a:t>
+                      </a:r>
+                    </a:p>
+                  </a:txBody>
+                  <a:tcPr>
+                    <a:solidFill>
+                      <a:srgbClr val="FFFFFF"/>
+                    </a:solidFill>
+                  </a:tcPr>
+                </a:tc>
+              </a:tr>
+              <a:tr h="475488">
+                <a:tc>
+                  <a:txBody>
+                    <a:bodyPr wrap="square"/>
+                    <a:lstStyle/>
+                    <a:p>
+                      <a:r>
+                        <a:rPr sz="1100" b="0">
+                          <a:solidFill>
+                            <a:srgbClr val="1A1A1A"/>
+                          </a:solidFill>
+                          <a:latin typeface="Arial"/>
+                        </a:rPr>
+                        <a:t>Wachstumsfinanzierung / Investition</a:t>
+                      </a:r>
+                    </a:p>
+                  </a:txBody>
+                  <a:tcPr>
+                    <a:solidFill>
+                      <a:srgbClr val="F4F6FA"/>
+                    </a:solidFill>
+                  </a:tcPr>
+                </a:tc>
+                <a:tc>
+                  <a:txBody>
+                    <a:bodyPr wrap="square"/>
+                    <a:lstStyle/>
+                    <a:p>
+                      <a:r>
+                        <a:rPr sz="1100" b="0">
+                          <a:solidFill>
+                            <a:srgbClr val="1A1A1A"/>
+                          </a:solidFill>
+                          <a:latin typeface="Arial"/>
+                        </a:rPr>
+                        <a:t>„Wir bauen gerade eine zweite Halle…" · „Der Auftragsbestand ist gut" · Keine Anfrage bei der Bank</a:t>
+                      </a:r>
+                    </a:p>
+                  </a:txBody>
+                  <a:tcPr>
+                    <a:solidFill>
+                      <a:srgbClr val="F4F6FA"/>
+                    </a:solidFill>
+                  </a:tcPr>
+                </a:tc>
+                <a:tc>
+                  <a:txBody>
+                    <a:bodyPr wrap="square"/>
+                    <a:lstStyle/>
+                    <a:p>
+                      <a:r>
+                        <a:rPr sz="1100" b="0">
+                          <a:solidFill>
+                            <a:srgbClr val="1A1A1A"/>
+                          </a:solidFill>
+                          <a:latin typeface="Arial"/>
+                        </a:rPr>
+                        <a:t>„Haben Sie den Finanzierungsbedarf schon durchgerechnet, oder ist das noch offen?"</a:t>
+                      </a:r>
+                    </a:p>
+                  </a:txBody>
+                  <a:tcPr>
+                    <a:solidFill>
+                      <a:srgbClr val="F4F6FA"/>
+                    </a:solidFill>
+                  </a:tcPr>
+                </a:tc>
+              </a:tr>
+              <a:tr h="475488">
+                <a:tc>
+                  <a:txBody>
+                    <a:bodyPr wrap="square"/>
+                    <a:lstStyle/>
+                    <a:p>
+                      <a:r>
+                        <a:rPr sz="1100" b="0">
+                          <a:solidFill>
+                            <a:srgbClr val="1A1A1A"/>
+                          </a:solidFill>
+                          <a:latin typeface="Arial"/>
+                        </a:rPr>
+                        <a:t>Risikoabsicherung (GF-Ausfall, Schlüsselperson)</a:t>
+                      </a:r>
+                    </a:p>
+                  </a:txBody>
+                  <a:tcPr>
+                    <a:solidFill>
+                      <a:srgbClr val="FFFFFF"/>
+                    </a:solidFill>
+                  </a:tcPr>
+                </a:tc>
+                <a:tc>
+                  <a:txBody>
+                    <a:bodyPr wrap="square"/>
+                    <a:lstStyle/>
+                    <a:p>
+                      <a:r>
+                        <a:rPr sz="1100" b="0">
+                          <a:solidFill>
+                            <a:srgbClr val="1A1A1A"/>
+                          </a:solidFill>
+                          <a:latin typeface="Arial"/>
+                        </a:rPr>
+                        <a:t>Krankheitsepisode erwähnt · „Wenn ich mal nicht mehr da bin…" · Kein Gesellschaftervertrag</a:t>
+                      </a:r>
+                    </a:p>
+                  </a:txBody>
+                  <a:tcPr>
+                    <a:solidFill>
+                      <a:srgbClr val="FFFFFF"/>
+                    </a:solidFill>
+                  </a:tcPr>
+                </a:tc>
+                <a:tc>
+                  <a:txBody>
+                    <a:bodyPr wrap="square"/>
+                    <a:lstStyle/>
+                    <a:p>
+                      <a:r>
+                        <a:rPr sz="1100" b="0">
+                          <a:solidFill>
+                            <a:srgbClr val="1A1A1A"/>
+                          </a:solidFill>
+                          <a:latin typeface="Arial"/>
+                        </a:rPr>
+                        <a:t>„Was passiert mit dem Unternehmen, wenn Sie länger ausfallen – ist das rechtlich und finanziell geregelt?"</a:t>
+                      </a:r>
+                    </a:p>
+                  </a:txBody>
+                  <a:tcPr>
+                    <a:solidFill>
+                      <a:srgbClr val="FFFFFF"/>
+                    </a:solidFill>
+                  </a:tcPr>
+                </a:tc>
+              </a:tr>
+              <a:tr h="475488">
+                <a:tc>
+                  <a:txBody>
+                    <a:bodyPr wrap="square"/>
+                    <a:lstStyle/>
+                    <a:p>
+                      <a:r>
+                        <a:rPr sz="1100" b="0">
+                          <a:solidFill>
+                            <a:srgbClr val="1A1A1A"/>
+                          </a:solidFill>
+                          <a:latin typeface="Arial"/>
+                        </a:rPr>
+                        <a:t>Liquiditätspuffer / Krisenvorsorge</a:t>
+                      </a:r>
+                    </a:p>
+                  </a:txBody>
+                  <a:tcPr>
+                    <a:solidFill>
+                      <a:srgbClr val="F4F6FA"/>
+                    </a:solidFill>
+                  </a:tcPr>
+                </a:tc>
+                <a:tc>
+                  <a:txBody>
+                    <a:bodyPr wrap="square"/>
+                    <a:lstStyle/>
+                    <a:p>
+                      <a:r>
+                        <a:rPr sz="1100" b="0">
+                          <a:solidFill>
+                            <a:srgbClr val="1A1A1A"/>
+                          </a:solidFill>
+                          <a:latin typeface="Arial"/>
+                        </a:rPr>
+                        <a:t>Kontokorrent nahe Limit · Saisonale Schwankungen · „Das läuft immer so ein bisschen eng im Frühjahr"</a:t>
+                      </a:r>
+                    </a:p>
+                  </a:txBody>
+                  <a:tcPr>
+                    <a:solidFill>
+                      <a:srgbClr val="F4F6FA"/>
+                    </a:solidFill>
+                  </a:tcPr>
+                </a:tc>
+                <a:tc>
+                  <a:txBody>
+                    <a:bodyPr wrap="square"/>
+                    <a:lstStyle/>
+                    <a:p>
+                      <a:r>
+                        <a:rPr sz="1100" b="0">
+                          <a:solidFill>
+                            <a:srgbClr val="1A1A1A"/>
+                          </a:solidFill>
+                          <a:latin typeface="Arial"/>
+                        </a:rPr>
+                        <a:t>„Welchen Liquiditätspuffer haben Sie für einen größeren Auftragsausfall?"</a:t>
+                      </a:r>
+                    </a:p>
+                  </a:txBody>
+                  <a:tcPr>
+                    <a:solidFill>
+                      <a:srgbClr val="F4F6FA"/>
+                    </a:solidFill>
+                  </a:tcPr>
+                </a:tc>
+              </a:tr>
+            </a:tbl>
+          </a:graphicData>
+        </a:graphic>
+      </p:graphicFrame>
+    </p:spTree>
+  </p:cSld>
+  <p:clrMapOvr>
+    <a:masterClrMapping/>
+  </p:clrMapOvr>
+</p:sld>
+</file>
+
+<file path=ppt/slides/slide9.xml><?xml version="1.0" encoding="utf-8"?>
 <p:sld xmlns:a="http://schemas.openxmlformats.org/drawingml/2006/main" xmlns:p="http://schemas.openxmlformats.org/presentationml/2006/main" xmlns:r="http://schemas.openxmlformats.org/officeDocument/2006/relationships">
   <p:cSld>
     <p:bg>
@@ -4654,8 +7843,8 @@
         </p:nvSpPr>
         <p:spPr>
           <a:xfrm>
-            <a:off x="365760" y="2286000"/>
-            <a:ext cx="11430000" cy="1828800"/>
+            <a:off x="365760" y="2011680"/>
+            <a:ext cx="11430000" cy="2011680"/>
           </a:xfrm>
           <a:prstGeom prst="rect">
             <a:avLst/>
@@ -4670,221 +7859,13 @@
           <a:p>
             <a:pPr algn="l"/>
             <a:r>
-              <a:rPr sz="3600" b="1">
+              <a:rPr sz="3600" b="1" i="0">
                 <a:solidFill>
                   <a:srgbClr val="FFFFFF"/>
                 </a:solidFill>
                 <a:latin typeface="Arial"/>
               </a:rPr>
-              <a:t>Arbeitsblatt A: SPIN-Fragen vorbereiten</a:t>
-            </a:r>
-          </a:p>
-        </p:txBody>
-      </p:sp>
-    </p:spTree>
-  </p:cSld>
-  <p:clrMapOvr>
-    <a:masterClrMapping/>
-  </p:clrMapOvr>
-</p:sld>
-</file>
-
-<file path=ppt/slides/slide8.xml><?xml version="1.0" encoding="utf-8"?>
-<p:sld xmlns:a="http://schemas.openxmlformats.org/drawingml/2006/main" xmlns:p="http://schemas.openxmlformats.org/presentationml/2006/main" xmlns:r="http://schemas.openxmlformats.org/officeDocument/2006/relationships">
-  <p:cSld>
-    <p:bg>
-      <p:bgPr>
-        <a:solidFill>
-          <a:srgbClr val="1A1A1A"/>
-        </a:solidFill>
-        <a:effectLst/>
-      </p:bgPr>
-    </p:bg>
-    <p:spTree>
-      <p:nvGrpSpPr>
-        <p:cNvPr id="1" name=""/>
-        <p:cNvGrpSpPr/>
-        <p:nvPr/>
-      </p:nvGrpSpPr>
-      <p:grpSpPr/>
-      <p:sp>
-        <p:nvSpPr>
-          <p:cNvPr id="2" name="Rectangle 1"/>
-          <p:cNvSpPr/>
-          <p:nvPr/>
-        </p:nvSpPr>
-        <p:spPr>
-          <a:xfrm>
-            <a:off x="0" y="0"/>
-            <a:ext cx="73152" cy="6858000"/>
-          </a:xfrm>
-          <a:prstGeom prst="rect">
-            <a:avLst/>
-          </a:prstGeom>
-          <a:solidFill>
-            <a:srgbClr val="E05B00"/>
-          </a:solidFill>
-          <a:ln>
-            <a:noFill/>
-          </a:ln>
-        </p:spPr>
-        <p:style>
-          <a:lnRef idx="1">
-            <a:schemeClr val="accent1"/>
-          </a:lnRef>
-          <a:fillRef idx="3">
-            <a:schemeClr val="accent1"/>
-          </a:fillRef>
-          <a:effectRef idx="2">
-            <a:schemeClr val="accent1"/>
-          </a:effectRef>
-          <a:fontRef idx="minor">
-            <a:schemeClr val="lt1"/>
-          </a:fontRef>
-        </p:style>
-        <p:txBody>
-          <a:bodyPr rtlCol="0" anchor="ctr"/>
-          <a:lstStyle/>
-          <a:p>
-            <a:pPr algn="ctr"/>
-          </a:p>
-        </p:txBody>
-      </p:sp>
-      <p:sp>
-        <p:nvSpPr>
-          <p:cNvPr id="3" name="TextBox 2"/>
-          <p:cNvSpPr txBox="1"/>
-          <p:nvPr/>
-        </p:nvSpPr>
-        <p:spPr>
-          <a:xfrm>
-            <a:off x="365760" y="2286000"/>
-            <a:ext cx="11430000" cy="1828800"/>
-          </a:xfrm>
-          <a:prstGeom prst="rect">
-            <a:avLst/>
-          </a:prstGeom>
-          <a:noFill/>
-        </p:spPr>
-        <p:txBody>
-          <a:bodyPr wrap="square">
-            <a:spAutoFit/>
-          </a:bodyPr>
-          <a:lstStyle/>
-          <a:p>
-            <a:pPr algn="l"/>
-            <a:r>
-              <a:rPr sz="3600" b="1">
-                <a:solidFill>
-                  <a:srgbClr val="FFFFFF"/>
-                </a:solidFill>
-                <a:latin typeface="Arial"/>
-              </a:rPr>
-              <a:t>Arbeitsblatt B: Beobachtungsbogen Rollenspiel</a:t>
-            </a:r>
-          </a:p>
-        </p:txBody>
-      </p:sp>
-    </p:spTree>
-  </p:cSld>
-  <p:clrMapOvr>
-    <a:masterClrMapping/>
-  </p:clrMapOvr>
-</p:sld>
-</file>
-
-<file path=ppt/slides/slide9.xml><?xml version="1.0" encoding="utf-8"?>
-<p:sld xmlns:a="http://schemas.openxmlformats.org/drawingml/2006/main" xmlns:p="http://schemas.openxmlformats.org/presentationml/2006/main" xmlns:r="http://schemas.openxmlformats.org/officeDocument/2006/relationships">
-  <p:cSld>
-    <p:bg>
-      <p:bgPr>
-        <a:solidFill>
-          <a:srgbClr val="1A1A1A"/>
-        </a:solidFill>
-        <a:effectLst/>
-      </p:bgPr>
-    </p:bg>
-    <p:spTree>
-      <p:nvGrpSpPr>
-        <p:cNvPr id="1" name=""/>
-        <p:cNvGrpSpPr/>
-        <p:nvPr/>
-      </p:nvGrpSpPr>
-      <p:grpSpPr/>
-      <p:sp>
-        <p:nvSpPr>
-          <p:cNvPr id="2" name="Rectangle 1"/>
-          <p:cNvSpPr/>
-          <p:nvPr/>
-        </p:nvSpPr>
-        <p:spPr>
-          <a:xfrm>
-            <a:off x="0" y="0"/>
-            <a:ext cx="73152" cy="6858000"/>
-          </a:xfrm>
-          <a:prstGeom prst="rect">
-            <a:avLst/>
-          </a:prstGeom>
-          <a:solidFill>
-            <a:srgbClr val="E05B00"/>
-          </a:solidFill>
-          <a:ln>
-            <a:noFill/>
-          </a:ln>
-        </p:spPr>
-        <p:style>
-          <a:lnRef idx="1">
-            <a:schemeClr val="accent1"/>
-          </a:lnRef>
-          <a:fillRef idx="3">
-            <a:schemeClr val="accent1"/>
-          </a:fillRef>
-          <a:effectRef idx="2">
-            <a:schemeClr val="accent1"/>
-          </a:effectRef>
-          <a:fontRef idx="minor">
-            <a:schemeClr val="lt1"/>
-          </a:fontRef>
-        </p:style>
-        <p:txBody>
-          <a:bodyPr rtlCol="0" anchor="ctr"/>
-          <a:lstStyle/>
-          <a:p>
-            <a:pPr algn="ctr"/>
-          </a:p>
-        </p:txBody>
-      </p:sp>
-      <p:sp>
-        <p:nvSpPr>
-          <p:cNvPr id="3" name="TextBox 2"/>
-          <p:cNvSpPr txBox="1"/>
-          <p:nvPr/>
-        </p:nvSpPr>
-        <p:spPr>
-          <a:xfrm>
-            <a:off x="365760" y="2286000"/>
-            <a:ext cx="11430000" cy="1828800"/>
-          </a:xfrm>
-          <a:prstGeom prst="rect">
-            <a:avLst/>
-          </a:prstGeom>
-          <a:noFill/>
-        </p:spPr>
-        <p:txBody>
-          <a:bodyPr wrap="square">
-            <a:spAutoFit/>
-          </a:bodyPr>
-          <a:lstStyle/>
-          <a:p>
-            <a:pPr algn="l"/>
-            <a:r>
-              <a:rPr sz="3600" b="1">
-                <a:solidFill>
-                  <a:srgbClr val="FFFFFF"/>
-                </a:solidFill>
-                <a:latin typeface="Arial"/>
-              </a:rPr>
-              <a:t>Pflichtlektüre</a:t>
+              <a:t>Fragetechnik in der Praxis: Drei Tiefen-Ebenen</a:t>
             </a:r>
           </a:p>
         </p:txBody>

--- a/public/downloads/praesentation/M11.pptx
+++ b/public/downloads/praesentation/M11.pptx
@@ -3731,7 +3731,7 @@
                   </a:txBody>
                   <a:tcPr>
                     <a:solidFill>
-                      <a:srgbClr val="191D2E"/>
+                      <a:srgbClr val="1F2B56"/>
                     </a:solidFill>
                   </a:tcPr>
                 </a:tc>
@@ -3753,7 +3753,7 @@
                   </a:txBody>
                   <a:tcPr>
                     <a:solidFill>
-                      <a:srgbClr val="191D2E"/>
+                      <a:srgbClr val="1F2B56"/>
                     </a:solidFill>
                   </a:tcPr>
                 </a:tc>
@@ -3775,7 +3775,7 @@
                   </a:txBody>
                   <a:tcPr>
                     <a:solidFill>
-                      <a:srgbClr val="191D2E"/>
+                      <a:srgbClr val="1F2B56"/>
                     </a:solidFill>
                   </a:tcPr>
                 </a:tc>
@@ -3797,7 +3797,7 @@
                   </a:txBody>
                   <a:tcPr>
                     <a:solidFill>
-                      <a:srgbClr val="191D2E"/>
+                      <a:srgbClr val="1F2B56"/>
                     </a:solidFill>
                   </a:tcPr>
                 </a:tc>
@@ -3819,7 +3819,7 @@
                   </a:txBody>
                   <a:tcPr>
                     <a:solidFill>
-                      <a:srgbClr val="191D2E"/>
+                      <a:srgbClr val="1F2B56"/>
                     </a:solidFill>
                   </a:tcPr>
                 </a:tc>
@@ -4402,7 +4402,7 @@
     <p:bg>
       <p:bgPr>
         <a:solidFill>
-          <a:srgbClr val="191D2E"/>
+          <a:srgbClr val="1F2B56"/>
         </a:solidFill>
         <a:effectLst/>
       </p:bgPr>
@@ -4603,7 +4603,7 @@
     <p:bg>
       <p:bgPr>
         <a:solidFill>
-          <a:srgbClr val="191D2E"/>
+          <a:srgbClr val="1F2B56"/>
         </a:solidFill>
         <a:effectLst/>
       </p:bgPr>
@@ -4804,7 +4804,7 @@
     <p:bg>
       <p:bgPr>
         <a:solidFill>
-          <a:srgbClr val="191D2E"/>
+          <a:srgbClr val="1F2B56"/>
         </a:solidFill>
         <a:effectLst/>
       </p:bgPr>
@@ -5312,7 +5312,7 @@
                   </a:txBody>
                   <a:tcPr>
                     <a:solidFill>
-                      <a:srgbClr val="191D2E"/>
+                      <a:srgbClr val="1F2B56"/>
                     </a:solidFill>
                   </a:tcPr>
                 </a:tc>
@@ -5334,7 +5334,7 @@
                   </a:txBody>
                   <a:tcPr>
                     <a:solidFill>
-                      <a:srgbClr val="191D2E"/>
+                      <a:srgbClr val="1F2B56"/>
                     </a:solidFill>
                   </a:tcPr>
                 </a:tc>
@@ -5356,7 +5356,7 @@
                   </a:txBody>
                   <a:tcPr>
                     <a:solidFill>
-                      <a:srgbClr val="191D2E"/>
+                      <a:srgbClr val="1F2B56"/>
                     </a:solidFill>
                   </a:tcPr>
                 </a:tc>
@@ -5651,7 +5651,7 @@
     <p:bg>
       <p:bgPr>
         <a:solidFill>
-          <a:srgbClr val="191D2E"/>
+          <a:srgbClr val="1F2B56"/>
         </a:solidFill>
         <a:effectLst/>
       </p:bgPr>
@@ -5852,7 +5852,7 @@
     <p:bg>
       <p:bgPr>
         <a:solidFill>
-          <a:srgbClr val="191D2E"/>
+          <a:srgbClr val="1F2B56"/>
         </a:solidFill>
         <a:effectLst/>
       </p:bgPr>
@@ -6053,7 +6053,7 @@
     <p:bg>
       <p:bgPr>
         <a:solidFill>
-          <a:srgbClr val="191D2E"/>
+          <a:srgbClr val="1F2B56"/>
         </a:solidFill>
         <a:effectLst/>
       </p:bgPr>
@@ -7491,29 +7491,29 @@
         </p:nvSpPr>
         <p:spPr>
           <a:xfrm>
-            <a:off x="4064000" y="927100"/>
-            <a:ext cx="508000" cy="647700"/>
-          </a:xfrm>
-          <a:prstGeom prst="rect">
-            <a:avLst/>
-          </a:prstGeom>
-          <a:noFill/>
-        </p:spPr>
-        <p:txBody>
-          <a:bodyPr wrap="square">
+            <a:off x="4064000" y="939799"/>
+            <a:ext cx="762000" cy="647700"/>
+          </a:xfrm>
+          <a:prstGeom prst="rect">
+            <a:avLst/>
+          </a:prstGeom>
+          <a:noFill/>
+        </p:spPr>
+        <p:txBody>
+          <a:bodyPr wrap="none">
             <a:normAutofit/>
           </a:bodyPr>
           <a:lstStyle/>
           <a:p>
             <a:pPr algn="l"/>
             <a:r>
-              <a:rPr sz="2600" b="0" i="1">
+              <a:rPr sz="2400" b="0" i="1">
                 <a:solidFill>
                   <a:srgbClr val="1F2B56"/>
                 </a:solidFill>
                 <a:latin typeface="Georgia"/>
               </a:rPr>
-              <a:t>I.</a:t>
+              <a:t>I</a:t>
             </a:r>
           </a:p>
         </p:txBody>
@@ -7526,8 +7526,8 @@
         </p:nvSpPr>
         <p:spPr>
           <a:xfrm>
-            <a:off x="4699000" y="952500"/>
-            <a:ext cx="6858000" cy="622300"/>
+            <a:off x="4953000" y="952500"/>
+            <a:ext cx="6629400" cy="635000"/>
           </a:xfrm>
           <a:prstGeom prst="rect">
             <a:avLst/>
@@ -7561,7 +7561,7 @@
         </p:nvSpPr>
         <p:spPr>
           <a:xfrm>
-            <a:off x="4064000" y="1574800"/>
+            <a:off x="4064000" y="1587500"/>
             <a:ext cx="7518399" cy="6350"/>
           </a:xfrm>
           <a:prstGeom prst="rect">
@@ -7604,29 +7604,29 @@
         </p:nvSpPr>
         <p:spPr>
           <a:xfrm>
-            <a:off x="4064000" y="1612900"/>
-            <a:ext cx="508000" cy="647700"/>
-          </a:xfrm>
-          <a:prstGeom prst="rect">
-            <a:avLst/>
-          </a:prstGeom>
-          <a:noFill/>
-        </p:spPr>
-        <p:txBody>
-          <a:bodyPr wrap="square">
+            <a:off x="4064000" y="1638300"/>
+            <a:ext cx="762000" cy="647700"/>
+          </a:xfrm>
+          <a:prstGeom prst="rect">
+            <a:avLst/>
+          </a:prstGeom>
+          <a:noFill/>
+        </p:spPr>
+        <p:txBody>
+          <a:bodyPr wrap="none">
             <a:normAutofit/>
           </a:bodyPr>
           <a:lstStyle/>
           <a:p>
             <a:pPr algn="l"/>
             <a:r>
-              <a:rPr sz="2600" b="0" i="1">
+              <a:rPr sz="2400" b="0" i="1">
                 <a:solidFill>
                   <a:srgbClr val="1F2B56"/>
                 </a:solidFill>
                 <a:latin typeface="Georgia"/>
               </a:rPr>
-              <a:t>II.</a:t>
+              <a:t>II</a:t>
             </a:r>
           </a:p>
         </p:txBody>
@@ -7639,8 +7639,8 @@
         </p:nvSpPr>
         <p:spPr>
           <a:xfrm>
-            <a:off x="4699000" y="1638300"/>
-            <a:ext cx="6858000" cy="622300"/>
+            <a:off x="4953000" y="1651000"/>
+            <a:ext cx="6629400" cy="635000"/>
           </a:xfrm>
           <a:prstGeom prst="rect">
             <a:avLst/>
@@ -7674,7 +7674,7 @@
         </p:nvSpPr>
         <p:spPr>
           <a:xfrm>
-            <a:off x="4064000" y="2260600"/>
+            <a:off x="4064000" y="2286000"/>
             <a:ext cx="7518399" cy="6350"/>
           </a:xfrm>
           <a:prstGeom prst="rect">
@@ -7717,29 +7717,29 @@
         </p:nvSpPr>
         <p:spPr>
           <a:xfrm>
-            <a:off x="4064000" y="2298700"/>
-            <a:ext cx="508000" cy="647700"/>
-          </a:xfrm>
-          <a:prstGeom prst="rect">
-            <a:avLst/>
-          </a:prstGeom>
-          <a:noFill/>
-        </p:spPr>
-        <p:txBody>
-          <a:bodyPr wrap="square">
+            <a:off x="4064000" y="2336800"/>
+            <a:ext cx="762000" cy="647700"/>
+          </a:xfrm>
+          <a:prstGeom prst="rect">
+            <a:avLst/>
+          </a:prstGeom>
+          <a:noFill/>
+        </p:spPr>
+        <p:txBody>
+          <a:bodyPr wrap="none">
             <a:normAutofit/>
           </a:bodyPr>
           <a:lstStyle/>
           <a:p>
             <a:pPr algn="l"/>
             <a:r>
-              <a:rPr sz="2600" b="0" i="1">
+              <a:rPr sz="2400" b="0" i="1">
                 <a:solidFill>
                   <a:srgbClr val="1F2B56"/>
                 </a:solidFill>
                 <a:latin typeface="Georgia"/>
               </a:rPr>
-              <a:t>III.</a:t>
+              <a:t>III</a:t>
             </a:r>
           </a:p>
         </p:txBody>
@@ -7752,8 +7752,8 @@
         </p:nvSpPr>
         <p:spPr>
           <a:xfrm>
-            <a:off x="4699000" y="2324100"/>
-            <a:ext cx="6858000" cy="622300"/>
+            <a:off x="4953000" y="2349500"/>
+            <a:ext cx="6629400" cy="635000"/>
           </a:xfrm>
           <a:prstGeom prst="rect">
             <a:avLst/>
@@ -7787,7 +7787,7 @@
         </p:nvSpPr>
         <p:spPr>
           <a:xfrm>
-            <a:off x="4064000" y="2946400"/>
+            <a:off x="4064000" y="2984500"/>
             <a:ext cx="7518399" cy="6350"/>
           </a:xfrm>
           <a:prstGeom prst="rect">
@@ -7830,29 +7830,29 @@
         </p:nvSpPr>
         <p:spPr>
           <a:xfrm>
-            <a:off x="4064000" y="2984500"/>
-            <a:ext cx="508000" cy="647700"/>
-          </a:xfrm>
-          <a:prstGeom prst="rect">
-            <a:avLst/>
-          </a:prstGeom>
-          <a:noFill/>
-        </p:spPr>
-        <p:txBody>
-          <a:bodyPr wrap="square">
+            <a:off x="4064000" y="3035300"/>
+            <a:ext cx="762000" cy="647700"/>
+          </a:xfrm>
+          <a:prstGeom prst="rect">
+            <a:avLst/>
+          </a:prstGeom>
+          <a:noFill/>
+        </p:spPr>
+        <p:txBody>
+          <a:bodyPr wrap="none">
             <a:normAutofit/>
           </a:bodyPr>
           <a:lstStyle/>
           <a:p>
             <a:pPr algn="l"/>
             <a:r>
-              <a:rPr sz="2600" b="0" i="1">
+              <a:rPr sz="2400" b="0" i="1">
                 <a:solidFill>
                   <a:srgbClr val="1F2B56"/>
                 </a:solidFill>
                 <a:latin typeface="Georgia"/>
               </a:rPr>
-              <a:t>IV.</a:t>
+              <a:t>IV</a:t>
             </a:r>
           </a:p>
         </p:txBody>
@@ -7865,8 +7865,8 @@
         </p:nvSpPr>
         <p:spPr>
           <a:xfrm>
-            <a:off x="4699000" y="3009900"/>
-            <a:ext cx="6858000" cy="622300"/>
+            <a:off x="4953000" y="3048000"/>
+            <a:ext cx="6629400" cy="635000"/>
           </a:xfrm>
           <a:prstGeom prst="rect">
             <a:avLst/>
@@ -7900,7 +7900,7 @@
         </p:nvSpPr>
         <p:spPr>
           <a:xfrm>
-            <a:off x="4064000" y="3632200"/>
+            <a:off x="4064000" y="3683000"/>
             <a:ext cx="7518399" cy="6350"/>
           </a:xfrm>
           <a:prstGeom prst="rect">
@@ -7943,29 +7943,29 @@
         </p:nvSpPr>
         <p:spPr>
           <a:xfrm>
-            <a:off x="4064000" y="3670300"/>
-            <a:ext cx="508000" cy="647700"/>
-          </a:xfrm>
-          <a:prstGeom prst="rect">
-            <a:avLst/>
-          </a:prstGeom>
-          <a:noFill/>
-        </p:spPr>
-        <p:txBody>
-          <a:bodyPr wrap="square">
+            <a:off x="4064000" y="3733799"/>
+            <a:ext cx="762000" cy="647700"/>
+          </a:xfrm>
+          <a:prstGeom prst="rect">
+            <a:avLst/>
+          </a:prstGeom>
+          <a:noFill/>
+        </p:spPr>
+        <p:txBody>
+          <a:bodyPr wrap="none">
             <a:normAutofit/>
           </a:bodyPr>
           <a:lstStyle/>
           <a:p>
             <a:pPr algn="l"/>
             <a:r>
-              <a:rPr sz="2600" b="0" i="1">
+              <a:rPr sz="2400" b="0" i="1">
                 <a:solidFill>
                   <a:srgbClr val="1F2B56"/>
                 </a:solidFill>
                 <a:latin typeface="Georgia"/>
               </a:rPr>
-              <a:t>V.</a:t>
+              <a:t>V</a:t>
             </a:r>
           </a:p>
         </p:txBody>
@@ -7978,8 +7978,8 @@
         </p:nvSpPr>
         <p:spPr>
           <a:xfrm>
-            <a:off x="4699000" y="3695700"/>
-            <a:ext cx="6858000" cy="622300"/>
+            <a:off x="4953000" y="3746500"/>
+            <a:ext cx="6629400" cy="635000"/>
           </a:xfrm>
           <a:prstGeom prst="rect">
             <a:avLst/>
@@ -8497,7 +8497,7 @@
     <p:bg>
       <p:bgPr>
         <a:solidFill>
-          <a:srgbClr val="191D2E"/>
+          <a:srgbClr val="1F2B56"/>
         </a:solidFill>
         <a:effectLst/>
       </p:bgPr>
@@ -8698,7 +8698,7 @@
     <p:bg>
       <p:bgPr>
         <a:solidFill>
-          <a:srgbClr val="191D2E"/>
+          <a:srgbClr val="1F2B56"/>
         </a:solidFill>
         <a:effectLst/>
       </p:bgPr>
@@ -8899,7 +8899,7 @@
     <p:bg>
       <p:bgPr>
         <a:solidFill>
-          <a:srgbClr val="191D2E"/>
+          <a:srgbClr val="1F2B56"/>
         </a:solidFill>
         <a:effectLst/>
       </p:bgPr>
@@ -9100,7 +9100,7 @@
     <p:bg>
       <p:bgPr>
         <a:solidFill>
-          <a:srgbClr val="191D2E"/>
+          <a:srgbClr val="1F2B56"/>
         </a:solidFill>
         <a:effectLst/>
       </p:bgPr>
@@ -9651,7 +9651,7 @@
     <p:bg>
       <p:bgPr>
         <a:solidFill>
-          <a:srgbClr val="191D2E"/>
+          <a:srgbClr val="1F2B56"/>
         </a:solidFill>
         <a:effectLst/>
       </p:bgPr>
@@ -11228,7 +11228,7 @@
                   </a:txBody>
                   <a:tcPr>
                     <a:solidFill>
-                      <a:srgbClr val="191D2E"/>
+                      <a:srgbClr val="1F2B56"/>
                     </a:solidFill>
                   </a:tcPr>
                 </a:tc>
@@ -11250,7 +11250,7 @@
                   </a:txBody>
                   <a:tcPr>
                     <a:solidFill>
-                      <a:srgbClr val="191D2E"/>
+                      <a:srgbClr val="1F2B56"/>
                     </a:solidFill>
                   </a:tcPr>
                 </a:tc>
@@ -11272,7 +11272,7 @@
                   </a:txBody>
                   <a:tcPr>
                     <a:solidFill>
-                      <a:srgbClr val="191D2E"/>
+                      <a:srgbClr val="1F2B56"/>
                     </a:solidFill>
                   </a:tcPr>
                 </a:tc>
@@ -11567,7 +11567,7 @@
     <p:bg>
       <p:bgPr>
         <a:solidFill>
-          <a:srgbClr val="191D2E"/>
+          <a:srgbClr val="1F2B56"/>
         </a:solidFill>
         <a:effectLst/>
       </p:bgPr>
@@ -12620,7 +12620,7 @@
     <p:bg>
       <p:bgPr>
         <a:solidFill>
-          <a:srgbClr val="191D2E"/>
+          <a:srgbClr val="1F2B56"/>
         </a:solidFill>
         <a:effectLst/>
       </p:bgPr>

--- a/public/downloads/praesentation/M11.pptx
+++ b/public/downloads/praesentation/M11.pptx
@@ -15,9 +15,8 @@
     <p:sldId id="263" r:id="rId14"/>
     <p:sldId id="264" r:id="rId15"/>
     <p:sldId id="265" r:id="rId16"/>
-    <p:sldId id="266" r:id="rId17"/>
   </p:sldIdLst>
-  <p:sldSz cx="12191695" cy="6858000" type="screen4x3"/>
+  <p:sldSz cx="12188952" cy="6858000" type="screen4x3"/>
   <p:notesSz cx="6858000" cy="9144000"/>
   <p:defaultTextStyle>
     <a:defPPr>
@@ -3091,14 +3090,6 @@
 <file path=ppt/slides/slide1.xml><?xml version="1.0" encoding="utf-8"?>
 <p:sld xmlns:a="http://schemas.openxmlformats.org/drawingml/2006/main" xmlns:p="http://schemas.openxmlformats.org/presentationml/2006/main" xmlns:r="http://schemas.openxmlformats.org/officeDocument/2006/relationships">
   <p:cSld>
-    <p:bg>
-      <p:bgPr>
-        <a:solidFill>
-          <a:srgbClr val="F8F8FA"/>
-        </a:solidFill>
-        <a:effectLst/>
-      </p:bgPr>
-    </p:bg>
     <p:spTree>
       <p:nvGrpSpPr>
         <p:cNvPr id="1" name=""/>
@@ -3108,125 +3099,20 @@
       <p:grpSpPr/>
       <p:sp>
         <p:nvSpPr>
-          <p:cNvPr id="2" name="TextBox 1"/>
-          <p:cNvSpPr txBox="1"/>
-          <p:nvPr/>
-        </p:nvSpPr>
-        <p:spPr>
-          <a:xfrm>
-            <a:off x="609600" y="304800"/>
-            <a:ext cx="3175000" cy="279400"/>
-          </a:xfrm>
-          <a:prstGeom prst="rect">
-            <a:avLst/>
-          </a:prstGeom>
-          <a:noFill/>
-        </p:spPr>
-        <p:txBody>
-          <a:bodyPr wrap="square">
-            <a:normAutofit/>
-          </a:bodyPr>
-          <a:lstStyle/>
-          <a:p>
-            <a:pPr algn="l"/>
-            <a:r>
-              <a:rPr sz="1000" b="1" i="0">
-                <a:solidFill>
-                  <a:srgbClr val="191D2E"/>
-                </a:solidFill>
-                <a:latin typeface="Arial"/>
-              </a:rPr>
-              <a:t>FKB  Campus</a:t>
-            </a:r>
-          </a:p>
-        </p:txBody>
-      </p:sp>
-      <p:sp>
-        <p:nvSpPr>
-          <p:cNvPr id="3" name="TextBox 2"/>
-          <p:cNvSpPr txBox="1"/>
-          <p:nvPr/>
-        </p:nvSpPr>
-        <p:spPr>
-          <a:xfrm>
-            <a:off x="609600" y="304800"/>
-            <a:ext cx="10972800" cy="279400"/>
-          </a:xfrm>
-          <a:prstGeom prst="rect">
-            <a:avLst/>
-          </a:prstGeom>
-          <a:noFill/>
-        </p:spPr>
-        <p:txBody>
-          <a:bodyPr wrap="square">
-            <a:normAutofit/>
-          </a:bodyPr>
-          <a:lstStyle/>
-          <a:p>
-            <a:pPr algn="r"/>
-            <a:r>
-              <a:rPr sz="900" b="0" i="0">
-                <a:solidFill>
-                  <a:srgbClr val="7B7FA0"/>
-                </a:solidFill>
-                <a:latin typeface="Courier New"/>
-              </a:rPr>
-              <a:t>M11  ·  v0.2</a:t>
-            </a:r>
-          </a:p>
-        </p:txBody>
-      </p:sp>
-      <p:sp>
-        <p:nvSpPr>
-          <p:cNvPr id="4" name="TextBox 3"/>
-          <p:cNvSpPr txBox="1"/>
-          <p:nvPr/>
-        </p:nvSpPr>
-        <p:spPr>
-          <a:xfrm>
-            <a:off x="609600" y="2794000"/>
-            <a:ext cx="10972800" cy="2032000"/>
-          </a:xfrm>
-          <a:prstGeom prst="rect">
-            <a:avLst/>
-          </a:prstGeom>
-          <a:noFill/>
-        </p:spPr>
-        <p:txBody>
-          <a:bodyPr wrap="square">
-            <a:normAutofit/>
-          </a:bodyPr>
-          <a:lstStyle/>
-          <a:p>
-            <a:pPr algn="l"/>
-            <a:r>
-              <a:rPr sz="6000" b="0" i="0">
-                <a:solidFill>
-                  <a:srgbClr val="191D2E"/>
-                </a:solidFill>
-                <a:latin typeface="Georgia"/>
-              </a:rPr>
-              <a:t>Latente Bedarfe erkennen</a:t>
-            </a:r>
-          </a:p>
-        </p:txBody>
-      </p:sp>
-      <p:sp>
-        <p:nvSpPr>
-          <p:cNvPr id="5" name="Rectangle 4"/>
+          <p:cNvPr id="2" name="Rectangle 1"/>
           <p:cNvSpPr/>
           <p:nvPr/>
         </p:nvSpPr>
         <p:spPr>
           <a:xfrm>
-            <a:off x="609600" y="4889500"/>
-            <a:ext cx="10972800" cy="6350"/>
+            <a:off x="0" y="0"/>
+            <a:ext cx="12188952" cy="6858000"/>
           </a:xfrm>
           <a:prstGeom prst="rect">
             <a:avLst/>
           </a:prstGeom>
           <a:solidFill>
-            <a:srgbClr val="191D2E"/>
+            <a:srgbClr val="1F2C56"/>
           </a:solidFill>
           <a:ln>
             <a:noFill/>
@@ -3256,14 +3142,57 @@
       </p:sp>
       <p:sp>
         <p:nvSpPr>
-          <p:cNvPr id="6" name="TextBox 5"/>
+          <p:cNvPr id="3" name="Rectangle 2"/>
+          <p:cNvSpPr/>
+          <p:nvPr/>
+        </p:nvSpPr>
+        <p:spPr>
+          <a:xfrm>
+            <a:off x="0" y="0"/>
+            <a:ext cx="12188952" cy="54864"/>
+          </a:xfrm>
+          <a:prstGeom prst="rect">
+            <a:avLst/>
+          </a:prstGeom>
+          <a:solidFill>
+            <a:srgbClr val="D9C089"/>
+          </a:solidFill>
+          <a:ln>
+            <a:noFill/>
+          </a:ln>
+        </p:spPr>
+        <p:style>
+          <a:lnRef idx="1">
+            <a:schemeClr val="accent1"/>
+          </a:lnRef>
+          <a:fillRef idx="3">
+            <a:schemeClr val="accent1"/>
+          </a:fillRef>
+          <a:effectRef idx="2">
+            <a:schemeClr val="accent1"/>
+          </a:effectRef>
+          <a:fontRef idx="minor">
+            <a:schemeClr val="lt1"/>
+          </a:fontRef>
+        </p:style>
+        <p:txBody>
+          <a:bodyPr rtlCol="0" anchor="ctr"/>
+          <a:lstStyle/>
+          <a:p>
+            <a:pPr algn="ctr"/>
+          </a:p>
+        </p:txBody>
+      </p:sp>
+      <p:sp>
+        <p:nvSpPr>
+          <p:cNvPr id="4" name="TextBox 3"/>
           <p:cNvSpPr txBox="1"/>
           <p:nvPr/>
         </p:nvSpPr>
         <p:spPr>
           <a:xfrm>
-            <a:off x="609600" y="5016500"/>
-            <a:ext cx="5207000" cy="1143000"/>
+            <a:off x="685800" y="201168"/>
+            <a:ext cx="10817352" cy="256032"/>
           </a:xfrm>
           <a:prstGeom prst="rect">
             <a:avLst/>
@@ -3271,21 +3200,99 @@
           <a:noFill/>
         </p:spPr>
         <p:txBody>
+          <a:bodyPr wrap="none">
+            <a:spAutoFit/>
+          </a:bodyPr>
+          <a:lstStyle/>
+          <a:p>
+            <a:pPr algn="l"/>
+            <a:r>
+              <a:rPr sz="800">
+                <a:solidFill>
+                  <a:srgbClr val="C8D2E6"/>
+                </a:solidFill>
+                <a:latin typeface="JetBrains Mono"/>
+              </a:rPr>
+              <a:t>FKB CAMPUS  ·  FIRMENKUNDENAKADEMIE  ·  M11</a:t>
+            </a:r>
+          </a:p>
+        </p:txBody>
+      </p:sp>
+      <p:sp>
+        <p:nvSpPr>
+          <p:cNvPr id="5" name="TextBox 4"/>
+          <p:cNvSpPr txBox="1"/>
+          <p:nvPr/>
+        </p:nvSpPr>
+        <p:spPr>
+          <a:xfrm>
+            <a:off x="685800" y="1828800"/>
+            <a:ext cx="10817352" cy="2011680"/>
+          </a:xfrm>
+          <a:prstGeom prst="rect">
+            <a:avLst/>
+          </a:prstGeom>
+          <a:noFill/>
+        </p:spPr>
+        <p:txBody>
           <a:bodyPr wrap="square">
-            <a:normAutofit/>
+            <a:spAutoFit/>
           </a:bodyPr>
           <a:lstStyle/>
           <a:p>
             <a:pPr algn="l"/>
             <a:r>
-              <a:rPr sz="1400" b="0" i="1">
-                <a:solidFill>
-                  <a:srgbClr val="4D5270"/>
-                </a:solidFill>
-                <a:latin typeface="Georgia"/>
-              </a:rPr>
-              <a:t>Implizite Kundenbedürfnisse durch SPIN-Fragetechnik und aktives Zuhören aufdecken</a:t>
-            </a:r>
+              <a:rPr sz="4600" b="1" i="0">
+                <a:solidFill>
+                  <a:srgbClr val="FFFFFF"/>
+                </a:solidFill>
+                <a:latin typeface="Source Serif 4"/>
+              </a:rPr>
+              <a:t>Latente Bedarfe erkennen</a:t>
+            </a:r>
+          </a:p>
+        </p:txBody>
+      </p:sp>
+      <p:sp>
+        <p:nvSpPr>
+          <p:cNvPr id="6" name="Rectangle 5"/>
+          <p:cNvSpPr/>
+          <p:nvPr/>
+        </p:nvSpPr>
+        <p:spPr>
+          <a:xfrm>
+            <a:off x="685800" y="5029200"/>
+            <a:ext cx="10817352" cy="12700"/>
+          </a:xfrm>
+          <a:prstGeom prst="rect">
+            <a:avLst/>
+          </a:prstGeom>
+          <a:solidFill>
+            <a:srgbClr val="FFFFFF"/>
+          </a:solidFill>
+          <a:ln>
+            <a:noFill/>
+          </a:ln>
+        </p:spPr>
+        <p:style>
+          <a:lnRef idx="1">
+            <a:schemeClr val="accent1"/>
+          </a:lnRef>
+          <a:fillRef idx="3">
+            <a:schemeClr val="accent1"/>
+          </a:fillRef>
+          <a:effectRef idx="2">
+            <a:schemeClr val="accent1"/>
+          </a:effectRef>
+          <a:fontRef idx="minor">
+            <a:schemeClr val="lt1"/>
+          </a:fontRef>
+        </p:style>
+        <p:txBody>
+          <a:bodyPr rtlCol="0" anchor="ctr"/>
+          <a:lstStyle/>
+          <a:p>
+            <a:pPr algn="ctr"/>
           </a:p>
         </p:txBody>
       </p:sp>
@@ -3297,8 +3304,8 @@
         </p:nvSpPr>
         <p:spPr>
           <a:xfrm>
-            <a:off x="6032500" y="5016500"/>
-            <a:ext cx="2540000" cy="177800"/>
+            <a:off x="685800" y="5193792"/>
+            <a:ext cx="5408676" cy="201168"/>
           </a:xfrm>
           <a:prstGeom prst="rect">
             <a:avLst/>
@@ -3306,20 +3313,20 @@
           <a:noFill/>
         </p:spPr>
         <p:txBody>
-          <a:bodyPr wrap="square">
-            <a:normAutofit/>
+          <a:bodyPr wrap="none">
+            <a:spAutoFit/>
           </a:bodyPr>
           <a:lstStyle/>
           <a:p>
             <a:pPr algn="l"/>
             <a:r>
-              <a:rPr sz="900" b="0" i="0">
-                <a:solidFill>
-                  <a:srgbClr val="7B7FA0"/>
-                </a:solidFill>
-                <a:latin typeface="Courier New"/>
-              </a:rPr>
-              <a:t>ZIELSTUFE</a:t>
+              <a:rPr sz="700">
+                <a:solidFill>
+                  <a:srgbClr val="A0B4D2"/>
+                </a:solidFill>
+                <a:latin typeface="JetBrains Mono"/>
+              </a:rPr>
+              <a:t>KOMPETENZSTUFE</a:t>
             </a:r>
           </a:p>
         </p:txBody>
@@ -3332,8 +3339,8 @@
         </p:nvSpPr>
         <p:spPr>
           <a:xfrm>
-            <a:off x="6032500" y="5207000"/>
-            <a:ext cx="2540000" cy="508000"/>
+            <a:off x="685800" y="5394960"/>
+            <a:ext cx="5408676" cy="320040"/>
           </a:xfrm>
           <a:prstGeom prst="rect">
             <a:avLst/>
@@ -3342,17 +3349,17 @@
         </p:spPr>
         <p:txBody>
           <a:bodyPr wrap="square">
-            <a:normAutofit/>
+            <a:spAutoFit/>
           </a:bodyPr>
           <a:lstStyle/>
           <a:p>
             <a:pPr algn="l"/>
             <a:r>
-              <a:rPr sz="1400" b="0" i="0">
-                <a:solidFill>
-                  <a:srgbClr val="191D2E"/>
-                </a:solidFill>
-                <a:latin typeface="Georgia"/>
+              <a:rPr sz="1100" b="0" i="0">
+                <a:solidFill>
+                  <a:srgbClr val="FFFFFF"/>
+                </a:solidFill>
+                <a:latin typeface="Arial"/>
               </a:rPr>
               <a:t>Sparring</a:t>
             </a:r>
@@ -3367,8 +3374,8 @@
         </p:nvSpPr>
         <p:spPr>
           <a:xfrm>
-            <a:off x="8890000" y="5016500"/>
-            <a:ext cx="2667000" cy="177800"/>
+            <a:off x="6094476" y="5193792"/>
+            <a:ext cx="5408676" cy="201168"/>
           </a:xfrm>
           <a:prstGeom prst="rect">
             <a:avLst/>
@@ -3376,20 +3383,20 @@
           <a:noFill/>
         </p:spPr>
         <p:txBody>
-          <a:bodyPr wrap="square">
-            <a:normAutofit/>
+          <a:bodyPr wrap="none">
+            <a:spAutoFit/>
           </a:bodyPr>
           <a:lstStyle/>
           <a:p>
             <a:pPr algn="l"/>
             <a:r>
-              <a:rPr sz="900" b="0" i="0">
-                <a:solidFill>
-                  <a:srgbClr val="7B7FA0"/>
-                </a:solidFill>
-                <a:latin typeface="Courier New"/>
-              </a:rPr>
-              <a:t>DAUER</a:t>
+              <a:rPr sz="700">
+                <a:solidFill>
+                  <a:srgbClr val="A0B4D2"/>
+                </a:solidFill>
+                <a:latin typeface="JetBrains Mono"/>
+              </a:rPr>
+              <a:t>VERSION</a:t>
             </a:r>
           </a:p>
         </p:txBody>
@@ -3402,8 +3409,8 @@
         </p:nvSpPr>
         <p:spPr>
           <a:xfrm>
-            <a:off x="8890000" y="5207000"/>
-            <a:ext cx="2667000" cy="508000"/>
+            <a:off x="6094476" y="5394960"/>
+            <a:ext cx="5408676" cy="320040"/>
           </a:xfrm>
           <a:prstGeom prst="rect">
             <a:avLst/>
@@ -3412,19 +3419,132 @@
         </p:spPr>
         <p:txBody>
           <a:bodyPr wrap="square">
-            <a:normAutofit/>
+            <a:spAutoFit/>
           </a:bodyPr>
           <a:lstStyle/>
           <a:p>
             <a:pPr algn="l"/>
             <a:r>
-              <a:rPr sz="1400" b="0" i="0">
-                <a:solidFill>
-                  <a:srgbClr val="191D2E"/>
-                </a:solidFill>
-                <a:latin typeface="Georgia"/>
-              </a:rPr>
-              <a:t>90 Min.</a:t>
+              <a:rPr sz="1100" b="0" i="0">
+                <a:solidFill>
+                  <a:srgbClr val="FFFFFF"/>
+                </a:solidFill>
+                <a:latin typeface="Arial"/>
+              </a:rPr>
+              <a:t>v0.2</a:t>
+            </a:r>
+          </a:p>
+        </p:txBody>
+      </p:sp>
+      <p:sp>
+        <p:nvSpPr>
+          <p:cNvPr id="11" name="Rectangle 10"/>
+          <p:cNvSpPr/>
+          <p:nvPr/>
+        </p:nvSpPr>
+        <p:spPr>
+          <a:xfrm>
+            <a:off x="0" y="6510528"/>
+            <a:ext cx="12188952" cy="347472"/>
+          </a:xfrm>
+          <a:prstGeom prst="rect">
+            <a:avLst/>
+          </a:prstGeom>
+          <a:solidFill>
+            <a:srgbClr val="0A1937"/>
+          </a:solidFill>
+          <a:ln>
+            <a:noFill/>
+          </a:ln>
+        </p:spPr>
+        <p:style>
+          <a:lnRef idx="1">
+            <a:schemeClr val="accent1"/>
+          </a:lnRef>
+          <a:fillRef idx="3">
+            <a:schemeClr val="accent1"/>
+          </a:fillRef>
+          <a:effectRef idx="2">
+            <a:schemeClr val="accent1"/>
+          </a:effectRef>
+          <a:fontRef idx="minor">
+            <a:schemeClr val="lt1"/>
+          </a:fontRef>
+        </p:style>
+        <p:txBody>
+          <a:bodyPr rtlCol="0" anchor="ctr"/>
+          <a:lstStyle/>
+          <a:p>
+            <a:pPr algn="ctr"/>
+          </a:p>
+        </p:txBody>
+      </p:sp>
+      <p:sp>
+        <p:nvSpPr>
+          <p:cNvPr id="12" name="TextBox 11"/>
+          <p:cNvSpPr txBox="1"/>
+          <p:nvPr/>
+        </p:nvSpPr>
+        <p:spPr>
+          <a:xfrm>
+            <a:off x="685800" y="6583680"/>
+            <a:ext cx="5408676" cy="256032"/>
+          </a:xfrm>
+          <a:prstGeom prst="rect">
+            <a:avLst/>
+          </a:prstGeom>
+          <a:noFill/>
+        </p:spPr>
+        <p:txBody>
+          <a:bodyPr wrap="none">
+            <a:spAutoFit/>
+          </a:bodyPr>
+          <a:lstStyle/>
+          <a:p>
+            <a:pPr algn="l"/>
+            <a:r>
+              <a:rPr sz="700">
+                <a:solidFill>
+                  <a:srgbClr val="96A5BE"/>
+                </a:solidFill>
+                <a:latin typeface="JetBrains Mono"/>
+              </a:rPr>
+              <a:t>Benedikt Zoller Coaching  ·  FKB Campus  ·  2026</a:t>
+            </a:r>
+          </a:p>
+        </p:txBody>
+      </p:sp>
+      <p:sp>
+        <p:nvSpPr>
+          <p:cNvPr id="13" name="TextBox 12"/>
+          <p:cNvSpPr txBox="1"/>
+          <p:nvPr/>
+        </p:nvSpPr>
+        <p:spPr>
+          <a:xfrm>
+            <a:off x="6094476" y="6583680"/>
+            <a:ext cx="5408676" cy="256032"/>
+          </a:xfrm>
+          <a:prstGeom prst="rect">
+            <a:avLst/>
+          </a:prstGeom>
+          <a:noFill/>
+        </p:spPr>
+        <p:txBody>
+          <a:bodyPr wrap="none">
+            <a:spAutoFit/>
+          </a:bodyPr>
+          <a:lstStyle/>
+          <a:p>
+            <a:pPr algn="r"/>
+            <a:r>
+              <a:rPr sz="700">
+                <a:solidFill>
+                  <a:srgbClr val="96A5BE"/>
+                </a:solidFill>
+                <a:latin typeface="JetBrains Mono"/>
+              </a:rPr>
+              <a:t>Trainer-Präsentation</a:t>
             </a:r>
           </a:p>
         </p:txBody>
@@ -3440,14 +3560,6 @@
 <file path=ppt/slides/slide10.xml><?xml version="1.0" encoding="utf-8"?>
 <p:sld xmlns:a="http://schemas.openxmlformats.org/drawingml/2006/main" xmlns:p="http://schemas.openxmlformats.org/presentationml/2006/main" xmlns:r="http://schemas.openxmlformats.org/officeDocument/2006/relationships">
   <p:cSld>
-    <p:bg>
-      <p:bgPr>
-        <a:solidFill>
-          <a:srgbClr val="F8F8FA"/>
-        </a:solidFill>
-        <a:effectLst/>
-      </p:bgPr>
-    </p:bg>
     <p:spTree>
       <p:nvGrpSpPr>
         <p:cNvPr id="1" name=""/>
@@ -3457,125 +3569,20 @@
       <p:grpSpPr/>
       <p:sp>
         <p:nvSpPr>
-          <p:cNvPr id="2" name="TextBox 1"/>
-          <p:cNvSpPr txBox="1"/>
-          <p:nvPr/>
-        </p:nvSpPr>
-        <p:spPr>
-          <a:xfrm>
-            <a:off x="609600" y="279400"/>
-            <a:ext cx="2540000" cy="279400"/>
-          </a:xfrm>
-          <a:prstGeom prst="rect">
-            <a:avLst/>
-          </a:prstGeom>
-          <a:noFill/>
-        </p:spPr>
-        <p:txBody>
-          <a:bodyPr wrap="square">
-            <a:normAutofit/>
-          </a:bodyPr>
-          <a:lstStyle/>
-          <a:p>
-            <a:pPr algn="l"/>
-            <a:r>
-              <a:rPr sz="1000" b="1" i="0">
-                <a:solidFill>
-                  <a:srgbClr val="191D2E"/>
-                </a:solidFill>
-                <a:latin typeface="Arial"/>
-              </a:rPr>
-              <a:t>FKB  Campus</a:t>
-            </a:r>
-          </a:p>
-        </p:txBody>
-      </p:sp>
-      <p:sp>
-        <p:nvSpPr>
-          <p:cNvPr id="3" name="TextBox 2"/>
-          <p:cNvSpPr txBox="1"/>
-          <p:nvPr/>
-        </p:nvSpPr>
-        <p:spPr>
-          <a:xfrm>
-            <a:off x="609600" y="279400"/>
-            <a:ext cx="10972800" cy="279400"/>
-          </a:xfrm>
-          <a:prstGeom prst="rect">
-            <a:avLst/>
-          </a:prstGeom>
-          <a:noFill/>
-        </p:spPr>
-        <p:txBody>
-          <a:bodyPr wrap="square">
-            <a:normAutofit/>
-          </a:bodyPr>
-          <a:lstStyle/>
-          <a:p>
-            <a:pPr algn="r"/>
-            <a:r>
-              <a:rPr sz="900" b="0" i="0">
-                <a:solidFill>
-                  <a:srgbClr val="7B7FA0"/>
-                </a:solidFill>
-                <a:latin typeface="Courier New"/>
-              </a:rPr>
-              <a:t>III · TYPISCHE LATENTE BEDARFSFELDER</a:t>
-            </a:r>
-          </a:p>
-        </p:txBody>
-      </p:sp>
-      <p:sp>
-        <p:nvSpPr>
-          <p:cNvPr id="4" name="TextBox 3"/>
-          <p:cNvSpPr txBox="1"/>
-          <p:nvPr/>
-        </p:nvSpPr>
-        <p:spPr>
-          <a:xfrm>
-            <a:off x="609600" y="6426200"/>
-            <a:ext cx="10972800" cy="228600"/>
-          </a:xfrm>
-          <a:prstGeom prst="rect">
-            <a:avLst/>
-          </a:prstGeom>
-          <a:noFill/>
-        </p:spPr>
-        <p:txBody>
-          <a:bodyPr wrap="square">
-            <a:normAutofit/>
-          </a:bodyPr>
-          <a:lstStyle/>
-          <a:p>
-            <a:pPr algn="r"/>
-            <a:r>
-              <a:rPr sz="900" b="0" i="0">
-                <a:solidFill>
-                  <a:srgbClr val="7B7FA0"/>
-                </a:solidFill>
-                <a:latin typeface="Courier New"/>
-              </a:rPr>
-              <a:t>10</a:t>
-            </a:r>
-          </a:p>
-        </p:txBody>
-      </p:sp>
-      <p:sp>
-        <p:nvSpPr>
-          <p:cNvPr id="5" name="Rectangle 4"/>
+          <p:cNvPr id="2" name="Rectangle 1"/>
           <p:cNvSpPr/>
           <p:nvPr/>
         </p:nvSpPr>
         <p:spPr>
           <a:xfrm>
-            <a:off x="609600" y="825500"/>
-            <a:ext cx="10972800" cy="6350"/>
+            <a:off x="0" y="0"/>
+            <a:ext cx="12188952" cy="6858000"/>
           </a:xfrm>
           <a:prstGeom prst="rect">
             <a:avLst/>
           </a:prstGeom>
           <a:solidFill>
-            <a:srgbClr val="191D2E"/>
+            <a:srgbClr val="EDEDF3"/>
           </a:solidFill>
           <a:ln>
             <a:noFill/>
@@ -3605,55 +3612,20 @@
       </p:sp>
       <p:sp>
         <p:nvSpPr>
-          <p:cNvPr id="6" name="TextBox 5"/>
-          <p:cNvSpPr txBox="1"/>
-          <p:nvPr/>
-        </p:nvSpPr>
-        <p:spPr>
-          <a:xfrm>
-            <a:off x="609600" y="920750"/>
-            <a:ext cx="10972800" cy="1778000"/>
-          </a:xfrm>
-          <a:prstGeom prst="rect">
-            <a:avLst/>
-          </a:prstGeom>
-          <a:noFill/>
-        </p:spPr>
-        <p:txBody>
-          <a:bodyPr wrap="square">
-            <a:normAutofit/>
-          </a:bodyPr>
-          <a:lstStyle/>
-          <a:p>
-            <a:pPr algn="l"/>
-            <a:r>
-              <a:rPr sz="3800" b="0" i="0">
-                <a:solidFill>
-                  <a:srgbClr val="191D2E"/>
-                </a:solidFill>
-                <a:latin typeface="Georgia"/>
-              </a:rPr>
-              <a:t>Qualität des Frageverhaltens messen</a:t>
-            </a:r>
-          </a:p>
-        </p:txBody>
-      </p:sp>
-      <p:sp>
-        <p:nvSpPr>
-          <p:cNvPr id="7" name="Rectangle 6"/>
+          <p:cNvPr id="3" name="Rectangle 2"/>
           <p:cNvSpPr/>
           <p:nvPr/>
         </p:nvSpPr>
         <p:spPr>
           <a:xfrm>
-            <a:off x="609600" y="2762250"/>
-            <a:ext cx="10972800" cy="6350"/>
+            <a:off x="0" y="0"/>
+            <a:ext cx="12188952" cy="50292"/>
           </a:xfrm>
           <a:prstGeom prst="rect">
             <a:avLst/>
           </a:prstGeom>
           <a:solidFill>
-            <a:srgbClr val="E0E0E8"/>
+            <a:srgbClr val="1F2C56"/>
           </a:solidFill>
           <a:ln>
             <a:noFill/>
@@ -3683,209 +3655,14 @@
       </p:sp>
       <p:sp>
         <p:nvSpPr>
-          <p:cNvPr id="8" name="TextBox 7"/>
-          <p:cNvSpPr txBox="1"/>
-          <p:nvPr/>
-        </p:nvSpPr>
-        <p:spPr>
-          <a:xfrm>
-            <a:off x="609600" y="2851150"/>
-            <a:ext cx="10972800" cy="3448050"/>
-          </a:xfrm>
-          <a:prstGeom prst="rect">
-            <a:avLst/>
-          </a:prstGeom>
-          <a:noFill/>
-        </p:spPr>
-        <p:txBody>
-          <a:bodyPr wrap="square">
-            <a:normAutofit/>
-          </a:bodyPr>
-          <a:lstStyle/>
-          <a:p>
-            <a:pPr>
-              <a:spcBef>
-                <a:spcPts val="600"/>
-              </a:spcBef>
-              <a:spcAft>
-                <a:spcPts val="600"/>
-              </a:spcAft>
-            </a:pPr>
-            <a:r>
-              <a:rPr sz="1400">
-                <a:solidFill>
-                  <a:srgbClr val="191D2E"/>
-                </a:solidFill>
-                <a:latin typeface="Georgia"/>
-              </a:rPr>
-              <a:t>–  Verhältnis offene zu geschlossene Fragen (Ziel: 70/30)</a:t>
-            </a:r>
-          </a:p>
-          <a:p>
-            <a:pPr>
-              <a:spcBef>
-                <a:spcPts val="600"/>
-              </a:spcBef>
-              <a:spcAft>
-                <a:spcPts val="600"/>
-              </a:spcAft>
-            </a:pPr>
-            <a:r>
-              <a:rPr sz="1400">
-                <a:solidFill>
-                  <a:srgbClr val="191D2E"/>
-                </a:solidFill>
-                <a:latin typeface="Georgia"/>
-              </a:rPr>
-              <a:t>–  Wie viel redet der Berater vs. der Kunde? (Ziel: 30/70)</a:t>
-            </a:r>
-          </a:p>
-          <a:p>
-            <a:pPr>
-              <a:spcBef>
-                <a:spcPts val="600"/>
-              </a:spcBef>
-              <a:spcAft>
-                <a:spcPts val="600"/>
-              </a:spcAft>
-            </a:pPr>
-            <a:r>
-              <a:rPr sz="1400">
-                <a:solidFill>
-                  <a:srgbClr val="191D2E"/>
-                </a:solidFill>
-                <a:latin typeface="Georgia"/>
-              </a:rPr>
-              <a:t>–  Wurden Implication-Fragen gestellt?</a:t>
-            </a:r>
-          </a:p>
-          <a:p>
-            <a:pPr>
-              <a:spcBef>
-                <a:spcPts val="600"/>
-              </a:spcBef>
-              <a:spcAft>
-                <a:spcPts val="600"/>
-              </a:spcAft>
-            </a:pPr>
-            <a:r>
-              <a:rPr sz="1400">
-                <a:solidFill>
-                  <a:srgbClr val="191D2E"/>
-                </a:solidFill>
-                <a:latin typeface="Georgia"/>
-              </a:rPr>
-              <a:t>–  Selbstreflexion nach jedem Gespräch: Was hätte ich früher fragen können?</a:t>
-            </a:r>
-          </a:p>
-        </p:txBody>
-      </p:sp>
-    </p:spTree>
-  </p:cSld>
-  <p:clrMapOvr>
-    <a:masterClrMapping/>
-  </p:clrMapOvr>
-</p:sld>
-</file>
-
-<file path=ppt/slides/slide11.xml><?xml version="1.0" encoding="utf-8"?>
-<p:sld xmlns:a="http://schemas.openxmlformats.org/drawingml/2006/main" xmlns:p="http://schemas.openxmlformats.org/presentationml/2006/main" xmlns:r="http://schemas.openxmlformats.org/officeDocument/2006/relationships">
-  <p:cSld>
-    <p:bg>
-      <p:bgPr>
-        <a:solidFill>
-          <a:srgbClr val="F8F8FA"/>
-        </a:solidFill>
-        <a:effectLst/>
-      </p:bgPr>
-    </p:bg>
-    <p:spTree>
-      <p:nvGrpSpPr>
-        <p:cNvPr id="1" name=""/>
-        <p:cNvGrpSpPr/>
-        <p:nvPr/>
-      </p:nvGrpSpPr>
-      <p:grpSpPr/>
-      <p:sp>
-        <p:nvSpPr>
-          <p:cNvPr id="2" name="TextBox 1"/>
-          <p:cNvSpPr txBox="1"/>
-          <p:nvPr/>
-        </p:nvSpPr>
-        <p:spPr>
-          <a:xfrm>
-            <a:off x="609600" y="457200"/>
-            <a:ext cx="3175000" cy="279400"/>
-          </a:xfrm>
-          <a:prstGeom prst="rect">
-            <a:avLst/>
-          </a:prstGeom>
-          <a:noFill/>
-        </p:spPr>
-        <p:txBody>
-          <a:bodyPr wrap="square">
-            <a:normAutofit/>
-          </a:bodyPr>
-          <a:lstStyle/>
-          <a:p>
-            <a:pPr algn="l"/>
-            <a:r>
-              <a:rPr sz="1000" b="1" i="0">
-                <a:solidFill>
-                  <a:srgbClr val="191D2E"/>
-                </a:solidFill>
-                <a:latin typeface="Arial"/>
-              </a:rPr>
-              <a:t>FKB  Campus</a:t>
-            </a:r>
-          </a:p>
-        </p:txBody>
-      </p:sp>
-      <p:sp>
-        <p:nvSpPr>
-          <p:cNvPr id="3" name="TextBox 2"/>
-          <p:cNvSpPr txBox="1"/>
-          <p:nvPr/>
-        </p:nvSpPr>
-        <p:spPr>
-          <a:xfrm>
-            <a:off x="609600" y="457200"/>
-            <a:ext cx="10972800" cy="279400"/>
-          </a:xfrm>
-          <a:prstGeom prst="rect">
-            <a:avLst/>
-          </a:prstGeom>
-          <a:noFill/>
-        </p:spPr>
-        <p:txBody>
-          <a:bodyPr wrap="square">
-            <a:normAutofit/>
-          </a:bodyPr>
-          <a:lstStyle/>
-          <a:p>
-            <a:pPr algn="r"/>
-            <a:r>
-              <a:rPr sz="900" b="0" i="0">
-                <a:solidFill>
-                  <a:srgbClr val="7B7FA0"/>
-                </a:solidFill>
-                <a:latin typeface="Courier New"/>
-              </a:rPr>
-              <a:t>Ende · v0.2</a:t>
-            </a:r>
-          </a:p>
-        </p:txBody>
-      </p:sp>
-      <p:sp>
-        <p:nvSpPr>
           <p:cNvPr id="4" name="TextBox 3"/>
           <p:cNvSpPr txBox="1"/>
           <p:nvPr/>
         </p:nvSpPr>
         <p:spPr>
           <a:xfrm>
-            <a:off x="609600" y="1143000"/>
-            <a:ext cx="10972800" cy="3556000"/>
+            <a:off x="685800" y="109728"/>
+            <a:ext cx="10817352" cy="228600"/>
           </a:xfrm>
           <a:prstGeom prst="rect">
             <a:avLst/>
@@ -3893,21 +3670,20 @@
           <a:noFill/>
         </p:spPr>
         <p:txBody>
-          <a:bodyPr wrap="square">
-            <a:normAutofit/>
+          <a:bodyPr wrap="none">
+            <a:spAutoFit/>
           </a:bodyPr>
           <a:lstStyle/>
           <a:p>
             <a:pPr algn="l"/>
             <a:r>
-              <a:rPr sz="9600" b="0" i="0">
-                <a:solidFill>
-                  <a:srgbClr val="191D2E"/>
-                </a:solidFill>
-                <a:latin typeface="Georgia"/>
-              </a:rPr>
-              <a:t>Danke.
-Fragen?</a:t>
+              <a:rPr sz="750">
+                <a:solidFill>
+                  <a:srgbClr val="78808C"/>
+                </a:solidFill>
+                <a:latin typeface="JetBrains Mono"/>
+              </a:rPr>
+              <a:t>M11  ·  INHALT</a:t>
             </a:r>
           </a:p>
         </p:txBody>
@@ -3920,14 +3696,14 @@
         </p:nvSpPr>
         <p:spPr>
           <a:xfrm>
-            <a:off x="609600" y="4826000"/>
-            <a:ext cx="10972800" cy="6350"/>
+            <a:off x="0" y="1234440"/>
+            <a:ext cx="12188952" cy="12700"/>
           </a:xfrm>
           <a:prstGeom prst="rect">
             <a:avLst/>
           </a:prstGeom>
           <a:solidFill>
-            <a:srgbClr val="191D2E"/>
+            <a:srgbClr val="D8DFE4"/>
           </a:solidFill>
           <a:ln>
             <a:noFill/>
@@ -3957,36 +3733,44 @@
       </p:sp>
       <p:sp>
         <p:nvSpPr>
-          <p:cNvPr id="6" name="TextBox 5"/>
-          <p:cNvSpPr txBox="1"/>
-          <p:nvPr/>
-        </p:nvSpPr>
-        <p:spPr>
-          <a:xfrm>
-            <a:off x="609600" y="4953000"/>
-            <a:ext cx="5715000" cy="1143000"/>
-          </a:xfrm>
-          <a:prstGeom prst="rect">
-            <a:avLst/>
-          </a:prstGeom>
-          <a:noFill/>
-        </p:spPr>
-        <p:txBody>
-          <a:bodyPr wrap="square">
-            <a:normAutofit/>
-          </a:bodyPr>
-          <a:lstStyle/>
-          <a:p>
-            <a:pPr algn="l"/>
-            <a:r>
-              <a:rPr sz="1400" b="0" i="1">
-                <a:solidFill>
-                  <a:srgbClr val="191D2E"/>
-                </a:solidFill>
-                <a:latin typeface="Georgia"/>
-              </a:rPr>
-              <a:t>Modul «Latente Bedarfe erkennen» auf FKB Campus — 5 Lernziele, Praxisfall und Quellenapparat.</a:t>
-            </a:r>
+          <p:cNvPr id="6" name="Rectangle 5"/>
+          <p:cNvSpPr/>
+          <p:nvPr/>
+        </p:nvSpPr>
+        <p:spPr>
+          <a:xfrm>
+            <a:off x="685800" y="502920"/>
+            <a:ext cx="36576" cy="658368"/>
+          </a:xfrm>
+          <a:prstGeom prst="rect">
+            <a:avLst/>
+          </a:prstGeom>
+          <a:solidFill>
+            <a:srgbClr val="D9C089"/>
+          </a:solidFill>
+          <a:ln>
+            <a:noFill/>
+          </a:ln>
+        </p:spPr>
+        <p:style>
+          <a:lnRef idx="1">
+            <a:schemeClr val="accent1"/>
+          </a:lnRef>
+          <a:fillRef idx="3">
+            <a:schemeClr val="accent1"/>
+          </a:fillRef>
+          <a:effectRef idx="2">
+            <a:schemeClr val="accent1"/>
+          </a:effectRef>
+          <a:fontRef idx="minor">
+            <a:schemeClr val="lt1"/>
+          </a:fontRef>
+        </p:style>
+        <p:txBody>
+          <a:bodyPr rtlCol="0" anchor="ctr"/>
+          <a:lstStyle/>
+          <a:p>
+            <a:pPr algn="ctr"/>
           </a:p>
         </p:txBody>
       </p:sp>
@@ -3998,8 +3782,8 @@
         </p:nvSpPr>
         <p:spPr>
           <a:xfrm>
-            <a:off x="6731000" y="4953000"/>
-            <a:ext cx="2413000" cy="177800"/>
+            <a:off x="813816" y="502920"/>
+            <a:ext cx="10634472" cy="685800"/>
           </a:xfrm>
           <a:prstGeom prst="rect">
             <a:avLst/>
@@ -4008,19 +3792,19 @@
         </p:spPr>
         <p:txBody>
           <a:bodyPr wrap="square">
-            <a:normAutofit/>
+            <a:spAutoFit/>
           </a:bodyPr>
           <a:lstStyle/>
           <a:p>
             <a:pPr algn="l"/>
             <a:r>
-              <a:rPr sz="900" b="0" i="0">
-                <a:solidFill>
-                  <a:srgbClr val="7B7FA0"/>
-                </a:solidFill>
-                <a:latin typeface="Courier New"/>
-              </a:rPr>
-              <a:t>Trainer</a:t>
+              <a:rPr sz="2400" b="1" i="0">
+                <a:solidFill>
+                  <a:srgbClr val="1F2C56"/>
+                </a:solidFill>
+                <a:latin typeface="Source Serif 4"/>
+              </a:rPr>
+              <a:t>Arbeitsblatt B: Beobachtungsbogen Rollenspiel</a:t>
             </a:r>
           </a:p>
         </p:txBody>
@@ -4033,8 +3817,8 @@
         </p:nvSpPr>
         <p:spPr>
           <a:xfrm>
-            <a:off x="6731000" y="5156200"/>
-            <a:ext cx="2413000" cy="381000"/>
+            <a:off x="685800" y="1417320"/>
+            <a:ext cx="10817352" cy="5029200"/>
           </a:xfrm>
           <a:prstGeom prst="rect">
             <a:avLst/>
@@ -4043,55 +3827,184 @@
         </p:spPr>
         <p:txBody>
           <a:bodyPr wrap="square">
-            <a:normAutofit/>
+            <a:spAutoFit/>
           </a:bodyPr>
           <a:lstStyle/>
           <a:p>
-            <a:pPr algn="l"/>
-            <a:r>
-              <a:rPr sz="1400" b="0" i="0">
-                <a:solidFill>
-                  <a:srgbClr val="4D5270"/>
-                </a:solidFill>
-                <a:latin typeface="Georgia"/>
-              </a:rPr>
-              <a:t>[Name · Kontakt]</a:t>
-            </a:r>
-          </a:p>
-        </p:txBody>
-      </p:sp>
-      <p:sp>
-        <p:nvSpPr>
-          <p:cNvPr id="9" name="TextBox 8"/>
-          <p:cNvSpPr txBox="1"/>
-          <p:nvPr/>
-        </p:nvSpPr>
-        <p:spPr>
-          <a:xfrm>
-            <a:off x="9398000" y="4953000"/>
-            <a:ext cx="2184400" cy="177800"/>
-          </a:xfrm>
-          <a:prstGeom prst="rect">
-            <a:avLst/>
-          </a:prstGeom>
-          <a:noFill/>
-        </p:spPr>
-        <p:txBody>
-          <a:bodyPr wrap="square">
-            <a:normAutofit/>
-          </a:bodyPr>
-          <a:lstStyle/>
-          <a:p>
-            <a:pPr algn="l"/>
-            <a:r>
-              <a:rPr sz="900" b="0" i="0">
-                <a:solidFill>
-                  <a:srgbClr val="7B7FA0"/>
-                </a:solidFill>
-                <a:latin typeface="Courier New"/>
-              </a:rPr>
-              <a:t>Modul</a:t>
-            </a:r>
+            <a:pPr>
+              <a:spcBef>
+                <a:spcPts val="400"/>
+              </a:spcBef>
+              <a:spcAft>
+                <a:spcPts val="200"/>
+              </a:spcAft>
+            </a:pPr>
+            <a:r>
+              <a:rPr sz="1200">
+                <a:solidFill>
+                  <a:srgbClr val="3D5466"/>
+                </a:solidFill>
+                <a:latin typeface="Arial"/>
+              </a:rPr>
+              <a:t>(Wird vom Beobachter ausgefüllt – nicht vom Spielenden)</a:t>
+            </a:r>
+          </a:p>
+          <a:p>
+            <a:pPr>
+              <a:spcBef>
+                <a:spcPts val="400"/>
+              </a:spcBef>
+              <a:spcAft>
+                <a:spcPts val="200"/>
+              </a:spcAft>
+            </a:pPr>
+            <a:r>
+              <a:rPr sz="1200">
+                <a:solidFill>
+                  <a:srgbClr val="3D5466"/>
+                </a:solidFill>
+                <a:latin typeface="Arial"/>
+              </a:rPr>
+              <a:t>Berater (Name): ___________________________ Datum: _______________</a:t>
+            </a:r>
+          </a:p>
+          <a:p>
+            <a:pPr>
+              <a:spcBef>
+                <a:spcPts val="400"/>
+              </a:spcBef>
+              <a:spcAft>
+                <a:spcPts val="200"/>
+              </a:spcAft>
+            </a:pPr>
+            <a:r>
+              <a:rPr sz="1200">
+                <a:solidFill>
+                  <a:srgbClr val="3D5466"/>
+                </a:solidFill>
+                <a:latin typeface="Arial"/>
+              </a:rPr>
+              <a:t>Stärkster Moment im Gespräch:</a:t>
+            </a:r>
+          </a:p>
+          <a:p>
+            <a:pPr>
+              <a:spcBef>
+                <a:spcPts val="400"/>
+              </a:spcBef>
+              <a:spcAft>
+                <a:spcPts val="200"/>
+              </a:spcAft>
+            </a:pPr>
+            <a:r>
+              <a:rPr sz="1200">
+                <a:solidFill>
+                  <a:srgbClr val="3D5466"/>
+                </a:solidFill>
+                <a:latin typeface="Arial"/>
+              </a:rPr>
+              <a:t>___________________________________________________________________________</a:t>
+            </a:r>
+          </a:p>
+          <a:p>
+            <a:pPr>
+              <a:spcBef>
+                <a:spcPts val="400"/>
+              </a:spcBef>
+              <a:spcAft>
+                <a:spcPts val="200"/>
+              </a:spcAft>
+            </a:pPr>
+            <a:r>
+              <a:rPr sz="1200">
+                <a:solidFill>
+                  <a:srgbClr val="3D5466"/>
+                </a:solidFill>
+                <a:latin typeface="Arial"/>
+              </a:rPr>
+              <a:t>Eine konkrete Verbesserungsmöglichkeit:</a:t>
+            </a:r>
+          </a:p>
+          <a:p>
+            <a:pPr>
+              <a:spcBef>
+                <a:spcPts val="400"/>
+              </a:spcBef>
+              <a:spcAft>
+                <a:spcPts val="200"/>
+              </a:spcAft>
+            </a:pPr>
+            <a:r>
+              <a:rPr sz="1200">
+                <a:solidFill>
+                  <a:srgbClr val="3D5466"/>
+                </a:solidFill>
+                <a:latin typeface="Arial"/>
+              </a:rPr>
+              <a:t>___________________________________________________________________________</a:t>
+            </a:r>
+          </a:p>
+          <a:p>
+            <a:pPr>
+              <a:spcBef>
+                <a:spcPts val="400"/>
+              </a:spcBef>
+              <a:spcAft>
+                <a:spcPts val="200"/>
+              </a:spcAft>
+            </a:pPr>
+            <a:r>
+              <a:rPr sz="1200">
+                <a:solidFill>
+                  <a:srgbClr val="3D5466"/>
+                </a:solidFill>
+                <a:latin typeface="Arial"/>
+              </a:rPr>
+              <a:t># 5. PRAXISTRANSFER</a:t>
+            </a:r>
+          </a:p>
+        </p:txBody>
+      </p:sp>
+      <p:sp>
+        <p:nvSpPr>
+          <p:cNvPr id="9" name="Rectangle 8"/>
+          <p:cNvSpPr/>
+          <p:nvPr/>
+        </p:nvSpPr>
+        <p:spPr>
+          <a:xfrm>
+            <a:off x="0" y="6510528"/>
+            <a:ext cx="12188952" cy="347472"/>
+          </a:xfrm>
+          <a:prstGeom prst="rect">
+            <a:avLst/>
+          </a:prstGeom>
+          <a:solidFill>
+            <a:srgbClr val="0A1937"/>
+          </a:solidFill>
+          <a:ln>
+            <a:noFill/>
+          </a:ln>
+        </p:spPr>
+        <p:style>
+          <a:lnRef idx="1">
+            <a:schemeClr val="accent1"/>
+          </a:lnRef>
+          <a:fillRef idx="3">
+            <a:schemeClr val="accent1"/>
+          </a:fillRef>
+          <a:effectRef idx="2">
+            <a:schemeClr val="accent1"/>
+          </a:effectRef>
+          <a:fontRef idx="minor">
+            <a:schemeClr val="lt1"/>
+          </a:fontRef>
+        </p:style>
+        <p:txBody>
+          <a:bodyPr rtlCol="0" anchor="ctr"/>
+          <a:lstStyle/>
+          <a:p>
+            <a:pPr algn="ctr"/>
           </a:p>
         </p:txBody>
       </p:sp>
@@ -4103,8 +4016,8 @@
         </p:nvSpPr>
         <p:spPr>
           <a:xfrm>
-            <a:off x="9398000" y="5156200"/>
-            <a:ext cx="2184400" cy="381000"/>
+            <a:off x="685800" y="6583680"/>
+            <a:ext cx="6490411" cy="256032"/>
           </a:xfrm>
           <a:prstGeom prst="rect">
             <a:avLst/>
@@ -4112,20 +4025,20 @@
           <a:noFill/>
         </p:spPr>
         <p:txBody>
-          <a:bodyPr wrap="square">
-            <a:normAutofit/>
+          <a:bodyPr wrap="none">
+            <a:spAutoFit/>
           </a:bodyPr>
           <a:lstStyle/>
           <a:p>
             <a:pPr algn="l"/>
             <a:r>
-              <a:rPr sz="1400" b="0" i="0">
-                <a:solidFill>
-                  <a:srgbClr val="191D2E"/>
-                </a:solidFill>
-                <a:latin typeface="Georgia"/>
-              </a:rPr>
-              <a:t>M11 · Sparring</a:t>
+              <a:rPr sz="700">
+                <a:solidFill>
+                  <a:srgbClr val="A0B4D2"/>
+                </a:solidFill>
+                <a:latin typeface="JetBrains Mono"/>
+              </a:rPr>
+              <a:t>Benedikt Zoller Coaching  ·  FKB Campus  ·  M11</a:t>
             </a:r>
           </a:p>
         </p:txBody>
@@ -4141,14 +4054,6 @@
 <file path=ppt/slides/slide2.xml><?xml version="1.0" encoding="utf-8"?>
 <p:sld xmlns:a="http://schemas.openxmlformats.org/drawingml/2006/main" xmlns:p="http://schemas.openxmlformats.org/presentationml/2006/main" xmlns:r="http://schemas.openxmlformats.org/officeDocument/2006/relationships">
   <p:cSld>
-    <p:bg>
-      <p:bgPr>
-        <a:solidFill>
-          <a:srgbClr val="F8F8FA"/>
-        </a:solidFill>
-        <a:effectLst/>
-      </p:bgPr>
-    </p:bg>
     <p:spTree>
       <p:nvGrpSpPr>
         <p:cNvPr id="1" name=""/>
@@ -4158,125 +4063,20 @@
       <p:grpSpPr/>
       <p:sp>
         <p:nvSpPr>
-          <p:cNvPr id="2" name="TextBox 1"/>
-          <p:cNvSpPr txBox="1"/>
-          <p:nvPr/>
-        </p:nvSpPr>
-        <p:spPr>
-          <a:xfrm>
-            <a:off x="609600" y="279400"/>
-            <a:ext cx="2540000" cy="279400"/>
-          </a:xfrm>
-          <a:prstGeom prst="rect">
-            <a:avLst/>
-          </a:prstGeom>
-          <a:noFill/>
-        </p:spPr>
-        <p:txBody>
-          <a:bodyPr wrap="square">
-            <a:normAutofit/>
-          </a:bodyPr>
-          <a:lstStyle/>
-          <a:p>
-            <a:pPr algn="l"/>
-            <a:r>
-              <a:rPr sz="1000" b="1" i="0">
-                <a:solidFill>
-                  <a:srgbClr val="191D2E"/>
-                </a:solidFill>
-                <a:latin typeface="Arial"/>
-              </a:rPr>
-              <a:t>FKB  Campus</a:t>
-            </a:r>
-          </a:p>
-        </p:txBody>
-      </p:sp>
-      <p:sp>
-        <p:nvSpPr>
-          <p:cNvPr id="3" name="TextBox 2"/>
-          <p:cNvSpPr txBox="1"/>
-          <p:nvPr/>
-        </p:nvSpPr>
-        <p:spPr>
-          <a:xfrm>
-            <a:off x="609600" y="279400"/>
-            <a:ext cx="10972800" cy="279400"/>
-          </a:xfrm>
-          <a:prstGeom prst="rect">
-            <a:avLst/>
-          </a:prstGeom>
-          <a:noFill/>
-        </p:spPr>
-        <p:txBody>
-          <a:bodyPr wrap="square">
-            <a:normAutofit/>
-          </a:bodyPr>
-          <a:lstStyle/>
-          <a:p>
-            <a:pPr algn="r"/>
-            <a:r>
-              <a:rPr sz="900" b="0" i="0">
-                <a:solidFill>
-                  <a:srgbClr val="7B7FA0"/>
-                </a:solidFill>
-                <a:latin typeface="Courier New"/>
-              </a:rPr>
-              <a:t>§ 00 — LERNZIELE</a:t>
-            </a:r>
-          </a:p>
-        </p:txBody>
-      </p:sp>
-      <p:sp>
-        <p:nvSpPr>
-          <p:cNvPr id="4" name="TextBox 3"/>
-          <p:cNvSpPr txBox="1"/>
-          <p:nvPr/>
-        </p:nvSpPr>
-        <p:spPr>
-          <a:xfrm>
-            <a:off x="609600" y="6426200"/>
-            <a:ext cx="10972800" cy="228600"/>
-          </a:xfrm>
-          <a:prstGeom prst="rect">
-            <a:avLst/>
-          </a:prstGeom>
-          <a:noFill/>
-        </p:spPr>
-        <p:txBody>
-          <a:bodyPr wrap="square">
-            <a:normAutofit/>
-          </a:bodyPr>
-          <a:lstStyle/>
-          <a:p>
-            <a:pPr algn="r"/>
-            <a:r>
-              <a:rPr sz="900" b="0" i="0">
-                <a:solidFill>
-                  <a:srgbClr val="7B7FA0"/>
-                </a:solidFill>
-                <a:latin typeface="Courier New"/>
-              </a:rPr>
-              <a:t>02</a:t>
-            </a:r>
-          </a:p>
-        </p:txBody>
-      </p:sp>
-      <p:sp>
-        <p:nvSpPr>
-          <p:cNvPr id="5" name="Rectangle 4"/>
+          <p:cNvPr id="2" name="Rectangle 1"/>
           <p:cNvSpPr/>
           <p:nvPr/>
         </p:nvSpPr>
         <p:spPr>
           <a:xfrm>
-            <a:off x="609600" y="825500"/>
-            <a:ext cx="10972800" cy="6350"/>
+            <a:off x="0" y="0"/>
+            <a:ext cx="12188952" cy="6858000"/>
           </a:xfrm>
           <a:prstGeom prst="rect">
             <a:avLst/>
           </a:prstGeom>
           <a:solidFill>
-            <a:srgbClr val="191D2E"/>
+            <a:srgbClr val="EDEDF3"/>
           </a:solidFill>
           <a:ln>
             <a:noFill/>
@@ -4306,55 +4106,20 @@
       </p:sp>
       <p:sp>
         <p:nvSpPr>
-          <p:cNvPr id="6" name="TextBox 5"/>
-          <p:cNvSpPr txBox="1"/>
-          <p:nvPr/>
-        </p:nvSpPr>
-        <p:spPr>
-          <a:xfrm>
-            <a:off x="609600" y="920750"/>
-            <a:ext cx="3175000" cy="1651000"/>
-          </a:xfrm>
-          <a:prstGeom prst="rect">
-            <a:avLst/>
-          </a:prstGeom>
-          <a:noFill/>
-        </p:spPr>
-        <p:txBody>
-          <a:bodyPr wrap="square">
-            <a:normAutofit/>
-          </a:bodyPr>
-          <a:lstStyle/>
-          <a:p>
-            <a:pPr algn="l"/>
-            <a:r>
-              <a:rPr sz="4800" b="0" i="1">
-                <a:solidFill>
-                  <a:srgbClr val="1F2B56"/>
-                </a:solidFill>
-                <a:latin typeface="Georgia"/>
-              </a:rPr>
-              <a:t>Inhalt.</a:t>
-            </a:r>
-          </a:p>
-        </p:txBody>
-      </p:sp>
-      <p:sp>
-        <p:nvSpPr>
-          <p:cNvPr id="7" name="Rectangle 6"/>
+          <p:cNvPr id="3" name="Rectangle 2"/>
           <p:cNvSpPr/>
           <p:nvPr/>
         </p:nvSpPr>
         <p:spPr>
           <a:xfrm>
-            <a:off x="4064000" y="889000"/>
-            <a:ext cx="7518399" cy="6350"/>
+            <a:off x="0" y="0"/>
+            <a:ext cx="12188952" cy="50292"/>
           </a:xfrm>
           <a:prstGeom prst="rect">
             <a:avLst/>
           </a:prstGeom>
           <a:solidFill>
-            <a:srgbClr val="E0E0E8"/>
+            <a:srgbClr val="1F2C56"/>
           </a:solidFill>
           <a:ln>
             <a:noFill/>
@@ -4384,14 +4149,14 @@
       </p:sp>
       <p:sp>
         <p:nvSpPr>
-          <p:cNvPr id="8" name="TextBox 7"/>
+          <p:cNvPr id="4" name="TextBox 3"/>
           <p:cNvSpPr txBox="1"/>
           <p:nvPr/>
         </p:nvSpPr>
         <p:spPr>
           <a:xfrm>
-            <a:off x="4064000" y="939799"/>
-            <a:ext cx="762000" cy="647700"/>
+            <a:off x="685800" y="109728"/>
+            <a:ext cx="10817352" cy="228600"/>
           </a:xfrm>
           <a:prstGeom prst="rect">
             <a:avLst/>
@@ -4400,74 +4165,39 @@
         </p:spPr>
         <p:txBody>
           <a:bodyPr wrap="none">
-            <a:normAutofit/>
+            <a:spAutoFit/>
           </a:bodyPr>
           <a:lstStyle/>
           <a:p>
             <a:pPr algn="l"/>
             <a:r>
-              <a:rPr sz="2400" b="0" i="1">
-                <a:solidFill>
-                  <a:srgbClr val="1F2B56"/>
-                </a:solidFill>
-                <a:latin typeface="Georgia"/>
-              </a:rPr>
-              <a:t>I</a:t>
-            </a:r>
-          </a:p>
-        </p:txBody>
-      </p:sp>
-      <p:sp>
-        <p:nvSpPr>
-          <p:cNvPr id="9" name="TextBox 8"/>
-          <p:cNvSpPr txBox="1"/>
-          <p:nvPr/>
-        </p:nvSpPr>
-        <p:spPr>
-          <a:xfrm>
-            <a:off x="4953000" y="952500"/>
-            <a:ext cx="6629400" cy="635000"/>
-          </a:xfrm>
-          <a:prstGeom prst="rect">
-            <a:avLst/>
-          </a:prstGeom>
-          <a:noFill/>
-        </p:spPr>
-        <p:txBody>
-          <a:bodyPr wrap="square">
-            <a:normAutofit/>
-          </a:bodyPr>
-          <a:lstStyle/>
-          <a:p>
-            <a:pPr algn="l"/>
-            <a:r>
-              <a:rPr sz="1400" b="0" i="0">
-                <a:solidFill>
-                  <a:srgbClr val="191D2E"/>
-                </a:solidFill>
-                <a:latin typeface="Georgia"/>
-              </a:rPr>
-              <a:t>Explizite von latenten Bedarfen anhand konkreter Gesprächsbeispiele unterscheiden und Kundensignale systematisch zuordnen</a:t>
-            </a:r>
-          </a:p>
-        </p:txBody>
-      </p:sp>
-      <p:sp>
-        <p:nvSpPr>
-          <p:cNvPr id="10" name="Rectangle 9"/>
+              <a:rPr sz="750">
+                <a:solidFill>
+                  <a:srgbClr val="78808C"/>
+                </a:solidFill>
+                <a:latin typeface="JetBrains Mono"/>
+              </a:rPr>
+              <a:t>LERNZIELE  ·  M11</a:t>
+            </a:r>
+          </a:p>
+        </p:txBody>
+      </p:sp>
+      <p:sp>
+        <p:nvSpPr>
+          <p:cNvPr id="5" name="Rectangle 4"/>
           <p:cNvSpPr/>
           <p:nvPr/>
         </p:nvSpPr>
         <p:spPr>
           <a:xfrm>
-            <a:off x="4064000" y="1587500"/>
-            <a:ext cx="7518399" cy="6350"/>
+            <a:off x="0" y="1234440"/>
+            <a:ext cx="12188952" cy="12700"/>
           </a:xfrm>
           <a:prstGeom prst="rect">
             <a:avLst/>
           </a:prstGeom>
           <a:solidFill>
-            <a:srgbClr val="E0E0E8"/>
+            <a:srgbClr val="D8DFE4"/>
           </a:solidFill>
           <a:ln>
             <a:noFill/>
@@ -4497,14 +4227,14 @@
       </p:sp>
       <p:sp>
         <p:nvSpPr>
-          <p:cNvPr id="11" name="TextBox 10"/>
+          <p:cNvPr id="6" name="TextBox 5"/>
           <p:cNvSpPr txBox="1"/>
           <p:nvPr/>
         </p:nvSpPr>
         <p:spPr>
           <a:xfrm>
-            <a:off x="4064000" y="1638300"/>
-            <a:ext cx="762000" cy="647700"/>
+            <a:off x="685800" y="502920"/>
+            <a:ext cx="10817352" cy="658368"/>
           </a:xfrm>
           <a:prstGeom prst="rect">
             <a:avLst/>
@@ -4512,34 +4242,34 @@
           <a:noFill/>
         </p:spPr>
         <p:txBody>
-          <a:bodyPr wrap="none">
-            <a:normAutofit/>
+          <a:bodyPr wrap="square">
+            <a:spAutoFit/>
           </a:bodyPr>
           <a:lstStyle/>
           <a:p>
             <a:pPr algn="l"/>
             <a:r>
-              <a:rPr sz="2400" b="0" i="1">
-                <a:solidFill>
-                  <a:srgbClr val="1F2B56"/>
-                </a:solidFill>
-                <a:latin typeface="Georgia"/>
-              </a:rPr>
-              <a:t>II</a:t>
-            </a:r>
-          </a:p>
-        </p:txBody>
-      </p:sp>
-      <p:sp>
-        <p:nvSpPr>
-          <p:cNvPr id="12" name="TextBox 11"/>
+              <a:rPr sz="2600" b="1" i="0">
+                <a:solidFill>
+                  <a:srgbClr val="1F2C56"/>
+                </a:solidFill>
+                <a:latin typeface="Source Serif 4"/>
+              </a:rPr>
+              <a:t>Was Sie heute mitnehmen</a:t>
+            </a:r>
+          </a:p>
+        </p:txBody>
+      </p:sp>
+      <p:sp>
+        <p:nvSpPr>
+          <p:cNvPr id="7" name="TextBox 6"/>
           <p:cNvSpPr txBox="1"/>
           <p:nvPr/>
         </p:nvSpPr>
         <p:spPr>
           <a:xfrm>
-            <a:off x="4953000" y="1651000"/>
-            <a:ext cx="6629400" cy="635000"/>
+            <a:off x="685800" y="1371600"/>
+            <a:ext cx="10817352" cy="5120640"/>
           </a:xfrm>
           <a:prstGeom prst="rect">
             <a:avLst/>
@@ -4548,39 +4278,122 @@
         </p:spPr>
         <p:txBody>
           <a:bodyPr wrap="square">
-            <a:normAutofit/>
+            <a:spAutoFit/>
           </a:bodyPr>
           <a:lstStyle/>
           <a:p>
-            <a:pPr algn="l"/>
-            <a:r>
-              <a:rPr sz="1400" b="0" i="0">
-                <a:solidFill>
-                  <a:srgbClr val="191D2E"/>
-                </a:solidFill>
-                <a:latin typeface="Georgia"/>
-              </a:rPr>
-              <a:t>Die SPIN-Fragetechnik in simulierten Kundengesprächen anwenden und implizite Problemformulierungen in explizite Bedarfsaussagen überführen</a:t>
-            </a:r>
-          </a:p>
-        </p:txBody>
-      </p:sp>
-      <p:sp>
-        <p:nvSpPr>
-          <p:cNvPr id="13" name="Rectangle 12"/>
+            <a:pPr>
+              <a:spcBef>
+                <a:spcPts val="800"/>
+              </a:spcBef>
+              <a:spcAft>
+                <a:spcPts val="200"/>
+              </a:spcAft>
+            </a:pPr>
+            <a:r>
+              <a:rPr sz="1400">
+                <a:solidFill>
+                  <a:srgbClr val="3D5466"/>
+                </a:solidFill>
+                <a:latin typeface="Arial"/>
+              </a:rPr>
+              <a:t>▸  Explizite von latenten Bedarfen anhand konkreter Gesprächsbeispiele unterscheiden und Kundensignale systematisch zuordnen</a:t>
+            </a:r>
+          </a:p>
+          <a:p>
+            <a:pPr>
+              <a:spcBef>
+                <a:spcPts val="800"/>
+              </a:spcBef>
+              <a:spcAft>
+                <a:spcPts val="200"/>
+              </a:spcAft>
+            </a:pPr>
+            <a:r>
+              <a:rPr sz="1400">
+                <a:solidFill>
+                  <a:srgbClr val="3D5466"/>
+                </a:solidFill>
+                <a:latin typeface="Arial"/>
+              </a:rPr>
+              <a:t>▸  Die SPIN-Fragetechnik in simulierten Kundengesprächen anwenden und implizite Problemformulierungen in explizite Bedarfsaussagen überführen</a:t>
+            </a:r>
+          </a:p>
+          <a:p>
+            <a:pPr>
+              <a:spcBef>
+                <a:spcPts val="800"/>
+              </a:spcBef>
+              <a:spcAft>
+                <a:spcPts val="200"/>
+              </a:spcAft>
+            </a:pPr>
+            <a:r>
+              <a:rPr sz="1400">
+                <a:solidFill>
+                  <a:srgbClr val="3D5466"/>
+                </a:solidFill>
+                <a:latin typeface="Arial"/>
+              </a:rPr>
+              <a:t>▸  Gesprächsverläufe auf latente Signale (verbal, paraverbal, nonverbal) analysieren und den wahrscheinlichen Hintergrundbedarf benennen</a:t>
+            </a:r>
+          </a:p>
+          <a:p>
+            <a:pPr>
+              <a:spcBef>
+                <a:spcPts val="800"/>
+              </a:spcBef>
+              <a:spcAft>
+                <a:spcPts val="200"/>
+              </a:spcAft>
+            </a:pPr>
+            <a:r>
+              <a:rPr sz="1400">
+                <a:solidFill>
+                  <a:srgbClr val="3D5466"/>
+                </a:solidFill>
+                <a:latin typeface="Arial"/>
+              </a:rPr>
+              <a:t>▸  Die Qualität des eigenen Frageverhaltens in Rollenspielen bewerten und konkrete Verbesserungsschritte ableiten</a:t>
+            </a:r>
+          </a:p>
+          <a:p>
+            <a:pPr>
+              <a:spcBef>
+                <a:spcPts val="800"/>
+              </a:spcBef>
+              <a:spcAft>
+                <a:spcPts val="200"/>
+              </a:spcAft>
+            </a:pPr>
+            <a:r>
+              <a:rPr sz="1400">
+                <a:solidFill>
+                  <a:srgbClr val="3D5466"/>
+                </a:solidFill>
+                <a:latin typeface="Arial"/>
+              </a:rPr>
+              <a:t>▸  Situationsgerecht zwischen verschiedenen Fragetechniken wählen und die Wahl begründen</a:t>
+            </a:r>
+          </a:p>
+        </p:txBody>
+      </p:sp>
+      <p:sp>
+        <p:nvSpPr>
+          <p:cNvPr id="8" name="Rectangle 7"/>
           <p:cNvSpPr/>
           <p:nvPr/>
         </p:nvSpPr>
         <p:spPr>
           <a:xfrm>
-            <a:off x="4064000" y="2286000"/>
-            <a:ext cx="7518399" cy="6350"/>
+            <a:off x="0" y="6510528"/>
+            <a:ext cx="12188952" cy="347472"/>
           </a:xfrm>
           <a:prstGeom prst="rect">
             <a:avLst/>
           </a:prstGeom>
           <a:solidFill>
-            <a:srgbClr val="E0E0E8"/>
+            <a:srgbClr val="0A1937"/>
           </a:solidFill>
           <a:ln>
             <a:noFill/>
@@ -4610,14 +4423,14 @@
       </p:sp>
       <p:sp>
         <p:nvSpPr>
-          <p:cNvPr id="14" name="TextBox 13"/>
+          <p:cNvPr id="9" name="TextBox 8"/>
           <p:cNvSpPr txBox="1"/>
           <p:nvPr/>
         </p:nvSpPr>
         <p:spPr>
           <a:xfrm>
-            <a:off x="4064000" y="2336800"/>
-            <a:ext cx="762000" cy="647700"/>
+            <a:off x="685800" y="6583680"/>
+            <a:ext cx="6490411" cy="256032"/>
           </a:xfrm>
           <a:prstGeom prst="rect">
             <a:avLst/>
@@ -4626,280 +4439,19 @@
         </p:spPr>
         <p:txBody>
           <a:bodyPr wrap="none">
-            <a:normAutofit/>
+            <a:spAutoFit/>
           </a:bodyPr>
           <a:lstStyle/>
           <a:p>
             <a:pPr algn="l"/>
             <a:r>
-              <a:rPr sz="2400" b="0" i="1">
-                <a:solidFill>
-                  <a:srgbClr val="1F2B56"/>
-                </a:solidFill>
-                <a:latin typeface="Georgia"/>
-              </a:rPr>
-              <a:t>III</a:t>
-            </a:r>
-          </a:p>
-        </p:txBody>
-      </p:sp>
-      <p:sp>
-        <p:nvSpPr>
-          <p:cNvPr id="15" name="TextBox 14"/>
-          <p:cNvSpPr txBox="1"/>
-          <p:nvPr/>
-        </p:nvSpPr>
-        <p:spPr>
-          <a:xfrm>
-            <a:off x="4953000" y="2349500"/>
-            <a:ext cx="6629400" cy="635000"/>
-          </a:xfrm>
-          <a:prstGeom prst="rect">
-            <a:avLst/>
-          </a:prstGeom>
-          <a:noFill/>
-        </p:spPr>
-        <p:txBody>
-          <a:bodyPr wrap="square">
-            <a:normAutofit/>
-          </a:bodyPr>
-          <a:lstStyle/>
-          <a:p>
-            <a:pPr algn="l"/>
-            <a:r>
-              <a:rPr sz="1400" b="0" i="0">
-                <a:solidFill>
-                  <a:srgbClr val="191D2E"/>
-                </a:solidFill>
-                <a:latin typeface="Georgia"/>
-              </a:rPr>
-              <a:t>Gesprächsverläufe auf latente Signale (verbal, paraverbal, nonverbal) analysieren und den wahrscheinlichen Hintergrundbedarf benennen</a:t>
-            </a:r>
-          </a:p>
-        </p:txBody>
-      </p:sp>
-      <p:sp>
-        <p:nvSpPr>
-          <p:cNvPr id="16" name="Rectangle 15"/>
-          <p:cNvSpPr/>
-          <p:nvPr/>
-        </p:nvSpPr>
-        <p:spPr>
-          <a:xfrm>
-            <a:off x="4064000" y="2984500"/>
-            <a:ext cx="7518399" cy="6350"/>
-          </a:xfrm>
-          <a:prstGeom prst="rect">
-            <a:avLst/>
-          </a:prstGeom>
-          <a:solidFill>
-            <a:srgbClr val="E0E0E8"/>
-          </a:solidFill>
-          <a:ln>
-            <a:noFill/>
-          </a:ln>
-        </p:spPr>
-        <p:style>
-          <a:lnRef idx="1">
-            <a:schemeClr val="accent1"/>
-          </a:lnRef>
-          <a:fillRef idx="3">
-            <a:schemeClr val="accent1"/>
-          </a:fillRef>
-          <a:effectRef idx="2">
-            <a:schemeClr val="accent1"/>
-          </a:effectRef>
-          <a:fontRef idx="minor">
-            <a:schemeClr val="lt1"/>
-          </a:fontRef>
-        </p:style>
-        <p:txBody>
-          <a:bodyPr rtlCol="0" anchor="ctr"/>
-          <a:lstStyle/>
-          <a:p>
-            <a:pPr algn="ctr"/>
-          </a:p>
-        </p:txBody>
-      </p:sp>
-      <p:sp>
-        <p:nvSpPr>
-          <p:cNvPr id="17" name="TextBox 16"/>
-          <p:cNvSpPr txBox="1"/>
-          <p:nvPr/>
-        </p:nvSpPr>
-        <p:spPr>
-          <a:xfrm>
-            <a:off x="4064000" y="3035300"/>
-            <a:ext cx="762000" cy="647700"/>
-          </a:xfrm>
-          <a:prstGeom prst="rect">
-            <a:avLst/>
-          </a:prstGeom>
-          <a:noFill/>
-        </p:spPr>
-        <p:txBody>
-          <a:bodyPr wrap="none">
-            <a:normAutofit/>
-          </a:bodyPr>
-          <a:lstStyle/>
-          <a:p>
-            <a:pPr algn="l"/>
-            <a:r>
-              <a:rPr sz="2400" b="0" i="1">
-                <a:solidFill>
-                  <a:srgbClr val="1F2B56"/>
-                </a:solidFill>
-                <a:latin typeface="Georgia"/>
-              </a:rPr>
-              <a:t>IV</a:t>
-            </a:r>
-          </a:p>
-        </p:txBody>
-      </p:sp>
-      <p:sp>
-        <p:nvSpPr>
-          <p:cNvPr id="18" name="TextBox 17"/>
-          <p:cNvSpPr txBox="1"/>
-          <p:nvPr/>
-        </p:nvSpPr>
-        <p:spPr>
-          <a:xfrm>
-            <a:off x="4953000" y="3048000"/>
-            <a:ext cx="6629400" cy="635000"/>
-          </a:xfrm>
-          <a:prstGeom prst="rect">
-            <a:avLst/>
-          </a:prstGeom>
-          <a:noFill/>
-        </p:spPr>
-        <p:txBody>
-          <a:bodyPr wrap="square">
-            <a:normAutofit/>
-          </a:bodyPr>
-          <a:lstStyle/>
-          <a:p>
-            <a:pPr algn="l"/>
-            <a:r>
-              <a:rPr sz="1400" b="0" i="0">
-                <a:solidFill>
-                  <a:srgbClr val="191D2E"/>
-                </a:solidFill>
-                <a:latin typeface="Georgia"/>
-              </a:rPr>
-              <a:t>Die Qualität des eigenen Frageverhaltens in Rollenspielen bewerten und konkrete Verbesserungsschritte ableiten</a:t>
-            </a:r>
-          </a:p>
-        </p:txBody>
-      </p:sp>
-      <p:sp>
-        <p:nvSpPr>
-          <p:cNvPr id="19" name="Rectangle 18"/>
-          <p:cNvSpPr/>
-          <p:nvPr/>
-        </p:nvSpPr>
-        <p:spPr>
-          <a:xfrm>
-            <a:off x="4064000" y="3683000"/>
-            <a:ext cx="7518399" cy="6350"/>
-          </a:xfrm>
-          <a:prstGeom prst="rect">
-            <a:avLst/>
-          </a:prstGeom>
-          <a:solidFill>
-            <a:srgbClr val="E0E0E8"/>
-          </a:solidFill>
-          <a:ln>
-            <a:noFill/>
-          </a:ln>
-        </p:spPr>
-        <p:style>
-          <a:lnRef idx="1">
-            <a:schemeClr val="accent1"/>
-          </a:lnRef>
-          <a:fillRef idx="3">
-            <a:schemeClr val="accent1"/>
-          </a:fillRef>
-          <a:effectRef idx="2">
-            <a:schemeClr val="accent1"/>
-          </a:effectRef>
-          <a:fontRef idx="minor">
-            <a:schemeClr val="lt1"/>
-          </a:fontRef>
-        </p:style>
-        <p:txBody>
-          <a:bodyPr rtlCol="0" anchor="ctr"/>
-          <a:lstStyle/>
-          <a:p>
-            <a:pPr algn="ctr"/>
-          </a:p>
-        </p:txBody>
-      </p:sp>
-      <p:sp>
-        <p:nvSpPr>
-          <p:cNvPr id="20" name="TextBox 19"/>
-          <p:cNvSpPr txBox="1"/>
-          <p:nvPr/>
-        </p:nvSpPr>
-        <p:spPr>
-          <a:xfrm>
-            <a:off x="4064000" y="3733799"/>
-            <a:ext cx="762000" cy="647700"/>
-          </a:xfrm>
-          <a:prstGeom prst="rect">
-            <a:avLst/>
-          </a:prstGeom>
-          <a:noFill/>
-        </p:spPr>
-        <p:txBody>
-          <a:bodyPr wrap="none">
-            <a:normAutofit/>
-          </a:bodyPr>
-          <a:lstStyle/>
-          <a:p>
-            <a:pPr algn="l"/>
-            <a:r>
-              <a:rPr sz="2400" b="0" i="1">
-                <a:solidFill>
-                  <a:srgbClr val="1F2B56"/>
-                </a:solidFill>
-                <a:latin typeface="Georgia"/>
-              </a:rPr>
-              <a:t>V</a:t>
-            </a:r>
-          </a:p>
-        </p:txBody>
-      </p:sp>
-      <p:sp>
-        <p:nvSpPr>
-          <p:cNvPr id="21" name="TextBox 20"/>
-          <p:cNvSpPr txBox="1"/>
-          <p:nvPr/>
-        </p:nvSpPr>
-        <p:spPr>
-          <a:xfrm>
-            <a:off x="4953000" y="3746500"/>
-            <a:ext cx="6629400" cy="635000"/>
-          </a:xfrm>
-          <a:prstGeom prst="rect">
-            <a:avLst/>
-          </a:prstGeom>
-          <a:noFill/>
-        </p:spPr>
-        <p:txBody>
-          <a:bodyPr wrap="square">
-            <a:normAutofit/>
-          </a:bodyPr>
-          <a:lstStyle/>
-          <a:p>
-            <a:pPr algn="l"/>
-            <a:r>
-              <a:rPr sz="1400" b="0" i="0">
-                <a:solidFill>
-                  <a:srgbClr val="191D2E"/>
-                </a:solidFill>
-                <a:latin typeface="Georgia"/>
-              </a:rPr>
-              <a:t>Situationsgerecht zwischen verschiedenen Fragetechniken wählen und die Wahl begründen</a:t>
+              <a:rPr sz="700">
+                <a:solidFill>
+                  <a:srgbClr val="A0B4D2"/>
+                </a:solidFill>
+                <a:latin typeface="JetBrains Mono"/>
+              </a:rPr>
+              <a:t>Benedikt Zoller Coaching  ·  FKB Campus  ·  M11</a:t>
             </a:r>
           </a:p>
         </p:txBody>
@@ -4915,14 +4467,6 @@
 <file path=ppt/slides/slide3.xml><?xml version="1.0" encoding="utf-8"?>
 <p:sld xmlns:a="http://schemas.openxmlformats.org/drawingml/2006/main" xmlns:p="http://schemas.openxmlformats.org/presentationml/2006/main" xmlns:r="http://schemas.openxmlformats.org/officeDocument/2006/relationships">
   <p:cSld>
-    <p:bg>
-      <p:bgPr>
-        <a:solidFill>
-          <a:srgbClr val="1F2B56"/>
-        </a:solidFill>
-        <a:effectLst/>
-      </p:bgPr>
-    </p:bg>
     <p:spTree>
       <p:nvGrpSpPr>
         <p:cNvPr id="1" name=""/>
@@ -4932,71 +4476,87 @@
       <p:grpSpPr/>
       <p:sp>
         <p:nvSpPr>
-          <p:cNvPr id="2" name="TextBox 1"/>
-          <p:cNvSpPr txBox="1"/>
-          <p:nvPr/>
-        </p:nvSpPr>
-        <p:spPr>
-          <a:xfrm>
-            <a:off x="609600" y="279400"/>
-            <a:ext cx="2540000" cy="279400"/>
-          </a:xfrm>
-          <a:prstGeom prst="rect">
-            <a:avLst/>
-          </a:prstGeom>
-          <a:noFill/>
-        </p:spPr>
-        <p:txBody>
-          <a:bodyPr wrap="square">
-            <a:normAutofit/>
-          </a:bodyPr>
-          <a:lstStyle/>
-          <a:p>
-            <a:pPr algn="l"/>
-            <a:r>
-              <a:rPr sz="1000" b="1" i="0">
-                <a:solidFill>
-                  <a:srgbClr val="F8F8FA"/>
-                </a:solidFill>
-                <a:latin typeface="Arial"/>
-              </a:rPr>
-              <a:t>FKB  Campus</a:t>
-            </a:r>
-          </a:p>
-        </p:txBody>
-      </p:sp>
-      <p:sp>
-        <p:nvSpPr>
-          <p:cNvPr id="3" name="TextBox 2"/>
-          <p:cNvSpPr txBox="1"/>
-          <p:nvPr/>
-        </p:nvSpPr>
-        <p:spPr>
-          <a:xfrm>
-            <a:off x="609600" y="279400"/>
-            <a:ext cx="10972800" cy="279400"/>
-          </a:xfrm>
-          <a:prstGeom prst="rect">
-            <a:avLst/>
-          </a:prstGeom>
-          <a:noFill/>
-        </p:spPr>
-        <p:txBody>
-          <a:bodyPr wrap="square">
-            <a:normAutofit/>
-          </a:bodyPr>
-          <a:lstStyle/>
-          <a:p>
-            <a:pPr algn="r"/>
-            <a:r>
-              <a:rPr sz="900" b="0" i="0">
-                <a:solidFill>
-                  <a:srgbClr val="7B7FA0"/>
-                </a:solidFill>
-                <a:latin typeface="Courier New"/>
-              </a:rPr>
-              <a:t>DER EISBERG DER KUNDENBEDÜRFNISSE</a:t>
-            </a:r>
+          <p:cNvPr id="2" name="Rectangle 1"/>
+          <p:cNvSpPr/>
+          <p:nvPr/>
+        </p:nvSpPr>
+        <p:spPr>
+          <a:xfrm>
+            <a:off x="0" y="0"/>
+            <a:ext cx="12188952" cy="6858000"/>
+          </a:xfrm>
+          <a:prstGeom prst="rect">
+            <a:avLst/>
+          </a:prstGeom>
+          <a:solidFill>
+            <a:srgbClr val="EDEDF3"/>
+          </a:solidFill>
+          <a:ln>
+            <a:noFill/>
+          </a:ln>
+        </p:spPr>
+        <p:style>
+          <a:lnRef idx="1">
+            <a:schemeClr val="accent1"/>
+          </a:lnRef>
+          <a:fillRef idx="3">
+            <a:schemeClr val="accent1"/>
+          </a:fillRef>
+          <a:effectRef idx="2">
+            <a:schemeClr val="accent1"/>
+          </a:effectRef>
+          <a:fontRef idx="minor">
+            <a:schemeClr val="lt1"/>
+          </a:fontRef>
+        </p:style>
+        <p:txBody>
+          <a:bodyPr rtlCol="0" anchor="ctr"/>
+          <a:lstStyle/>
+          <a:p>
+            <a:pPr algn="ctr"/>
+          </a:p>
+        </p:txBody>
+      </p:sp>
+      <p:sp>
+        <p:nvSpPr>
+          <p:cNvPr id="3" name="Rectangle 2"/>
+          <p:cNvSpPr/>
+          <p:nvPr/>
+        </p:nvSpPr>
+        <p:spPr>
+          <a:xfrm>
+            <a:off x="0" y="0"/>
+            <a:ext cx="12188952" cy="50292"/>
+          </a:xfrm>
+          <a:prstGeom prst="rect">
+            <a:avLst/>
+          </a:prstGeom>
+          <a:solidFill>
+            <a:srgbClr val="1F2C56"/>
+          </a:solidFill>
+          <a:ln>
+            <a:noFill/>
+          </a:ln>
+        </p:spPr>
+        <p:style>
+          <a:lnRef idx="1">
+            <a:schemeClr val="accent1"/>
+          </a:lnRef>
+          <a:fillRef idx="3">
+            <a:schemeClr val="accent1"/>
+          </a:fillRef>
+          <a:effectRef idx="2">
+            <a:schemeClr val="accent1"/>
+          </a:effectRef>
+          <a:fontRef idx="minor">
+            <a:schemeClr val="lt1"/>
+          </a:fontRef>
+        </p:style>
+        <p:txBody>
+          <a:bodyPr rtlCol="0" anchor="ctr"/>
+          <a:lstStyle/>
+          <a:p>
+            <a:pPr algn="ctr"/>
           </a:p>
         </p:txBody>
       </p:sp>
@@ -5008,8 +4568,8 @@
         </p:nvSpPr>
         <p:spPr>
           <a:xfrm>
-            <a:off x="609600" y="6426200"/>
-            <a:ext cx="10972800" cy="228600"/>
+            <a:off x="685800" y="109728"/>
+            <a:ext cx="10817352" cy="228600"/>
           </a:xfrm>
           <a:prstGeom prst="rect">
             <a:avLst/>
@@ -5017,91 +4577,107 @@
           <a:noFill/>
         </p:spPr>
         <p:txBody>
-          <a:bodyPr wrap="square">
-            <a:normAutofit/>
+          <a:bodyPr wrap="none">
+            <a:spAutoFit/>
           </a:bodyPr>
           <a:lstStyle/>
           <a:p>
-            <a:pPr algn="r"/>
-            <a:r>
-              <a:rPr sz="900" b="0" i="0">
-                <a:solidFill>
-                  <a:srgbClr val="7B7FA0"/>
-                </a:solidFill>
-                <a:latin typeface="Courier New"/>
-              </a:rPr>
-              <a:t>03</a:t>
-            </a:r>
-          </a:p>
-        </p:txBody>
-      </p:sp>
-      <p:sp>
-        <p:nvSpPr>
-          <p:cNvPr id="5" name="TextBox 4"/>
-          <p:cNvSpPr txBox="1"/>
-          <p:nvPr/>
-        </p:nvSpPr>
-        <p:spPr>
-          <a:xfrm>
-            <a:off x="609600" y="635000"/>
-            <a:ext cx="5461000" cy="5461000"/>
-          </a:xfrm>
-          <a:prstGeom prst="rect">
-            <a:avLst/>
-          </a:prstGeom>
-          <a:noFill/>
-        </p:spPr>
-        <p:txBody>
-          <a:bodyPr wrap="square">
-            <a:normAutofit/>
-          </a:bodyPr>
-          <a:lstStyle/>
-          <a:p>
             <a:pPr algn="l"/>
             <a:r>
-              <a:rPr sz="28000" b="0" i="1">
-                <a:solidFill>
-                  <a:srgbClr val="D9BF7A"/>
-                </a:solidFill>
-                <a:latin typeface="Georgia"/>
-              </a:rPr>
-              <a:t>I</a:t>
-            </a:r>
-          </a:p>
-        </p:txBody>
-      </p:sp>
-      <p:sp>
-        <p:nvSpPr>
-          <p:cNvPr id="6" name="TextBox 5"/>
-          <p:cNvSpPr txBox="1"/>
-          <p:nvPr/>
-        </p:nvSpPr>
-        <p:spPr>
-          <a:xfrm>
-            <a:off x="6731000" y="4064000"/>
-            <a:ext cx="4851400" cy="1778000"/>
-          </a:xfrm>
-          <a:prstGeom prst="rect">
-            <a:avLst/>
-          </a:prstGeom>
-          <a:noFill/>
-        </p:spPr>
-        <p:txBody>
-          <a:bodyPr wrap="square">
-            <a:normAutofit/>
-          </a:bodyPr>
-          <a:lstStyle/>
-          <a:p>
-            <a:pPr algn="r"/>
-            <a:r>
-              <a:rPr sz="3800" b="0" i="0">
-                <a:solidFill>
-                  <a:srgbClr val="F8F8FA"/>
-                </a:solidFill>
-                <a:latin typeface="Georgia"/>
-              </a:rPr>
-              <a:t>Der Eisberg der Kundenbedürfnisse</a:t>
-            </a:r>
+              <a:rPr sz="750">
+                <a:solidFill>
+                  <a:srgbClr val="78808C"/>
+                </a:solidFill>
+                <a:latin typeface="JetBrains Mono"/>
+              </a:rPr>
+              <a:t>M11  ·  INHALT</a:t>
+            </a:r>
+          </a:p>
+        </p:txBody>
+      </p:sp>
+      <p:sp>
+        <p:nvSpPr>
+          <p:cNvPr id="5" name="Rectangle 4"/>
+          <p:cNvSpPr/>
+          <p:nvPr/>
+        </p:nvSpPr>
+        <p:spPr>
+          <a:xfrm>
+            <a:off x="0" y="1234440"/>
+            <a:ext cx="12188952" cy="12700"/>
+          </a:xfrm>
+          <a:prstGeom prst="rect">
+            <a:avLst/>
+          </a:prstGeom>
+          <a:solidFill>
+            <a:srgbClr val="D8DFE4"/>
+          </a:solidFill>
+          <a:ln>
+            <a:noFill/>
+          </a:ln>
+        </p:spPr>
+        <p:style>
+          <a:lnRef idx="1">
+            <a:schemeClr val="accent1"/>
+          </a:lnRef>
+          <a:fillRef idx="3">
+            <a:schemeClr val="accent1"/>
+          </a:fillRef>
+          <a:effectRef idx="2">
+            <a:schemeClr val="accent1"/>
+          </a:effectRef>
+          <a:fontRef idx="minor">
+            <a:schemeClr val="lt1"/>
+          </a:fontRef>
+        </p:style>
+        <p:txBody>
+          <a:bodyPr rtlCol="0" anchor="ctr"/>
+          <a:lstStyle/>
+          <a:p>
+            <a:pPr algn="ctr"/>
+          </a:p>
+        </p:txBody>
+      </p:sp>
+      <p:sp>
+        <p:nvSpPr>
+          <p:cNvPr id="6" name="Rectangle 5"/>
+          <p:cNvSpPr/>
+          <p:nvPr/>
+        </p:nvSpPr>
+        <p:spPr>
+          <a:xfrm>
+            <a:off x="685800" y="502920"/>
+            <a:ext cx="36576" cy="658368"/>
+          </a:xfrm>
+          <a:prstGeom prst="rect">
+            <a:avLst/>
+          </a:prstGeom>
+          <a:solidFill>
+            <a:srgbClr val="D9C089"/>
+          </a:solidFill>
+          <a:ln>
+            <a:noFill/>
+          </a:ln>
+        </p:spPr>
+        <p:style>
+          <a:lnRef idx="1">
+            <a:schemeClr val="accent1"/>
+          </a:lnRef>
+          <a:fillRef idx="3">
+            <a:schemeClr val="accent1"/>
+          </a:fillRef>
+          <a:effectRef idx="2">
+            <a:schemeClr val="accent1"/>
+          </a:effectRef>
+          <a:fontRef idx="minor">
+            <a:schemeClr val="lt1"/>
+          </a:fontRef>
+        </p:style>
+        <p:txBody>
+          <a:bodyPr rtlCol="0" anchor="ctr"/>
+          <a:lstStyle/>
+          <a:p>
+            <a:pPr algn="ctr"/>
           </a:p>
         </p:txBody>
       </p:sp>
@@ -5113,8 +4689,8 @@
         </p:nvSpPr>
         <p:spPr>
           <a:xfrm>
-            <a:off x="6731000" y="5842000"/>
-            <a:ext cx="4851400" cy="635000"/>
+            <a:off x="813816" y="502920"/>
+            <a:ext cx="10634472" cy="685800"/>
           </a:xfrm>
           <a:prstGeom prst="rect">
             <a:avLst/>
@@ -5123,19 +4699,158 @@
         </p:spPr>
         <p:txBody>
           <a:bodyPr wrap="square">
-            <a:normAutofit/>
+            <a:spAutoFit/>
           </a:bodyPr>
           <a:lstStyle/>
           <a:p>
-            <a:pPr algn="r"/>
-            <a:r>
-              <a:rPr sz="1400" b="0" i="1">
-                <a:solidFill>
-                  <a:srgbClr val="7B7FA0"/>
-                </a:solidFill>
-                <a:latin typeface="Georgia"/>
-              </a:rPr>
-              <a:t>10 % sichtbar — 90 % unsichtbar</a:t>
+            <a:pPr algn="l"/>
+            <a:r>
+              <a:rPr sz="2400" b="1" i="0">
+                <a:solidFill>
+                  <a:srgbClr val="1F2C56"/>
+                </a:solidFill>
+                <a:latin typeface="Source Serif 4"/>
+              </a:rPr>
+              <a:t>Das Eisberg-Modell der Kundenbedürfnisse</a:t>
+            </a:r>
+          </a:p>
+        </p:txBody>
+      </p:sp>
+      <p:sp>
+        <p:nvSpPr>
+          <p:cNvPr id="8" name="TextBox 7"/>
+          <p:cNvSpPr txBox="1"/>
+          <p:nvPr/>
+        </p:nvSpPr>
+        <p:spPr>
+          <a:xfrm>
+            <a:off x="685800" y="1417320"/>
+            <a:ext cx="10817352" cy="5029200"/>
+          </a:xfrm>
+          <a:prstGeom prst="rect">
+            <a:avLst/>
+          </a:prstGeom>
+          <a:noFill/>
+        </p:spPr>
+        <p:txBody>
+          <a:bodyPr wrap="square">
+            <a:spAutoFit/>
+          </a:bodyPr>
+          <a:lstStyle/>
+          <a:p>
+            <a:pPr>
+              <a:spcBef>
+                <a:spcPts val="400"/>
+              </a:spcBef>
+              <a:spcAft>
+                <a:spcPts val="200"/>
+              </a:spcAft>
+            </a:pPr>
+            <a:r>
+              <a:rPr sz="1300">
+                <a:solidFill>
+                  <a:srgbClr val="3D5466"/>
+                </a:solidFill>
+                <a:latin typeface="Arial"/>
+              </a:rPr>
+              <a:t>▸  Explizite Bedarfe: Der Kunde benennt klar, was er will. „Ich brauche eine Anschlussfinanzierung für meine Maschine." Explizite Bedarfe entstehen, wenn der Kunde seine Situation analysiert und eine Lösung definiert hat.</a:t>
+            </a:r>
+          </a:p>
+          <a:p>
+            <a:pPr>
+              <a:spcBef>
+                <a:spcPts val="400"/>
+              </a:spcBef>
+              <a:spcAft>
+                <a:spcPts val="200"/>
+              </a:spcAft>
+            </a:pPr>
+            <a:r>
+              <a:rPr sz="1300">
+                <a:solidFill>
+                  <a:srgbClr val="3D5466"/>
+                </a:solidFill>
+                <a:latin typeface="Arial"/>
+              </a:rPr>
+              <a:t>▸  Implizite (latente) Bedarfe: Der Kunde beschreibt ein Problem, einen Schmerz oder eine Unzufriedenheit, ohne eine Lösung zu benennen. „Unsere Abschreibungen sind dieses Jahr sehr hoch." Oder: „Ich mache mir Sorgen wegen der Nachfolge." Latente Bedarfe sind die Grundlage – und oft der eigentliche Grund für das Gespräch.</a:t>
+            </a:r>
+          </a:p>
+        </p:txBody>
+      </p:sp>
+      <p:sp>
+        <p:nvSpPr>
+          <p:cNvPr id="9" name="Rectangle 8"/>
+          <p:cNvSpPr/>
+          <p:nvPr/>
+        </p:nvSpPr>
+        <p:spPr>
+          <a:xfrm>
+            <a:off x="0" y="6510528"/>
+            <a:ext cx="12188952" cy="347472"/>
+          </a:xfrm>
+          <a:prstGeom prst="rect">
+            <a:avLst/>
+          </a:prstGeom>
+          <a:solidFill>
+            <a:srgbClr val="0A1937"/>
+          </a:solidFill>
+          <a:ln>
+            <a:noFill/>
+          </a:ln>
+        </p:spPr>
+        <p:style>
+          <a:lnRef idx="1">
+            <a:schemeClr val="accent1"/>
+          </a:lnRef>
+          <a:fillRef idx="3">
+            <a:schemeClr val="accent1"/>
+          </a:fillRef>
+          <a:effectRef idx="2">
+            <a:schemeClr val="accent1"/>
+          </a:effectRef>
+          <a:fontRef idx="minor">
+            <a:schemeClr val="lt1"/>
+          </a:fontRef>
+        </p:style>
+        <p:txBody>
+          <a:bodyPr rtlCol="0" anchor="ctr"/>
+          <a:lstStyle/>
+          <a:p>
+            <a:pPr algn="ctr"/>
+          </a:p>
+        </p:txBody>
+      </p:sp>
+      <p:sp>
+        <p:nvSpPr>
+          <p:cNvPr id="10" name="TextBox 9"/>
+          <p:cNvSpPr txBox="1"/>
+          <p:nvPr/>
+        </p:nvSpPr>
+        <p:spPr>
+          <a:xfrm>
+            <a:off x="685800" y="6583680"/>
+            <a:ext cx="6490411" cy="256032"/>
+          </a:xfrm>
+          <a:prstGeom prst="rect">
+            <a:avLst/>
+          </a:prstGeom>
+          <a:noFill/>
+        </p:spPr>
+        <p:txBody>
+          <a:bodyPr wrap="none">
+            <a:spAutoFit/>
+          </a:bodyPr>
+          <a:lstStyle/>
+          <a:p>
+            <a:pPr algn="l"/>
+            <a:r>
+              <a:rPr sz="700">
+                <a:solidFill>
+                  <a:srgbClr val="A0B4D2"/>
+                </a:solidFill>
+                <a:latin typeface="JetBrains Mono"/>
+              </a:rPr>
+              <a:t>Benedikt Zoller Coaching  ·  FKB Campus  ·  M11</a:t>
             </a:r>
           </a:p>
         </p:txBody>
@@ -5151,14 +4866,6 @@
 <file path=ppt/slides/slide4.xml><?xml version="1.0" encoding="utf-8"?>
 <p:sld xmlns:a="http://schemas.openxmlformats.org/drawingml/2006/main" xmlns:p="http://schemas.openxmlformats.org/presentationml/2006/main" xmlns:r="http://schemas.openxmlformats.org/officeDocument/2006/relationships">
   <p:cSld>
-    <p:bg>
-      <p:bgPr>
-        <a:solidFill>
-          <a:srgbClr val="F8F8FA"/>
-        </a:solidFill>
-        <a:effectLst/>
-      </p:bgPr>
-    </p:bg>
     <p:spTree>
       <p:nvGrpSpPr>
         <p:cNvPr id="1" name=""/>
@@ -5168,125 +4875,20 @@
       <p:grpSpPr/>
       <p:sp>
         <p:nvSpPr>
-          <p:cNvPr id="2" name="TextBox 1"/>
-          <p:cNvSpPr txBox="1"/>
-          <p:nvPr/>
-        </p:nvSpPr>
-        <p:spPr>
-          <a:xfrm>
-            <a:off x="609600" y="279400"/>
-            <a:ext cx="2540000" cy="279400"/>
-          </a:xfrm>
-          <a:prstGeom prst="rect">
-            <a:avLst/>
-          </a:prstGeom>
-          <a:noFill/>
-        </p:spPr>
-        <p:txBody>
-          <a:bodyPr wrap="square">
-            <a:normAutofit/>
-          </a:bodyPr>
-          <a:lstStyle/>
-          <a:p>
-            <a:pPr algn="l"/>
-            <a:r>
-              <a:rPr sz="1000" b="1" i="0">
-                <a:solidFill>
-                  <a:srgbClr val="191D2E"/>
-                </a:solidFill>
-                <a:latin typeface="Arial"/>
-              </a:rPr>
-              <a:t>FKB  Campus</a:t>
-            </a:r>
-          </a:p>
-        </p:txBody>
-      </p:sp>
-      <p:sp>
-        <p:nvSpPr>
-          <p:cNvPr id="3" name="TextBox 2"/>
-          <p:cNvSpPr txBox="1"/>
-          <p:nvPr/>
-        </p:nvSpPr>
-        <p:spPr>
-          <a:xfrm>
-            <a:off x="609600" y="279400"/>
-            <a:ext cx="10972800" cy="279400"/>
-          </a:xfrm>
-          <a:prstGeom prst="rect">
-            <a:avLst/>
-          </a:prstGeom>
-          <a:noFill/>
-        </p:spPr>
-        <p:txBody>
-          <a:bodyPr wrap="square">
-            <a:normAutofit/>
-          </a:bodyPr>
-          <a:lstStyle/>
-          <a:p>
-            <a:pPr algn="r"/>
-            <a:r>
-              <a:rPr sz="900" b="0" i="0">
-                <a:solidFill>
-                  <a:srgbClr val="7B7FA0"/>
-                </a:solidFill>
-                <a:latin typeface="Courier New"/>
-              </a:rPr>
-              <a:t>I · DER EISBERG DER KUNDENBEDÜRFNISSE</a:t>
-            </a:r>
-          </a:p>
-        </p:txBody>
-      </p:sp>
-      <p:sp>
-        <p:nvSpPr>
-          <p:cNvPr id="4" name="TextBox 3"/>
-          <p:cNvSpPr txBox="1"/>
-          <p:nvPr/>
-        </p:nvSpPr>
-        <p:spPr>
-          <a:xfrm>
-            <a:off x="609600" y="6426200"/>
-            <a:ext cx="10972800" cy="228600"/>
-          </a:xfrm>
-          <a:prstGeom prst="rect">
-            <a:avLst/>
-          </a:prstGeom>
-          <a:noFill/>
-        </p:spPr>
-        <p:txBody>
-          <a:bodyPr wrap="square">
-            <a:normAutofit/>
-          </a:bodyPr>
-          <a:lstStyle/>
-          <a:p>
-            <a:pPr algn="r"/>
-            <a:r>
-              <a:rPr sz="900" b="0" i="0">
-                <a:solidFill>
-                  <a:srgbClr val="7B7FA0"/>
-                </a:solidFill>
-                <a:latin typeface="Courier New"/>
-              </a:rPr>
-              <a:t>04</a:t>
-            </a:r>
-          </a:p>
-        </p:txBody>
-      </p:sp>
-      <p:sp>
-        <p:nvSpPr>
-          <p:cNvPr id="5" name="Rectangle 4"/>
+          <p:cNvPr id="2" name="Rectangle 1"/>
           <p:cNvSpPr/>
           <p:nvPr/>
         </p:nvSpPr>
         <p:spPr>
           <a:xfrm>
-            <a:off x="609600" y="825500"/>
-            <a:ext cx="10972800" cy="6350"/>
+            <a:off x="0" y="0"/>
+            <a:ext cx="12188952" cy="6858000"/>
           </a:xfrm>
           <a:prstGeom prst="rect">
             <a:avLst/>
           </a:prstGeom>
           <a:solidFill>
-            <a:srgbClr val="191D2E"/>
+            <a:srgbClr val="FFFFFF"/>
           </a:solidFill>
           <a:ln>
             <a:noFill/>
@@ -5316,90 +4918,20 @@
       </p:sp>
       <p:sp>
         <p:nvSpPr>
-          <p:cNvPr id="6" name="TextBox 5"/>
-          <p:cNvSpPr txBox="1"/>
-          <p:nvPr/>
-        </p:nvSpPr>
-        <p:spPr>
-          <a:xfrm>
-            <a:off x="609600" y="889000"/>
-            <a:ext cx="3810000" cy="177800"/>
-          </a:xfrm>
-          <a:prstGeom prst="rect">
-            <a:avLst/>
-          </a:prstGeom>
-          <a:noFill/>
-        </p:spPr>
-        <p:txBody>
-          <a:bodyPr wrap="square">
-            <a:normAutofit/>
-          </a:bodyPr>
-          <a:lstStyle/>
-          <a:p>
-            <a:pPr algn="l"/>
-            <a:r>
-              <a:rPr sz="900" b="0" i="0">
-                <a:solidFill>
-                  <a:srgbClr val="7B7FA0"/>
-                </a:solidFill>
-                <a:latin typeface="Courier New"/>
-              </a:rPr>
-              <a:t>Kernaussage</a:t>
-            </a:r>
-          </a:p>
-        </p:txBody>
-      </p:sp>
-      <p:sp>
-        <p:nvSpPr>
-          <p:cNvPr id="7" name="TextBox 6"/>
-          <p:cNvSpPr txBox="1"/>
-          <p:nvPr/>
-        </p:nvSpPr>
-        <p:spPr>
-          <a:xfrm>
-            <a:off x="609600" y="920750"/>
-            <a:ext cx="10972800" cy="1778000"/>
-          </a:xfrm>
-          <a:prstGeom prst="rect">
-            <a:avLst/>
-          </a:prstGeom>
-          <a:noFill/>
-        </p:spPr>
-        <p:txBody>
-          <a:bodyPr wrap="square">
-            <a:normAutofit/>
-          </a:bodyPr>
-          <a:lstStyle/>
-          <a:p>
-            <a:pPr algn="l"/>
-            <a:r>
-              <a:rPr sz="3800" b="0" i="0">
-                <a:solidFill>
-                  <a:srgbClr val="191D2E"/>
-                </a:solidFill>
-                <a:latin typeface="Georgia"/>
-              </a:rPr>
-              <a:t>Kunden sagen selten, was sie wirklich brauchen</a:t>
-            </a:r>
-          </a:p>
-        </p:txBody>
-      </p:sp>
-      <p:sp>
-        <p:nvSpPr>
-          <p:cNvPr id="8" name="Rectangle 7"/>
+          <p:cNvPr id="3" name="Rectangle 2"/>
           <p:cNvSpPr/>
           <p:nvPr/>
         </p:nvSpPr>
         <p:spPr>
           <a:xfrm>
-            <a:off x="609600" y="2762250"/>
-            <a:ext cx="10972800" cy="6350"/>
+            <a:off x="0" y="0"/>
+            <a:ext cx="12188952" cy="50292"/>
           </a:xfrm>
           <a:prstGeom prst="rect">
             <a:avLst/>
           </a:prstGeom>
           <a:solidFill>
-            <a:srgbClr val="191D2E"/>
+            <a:srgbClr val="1F2C56"/>
           </a:solidFill>
           <a:ln>
             <a:noFill/>
@@ -5429,14 +4961,194 @@
       </p:sp>
       <p:sp>
         <p:nvSpPr>
+          <p:cNvPr id="4" name="TextBox 3"/>
+          <p:cNvSpPr txBox="1"/>
+          <p:nvPr/>
+        </p:nvSpPr>
+        <p:spPr>
+          <a:xfrm>
+            <a:off x="685800" y="109728"/>
+            <a:ext cx="10817352" cy="228600"/>
+          </a:xfrm>
+          <a:prstGeom prst="rect">
+            <a:avLst/>
+          </a:prstGeom>
+          <a:noFill/>
+        </p:spPr>
+        <p:txBody>
+          <a:bodyPr wrap="none">
+            <a:spAutoFit/>
+          </a:bodyPr>
+          <a:lstStyle/>
+          <a:p>
+            <a:pPr algn="l"/>
+            <a:r>
+              <a:rPr sz="750">
+                <a:solidFill>
+                  <a:srgbClr val="78808C"/>
+                </a:solidFill>
+                <a:latin typeface="JetBrains Mono"/>
+              </a:rPr>
+              <a:t>M11  ·  SCHAUBILD</a:t>
+            </a:r>
+          </a:p>
+        </p:txBody>
+      </p:sp>
+      <p:sp>
+        <p:nvSpPr>
+          <p:cNvPr id="5" name="TextBox 4"/>
+          <p:cNvSpPr txBox="1"/>
+          <p:nvPr/>
+        </p:nvSpPr>
+        <p:spPr>
+          <a:xfrm>
+            <a:off x="685800" y="502920"/>
+            <a:ext cx="10817352" cy="594360"/>
+          </a:xfrm>
+          <a:prstGeom prst="rect">
+            <a:avLst/>
+          </a:prstGeom>
+          <a:noFill/>
+        </p:spPr>
+        <p:txBody>
+          <a:bodyPr wrap="square">
+            <a:spAutoFit/>
+          </a:bodyPr>
+          <a:lstStyle/>
+          <a:p>
+            <a:pPr algn="l"/>
+            <a:r>
+              <a:rPr sz="2000" b="1" i="0">
+                <a:solidFill>
+                  <a:srgbClr val="1F2C56"/>
+                </a:solidFill>
+                <a:latin typeface="Source Serif 4"/>
+              </a:rPr>
+              <a:t>Eisberg-Modell latente Bedarfe</a:t>
+            </a:r>
+          </a:p>
+        </p:txBody>
+      </p:sp>
+      <p:sp>
+        <p:nvSpPr>
+          <p:cNvPr id="6" name="Rectangle 5"/>
+          <p:cNvSpPr/>
+          <p:nvPr/>
+        </p:nvSpPr>
+        <p:spPr>
+          <a:xfrm>
+            <a:off x="685800" y="1143000"/>
+            <a:ext cx="10817352" cy="25400"/>
+          </a:xfrm>
+          <a:prstGeom prst="rect">
+            <a:avLst/>
+          </a:prstGeom>
+          <a:solidFill>
+            <a:srgbClr val="D9C089"/>
+          </a:solidFill>
+          <a:ln>
+            <a:noFill/>
+          </a:ln>
+        </p:spPr>
+        <p:style>
+          <a:lnRef idx="1">
+            <a:schemeClr val="accent1"/>
+          </a:lnRef>
+          <a:fillRef idx="3">
+            <a:schemeClr val="accent1"/>
+          </a:fillRef>
+          <a:effectRef idx="2">
+            <a:schemeClr val="accent1"/>
+          </a:effectRef>
+          <a:fontRef idx="minor">
+            <a:schemeClr val="lt1"/>
+          </a:fontRef>
+        </p:style>
+        <p:txBody>
+          <a:bodyPr rtlCol="0" anchor="ctr"/>
+          <a:lstStyle/>
+          <a:p>
+            <a:pPr algn="ctr"/>
+          </a:p>
+        </p:txBody>
+      </p:sp>
+      <p:pic>
+        <p:nvPicPr>
+          <p:cNvPr id="7" name="Picture 6" descr="image.png"/>
+          <p:cNvPicPr>
+            <a:picLocks noChangeAspect="1"/>
+          </p:cNvPicPr>
+          <p:nvPr/>
+        </p:nvPicPr>
+        <p:blipFill>
+          <a:blip r:embed="rId2"/>
+          <a:stretch>
+            <a:fillRect/>
+          </a:stretch>
+        </p:blipFill>
+        <p:spPr>
+          <a:xfrm>
+            <a:off x="2554863" y="1325880"/>
+            <a:ext cx="7079225" cy="4937760"/>
+          </a:xfrm>
+          <a:prstGeom prst="rect">
+            <a:avLst/>
+          </a:prstGeom>
+        </p:spPr>
+      </p:pic>
+      <p:sp>
+        <p:nvSpPr>
+          <p:cNvPr id="8" name="Rectangle 7"/>
+          <p:cNvSpPr/>
+          <p:nvPr/>
+        </p:nvSpPr>
+        <p:spPr>
+          <a:xfrm>
+            <a:off x="0" y="6510528"/>
+            <a:ext cx="12188952" cy="347472"/>
+          </a:xfrm>
+          <a:prstGeom prst="rect">
+            <a:avLst/>
+          </a:prstGeom>
+          <a:solidFill>
+            <a:srgbClr val="0A1937"/>
+          </a:solidFill>
+          <a:ln>
+            <a:noFill/>
+          </a:ln>
+        </p:spPr>
+        <p:style>
+          <a:lnRef idx="1">
+            <a:schemeClr val="accent1"/>
+          </a:lnRef>
+          <a:fillRef idx="3">
+            <a:schemeClr val="accent1"/>
+          </a:fillRef>
+          <a:effectRef idx="2">
+            <a:schemeClr val="accent1"/>
+          </a:effectRef>
+          <a:fontRef idx="minor">
+            <a:schemeClr val="lt1"/>
+          </a:fontRef>
+        </p:style>
+        <p:txBody>
+          <a:bodyPr rtlCol="0" anchor="ctr"/>
+          <a:lstStyle/>
+          <a:p>
+            <a:pPr algn="ctr"/>
+          </a:p>
+        </p:txBody>
+      </p:sp>
+      <p:sp>
+        <p:nvSpPr>
           <p:cNvPr id="9" name="TextBox 8"/>
           <p:cNvSpPr txBox="1"/>
           <p:nvPr/>
         </p:nvSpPr>
         <p:spPr>
           <a:xfrm>
-            <a:off x="609600" y="2825750"/>
-            <a:ext cx="5207000" cy="2857500"/>
+            <a:off x="685800" y="6583680"/>
+            <a:ext cx="6490411" cy="256032"/>
           </a:xfrm>
           <a:prstGeom prst="rect">
             <a:avLst/>
@@ -5444,20 +5156,20 @@
           <a:noFill/>
         </p:spPr>
         <p:txBody>
-          <a:bodyPr wrap="square">
-            <a:normAutofit/>
+          <a:bodyPr wrap="none">
+            <a:spAutoFit/>
           </a:bodyPr>
           <a:lstStyle/>
           <a:p>
             <a:pPr algn="l"/>
             <a:r>
-              <a:rPr sz="1400" b="0" i="0">
-                <a:solidFill>
-                  <a:srgbClr val="191D2E"/>
-                </a:solidFill>
-                <a:latin typeface="Georgia"/>
-              </a:rPr>
-              <a:t>Explizite Bedarfe werden direkt geäußert: 'Ich brauche einen Kredit.' Latente Bedarfe liegen darunter — noch nicht formuliert, oft nicht einmal bewusst. Sie zu entdecken ist der Unterschied zwischen Transaktions- und Beziehungsbanking.</a:t>
+              <a:rPr sz="700">
+                <a:solidFill>
+                  <a:srgbClr val="A0B4D2"/>
+                </a:solidFill>
+                <a:latin typeface="JetBrains Mono"/>
+              </a:rPr>
+              <a:t>Benedikt Zoller Coaching  ·  FKB Campus  ·  M11</a:t>
             </a:r>
           </a:p>
         </p:txBody>
@@ -5470,8 +5182,8 @@
         </p:nvSpPr>
         <p:spPr>
           <a:xfrm>
-            <a:off x="6096000" y="2825750"/>
-            <a:ext cx="4851400" cy="177800"/>
+            <a:off x="7176211" y="6583680"/>
+            <a:ext cx="4326940" cy="256032"/>
           </a:xfrm>
           <a:prstGeom prst="rect">
             <a:avLst/>
@@ -5479,55 +5191,20 @@
           <a:noFill/>
         </p:spPr>
         <p:txBody>
-          <a:bodyPr wrap="square">
-            <a:normAutofit/>
+          <a:bodyPr wrap="none">
+            <a:spAutoFit/>
           </a:bodyPr>
           <a:lstStyle/>
           <a:p>
-            <a:pPr algn="l"/>
-            <a:r>
-              <a:rPr sz="900" b="0" i="0">
-                <a:solidFill>
-                  <a:srgbClr val="1F2B56"/>
-                </a:solidFill>
-                <a:latin typeface="Courier New"/>
-              </a:rPr>
-              <a:t>Mitnahme</a:t>
-            </a:r>
-          </a:p>
-        </p:txBody>
-      </p:sp>
-      <p:sp>
-        <p:nvSpPr>
-          <p:cNvPr id="11" name="TextBox 10"/>
-          <p:cNvSpPr txBox="1"/>
-          <p:nvPr/>
-        </p:nvSpPr>
-        <p:spPr>
-          <a:xfrm>
-            <a:off x="6096000" y="3041650"/>
-            <a:ext cx="4851400" cy="2667000"/>
-          </a:xfrm>
-          <a:prstGeom prst="rect">
-            <a:avLst/>
-          </a:prstGeom>
-          <a:noFill/>
-        </p:spPr>
-        <p:txBody>
-          <a:bodyPr wrap="square">
-            <a:normAutofit/>
-          </a:bodyPr>
-          <a:lstStyle/>
-          <a:p>
-            <a:pPr algn="l"/>
-            <a:r>
-              <a:rPr sz="1400" b="0" i="1">
-                <a:solidFill>
-                  <a:srgbClr val="191D2E"/>
-                </a:solidFill>
-                <a:latin typeface="Georgia"/>
-              </a:rPr>
-              <a:t>Wer nur explizite Bedarfe bedient, ist austauschbar. Wer latente Bedarfe aufdeckt, wird Partner.</a:t>
+            <a:pPr algn="r"/>
+            <a:r>
+              <a:rPr sz="700">
+                <a:solidFill>
+                  <a:srgbClr val="A0B4D2"/>
+                </a:solidFill>
+                <a:latin typeface="JetBrains Mono"/>
+              </a:rPr>
+              <a:t>Schaubild</a:t>
             </a:r>
           </a:p>
         </p:txBody>
@@ -5543,14 +5220,6 @@
 <file path=ppt/slides/slide5.xml><?xml version="1.0" encoding="utf-8"?>
 <p:sld xmlns:a="http://schemas.openxmlformats.org/drawingml/2006/main" xmlns:p="http://schemas.openxmlformats.org/presentationml/2006/main" xmlns:r="http://schemas.openxmlformats.org/officeDocument/2006/relationships">
   <p:cSld>
-    <p:bg>
-      <p:bgPr>
-        <a:solidFill>
-          <a:srgbClr val="1F2B56"/>
-        </a:solidFill>
-        <a:effectLst/>
-      </p:bgPr>
-    </p:bg>
     <p:spTree>
       <p:nvGrpSpPr>
         <p:cNvPr id="1" name=""/>
@@ -5560,71 +5229,87 @@
       <p:grpSpPr/>
       <p:sp>
         <p:nvSpPr>
-          <p:cNvPr id="2" name="TextBox 1"/>
-          <p:cNvSpPr txBox="1"/>
-          <p:nvPr/>
-        </p:nvSpPr>
-        <p:spPr>
-          <a:xfrm>
-            <a:off x="609600" y="279400"/>
-            <a:ext cx="2540000" cy="279400"/>
-          </a:xfrm>
-          <a:prstGeom prst="rect">
-            <a:avLst/>
-          </a:prstGeom>
-          <a:noFill/>
-        </p:spPr>
-        <p:txBody>
-          <a:bodyPr wrap="square">
-            <a:normAutofit/>
-          </a:bodyPr>
-          <a:lstStyle/>
-          <a:p>
-            <a:pPr algn="l"/>
-            <a:r>
-              <a:rPr sz="1000" b="1" i="0">
-                <a:solidFill>
-                  <a:srgbClr val="F8F8FA"/>
-                </a:solidFill>
-                <a:latin typeface="Arial"/>
-              </a:rPr>
-              <a:t>FKB  Campus</a:t>
-            </a:r>
-          </a:p>
-        </p:txBody>
-      </p:sp>
-      <p:sp>
-        <p:nvSpPr>
-          <p:cNvPr id="3" name="TextBox 2"/>
-          <p:cNvSpPr txBox="1"/>
-          <p:nvPr/>
-        </p:nvSpPr>
-        <p:spPr>
-          <a:xfrm>
-            <a:off x="609600" y="279400"/>
-            <a:ext cx="10972800" cy="279400"/>
-          </a:xfrm>
-          <a:prstGeom prst="rect">
-            <a:avLst/>
-          </a:prstGeom>
-          <a:noFill/>
-        </p:spPr>
-        <p:txBody>
-          <a:bodyPr wrap="square">
-            <a:normAutofit/>
-          </a:bodyPr>
-          <a:lstStyle/>
-          <a:p>
-            <a:pPr algn="r"/>
-            <a:r>
-              <a:rPr sz="900" b="0" i="0">
-                <a:solidFill>
-                  <a:srgbClr val="7B7FA0"/>
-                </a:solidFill>
-                <a:latin typeface="Courier New"/>
-              </a:rPr>
-              <a:t>SPIN IN DER TIEFE</a:t>
-            </a:r>
+          <p:cNvPr id="2" name="Rectangle 1"/>
+          <p:cNvSpPr/>
+          <p:nvPr/>
+        </p:nvSpPr>
+        <p:spPr>
+          <a:xfrm>
+            <a:off x="0" y="0"/>
+            <a:ext cx="12188952" cy="6858000"/>
+          </a:xfrm>
+          <a:prstGeom prst="rect">
+            <a:avLst/>
+          </a:prstGeom>
+          <a:solidFill>
+            <a:srgbClr val="EDEDF3"/>
+          </a:solidFill>
+          <a:ln>
+            <a:noFill/>
+          </a:ln>
+        </p:spPr>
+        <p:style>
+          <a:lnRef idx="1">
+            <a:schemeClr val="accent1"/>
+          </a:lnRef>
+          <a:fillRef idx="3">
+            <a:schemeClr val="accent1"/>
+          </a:fillRef>
+          <a:effectRef idx="2">
+            <a:schemeClr val="accent1"/>
+          </a:effectRef>
+          <a:fontRef idx="minor">
+            <a:schemeClr val="lt1"/>
+          </a:fontRef>
+        </p:style>
+        <p:txBody>
+          <a:bodyPr rtlCol="0" anchor="ctr"/>
+          <a:lstStyle/>
+          <a:p>
+            <a:pPr algn="ctr"/>
+          </a:p>
+        </p:txBody>
+      </p:sp>
+      <p:sp>
+        <p:nvSpPr>
+          <p:cNvPr id="3" name="Rectangle 2"/>
+          <p:cNvSpPr/>
+          <p:nvPr/>
+        </p:nvSpPr>
+        <p:spPr>
+          <a:xfrm>
+            <a:off x="0" y="0"/>
+            <a:ext cx="12188952" cy="50292"/>
+          </a:xfrm>
+          <a:prstGeom prst="rect">
+            <a:avLst/>
+          </a:prstGeom>
+          <a:solidFill>
+            <a:srgbClr val="1F2C56"/>
+          </a:solidFill>
+          <a:ln>
+            <a:noFill/>
+          </a:ln>
+        </p:spPr>
+        <p:style>
+          <a:lnRef idx="1">
+            <a:schemeClr val="accent1"/>
+          </a:lnRef>
+          <a:fillRef idx="3">
+            <a:schemeClr val="accent1"/>
+          </a:fillRef>
+          <a:effectRef idx="2">
+            <a:schemeClr val="accent1"/>
+          </a:effectRef>
+          <a:fontRef idx="minor">
+            <a:schemeClr val="lt1"/>
+          </a:fontRef>
+        </p:style>
+        <p:txBody>
+          <a:bodyPr rtlCol="0" anchor="ctr"/>
+          <a:lstStyle/>
+          <a:p>
+            <a:pPr algn="ctr"/>
           </a:p>
         </p:txBody>
       </p:sp>
@@ -5636,8 +5321,8 @@
         </p:nvSpPr>
         <p:spPr>
           <a:xfrm>
-            <a:off x="609600" y="6426200"/>
-            <a:ext cx="10972800" cy="228600"/>
+            <a:off x="685800" y="109728"/>
+            <a:ext cx="10817352" cy="228600"/>
           </a:xfrm>
           <a:prstGeom prst="rect">
             <a:avLst/>
@@ -5645,91 +5330,107 @@
           <a:noFill/>
         </p:spPr>
         <p:txBody>
-          <a:bodyPr wrap="square">
-            <a:normAutofit/>
+          <a:bodyPr wrap="none">
+            <a:spAutoFit/>
           </a:bodyPr>
           <a:lstStyle/>
           <a:p>
-            <a:pPr algn="r"/>
-            <a:r>
-              <a:rPr sz="900" b="0" i="0">
-                <a:solidFill>
-                  <a:srgbClr val="7B7FA0"/>
-                </a:solidFill>
-                <a:latin typeface="Courier New"/>
-              </a:rPr>
-              <a:t>05</a:t>
-            </a:r>
-          </a:p>
-        </p:txBody>
-      </p:sp>
-      <p:sp>
-        <p:nvSpPr>
-          <p:cNvPr id="5" name="TextBox 4"/>
-          <p:cNvSpPr txBox="1"/>
-          <p:nvPr/>
-        </p:nvSpPr>
-        <p:spPr>
-          <a:xfrm>
-            <a:off x="609600" y="635000"/>
-            <a:ext cx="5461000" cy="5461000"/>
-          </a:xfrm>
-          <a:prstGeom prst="rect">
-            <a:avLst/>
-          </a:prstGeom>
-          <a:noFill/>
-        </p:spPr>
-        <p:txBody>
-          <a:bodyPr wrap="square">
-            <a:normAutofit/>
-          </a:bodyPr>
-          <a:lstStyle/>
-          <a:p>
             <a:pPr algn="l"/>
             <a:r>
-              <a:rPr sz="28000" b="0" i="1">
-                <a:solidFill>
-                  <a:srgbClr val="D9BF7A"/>
-                </a:solidFill>
-                <a:latin typeface="Georgia"/>
-              </a:rPr>
-              <a:t>II</a:t>
-            </a:r>
-          </a:p>
-        </p:txBody>
-      </p:sp>
-      <p:sp>
-        <p:nvSpPr>
-          <p:cNvPr id="6" name="TextBox 5"/>
-          <p:cNvSpPr txBox="1"/>
-          <p:nvPr/>
-        </p:nvSpPr>
-        <p:spPr>
-          <a:xfrm>
-            <a:off x="6731000" y="4064000"/>
-            <a:ext cx="4851400" cy="1778000"/>
-          </a:xfrm>
-          <a:prstGeom prst="rect">
-            <a:avLst/>
-          </a:prstGeom>
-          <a:noFill/>
-        </p:spPr>
-        <p:txBody>
-          <a:bodyPr wrap="square">
-            <a:normAutofit/>
-          </a:bodyPr>
-          <a:lstStyle/>
-          <a:p>
-            <a:pPr algn="r"/>
-            <a:r>
-              <a:rPr sz="3800" b="0" i="0">
-                <a:solidFill>
-                  <a:srgbClr val="F8F8FA"/>
-                </a:solidFill>
-                <a:latin typeface="Georgia"/>
-              </a:rPr>
-              <a:t>SPIN in der Tiefe</a:t>
-            </a:r>
+              <a:rPr sz="750">
+                <a:solidFill>
+                  <a:srgbClr val="78808C"/>
+                </a:solidFill>
+                <a:latin typeface="JetBrains Mono"/>
+              </a:rPr>
+              <a:t>M11  ·  INHALT</a:t>
+            </a:r>
+          </a:p>
+        </p:txBody>
+      </p:sp>
+      <p:sp>
+        <p:nvSpPr>
+          <p:cNvPr id="5" name="Rectangle 4"/>
+          <p:cNvSpPr/>
+          <p:nvPr/>
+        </p:nvSpPr>
+        <p:spPr>
+          <a:xfrm>
+            <a:off x="0" y="1234440"/>
+            <a:ext cx="12188952" cy="12700"/>
+          </a:xfrm>
+          <a:prstGeom prst="rect">
+            <a:avLst/>
+          </a:prstGeom>
+          <a:solidFill>
+            <a:srgbClr val="D8DFE4"/>
+          </a:solidFill>
+          <a:ln>
+            <a:noFill/>
+          </a:ln>
+        </p:spPr>
+        <p:style>
+          <a:lnRef idx="1">
+            <a:schemeClr val="accent1"/>
+          </a:lnRef>
+          <a:fillRef idx="3">
+            <a:schemeClr val="accent1"/>
+          </a:fillRef>
+          <a:effectRef idx="2">
+            <a:schemeClr val="accent1"/>
+          </a:effectRef>
+          <a:fontRef idx="minor">
+            <a:schemeClr val="lt1"/>
+          </a:fontRef>
+        </p:style>
+        <p:txBody>
+          <a:bodyPr rtlCol="0" anchor="ctr"/>
+          <a:lstStyle/>
+          <a:p>
+            <a:pPr algn="ctr"/>
+          </a:p>
+        </p:txBody>
+      </p:sp>
+      <p:sp>
+        <p:nvSpPr>
+          <p:cNvPr id="6" name="Rectangle 5"/>
+          <p:cNvSpPr/>
+          <p:nvPr/>
+        </p:nvSpPr>
+        <p:spPr>
+          <a:xfrm>
+            <a:off x="685800" y="502920"/>
+            <a:ext cx="36576" cy="658368"/>
+          </a:xfrm>
+          <a:prstGeom prst="rect">
+            <a:avLst/>
+          </a:prstGeom>
+          <a:solidFill>
+            <a:srgbClr val="D9C089"/>
+          </a:solidFill>
+          <a:ln>
+            <a:noFill/>
+          </a:ln>
+        </p:spPr>
+        <p:style>
+          <a:lnRef idx="1">
+            <a:schemeClr val="accent1"/>
+          </a:lnRef>
+          <a:fillRef idx="3">
+            <a:schemeClr val="accent1"/>
+          </a:fillRef>
+          <a:effectRef idx="2">
+            <a:schemeClr val="accent1"/>
+          </a:effectRef>
+          <a:fontRef idx="minor">
+            <a:schemeClr val="lt1"/>
+          </a:fontRef>
+        </p:style>
+        <p:txBody>
+          <a:bodyPr rtlCol="0" anchor="ctr"/>
+          <a:lstStyle/>
+          <a:p>
+            <a:pPr algn="ctr"/>
           </a:p>
         </p:txBody>
       </p:sp>
@@ -5741,8 +5442,8 @@
         </p:nvSpPr>
         <p:spPr>
           <a:xfrm>
-            <a:off x="6731000" y="5842000"/>
-            <a:ext cx="4851400" cy="635000"/>
+            <a:off x="813816" y="502920"/>
+            <a:ext cx="10634472" cy="685800"/>
           </a:xfrm>
           <a:prstGeom prst="rect">
             <a:avLst/>
@@ -5751,19 +5452,234 @@
         </p:spPr>
         <p:txBody>
           <a:bodyPr wrap="square">
-            <a:normAutofit/>
+            <a:spAutoFit/>
           </a:bodyPr>
           <a:lstStyle/>
           <a:p>
-            <a:pPr algn="r"/>
-            <a:r>
-              <a:rPr sz="1400" b="0" i="1">
-                <a:solidFill>
-                  <a:srgbClr val="7B7FA0"/>
-                </a:solidFill>
-                <a:latin typeface="Georgia"/>
-              </a:rPr>
-              <a:t>Implizites in Explizites verwandeln</a:t>
+            <a:pPr algn="l"/>
+            <a:r>
+              <a:rPr sz="2400" b="1" i="0">
+                <a:solidFill>
+                  <a:srgbClr val="1F2C56"/>
+                </a:solidFill>
+                <a:latin typeface="Source Serif 4"/>
+              </a:rPr>
+              <a:t>Warum Kunden latente Bedarfe nicht artikulieren</a:t>
+            </a:r>
+          </a:p>
+        </p:txBody>
+      </p:sp>
+      <p:sp>
+        <p:nvSpPr>
+          <p:cNvPr id="8" name="TextBox 7"/>
+          <p:cNvSpPr txBox="1"/>
+          <p:nvPr/>
+        </p:nvSpPr>
+        <p:spPr>
+          <a:xfrm>
+            <a:off x="685800" y="1417320"/>
+            <a:ext cx="10817352" cy="5029200"/>
+          </a:xfrm>
+          <a:prstGeom prst="rect">
+            <a:avLst/>
+          </a:prstGeom>
+          <a:noFill/>
+        </p:spPr>
+        <p:txBody>
+          <a:bodyPr wrap="square">
+            <a:spAutoFit/>
+          </a:bodyPr>
+          <a:lstStyle/>
+          <a:p>
+            <a:pPr>
+              <a:spcBef>
+                <a:spcPts val="400"/>
+              </a:spcBef>
+              <a:spcAft>
+                <a:spcPts val="200"/>
+              </a:spcAft>
+            </a:pPr>
+            <a:r>
+              <a:rPr sz="1200">
+                <a:solidFill>
+                  <a:srgbClr val="3D5466"/>
+                </a:solidFill>
+                <a:latin typeface="Arial"/>
+              </a:rPr>
+              <a:t>Es gibt vier Hauptgründe, warum Kunden ihre eigentlichen Bedarfe nicht spontan nennen (praxisbasiert; vgl. Rackham, 1988 , S. 57–62):</a:t>
+            </a:r>
+          </a:p>
+          <a:p>
+            <a:pPr>
+              <a:spcBef>
+                <a:spcPts val="400"/>
+              </a:spcBef>
+              <a:spcAft>
+                <a:spcPts val="200"/>
+              </a:spcAft>
+            </a:pPr>
+            <a:r>
+              <a:rPr sz="1300">
+                <a:solidFill>
+                  <a:srgbClr val="3D5466"/>
+                </a:solidFill>
+                <a:latin typeface="Arial"/>
+              </a:rPr>
+              <a:t>▸  Unbewusstheit: Der Bedarf ist noch nicht als solcher erkannt. Der Kunde spürt das Problem, hat es aber nicht als lösungswürdig eingeordnet.</a:t>
+            </a:r>
+          </a:p>
+          <a:p>
+            <a:pPr>
+              <a:spcBef>
+                <a:spcPts val="400"/>
+              </a:spcBef>
+              <a:spcAft>
+                <a:spcPts val="200"/>
+              </a:spcAft>
+            </a:pPr>
+            <a:r>
+              <a:rPr sz="1300">
+                <a:solidFill>
+                  <a:srgbClr val="3D5466"/>
+                </a:solidFill>
+                <a:latin typeface="Arial"/>
+              </a:rPr>
+              <a:t>▸  Schambarriere: Sensitive Themen wie Nachfolge, Unternehmenskrise oder Privatsphäre werden nicht freiwillig angesprochen.</a:t>
+            </a:r>
+          </a:p>
+          <a:p>
+            <a:pPr>
+              <a:spcBef>
+                <a:spcPts val="400"/>
+              </a:spcBef>
+              <a:spcAft>
+                <a:spcPts val="200"/>
+              </a:spcAft>
+            </a:pPr>
+            <a:r>
+              <a:rPr sz="1300">
+                <a:solidFill>
+                  <a:srgbClr val="3D5466"/>
+                </a:solidFill>
+                <a:latin typeface="Arial"/>
+              </a:rPr>
+              <a:t>▸  Fehlende Sicherheit: Der Kunde weiß nicht, ob der Berater kompetent genug ist für das eigentliche Thema. Im Volksbankenalltag kommt ein verstärkender Faktor hinzu: Häufige Beraterwechsel. Wer innerhalb von sechs Jahren den vierten Berater bekommt, hat gelernt, sensible Themen wie Nachfolge oder Unternehmenskrise nicht mehr anzusprechen – das Vertrauen für diese Ebene muss jedes Mal neu aufgebaut werden. Praxistipp: Eigene Erfahrungen kurz einbringen öffnet schneller als jede Frage – „Ich habe das bei einem anderen Kunden ähnlich erlebt, wie er das gelöst hat, war interessant…" signalisiert Kompetenz und schafft Vertrautheit.</a:t>
+            </a:r>
+          </a:p>
+          <a:p>
+            <a:pPr>
+              <a:spcBef>
+                <a:spcPts val="400"/>
+              </a:spcBef>
+              <a:spcAft>
+                <a:spcPts val="200"/>
+              </a:spcAft>
+            </a:pPr>
+            <a:r>
+              <a:rPr sz="1300">
+                <a:solidFill>
+                  <a:srgbClr val="3D5466"/>
+                </a:solidFill>
+                <a:latin typeface="Arial"/>
+              </a:rPr>
+              <a:t>▸  Gewohnheit: Der Kunde ist es gewohnt, dass Bankgespräche Produktgespräche sind – er stellt sich selbst anders ein.</a:t>
+            </a:r>
+          </a:p>
+          <a:p>
+            <a:pPr>
+              <a:spcBef>
+                <a:spcPts val="400"/>
+              </a:spcBef>
+              <a:spcAft>
+                <a:spcPts val="200"/>
+              </a:spcAft>
+            </a:pPr>
+            <a:r>
+              <a:rPr sz="1200">
+                <a:solidFill>
+                  <a:srgbClr val="3D5466"/>
+                </a:solidFill>
+                <a:latin typeface="Arial"/>
+              </a:rPr>
+              <a:t>Der Berater, der latente Bedarfe erkennen will, muss aktiv dazu einladen: durch offene Haltung, gezielte Fragen und echtes Zuhören.</a:t>
+            </a:r>
+          </a:p>
+        </p:txBody>
+      </p:sp>
+      <p:sp>
+        <p:nvSpPr>
+          <p:cNvPr id="9" name="Rectangle 8"/>
+          <p:cNvSpPr/>
+          <p:nvPr/>
+        </p:nvSpPr>
+        <p:spPr>
+          <a:xfrm>
+            <a:off x="0" y="6510528"/>
+            <a:ext cx="12188952" cy="347472"/>
+          </a:xfrm>
+          <a:prstGeom prst="rect">
+            <a:avLst/>
+          </a:prstGeom>
+          <a:solidFill>
+            <a:srgbClr val="0A1937"/>
+          </a:solidFill>
+          <a:ln>
+            <a:noFill/>
+          </a:ln>
+        </p:spPr>
+        <p:style>
+          <a:lnRef idx="1">
+            <a:schemeClr val="accent1"/>
+          </a:lnRef>
+          <a:fillRef idx="3">
+            <a:schemeClr val="accent1"/>
+          </a:fillRef>
+          <a:effectRef idx="2">
+            <a:schemeClr val="accent1"/>
+          </a:effectRef>
+          <a:fontRef idx="minor">
+            <a:schemeClr val="lt1"/>
+          </a:fontRef>
+        </p:style>
+        <p:txBody>
+          <a:bodyPr rtlCol="0" anchor="ctr"/>
+          <a:lstStyle/>
+          <a:p>
+            <a:pPr algn="ctr"/>
+          </a:p>
+        </p:txBody>
+      </p:sp>
+      <p:sp>
+        <p:nvSpPr>
+          <p:cNvPr id="10" name="TextBox 9"/>
+          <p:cNvSpPr txBox="1"/>
+          <p:nvPr/>
+        </p:nvSpPr>
+        <p:spPr>
+          <a:xfrm>
+            <a:off x="685800" y="6583680"/>
+            <a:ext cx="6490411" cy="256032"/>
+          </a:xfrm>
+          <a:prstGeom prst="rect">
+            <a:avLst/>
+          </a:prstGeom>
+          <a:noFill/>
+        </p:spPr>
+        <p:txBody>
+          <a:bodyPr wrap="none">
+            <a:spAutoFit/>
+          </a:bodyPr>
+          <a:lstStyle/>
+          <a:p>
+            <a:pPr algn="l"/>
+            <a:r>
+              <a:rPr sz="700">
+                <a:solidFill>
+                  <a:srgbClr val="A0B4D2"/>
+                </a:solidFill>
+                <a:latin typeface="JetBrains Mono"/>
+              </a:rPr>
+              <a:t>Benedikt Zoller Coaching  ·  FKB Campus  ·  M11</a:t>
             </a:r>
           </a:p>
         </p:txBody>
@@ -5779,14 +5695,6 @@
 <file path=ppt/slides/slide6.xml><?xml version="1.0" encoding="utf-8"?>
 <p:sld xmlns:a="http://schemas.openxmlformats.org/drawingml/2006/main" xmlns:p="http://schemas.openxmlformats.org/presentationml/2006/main" xmlns:r="http://schemas.openxmlformats.org/officeDocument/2006/relationships">
   <p:cSld>
-    <p:bg>
-      <p:bgPr>
-        <a:solidFill>
-          <a:srgbClr val="F8F8FA"/>
-        </a:solidFill>
-        <a:effectLst/>
-      </p:bgPr>
-    </p:bg>
     <p:spTree>
       <p:nvGrpSpPr>
         <p:cNvPr id="1" name=""/>
@@ -5796,125 +5704,20 @@
       <p:grpSpPr/>
       <p:sp>
         <p:nvSpPr>
-          <p:cNvPr id="2" name="TextBox 1"/>
-          <p:cNvSpPr txBox="1"/>
-          <p:nvPr/>
-        </p:nvSpPr>
-        <p:spPr>
-          <a:xfrm>
-            <a:off x="609600" y="279400"/>
-            <a:ext cx="2540000" cy="279400"/>
-          </a:xfrm>
-          <a:prstGeom prst="rect">
-            <a:avLst/>
-          </a:prstGeom>
-          <a:noFill/>
-        </p:spPr>
-        <p:txBody>
-          <a:bodyPr wrap="square">
-            <a:normAutofit/>
-          </a:bodyPr>
-          <a:lstStyle/>
-          <a:p>
-            <a:pPr algn="l"/>
-            <a:r>
-              <a:rPr sz="1000" b="1" i="0">
-                <a:solidFill>
-                  <a:srgbClr val="191D2E"/>
-                </a:solidFill>
-                <a:latin typeface="Arial"/>
-              </a:rPr>
-              <a:t>FKB  Campus</a:t>
-            </a:r>
-          </a:p>
-        </p:txBody>
-      </p:sp>
-      <p:sp>
-        <p:nvSpPr>
-          <p:cNvPr id="3" name="TextBox 2"/>
-          <p:cNvSpPr txBox="1"/>
-          <p:nvPr/>
-        </p:nvSpPr>
-        <p:spPr>
-          <a:xfrm>
-            <a:off x="609600" y="279400"/>
-            <a:ext cx="10972800" cy="279400"/>
-          </a:xfrm>
-          <a:prstGeom prst="rect">
-            <a:avLst/>
-          </a:prstGeom>
-          <a:noFill/>
-        </p:spPr>
-        <p:txBody>
-          <a:bodyPr wrap="square">
-            <a:normAutofit/>
-          </a:bodyPr>
-          <a:lstStyle/>
-          <a:p>
-            <a:pPr algn="r"/>
-            <a:r>
-              <a:rPr sz="900" b="0" i="0">
-                <a:solidFill>
-                  <a:srgbClr val="7B7FA0"/>
-                </a:solidFill>
-                <a:latin typeface="Courier New"/>
-              </a:rPr>
-              <a:t>II · SPIN IN DER TIEFE</a:t>
-            </a:r>
-          </a:p>
-        </p:txBody>
-      </p:sp>
-      <p:sp>
-        <p:nvSpPr>
-          <p:cNvPr id="4" name="TextBox 3"/>
-          <p:cNvSpPr txBox="1"/>
-          <p:nvPr/>
-        </p:nvSpPr>
-        <p:spPr>
-          <a:xfrm>
-            <a:off x="609600" y="6426200"/>
-            <a:ext cx="10972800" cy="228600"/>
-          </a:xfrm>
-          <a:prstGeom prst="rect">
-            <a:avLst/>
-          </a:prstGeom>
-          <a:noFill/>
-        </p:spPr>
-        <p:txBody>
-          <a:bodyPr wrap="square">
-            <a:normAutofit/>
-          </a:bodyPr>
-          <a:lstStyle/>
-          <a:p>
-            <a:pPr algn="r"/>
-            <a:r>
-              <a:rPr sz="900" b="0" i="0">
-                <a:solidFill>
-                  <a:srgbClr val="7B7FA0"/>
-                </a:solidFill>
-                <a:latin typeface="Courier New"/>
-              </a:rPr>
-              <a:t>06</a:t>
-            </a:r>
-          </a:p>
-        </p:txBody>
-      </p:sp>
-      <p:sp>
-        <p:nvSpPr>
-          <p:cNvPr id="5" name="Rectangle 4"/>
+          <p:cNvPr id="2" name="Rectangle 1"/>
           <p:cNvSpPr/>
           <p:nvPr/>
         </p:nvSpPr>
         <p:spPr>
           <a:xfrm>
-            <a:off x="609600" y="825500"/>
-            <a:ext cx="10972800" cy="6350"/>
+            <a:off x="0" y="0"/>
+            <a:ext cx="12188952" cy="6858000"/>
           </a:xfrm>
           <a:prstGeom prst="rect">
             <a:avLst/>
           </a:prstGeom>
           <a:solidFill>
-            <a:srgbClr val="191D2E"/>
+            <a:srgbClr val="EDEDF3"/>
           </a:solidFill>
           <a:ln>
             <a:noFill/>
@@ -5944,55 +5747,20 @@
       </p:sp>
       <p:sp>
         <p:nvSpPr>
-          <p:cNvPr id="6" name="TextBox 5"/>
-          <p:cNvSpPr txBox="1"/>
-          <p:nvPr/>
-        </p:nvSpPr>
-        <p:spPr>
-          <a:xfrm>
-            <a:off x="609600" y="920750"/>
-            <a:ext cx="10972800" cy="1778000"/>
-          </a:xfrm>
-          <a:prstGeom prst="rect">
-            <a:avLst/>
-          </a:prstGeom>
-          <a:noFill/>
-        </p:spPr>
-        <p:txBody>
-          <a:bodyPr wrap="square">
-            <a:normAutofit/>
-          </a:bodyPr>
-          <a:lstStyle/>
-          <a:p>
-            <a:pPr algn="l"/>
-            <a:r>
-              <a:rPr sz="3800" b="0" i="0">
-                <a:solidFill>
-                  <a:srgbClr val="191D2E"/>
-                </a:solidFill>
-                <a:latin typeface="Georgia"/>
-              </a:rPr>
-              <a:t>Vom Problem zum Bedarf — die SPIN-Logik</a:t>
-            </a:r>
-          </a:p>
-        </p:txBody>
-      </p:sp>
-      <p:sp>
-        <p:nvSpPr>
-          <p:cNvPr id="7" name="Rectangle 6"/>
+          <p:cNvPr id="3" name="Rectangle 2"/>
           <p:cNvSpPr/>
           <p:nvPr/>
         </p:nvSpPr>
         <p:spPr>
           <a:xfrm>
-            <a:off x="609600" y="2762250"/>
-            <a:ext cx="10972800" cy="6350"/>
+            <a:off x="0" y="0"/>
+            <a:ext cx="12188952" cy="50292"/>
           </a:xfrm>
           <a:prstGeom prst="rect">
             <a:avLst/>
           </a:prstGeom>
           <a:solidFill>
-            <a:srgbClr val="E0E0E8"/>
+            <a:srgbClr val="1F2C56"/>
           </a:solidFill>
           <a:ln>
             <a:noFill/>
@@ -6022,14 +5790,170 @@
       </p:sp>
       <p:sp>
         <p:nvSpPr>
+          <p:cNvPr id="4" name="TextBox 3"/>
+          <p:cNvSpPr txBox="1"/>
+          <p:nvPr/>
+        </p:nvSpPr>
+        <p:spPr>
+          <a:xfrm>
+            <a:off x="685800" y="109728"/>
+            <a:ext cx="10817352" cy="228600"/>
+          </a:xfrm>
+          <a:prstGeom prst="rect">
+            <a:avLst/>
+          </a:prstGeom>
+          <a:noFill/>
+        </p:spPr>
+        <p:txBody>
+          <a:bodyPr wrap="none">
+            <a:spAutoFit/>
+          </a:bodyPr>
+          <a:lstStyle/>
+          <a:p>
+            <a:pPr algn="l"/>
+            <a:r>
+              <a:rPr sz="750">
+                <a:solidFill>
+                  <a:srgbClr val="78808C"/>
+                </a:solidFill>
+                <a:latin typeface="JetBrains Mono"/>
+              </a:rPr>
+              <a:t>M11  ·  INHALT</a:t>
+            </a:r>
+          </a:p>
+        </p:txBody>
+      </p:sp>
+      <p:sp>
+        <p:nvSpPr>
+          <p:cNvPr id="5" name="Rectangle 4"/>
+          <p:cNvSpPr/>
+          <p:nvPr/>
+        </p:nvSpPr>
+        <p:spPr>
+          <a:xfrm>
+            <a:off x="0" y="1234440"/>
+            <a:ext cx="12188952" cy="12700"/>
+          </a:xfrm>
+          <a:prstGeom prst="rect">
+            <a:avLst/>
+          </a:prstGeom>
+          <a:solidFill>
+            <a:srgbClr val="D8DFE4"/>
+          </a:solidFill>
+          <a:ln>
+            <a:noFill/>
+          </a:ln>
+        </p:spPr>
+        <p:style>
+          <a:lnRef idx="1">
+            <a:schemeClr val="accent1"/>
+          </a:lnRef>
+          <a:fillRef idx="3">
+            <a:schemeClr val="accent1"/>
+          </a:fillRef>
+          <a:effectRef idx="2">
+            <a:schemeClr val="accent1"/>
+          </a:effectRef>
+          <a:fontRef idx="minor">
+            <a:schemeClr val="lt1"/>
+          </a:fontRef>
+        </p:style>
+        <p:txBody>
+          <a:bodyPr rtlCol="0" anchor="ctr"/>
+          <a:lstStyle/>
+          <a:p>
+            <a:pPr algn="ctr"/>
+          </a:p>
+        </p:txBody>
+      </p:sp>
+      <p:sp>
+        <p:nvSpPr>
+          <p:cNvPr id="6" name="Rectangle 5"/>
+          <p:cNvSpPr/>
+          <p:nvPr/>
+        </p:nvSpPr>
+        <p:spPr>
+          <a:xfrm>
+            <a:off x="685800" y="502920"/>
+            <a:ext cx="36576" cy="658368"/>
+          </a:xfrm>
+          <a:prstGeom prst="rect">
+            <a:avLst/>
+          </a:prstGeom>
+          <a:solidFill>
+            <a:srgbClr val="D9C089"/>
+          </a:solidFill>
+          <a:ln>
+            <a:noFill/>
+          </a:ln>
+        </p:spPr>
+        <p:style>
+          <a:lnRef idx="1">
+            <a:schemeClr val="accent1"/>
+          </a:lnRef>
+          <a:fillRef idx="3">
+            <a:schemeClr val="accent1"/>
+          </a:fillRef>
+          <a:effectRef idx="2">
+            <a:schemeClr val="accent1"/>
+          </a:effectRef>
+          <a:fontRef idx="minor">
+            <a:schemeClr val="lt1"/>
+          </a:fontRef>
+        </p:style>
+        <p:txBody>
+          <a:bodyPr rtlCol="0" anchor="ctr"/>
+          <a:lstStyle/>
+          <a:p>
+            <a:pPr algn="ctr"/>
+          </a:p>
+        </p:txBody>
+      </p:sp>
+      <p:sp>
+        <p:nvSpPr>
+          <p:cNvPr id="7" name="TextBox 6"/>
+          <p:cNvSpPr txBox="1"/>
+          <p:nvPr/>
+        </p:nvSpPr>
+        <p:spPr>
+          <a:xfrm>
+            <a:off x="813816" y="502920"/>
+            <a:ext cx="10634472" cy="685800"/>
+          </a:xfrm>
+          <a:prstGeom prst="rect">
+            <a:avLst/>
+          </a:prstGeom>
+          <a:noFill/>
+        </p:spPr>
+        <p:txBody>
+          <a:bodyPr wrap="square">
+            <a:spAutoFit/>
+          </a:bodyPr>
+          <a:lstStyle/>
+          <a:p>
+            <a:pPr algn="l"/>
+            <a:r>
+              <a:rPr sz="2400" b="1" i="0">
+                <a:solidFill>
+                  <a:srgbClr val="1F2C56"/>
+                </a:solidFill>
+                <a:latin typeface="Source Serif 4"/>
+              </a:rPr>
+              <a:t>Typische latente Bedarfsfelder im Firmenkunden-Alltag</a:t>
+            </a:r>
+          </a:p>
+        </p:txBody>
+      </p:sp>
+      <p:sp>
+        <p:nvSpPr>
           <p:cNvPr id="8" name="TextBox 7"/>
           <p:cNvSpPr txBox="1"/>
           <p:nvPr/>
         </p:nvSpPr>
         <p:spPr>
           <a:xfrm>
-            <a:off x="609600" y="2851150"/>
-            <a:ext cx="10972800" cy="3448050"/>
+            <a:off x="685800" y="1417320"/>
+            <a:ext cx="10817352" cy="5029200"/>
           </a:xfrm>
           <a:prstGeom prst="rect">
             <a:avLst/>
@@ -6038,83 +5962,142 @@
         </p:spPr>
         <p:txBody>
           <a:bodyPr wrap="square">
-            <a:normAutofit/>
+            <a:spAutoFit/>
           </a:bodyPr>
           <a:lstStyle/>
           <a:p>
             <a:pPr>
               <a:spcBef>
-                <a:spcPts val="600"/>
+                <a:spcPts val="400"/>
               </a:spcBef>
               <a:spcAft>
-                <a:spcPts val="600"/>
+                <a:spcPts val="200"/>
               </a:spcAft>
             </a:pPr>
             <a:r>
-              <a:rPr sz="1400">
-                <a:solidFill>
-                  <a:srgbClr val="191D2E"/>
-                </a:solidFill>
-                <a:latin typeface="Georgia"/>
-              </a:rPr>
-              <a:t>–  Implizit: 'Wir haben manchmal Liquiditätsengpässe' (Problem, noch kein Bedarf)</a:t>
+              <a:rPr sz="1200">
+                <a:solidFill>
+                  <a:srgbClr val="3D5466"/>
+                </a:solidFill>
+                <a:latin typeface="Arial"/>
+              </a:rPr>
+              <a:t>Ein Berater braucht ein inneres Radar: Worauf soll ich achten? Die folgende Übersicht zeigt die vier häufigsten Felder – mit typischen Kundensignalen und passendem Gesprächseinstieg:</a:t>
             </a:r>
           </a:p>
           <a:p>
             <a:pPr>
               <a:spcBef>
-                <a:spcPts val="600"/>
+                <a:spcPts val="400"/>
               </a:spcBef>
               <a:spcAft>
-                <a:spcPts val="600"/>
+                <a:spcPts val="200"/>
               </a:spcAft>
             </a:pPr>
             <a:r>
-              <a:rPr sz="1400">
-                <a:solidFill>
-                  <a:srgbClr val="191D2E"/>
-                </a:solidFill>
-                <a:latin typeface="Georgia"/>
-              </a:rPr>
-              <a:t>–  Implication: 'Was kostet Sie das, wenn Lieferantenrabatte entfallen?'</a:t>
+              <a:rPr sz="1200">
+                <a:solidFill>
+                  <a:srgbClr val="3D5466"/>
+                </a:solidFill>
+                <a:latin typeface="Arial"/>
+              </a:rPr>
+              <a:t>## 4.2 SPIN – Das Fragetechnik-System für tiefe Bedarfe</a:t>
             </a:r>
           </a:p>
           <a:p>
             <a:pPr>
               <a:spcBef>
-                <a:spcPts val="600"/>
+                <a:spcPts val="400"/>
               </a:spcBef>
               <a:spcAft>
-                <a:spcPts val="600"/>
+                <a:spcPts val="200"/>
               </a:spcAft>
             </a:pPr>
             <a:r>
-              <a:rPr sz="1400">
-                <a:solidFill>
-                  <a:srgbClr val="191D2E"/>
-                </a:solidFill>
-                <a:latin typeface="Georgia"/>
-              </a:rPr>
-              <a:t>–  Explizit: 'Wir brauchen einen flexibleren Kontokorrent'</a:t>
-            </a:r>
-          </a:p>
-          <a:p>
-            <a:pPr>
-              <a:spcBef>
-                <a:spcPts val="600"/>
-              </a:spcBef>
-              <a:spcAft>
-                <a:spcPts val="600"/>
-              </a:spcAft>
-            </a:pPr>
-            <a:r>
-              <a:rPr sz="1400">
-                <a:solidFill>
-                  <a:srgbClr val="191D2E"/>
-                </a:solidFill>
-                <a:latin typeface="Georgia"/>
-              </a:rPr>
-              <a:t>–  Die Implikationsfrage transformiert Problem → dringenden Bedarf</a:t>
+              <a:rPr sz="1200">
+                <a:solidFill>
+                  <a:srgbClr val="3D5466"/>
+                </a:solidFill>
+                <a:latin typeface="Arial"/>
+              </a:rPr>
+              <a:t>Rackham (1988) entwickelte das SPIN-Modell auf Basis empirischer Gesprächsanalysen. Die vier Fragetypen führen den Kunden von der Oberfläche in die Tiefe:</a:t>
+            </a:r>
+          </a:p>
+        </p:txBody>
+      </p:sp>
+      <p:sp>
+        <p:nvSpPr>
+          <p:cNvPr id="9" name="Rectangle 8"/>
+          <p:cNvSpPr/>
+          <p:nvPr/>
+        </p:nvSpPr>
+        <p:spPr>
+          <a:xfrm>
+            <a:off x="0" y="6510528"/>
+            <a:ext cx="12188952" cy="347472"/>
+          </a:xfrm>
+          <a:prstGeom prst="rect">
+            <a:avLst/>
+          </a:prstGeom>
+          <a:solidFill>
+            <a:srgbClr val="0A1937"/>
+          </a:solidFill>
+          <a:ln>
+            <a:noFill/>
+          </a:ln>
+        </p:spPr>
+        <p:style>
+          <a:lnRef idx="1">
+            <a:schemeClr val="accent1"/>
+          </a:lnRef>
+          <a:fillRef idx="3">
+            <a:schemeClr val="accent1"/>
+          </a:fillRef>
+          <a:effectRef idx="2">
+            <a:schemeClr val="accent1"/>
+          </a:effectRef>
+          <a:fontRef idx="minor">
+            <a:schemeClr val="lt1"/>
+          </a:fontRef>
+        </p:style>
+        <p:txBody>
+          <a:bodyPr rtlCol="0" anchor="ctr"/>
+          <a:lstStyle/>
+          <a:p>
+            <a:pPr algn="ctr"/>
+          </a:p>
+        </p:txBody>
+      </p:sp>
+      <p:sp>
+        <p:nvSpPr>
+          <p:cNvPr id="10" name="TextBox 9"/>
+          <p:cNvSpPr txBox="1"/>
+          <p:nvPr/>
+        </p:nvSpPr>
+        <p:spPr>
+          <a:xfrm>
+            <a:off x="685800" y="6583680"/>
+            <a:ext cx="6490411" cy="256032"/>
+          </a:xfrm>
+          <a:prstGeom prst="rect">
+            <a:avLst/>
+          </a:prstGeom>
+          <a:noFill/>
+        </p:spPr>
+        <p:txBody>
+          <a:bodyPr wrap="none">
+            <a:spAutoFit/>
+          </a:bodyPr>
+          <a:lstStyle/>
+          <a:p>
+            <a:pPr algn="l"/>
+            <a:r>
+              <a:rPr sz="700">
+                <a:solidFill>
+                  <a:srgbClr val="A0B4D2"/>
+                </a:solidFill>
+                <a:latin typeface="JetBrains Mono"/>
+              </a:rPr>
+              <a:t>Benedikt Zoller Coaching  ·  FKB Campus  ·  M11</a:t>
             </a:r>
           </a:p>
         </p:txBody>
@@ -6130,14 +6113,6 @@
 <file path=ppt/slides/slide7.xml><?xml version="1.0" encoding="utf-8"?>
 <p:sld xmlns:a="http://schemas.openxmlformats.org/drawingml/2006/main" xmlns:p="http://schemas.openxmlformats.org/presentationml/2006/main" xmlns:r="http://schemas.openxmlformats.org/officeDocument/2006/relationships">
   <p:cSld>
-    <p:bg>
-      <p:bgPr>
-        <a:solidFill>
-          <a:srgbClr val="F8F8FA"/>
-        </a:solidFill>
-        <a:effectLst/>
-      </p:bgPr>
-    </p:bg>
     <p:spTree>
       <p:nvGrpSpPr>
         <p:cNvPr id="1" name=""/>
@@ -6147,125 +6122,20 @@
       <p:grpSpPr/>
       <p:sp>
         <p:nvSpPr>
-          <p:cNvPr id="2" name="TextBox 1"/>
-          <p:cNvSpPr txBox="1"/>
-          <p:nvPr/>
-        </p:nvSpPr>
-        <p:spPr>
-          <a:xfrm>
-            <a:off x="609600" y="279400"/>
-            <a:ext cx="2540000" cy="279400"/>
-          </a:xfrm>
-          <a:prstGeom prst="rect">
-            <a:avLst/>
-          </a:prstGeom>
-          <a:noFill/>
-        </p:spPr>
-        <p:txBody>
-          <a:bodyPr wrap="square">
-            <a:normAutofit/>
-          </a:bodyPr>
-          <a:lstStyle/>
-          <a:p>
-            <a:pPr algn="l"/>
-            <a:r>
-              <a:rPr sz="1000" b="1" i="0">
-                <a:solidFill>
-                  <a:srgbClr val="191D2E"/>
-                </a:solidFill>
-                <a:latin typeface="Arial"/>
-              </a:rPr>
-              <a:t>FKB  Campus</a:t>
-            </a:r>
-          </a:p>
-        </p:txBody>
-      </p:sp>
-      <p:sp>
-        <p:nvSpPr>
-          <p:cNvPr id="3" name="TextBox 2"/>
-          <p:cNvSpPr txBox="1"/>
-          <p:nvPr/>
-        </p:nvSpPr>
-        <p:spPr>
-          <a:xfrm>
-            <a:off x="609600" y="279400"/>
-            <a:ext cx="10972800" cy="279400"/>
-          </a:xfrm>
-          <a:prstGeom prst="rect">
-            <a:avLst/>
-          </a:prstGeom>
-          <a:noFill/>
-        </p:spPr>
-        <p:txBody>
-          <a:bodyPr wrap="square">
-            <a:normAutofit/>
-          </a:bodyPr>
-          <a:lstStyle/>
-          <a:p>
-            <a:pPr algn="r"/>
-            <a:r>
-              <a:rPr sz="900" b="0" i="0">
-                <a:solidFill>
-                  <a:srgbClr val="7B7FA0"/>
-                </a:solidFill>
-                <a:latin typeface="Courier New"/>
-              </a:rPr>
-              <a:t>II · SPIN IN DER TIEFE</a:t>
-            </a:r>
-          </a:p>
-        </p:txBody>
-      </p:sp>
-      <p:sp>
-        <p:nvSpPr>
-          <p:cNvPr id="4" name="TextBox 3"/>
-          <p:cNvSpPr txBox="1"/>
-          <p:nvPr/>
-        </p:nvSpPr>
-        <p:spPr>
-          <a:xfrm>
-            <a:off x="609600" y="6426200"/>
-            <a:ext cx="10972800" cy="228600"/>
-          </a:xfrm>
-          <a:prstGeom prst="rect">
-            <a:avLst/>
-          </a:prstGeom>
-          <a:noFill/>
-        </p:spPr>
-        <p:txBody>
-          <a:bodyPr wrap="square">
-            <a:normAutofit/>
-          </a:bodyPr>
-          <a:lstStyle/>
-          <a:p>
-            <a:pPr algn="r"/>
-            <a:r>
-              <a:rPr sz="900" b="0" i="0">
-                <a:solidFill>
-                  <a:srgbClr val="7B7FA0"/>
-                </a:solidFill>
-                <a:latin typeface="Courier New"/>
-              </a:rPr>
-              <a:t>07</a:t>
-            </a:r>
-          </a:p>
-        </p:txBody>
-      </p:sp>
-      <p:sp>
-        <p:nvSpPr>
-          <p:cNvPr id="5" name="Rectangle 4"/>
+          <p:cNvPr id="2" name="Rectangle 1"/>
           <p:cNvSpPr/>
           <p:nvPr/>
         </p:nvSpPr>
         <p:spPr>
           <a:xfrm>
-            <a:off x="609600" y="825500"/>
-            <a:ext cx="10972800" cy="6350"/>
+            <a:off x="0" y="0"/>
+            <a:ext cx="12188952" cy="6858000"/>
           </a:xfrm>
           <a:prstGeom prst="rect">
             <a:avLst/>
           </a:prstGeom>
           <a:solidFill>
-            <a:srgbClr val="191D2E"/>
+            <a:srgbClr val="EDEDF3"/>
           </a:solidFill>
           <a:ln>
             <a:noFill/>
@@ -6295,55 +6165,20 @@
       </p:sp>
       <p:sp>
         <p:nvSpPr>
-          <p:cNvPr id="6" name="TextBox 5"/>
-          <p:cNvSpPr txBox="1"/>
-          <p:nvPr/>
-        </p:nvSpPr>
-        <p:spPr>
-          <a:xfrm>
-            <a:off x="609600" y="920750"/>
-            <a:ext cx="10972800" cy="1778000"/>
-          </a:xfrm>
-          <a:prstGeom prst="rect">
-            <a:avLst/>
-          </a:prstGeom>
-          <a:noFill/>
-        </p:spPr>
-        <p:txBody>
-          <a:bodyPr wrap="square">
-            <a:normAutofit/>
-          </a:bodyPr>
-          <a:lstStyle/>
-          <a:p>
-            <a:pPr algn="l"/>
-            <a:r>
-              <a:rPr sz="3800" b="0" i="0">
-                <a:solidFill>
-                  <a:srgbClr val="191D2E"/>
-                </a:solidFill>
-                <a:latin typeface="Georgia"/>
-              </a:rPr>
-              <a:t>Signale erkennen — verbal, paraverbal, nonverbal</a:t>
-            </a:r>
-          </a:p>
-        </p:txBody>
-      </p:sp>
-      <p:sp>
-        <p:nvSpPr>
-          <p:cNvPr id="7" name="Rectangle 6"/>
+          <p:cNvPr id="3" name="Rectangle 2"/>
           <p:cNvSpPr/>
           <p:nvPr/>
         </p:nvSpPr>
         <p:spPr>
           <a:xfrm>
-            <a:off x="609600" y="2762250"/>
-            <a:ext cx="10972800" cy="6350"/>
+            <a:off x="0" y="0"/>
+            <a:ext cx="12188952" cy="50292"/>
           </a:xfrm>
           <a:prstGeom prst="rect">
             <a:avLst/>
           </a:prstGeom>
           <a:solidFill>
-            <a:srgbClr val="E0E0E8"/>
+            <a:srgbClr val="1F2C56"/>
           </a:solidFill>
           <a:ln>
             <a:noFill/>
@@ -6373,14 +6208,170 @@
       </p:sp>
       <p:sp>
         <p:nvSpPr>
+          <p:cNvPr id="4" name="TextBox 3"/>
+          <p:cNvSpPr txBox="1"/>
+          <p:nvPr/>
+        </p:nvSpPr>
+        <p:spPr>
+          <a:xfrm>
+            <a:off x="685800" y="109728"/>
+            <a:ext cx="10817352" cy="228600"/>
+          </a:xfrm>
+          <a:prstGeom prst="rect">
+            <a:avLst/>
+          </a:prstGeom>
+          <a:noFill/>
+        </p:spPr>
+        <p:txBody>
+          <a:bodyPr wrap="none">
+            <a:spAutoFit/>
+          </a:bodyPr>
+          <a:lstStyle/>
+          <a:p>
+            <a:pPr algn="l"/>
+            <a:r>
+              <a:rPr sz="750">
+                <a:solidFill>
+                  <a:srgbClr val="78808C"/>
+                </a:solidFill>
+                <a:latin typeface="JetBrains Mono"/>
+              </a:rPr>
+              <a:t>M11  ·  INHALT</a:t>
+            </a:r>
+          </a:p>
+        </p:txBody>
+      </p:sp>
+      <p:sp>
+        <p:nvSpPr>
+          <p:cNvPr id="5" name="Rectangle 4"/>
+          <p:cNvSpPr/>
+          <p:nvPr/>
+        </p:nvSpPr>
+        <p:spPr>
+          <a:xfrm>
+            <a:off x="0" y="1234440"/>
+            <a:ext cx="12188952" cy="12700"/>
+          </a:xfrm>
+          <a:prstGeom prst="rect">
+            <a:avLst/>
+          </a:prstGeom>
+          <a:solidFill>
+            <a:srgbClr val="D8DFE4"/>
+          </a:solidFill>
+          <a:ln>
+            <a:noFill/>
+          </a:ln>
+        </p:spPr>
+        <p:style>
+          <a:lnRef idx="1">
+            <a:schemeClr val="accent1"/>
+          </a:lnRef>
+          <a:fillRef idx="3">
+            <a:schemeClr val="accent1"/>
+          </a:fillRef>
+          <a:effectRef idx="2">
+            <a:schemeClr val="accent1"/>
+          </a:effectRef>
+          <a:fontRef idx="minor">
+            <a:schemeClr val="lt1"/>
+          </a:fontRef>
+        </p:style>
+        <p:txBody>
+          <a:bodyPr rtlCol="0" anchor="ctr"/>
+          <a:lstStyle/>
+          <a:p>
+            <a:pPr algn="ctr"/>
+          </a:p>
+        </p:txBody>
+      </p:sp>
+      <p:sp>
+        <p:nvSpPr>
+          <p:cNvPr id="6" name="Rectangle 5"/>
+          <p:cNvSpPr/>
+          <p:nvPr/>
+        </p:nvSpPr>
+        <p:spPr>
+          <a:xfrm>
+            <a:off x="685800" y="502920"/>
+            <a:ext cx="36576" cy="658368"/>
+          </a:xfrm>
+          <a:prstGeom prst="rect">
+            <a:avLst/>
+          </a:prstGeom>
+          <a:solidFill>
+            <a:srgbClr val="D9C089"/>
+          </a:solidFill>
+          <a:ln>
+            <a:noFill/>
+          </a:ln>
+        </p:spPr>
+        <p:style>
+          <a:lnRef idx="1">
+            <a:schemeClr val="accent1"/>
+          </a:lnRef>
+          <a:fillRef idx="3">
+            <a:schemeClr val="accent1"/>
+          </a:fillRef>
+          <a:effectRef idx="2">
+            <a:schemeClr val="accent1"/>
+          </a:effectRef>
+          <a:fontRef idx="minor">
+            <a:schemeClr val="lt1"/>
+          </a:fontRef>
+        </p:style>
+        <p:txBody>
+          <a:bodyPr rtlCol="0" anchor="ctr"/>
+          <a:lstStyle/>
+          <a:p>
+            <a:pPr algn="ctr"/>
+          </a:p>
+        </p:txBody>
+      </p:sp>
+      <p:sp>
+        <p:nvSpPr>
+          <p:cNvPr id="7" name="TextBox 6"/>
+          <p:cNvSpPr txBox="1"/>
+          <p:nvPr/>
+        </p:nvSpPr>
+        <p:spPr>
+          <a:xfrm>
+            <a:off x="813816" y="502920"/>
+            <a:ext cx="10634472" cy="685800"/>
+          </a:xfrm>
+          <a:prstGeom prst="rect">
+            <a:avLst/>
+          </a:prstGeom>
+          <a:noFill/>
+        </p:spPr>
+        <p:txBody>
+          <a:bodyPr wrap="square">
+            <a:spAutoFit/>
+          </a:bodyPr>
+          <a:lstStyle/>
+          <a:p>
+            <a:pPr algn="l"/>
+            <a:r>
+              <a:rPr sz="2400" b="1" i="0">
+                <a:solidFill>
+                  <a:srgbClr val="1F2C56"/>
+                </a:solidFill>
+                <a:latin typeface="Source Serif 4"/>
+              </a:rPr>
+              <a:t>Fragetechnik in der Praxis: Drei Tiefen-Ebenen</a:t>
+            </a:r>
+          </a:p>
+        </p:txBody>
+      </p:sp>
+      <p:sp>
+        <p:nvSpPr>
           <p:cNvPr id="8" name="TextBox 7"/>
           <p:cNvSpPr txBox="1"/>
           <p:nvPr/>
         </p:nvSpPr>
         <p:spPr>
           <a:xfrm>
-            <a:off x="609600" y="2851150"/>
-            <a:ext cx="10972800" cy="3448050"/>
+            <a:off x="685800" y="1417320"/>
+            <a:ext cx="10817352" cy="5029200"/>
           </a:xfrm>
           <a:prstGeom prst="rect">
             <a:avLst/>
@@ -6389,26 +6380,83 @@
         </p:spPr>
         <p:txBody>
           <a:bodyPr wrap="square">
-            <a:normAutofit/>
+            <a:spAutoFit/>
           </a:bodyPr>
           <a:lstStyle/>
+          <a:p>
+            <a:pPr>
+              <a:spcBef>
+                <a:spcPts val="400"/>
+              </a:spcBef>
+              <a:spcAft>
+                <a:spcPts val="200"/>
+              </a:spcAft>
+            </a:pPr>
+            <a:r>
+              <a:rPr sz="1200">
+                <a:solidFill>
+                  <a:srgbClr val="3D5466"/>
+                </a:solidFill>
+                <a:latin typeface="Arial"/>
+              </a:rPr>
+              <a:t>Latente Bedarfe liegen oft unter zwei oder drei Gesprächsschichten. Eine einfache Orientierung:</a:t>
+            </a:r>
+          </a:p>
+          <a:p>
+            <a:pPr>
+              <a:spcBef>
+                <a:spcPts val="400"/>
+              </a:spcBef>
+              <a:spcAft>
+                <a:spcPts val="200"/>
+              </a:spcAft>
+            </a:pPr>
+            <a:r>
+              <a:rPr sz="1200">
+                <a:solidFill>
+                  <a:srgbClr val="3D5466"/>
+                </a:solidFill>
+                <a:latin typeface="Arial"/>
+              </a:rPr>
+              <a:t>Ebene 1 – Thema (Was ist das Gesprächsthema?)</a:t>
+            </a:r>
+          </a:p>
           <a:p>
             <a:pPr>
               <a:spcBef>
                 <a:spcPts val="600"/>
               </a:spcBef>
               <a:spcAft>
-                <a:spcPts val="600"/>
+                <a:spcPts val="200"/>
               </a:spcAft>
             </a:pPr>
             <a:r>
-              <a:rPr sz="1400">
-                <a:solidFill>
-                  <a:srgbClr val="191D2E"/>
-                </a:solidFill>
-                <a:latin typeface="Georgia"/>
-              </a:rPr>
-              <a:t>–  Verbal: Zögern, Einschränkungen, Themenwechsel</a:t>
+              <a:rPr sz="1200" i="1">
+                <a:solidFill>
+                  <a:srgbClr val="3D5466"/>
+                </a:solidFill>
+                <a:latin typeface="Arial"/>
+              </a:rPr>
+              <a:t>→  „Wie läuft das Geschäft aktuell?"</a:t>
+            </a:r>
+          </a:p>
+          <a:p>
+            <a:pPr>
+              <a:spcBef>
+                <a:spcPts val="400"/>
+              </a:spcBef>
+              <a:spcAft>
+                <a:spcPts val="200"/>
+              </a:spcAft>
+            </a:pPr>
+            <a:r>
+              <a:rPr sz="1200">
+                <a:solidFill>
+                  <a:srgbClr val="3D5466"/>
+                </a:solidFill>
+                <a:latin typeface="Arial"/>
+              </a:rPr>
+              <a:t>Ebene 2 – Problem (Wo drückt der Schuh?)</a:t>
             </a:r>
           </a:p>
           <a:p>
@@ -6417,17 +6465,36 @@
                 <a:spcPts val="600"/>
               </a:spcBef>
               <a:spcAft>
-                <a:spcPts val="600"/>
+                <a:spcPts val="200"/>
               </a:spcAft>
             </a:pPr>
             <a:r>
-              <a:rPr sz="1400">
-                <a:solidFill>
-                  <a:srgbClr val="191D2E"/>
-                </a:solidFill>
-                <a:latin typeface="Georgia"/>
-              </a:rPr>
-              <a:t>–  Paraverbal: Tonfall, Pausen, Betonung</a:t>
+              <a:rPr sz="1200" i="1">
+                <a:solidFill>
+                  <a:srgbClr val="3D5466"/>
+                </a:solidFill>
+                <a:latin typeface="Arial"/>
+              </a:rPr>
+              <a:t>→  „Sie sagten, die Personalkosten steigen. Was steckt dahinter?"</a:t>
+            </a:r>
+          </a:p>
+          <a:p>
+            <a:pPr>
+              <a:spcBef>
+                <a:spcPts val="400"/>
+              </a:spcBef>
+              <a:spcAft>
+                <a:spcPts val="200"/>
+              </a:spcAft>
+            </a:pPr>
+            <a:r>
+              <a:rPr sz="1200">
+                <a:solidFill>
+                  <a:srgbClr val="3D5466"/>
+                </a:solidFill>
+                <a:latin typeface="Arial"/>
+              </a:rPr>
+              <a:t>Ebene 3 – Bedeutung (Was steht auf dem Spiel?)</a:t>
             </a:r>
           </a:p>
           <a:p>
@@ -6436,36 +6503,190 @@
                 <a:spcPts val="600"/>
               </a:spcBef>
               <a:spcAft>
-                <a:spcPts val="600"/>
+                <a:spcPts val="200"/>
               </a:spcAft>
             </a:pPr>
             <a:r>
-              <a:rPr sz="1400">
-                <a:solidFill>
-                  <a:srgbClr val="191D2E"/>
-                </a:solidFill>
-                <a:latin typeface="Georgia"/>
-              </a:rPr>
-              <a:t>–  Nonverbal: Blickkontakt meiden, Körperhaltung, Gestik</a:t>
+              <a:rPr sz="1200" i="1">
+                <a:solidFill>
+                  <a:srgbClr val="3D5466"/>
+                </a:solidFill>
+                <a:latin typeface="Arial"/>
+              </a:rPr>
+              <a:t>→  „Wenn sich das fortsetzt: Was bedeutet das für Ihre Pläne für die nächsten fünf Jahre?"</a:t>
             </a:r>
           </a:p>
           <a:p>
             <a:pPr>
               <a:spcBef>
-                <a:spcPts val="600"/>
+                <a:spcPts val="400"/>
               </a:spcBef>
               <a:spcAft>
-                <a:spcPts val="600"/>
+                <a:spcPts val="200"/>
               </a:spcAft>
             </a:pPr>
             <a:r>
-              <a:rPr sz="1400">
-                <a:solidFill>
-                  <a:srgbClr val="191D2E"/>
-                </a:solidFill>
-                <a:latin typeface="Georgia"/>
-              </a:rPr>
-              <a:t>–  Regeln: Nicht unterbrechen. 5-Sekunden-Pause aushalten. Nachfragen.</a:t>
+              <a:rPr sz="1200">
+                <a:solidFill>
+                  <a:srgbClr val="3D5466"/>
+                </a:solidFill>
+                <a:latin typeface="Arial"/>
+              </a:rPr>
+              <a:t>Erst auf Ebene 3 wird der latente Bedarf sichtbar – und damit auch, welches Produkt oder welche Lösung wirklich passt.</a:t>
+            </a:r>
+          </a:p>
+          <a:p>
+            <a:pPr>
+              <a:spcBef>
+                <a:spcPts val="400"/>
+              </a:spcBef>
+              <a:spcAft>
+                <a:spcPts val="200"/>
+              </a:spcAft>
+            </a:pPr>
+            <a:r>
+              <a:rPr sz="1200">
+                <a:solidFill>
+                  <a:srgbClr val="3D5466"/>
+                </a:solidFill>
+                <a:latin typeface="Arial"/>
+              </a:rPr>
+              <a:t>## 4.3 Signale erkennen: Die vier Kanäle</a:t>
+            </a:r>
+          </a:p>
+          <a:p>
+            <a:pPr>
+              <a:spcBef>
+                <a:spcPts val="400"/>
+              </a:spcBef>
+              <a:spcAft>
+                <a:spcPts val="200"/>
+              </a:spcAft>
+            </a:pPr>
+            <a:r>
+              <a:rPr sz="1200">
+                <a:solidFill>
+                  <a:srgbClr val="3D5466"/>
+                </a:solidFill>
+                <a:latin typeface="Arial"/>
+              </a:rPr>
+              <a:t>Kunden kommunizieren latente Bedarfe auf vier Kanälen gleichzeitig (Watzlawick et al., 1967; Schulz von Thun, 1981). Wer nur den Sachkanal hört, verpasst 75 % der Information.</a:t>
+            </a:r>
+          </a:p>
+          <a:p>
+            <a:pPr>
+              <a:spcBef>
+                <a:spcPts val="400"/>
+              </a:spcBef>
+              <a:spcAft>
+                <a:spcPts val="200"/>
+              </a:spcAft>
+            </a:pPr>
+            <a:r>
+              <a:rPr sz="1200">
+                <a:solidFill>
+                  <a:srgbClr val="3D5466"/>
+                </a:solidFill>
+                <a:latin typeface="Arial"/>
+              </a:rPr>
+              <a:t>Paraverbale Signale: Pausen, Zögern, plötzlich leiser werden, Themenwechsel nach Nachfrage.</a:t>
+            </a:r>
+          </a:p>
+          <a:p>
+            <a:pPr>
+              <a:spcBef>
+                <a:spcPts val="400"/>
+              </a:spcBef>
+              <a:spcAft>
+                <a:spcPts val="200"/>
+              </a:spcAft>
+            </a:pPr>
+            <a:r>
+              <a:rPr sz="1200">
+                <a:solidFill>
+                  <a:srgbClr val="3D5466"/>
+                </a:solidFill>
+                <a:latin typeface="Arial"/>
+              </a:rPr>
+              <a:t>Nonverbale Signale: Abwenden, kurzes Lächeln das nicht bis zu den Augen geht, angespannte Körperhaltung beim bestimmten Thema.</a:t>
+            </a:r>
+          </a:p>
+        </p:txBody>
+      </p:sp>
+      <p:sp>
+        <p:nvSpPr>
+          <p:cNvPr id="9" name="Rectangle 8"/>
+          <p:cNvSpPr/>
+          <p:nvPr/>
+        </p:nvSpPr>
+        <p:spPr>
+          <a:xfrm>
+            <a:off x="0" y="6510528"/>
+            <a:ext cx="12188952" cy="347472"/>
+          </a:xfrm>
+          <a:prstGeom prst="rect">
+            <a:avLst/>
+          </a:prstGeom>
+          <a:solidFill>
+            <a:srgbClr val="0A1937"/>
+          </a:solidFill>
+          <a:ln>
+            <a:noFill/>
+          </a:ln>
+        </p:spPr>
+        <p:style>
+          <a:lnRef idx="1">
+            <a:schemeClr val="accent1"/>
+          </a:lnRef>
+          <a:fillRef idx="3">
+            <a:schemeClr val="accent1"/>
+          </a:fillRef>
+          <a:effectRef idx="2">
+            <a:schemeClr val="accent1"/>
+          </a:effectRef>
+          <a:fontRef idx="minor">
+            <a:schemeClr val="lt1"/>
+          </a:fontRef>
+        </p:style>
+        <p:txBody>
+          <a:bodyPr rtlCol="0" anchor="ctr"/>
+          <a:lstStyle/>
+          <a:p>
+            <a:pPr algn="ctr"/>
+          </a:p>
+        </p:txBody>
+      </p:sp>
+      <p:sp>
+        <p:nvSpPr>
+          <p:cNvPr id="10" name="TextBox 9"/>
+          <p:cNvSpPr txBox="1"/>
+          <p:nvPr/>
+        </p:nvSpPr>
+        <p:spPr>
+          <a:xfrm>
+            <a:off x="685800" y="6583680"/>
+            <a:ext cx="6490411" cy="256032"/>
+          </a:xfrm>
+          <a:prstGeom prst="rect">
+            <a:avLst/>
+          </a:prstGeom>
+          <a:noFill/>
+        </p:spPr>
+        <p:txBody>
+          <a:bodyPr wrap="none">
+            <a:spAutoFit/>
+          </a:bodyPr>
+          <a:lstStyle/>
+          <a:p>
+            <a:pPr algn="l"/>
+            <a:r>
+              <a:rPr sz="700">
+                <a:solidFill>
+                  <a:srgbClr val="A0B4D2"/>
+                </a:solidFill>
+                <a:latin typeface="JetBrains Mono"/>
+              </a:rPr>
+              <a:t>Benedikt Zoller Coaching  ·  FKB Campus  ·  M11</a:t>
             </a:r>
           </a:p>
         </p:txBody>
@@ -6481,14 +6702,6 @@
 <file path=ppt/slides/slide8.xml><?xml version="1.0" encoding="utf-8"?>
 <p:sld xmlns:a="http://schemas.openxmlformats.org/drawingml/2006/main" xmlns:p="http://schemas.openxmlformats.org/presentationml/2006/main" xmlns:r="http://schemas.openxmlformats.org/officeDocument/2006/relationships">
   <p:cSld>
-    <p:bg>
-      <p:bgPr>
-        <a:solidFill>
-          <a:srgbClr val="1F2B56"/>
-        </a:solidFill>
-        <a:effectLst/>
-      </p:bgPr>
-    </p:bg>
     <p:spTree>
       <p:nvGrpSpPr>
         <p:cNvPr id="1" name=""/>
@@ -6498,71 +6711,87 @@
       <p:grpSpPr/>
       <p:sp>
         <p:nvSpPr>
-          <p:cNvPr id="2" name="TextBox 1"/>
-          <p:cNvSpPr txBox="1"/>
-          <p:nvPr/>
-        </p:nvSpPr>
-        <p:spPr>
-          <a:xfrm>
-            <a:off x="609600" y="279400"/>
-            <a:ext cx="2540000" cy="279400"/>
-          </a:xfrm>
-          <a:prstGeom prst="rect">
-            <a:avLst/>
-          </a:prstGeom>
-          <a:noFill/>
-        </p:spPr>
-        <p:txBody>
-          <a:bodyPr wrap="square">
-            <a:normAutofit/>
-          </a:bodyPr>
-          <a:lstStyle/>
-          <a:p>
-            <a:pPr algn="l"/>
-            <a:r>
-              <a:rPr sz="1000" b="1" i="0">
-                <a:solidFill>
-                  <a:srgbClr val="F8F8FA"/>
-                </a:solidFill>
-                <a:latin typeface="Arial"/>
-              </a:rPr>
-              <a:t>FKB  Campus</a:t>
-            </a:r>
-          </a:p>
-        </p:txBody>
-      </p:sp>
-      <p:sp>
-        <p:nvSpPr>
-          <p:cNvPr id="3" name="TextBox 2"/>
-          <p:cNvSpPr txBox="1"/>
-          <p:nvPr/>
-        </p:nvSpPr>
-        <p:spPr>
-          <a:xfrm>
-            <a:off x="609600" y="279400"/>
-            <a:ext cx="10972800" cy="279400"/>
-          </a:xfrm>
-          <a:prstGeom prst="rect">
-            <a:avLst/>
-          </a:prstGeom>
-          <a:noFill/>
-        </p:spPr>
-        <p:txBody>
-          <a:bodyPr wrap="square">
-            <a:normAutofit/>
-          </a:bodyPr>
-          <a:lstStyle/>
-          <a:p>
-            <a:pPr algn="r"/>
-            <a:r>
-              <a:rPr sz="900" b="0" i="0">
-                <a:solidFill>
-                  <a:srgbClr val="7B7FA0"/>
-                </a:solidFill>
-                <a:latin typeface="Courier New"/>
-              </a:rPr>
-              <a:t>TYPISCHE LATENTE BEDARFSFELDER</a:t>
-            </a:r>
+          <p:cNvPr id="2" name="Rectangle 1"/>
+          <p:cNvSpPr/>
+          <p:nvPr/>
+        </p:nvSpPr>
+        <p:spPr>
+          <a:xfrm>
+            <a:off x="0" y="0"/>
+            <a:ext cx="12188952" cy="6858000"/>
+          </a:xfrm>
+          <a:prstGeom prst="rect">
+            <a:avLst/>
+          </a:prstGeom>
+          <a:solidFill>
+            <a:srgbClr val="EDEDF3"/>
+          </a:solidFill>
+          <a:ln>
+            <a:noFill/>
+          </a:ln>
+        </p:spPr>
+        <p:style>
+          <a:lnRef idx="1">
+            <a:schemeClr val="accent1"/>
+          </a:lnRef>
+          <a:fillRef idx="3">
+            <a:schemeClr val="accent1"/>
+          </a:fillRef>
+          <a:effectRef idx="2">
+            <a:schemeClr val="accent1"/>
+          </a:effectRef>
+          <a:fontRef idx="minor">
+            <a:schemeClr val="lt1"/>
+          </a:fontRef>
+        </p:style>
+        <p:txBody>
+          <a:bodyPr rtlCol="0" anchor="ctr"/>
+          <a:lstStyle/>
+          <a:p>
+            <a:pPr algn="ctr"/>
+          </a:p>
+        </p:txBody>
+      </p:sp>
+      <p:sp>
+        <p:nvSpPr>
+          <p:cNvPr id="3" name="Rectangle 2"/>
+          <p:cNvSpPr/>
+          <p:nvPr/>
+        </p:nvSpPr>
+        <p:spPr>
+          <a:xfrm>
+            <a:off x="0" y="0"/>
+            <a:ext cx="12188952" cy="50292"/>
+          </a:xfrm>
+          <a:prstGeom prst="rect">
+            <a:avLst/>
+          </a:prstGeom>
+          <a:solidFill>
+            <a:srgbClr val="1F2C56"/>
+          </a:solidFill>
+          <a:ln>
+            <a:noFill/>
+          </a:ln>
+        </p:spPr>
+        <p:style>
+          <a:lnRef idx="1">
+            <a:schemeClr val="accent1"/>
+          </a:lnRef>
+          <a:fillRef idx="3">
+            <a:schemeClr val="accent1"/>
+          </a:fillRef>
+          <a:effectRef idx="2">
+            <a:schemeClr val="accent1"/>
+          </a:effectRef>
+          <a:fontRef idx="minor">
+            <a:schemeClr val="lt1"/>
+          </a:fontRef>
+        </p:style>
+        <p:txBody>
+          <a:bodyPr rtlCol="0" anchor="ctr"/>
+          <a:lstStyle/>
+          <a:p>
+            <a:pPr algn="ctr"/>
           </a:p>
         </p:txBody>
       </p:sp>
@@ -6574,8 +6803,8 @@
         </p:nvSpPr>
         <p:spPr>
           <a:xfrm>
-            <a:off x="609600" y="6426200"/>
-            <a:ext cx="10972800" cy="228600"/>
+            <a:off x="685800" y="109728"/>
+            <a:ext cx="10817352" cy="228600"/>
           </a:xfrm>
           <a:prstGeom prst="rect">
             <a:avLst/>
@@ -6583,91 +6812,107 @@
           <a:noFill/>
         </p:spPr>
         <p:txBody>
-          <a:bodyPr wrap="square">
-            <a:normAutofit/>
+          <a:bodyPr wrap="none">
+            <a:spAutoFit/>
           </a:bodyPr>
           <a:lstStyle/>
           <a:p>
-            <a:pPr algn="r"/>
-            <a:r>
-              <a:rPr sz="900" b="0" i="0">
-                <a:solidFill>
-                  <a:srgbClr val="7B7FA0"/>
-                </a:solidFill>
-                <a:latin typeface="Courier New"/>
-              </a:rPr>
-              <a:t>08</a:t>
-            </a:r>
-          </a:p>
-        </p:txBody>
-      </p:sp>
-      <p:sp>
-        <p:nvSpPr>
-          <p:cNvPr id="5" name="TextBox 4"/>
-          <p:cNvSpPr txBox="1"/>
-          <p:nvPr/>
-        </p:nvSpPr>
-        <p:spPr>
-          <a:xfrm>
-            <a:off x="609600" y="635000"/>
-            <a:ext cx="5461000" cy="5461000"/>
-          </a:xfrm>
-          <a:prstGeom prst="rect">
-            <a:avLst/>
-          </a:prstGeom>
-          <a:noFill/>
-        </p:spPr>
-        <p:txBody>
-          <a:bodyPr wrap="square">
-            <a:normAutofit/>
-          </a:bodyPr>
-          <a:lstStyle/>
-          <a:p>
             <a:pPr algn="l"/>
             <a:r>
-              <a:rPr sz="28000" b="0" i="1">
-                <a:solidFill>
-                  <a:srgbClr val="D9BF7A"/>
-                </a:solidFill>
-                <a:latin typeface="Georgia"/>
-              </a:rPr>
-              <a:t>III</a:t>
-            </a:r>
-          </a:p>
-        </p:txBody>
-      </p:sp>
-      <p:sp>
-        <p:nvSpPr>
-          <p:cNvPr id="6" name="TextBox 5"/>
-          <p:cNvSpPr txBox="1"/>
-          <p:nvPr/>
-        </p:nvSpPr>
-        <p:spPr>
-          <a:xfrm>
-            <a:off x="6731000" y="4064000"/>
-            <a:ext cx="4851400" cy="1778000"/>
-          </a:xfrm>
-          <a:prstGeom prst="rect">
-            <a:avLst/>
-          </a:prstGeom>
-          <a:noFill/>
-        </p:spPr>
-        <p:txBody>
-          <a:bodyPr wrap="square">
-            <a:normAutofit/>
-          </a:bodyPr>
-          <a:lstStyle/>
-          <a:p>
-            <a:pPr algn="r"/>
-            <a:r>
-              <a:rPr sz="3800" b="0" i="0">
-                <a:solidFill>
-                  <a:srgbClr val="F8F8FA"/>
-                </a:solidFill>
-                <a:latin typeface="Georgia"/>
-              </a:rPr>
-              <a:t>Typische latente Bedarfsfelder</a:t>
-            </a:r>
+              <a:rPr sz="750">
+                <a:solidFill>
+                  <a:srgbClr val="78808C"/>
+                </a:solidFill>
+                <a:latin typeface="JetBrains Mono"/>
+              </a:rPr>
+              <a:t>M11  ·  INHALT</a:t>
+            </a:r>
+          </a:p>
+        </p:txBody>
+      </p:sp>
+      <p:sp>
+        <p:nvSpPr>
+          <p:cNvPr id="5" name="Rectangle 4"/>
+          <p:cNvSpPr/>
+          <p:nvPr/>
+        </p:nvSpPr>
+        <p:spPr>
+          <a:xfrm>
+            <a:off x="0" y="1234440"/>
+            <a:ext cx="12188952" cy="12700"/>
+          </a:xfrm>
+          <a:prstGeom prst="rect">
+            <a:avLst/>
+          </a:prstGeom>
+          <a:solidFill>
+            <a:srgbClr val="D8DFE4"/>
+          </a:solidFill>
+          <a:ln>
+            <a:noFill/>
+          </a:ln>
+        </p:spPr>
+        <p:style>
+          <a:lnRef idx="1">
+            <a:schemeClr val="accent1"/>
+          </a:lnRef>
+          <a:fillRef idx="3">
+            <a:schemeClr val="accent1"/>
+          </a:fillRef>
+          <a:effectRef idx="2">
+            <a:schemeClr val="accent1"/>
+          </a:effectRef>
+          <a:fontRef idx="minor">
+            <a:schemeClr val="lt1"/>
+          </a:fontRef>
+        </p:style>
+        <p:txBody>
+          <a:bodyPr rtlCol="0" anchor="ctr"/>
+          <a:lstStyle/>
+          <a:p>
+            <a:pPr algn="ctr"/>
+          </a:p>
+        </p:txBody>
+      </p:sp>
+      <p:sp>
+        <p:nvSpPr>
+          <p:cNvPr id="6" name="Rectangle 5"/>
+          <p:cNvSpPr/>
+          <p:nvPr/>
+        </p:nvSpPr>
+        <p:spPr>
+          <a:xfrm>
+            <a:off x="685800" y="502920"/>
+            <a:ext cx="36576" cy="658368"/>
+          </a:xfrm>
+          <a:prstGeom prst="rect">
+            <a:avLst/>
+          </a:prstGeom>
+          <a:solidFill>
+            <a:srgbClr val="D9C089"/>
+          </a:solidFill>
+          <a:ln>
+            <a:noFill/>
+          </a:ln>
+        </p:spPr>
+        <p:style>
+          <a:lnRef idx="1">
+            <a:schemeClr val="accent1"/>
+          </a:lnRef>
+          <a:fillRef idx="3">
+            <a:schemeClr val="accent1"/>
+          </a:fillRef>
+          <a:effectRef idx="2">
+            <a:schemeClr val="accent1"/>
+          </a:effectRef>
+          <a:fontRef idx="minor">
+            <a:schemeClr val="lt1"/>
+          </a:fontRef>
+        </p:style>
+        <p:txBody>
+          <a:bodyPr rtlCol="0" anchor="ctr"/>
+          <a:lstStyle/>
+          <a:p>
+            <a:pPr algn="ctr"/>
           </a:p>
         </p:txBody>
       </p:sp>
@@ -6679,8 +6924,8 @@
         </p:nvSpPr>
         <p:spPr>
           <a:xfrm>
-            <a:off x="6731000" y="5842000"/>
-            <a:ext cx="4851400" cy="635000"/>
+            <a:off x="813816" y="502920"/>
+            <a:ext cx="10634472" cy="685800"/>
           </a:xfrm>
           <a:prstGeom prst="rect">
             <a:avLst/>
@@ -6689,19 +6934,348 @@
         </p:spPr>
         <p:txBody>
           <a:bodyPr wrap="square">
-            <a:normAutofit/>
+            <a:spAutoFit/>
           </a:bodyPr>
           <a:lstStyle/>
           <a:p>
-            <a:pPr algn="r"/>
-            <a:r>
-              <a:rPr sz="1400" b="0" i="1">
-                <a:solidFill>
-                  <a:srgbClr val="7B7FA0"/>
-                </a:solidFill>
-                <a:latin typeface="Georgia"/>
-              </a:rPr>
-              <a:t>Was Firmenkundenberater häufig übersehen</a:t>
+            <a:pPr algn="l"/>
+            <a:r>
+              <a:rPr sz="2400" b="1" i="0">
+                <a:solidFill>
+                  <a:srgbClr val="1F2C56"/>
+                </a:solidFill>
+                <a:latin typeface="Source Serif 4"/>
+              </a:rPr>
+              <a:t>Übung im Plenum: „Was höre ich wirklich?"</a:t>
+            </a:r>
+          </a:p>
+        </p:txBody>
+      </p:sp>
+      <p:sp>
+        <p:nvSpPr>
+          <p:cNvPr id="8" name="TextBox 7"/>
+          <p:cNvSpPr txBox="1"/>
+          <p:nvPr/>
+        </p:nvSpPr>
+        <p:spPr>
+          <a:xfrm>
+            <a:off x="685800" y="1417320"/>
+            <a:ext cx="10817352" cy="5029200"/>
+          </a:xfrm>
+          <a:prstGeom prst="rect">
+            <a:avLst/>
+          </a:prstGeom>
+          <a:noFill/>
+        </p:spPr>
+        <p:txBody>
+          <a:bodyPr wrap="square">
+            <a:spAutoFit/>
+          </a:bodyPr>
+          <a:lstStyle/>
+          <a:p>
+            <a:pPr>
+              <a:spcBef>
+                <a:spcPts val="400"/>
+              </a:spcBef>
+              <a:spcAft>
+                <a:spcPts val="200"/>
+              </a:spcAft>
+            </a:pPr>
+            <a:r>
+              <a:rPr sz="1200">
+                <a:solidFill>
+                  <a:srgbClr val="3D5466"/>
+                </a:solidFill>
+                <a:latin typeface="Arial"/>
+              </a:rPr>
+              <a:t>Der Trainer liest fünf Kundenaussagen vor. Die Teilnehmenden notieren: (1) Sachinhalt, (2) vermuteter latenter Hintergrund. Anschließend Auswertung im Plenum.</a:t>
+            </a:r>
+          </a:p>
+          <a:p>
+            <a:pPr>
+              <a:spcBef>
+                <a:spcPts val="400"/>
+              </a:spcBef>
+              <a:spcAft>
+                <a:spcPts val="200"/>
+              </a:spcAft>
+            </a:pPr>
+            <a:r>
+              <a:rPr sz="1300">
+                <a:solidFill>
+                  <a:srgbClr val="3D5466"/>
+                </a:solidFill>
+                <a:latin typeface="Arial"/>
+              </a:rPr>
+              <a:t>▸  „Die Banken geben einem ja momentan viele Angebote." → _______</a:t>
+            </a:r>
+          </a:p>
+          <a:p>
+            <a:pPr>
+              <a:spcBef>
+                <a:spcPts val="400"/>
+              </a:spcBef>
+              <a:spcAft>
+                <a:spcPts val="200"/>
+              </a:spcAft>
+            </a:pPr>
+            <a:r>
+              <a:rPr sz="1300">
+                <a:solidFill>
+                  <a:srgbClr val="3D5466"/>
+                </a:solidFill>
+                <a:latin typeface="Arial"/>
+              </a:rPr>
+              <a:t>▸  „Mein Sohn macht das irgendwann schon." → _______</a:t>
+            </a:r>
+          </a:p>
+          <a:p>
+            <a:pPr>
+              <a:spcBef>
+                <a:spcPts val="400"/>
+              </a:spcBef>
+              <a:spcAft>
+                <a:spcPts val="200"/>
+              </a:spcAft>
+            </a:pPr>
+            <a:r>
+              <a:rPr sz="1300">
+                <a:solidFill>
+                  <a:srgbClr val="3D5466"/>
+                </a:solidFill>
+                <a:latin typeface="Arial"/>
+              </a:rPr>
+              <a:t>▸  „Wir haben dieses Jahr weniger investiert als geplant." → _______</a:t>
+            </a:r>
+          </a:p>
+          <a:p>
+            <a:pPr>
+              <a:spcBef>
+                <a:spcPts val="400"/>
+              </a:spcBef>
+              <a:spcAft>
+                <a:spcPts val="200"/>
+              </a:spcAft>
+            </a:pPr>
+            <a:r>
+              <a:rPr sz="1300">
+                <a:solidFill>
+                  <a:srgbClr val="3D5466"/>
+                </a:solidFill>
+                <a:latin typeface="Arial"/>
+              </a:rPr>
+              <a:t>▸  „Eigentlich läuft alles, aber die Mitarbeiter kosten immer mehr." → _______</a:t>
+            </a:r>
+          </a:p>
+          <a:p>
+            <a:pPr>
+              <a:spcBef>
+                <a:spcPts val="400"/>
+              </a:spcBef>
+              <a:spcAft>
+                <a:spcPts val="200"/>
+              </a:spcAft>
+            </a:pPr>
+            <a:r>
+              <a:rPr sz="1300">
+                <a:solidFill>
+                  <a:srgbClr val="3D5466"/>
+                </a:solidFill>
+                <a:latin typeface="Arial"/>
+              </a:rPr>
+              <a:t>▸  „Ich muss mal schauen, wie sich das mit der Rente entwickelt." → _______</a:t>
+            </a:r>
+          </a:p>
+          <a:p>
+            <a:pPr>
+              <a:spcBef>
+                <a:spcPts val="400"/>
+              </a:spcBef>
+              <a:spcAft>
+                <a:spcPts val="200"/>
+              </a:spcAft>
+            </a:pPr>
+            <a:r>
+              <a:rPr sz="1200">
+                <a:solidFill>
+                  <a:srgbClr val="3D5466"/>
+                </a:solidFill>
+                <a:latin typeface="Arial"/>
+              </a:rPr>
+              <a:t>## 4.4 Aktives Zuhören als Schlüsselkompetenz</a:t>
+            </a:r>
+          </a:p>
+          <a:p>
+            <a:pPr>
+              <a:spcBef>
+                <a:spcPts val="400"/>
+              </a:spcBef>
+              <a:spcAft>
+                <a:spcPts val="200"/>
+              </a:spcAft>
+            </a:pPr>
+            <a:r>
+              <a:rPr sz="1200">
+                <a:solidFill>
+                  <a:srgbClr val="3D5466"/>
+                </a:solidFill>
+                <a:latin typeface="Arial"/>
+              </a:rPr>
+              <a:t>Techniken des aktiven Zuhörens:</a:t>
+            </a:r>
+          </a:p>
+          <a:p>
+            <a:pPr>
+              <a:spcBef>
+                <a:spcPts val="400"/>
+              </a:spcBef>
+              <a:spcAft>
+                <a:spcPts val="200"/>
+              </a:spcAft>
+            </a:pPr>
+            <a:r>
+              <a:rPr sz="1300">
+                <a:solidFill>
+                  <a:srgbClr val="3D5466"/>
+                </a:solidFill>
+                <a:latin typeface="Arial"/>
+              </a:rPr>
+              <a:t>▸  Paraphrasieren: Den Kern des Gesagten in eigenen Worten wiedergeben. „Wenn ich Sie richtig verstehe, macht Ihnen weniger die Finanzierung Sorgen als die Frage, wer das Unternehmen in zehn Jahren führt?"</a:t>
+            </a:r>
+          </a:p>
+          <a:p>
+            <a:pPr>
+              <a:spcBef>
+                <a:spcPts val="400"/>
+              </a:spcBef>
+              <a:spcAft>
+                <a:spcPts val="200"/>
+              </a:spcAft>
+            </a:pPr>
+            <a:r>
+              <a:rPr sz="1300">
+                <a:solidFill>
+                  <a:srgbClr val="3D5466"/>
+                </a:solidFill>
+                <a:latin typeface="Arial"/>
+              </a:rPr>
+              <a:t>▸  Verbalisieren: Wahrgenommenes Gefühl benennen (mit Vorsicht). „Ich habe das Gefühl, das Thema liegt Ihnen schon länger am Herzen."</a:t>
+            </a:r>
+          </a:p>
+          <a:p>
+            <a:pPr>
+              <a:spcBef>
+                <a:spcPts val="400"/>
+              </a:spcBef>
+              <a:spcAft>
+                <a:spcPts val="200"/>
+              </a:spcAft>
+            </a:pPr>
+            <a:r>
+              <a:rPr sz="1300">
+                <a:solidFill>
+                  <a:srgbClr val="3D5466"/>
+                </a:solidFill>
+                <a:latin typeface="Arial"/>
+              </a:rPr>
+              <a:t>▸  Schweigen lassen: Pausen aushalten. Viele latente Bedarfe werden erst geäußert, wenn der Berater aufhört zu reden. Vier Sekunden Stille fühlen sich für einen unerfahrenen Berater wie eine Ewigkeit an – für den Kunden sind es vier Sekunden Denkzeit. Wer das Schweigen bricht, beraubt den Kunden dieser Denkzeit. Konkrete Hilfe: Nicken und Augenkontakt halten. Oder leise sagen: „Ich lasse Ihnen einen Moment." Nichts weiter. Rollenspielübung: Üben Sie bewusst, bis zu 6 Sekunden Stille auszuhalten, bevor Sie weitermachen – lassen Sie den Beobachter die Sekunden zählen.</a:t>
+            </a:r>
+          </a:p>
+          <a:p>
+            <a:pPr>
+              <a:spcBef>
+                <a:spcPts val="400"/>
+              </a:spcBef>
+              <a:spcAft>
+                <a:spcPts val="200"/>
+              </a:spcAft>
+            </a:pPr>
+            <a:r>
+              <a:rPr sz="1300">
+                <a:solidFill>
+                  <a:srgbClr val="3D5466"/>
+                </a:solidFill>
+                <a:latin typeface="Arial"/>
+              </a:rPr>
+              <a:t>▸  Offene Einladung: „Gibt es etwas, das wir heute noch ansprechen sollten, das wir noch nicht berührt haben?"</a:t>
+            </a:r>
+          </a:p>
+        </p:txBody>
+      </p:sp>
+      <p:sp>
+        <p:nvSpPr>
+          <p:cNvPr id="9" name="Rectangle 8"/>
+          <p:cNvSpPr/>
+          <p:nvPr/>
+        </p:nvSpPr>
+        <p:spPr>
+          <a:xfrm>
+            <a:off x="0" y="6510528"/>
+            <a:ext cx="12188952" cy="347472"/>
+          </a:xfrm>
+          <a:prstGeom prst="rect">
+            <a:avLst/>
+          </a:prstGeom>
+          <a:solidFill>
+            <a:srgbClr val="0A1937"/>
+          </a:solidFill>
+          <a:ln>
+            <a:noFill/>
+          </a:ln>
+        </p:spPr>
+        <p:style>
+          <a:lnRef idx="1">
+            <a:schemeClr val="accent1"/>
+          </a:lnRef>
+          <a:fillRef idx="3">
+            <a:schemeClr val="accent1"/>
+          </a:fillRef>
+          <a:effectRef idx="2">
+            <a:schemeClr val="accent1"/>
+          </a:effectRef>
+          <a:fontRef idx="minor">
+            <a:schemeClr val="lt1"/>
+          </a:fontRef>
+        </p:style>
+        <p:txBody>
+          <a:bodyPr rtlCol="0" anchor="ctr"/>
+          <a:lstStyle/>
+          <a:p>
+            <a:pPr algn="ctr"/>
+          </a:p>
+        </p:txBody>
+      </p:sp>
+      <p:sp>
+        <p:nvSpPr>
+          <p:cNvPr id="10" name="TextBox 9"/>
+          <p:cNvSpPr txBox="1"/>
+          <p:nvPr/>
+        </p:nvSpPr>
+        <p:spPr>
+          <a:xfrm>
+            <a:off x="685800" y="6583680"/>
+            <a:ext cx="6490411" cy="256032"/>
+          </a:xfrm>
+          <a:prstGeom prst="rect">
+            <a:avLst/>
+          </a:prstGeom>
+          <a:noFill/>
+        </p:spPr>
+        <p:txBody>
+          <a:bodyPr wrap="none">
+            <a:spAutoFit/>
+          </a:bodyPr>
+          <a:lstStyle/>
+          <a:p>
+            <a:pPr algn="l"/>
+            <a:r>
+              <a:rPr sz="700">
+                <a:solidFill>
+                  <a:srgbClr val="A0B4D2"/>
+                </a:solidFill>
+                <a:latin typeface="JetBrains Mono"/>
+              </a:rPr>
+              <a:t>Benedikt Zoller Coaching  ·  FKB Campus  ·  M11</a:t>
             </a:r>
           </a:p>
         </p:txBody>
@@ -6717,14 +7291,6 @@
 <file path=ppt/slides/slide9.xml><?xml version="1.0" encoding="utf-8"?>
 <p:sld xmlns:a="http://schemas.openxmlformats.org/drawingml/2006/main" xmlns:p="http://schemas.openxmlformats.org/presentationml/2006/main" xmlns:r="http://schemas.openxmlformats.org/officeDocument/2006/relationships">
   <p:cSld>
-    <p:bg>
-      <p:bgPr>
-        <a:solidFill>
-          <a:srgbClr val="F8F8FA"/>
-        </a:solidFill>
-        <a:effectLst/>
-      </p:bgPr>
-    </p:bg>
     <p:spTree>
       <p:nvGrpSpPr>
         <p:cNvPr id="1" name=""/>
@@ -6734,125 +7300,20 @@
       <p:grpSpPr/>
       <p:sp>
         <p:nvSpPr>
-          <p:cNvPr id="2" name="TextBox 1"/>
-          <p:cNvSpPr txBox="1"/>
-          <p:nvPr/>
-        </p:nvSpPr>
-        <p:spPr>
-          <a:xfrm>
-            <a:off x="609600" y="279400"/>
-            <a:ext cx="2540000" cy="279400"/>
-          </a:xfrm>
-          <a:prstGeom prst="rect">
-            <a:avLst/>
-          </a:prstGeom>
-          <a:noFill/>
-        </p:spPr>
-        <p:txBody>
-          <a:bodyPr wrap="square">
-            <a:normAutofit/>
-          </a:bodyPr>
-          <a:lstStyle/>
-          <a:p>
-            <a:pPr algn="l"/>
-            <a:r>
-              <a:rPr sz="1000" b="1" i="0">
-                <a:solidFill>
-                  <a:srgbClr val="191D2E"/>
-                </a:solidFill>
-                <a:latin typeface="Arial"/>
-              </a:rPr>
-              <a:t>FKB  Campus</a:t>
-            </a:r>
-          </a:p>
-        </p:txBody>
-      </p:sp>
-      <p:sp>
-        <p:nvSpPr>
-          <p:cNvPr id="3" name="TextBox 2"/>
-          <p:cNvSpPr txBox="1"/>
-          <p:nvPr/>
-        </p:nvSpPr>
-        <p:spPr>
-          <a:xfrm>
-            <a:off x="609600" y="279400"/>
-            <a:ext cx="10972800" cy="279400"/>
-          </a:xfrm>
-          <a:prstGeom prst="rect">
-            <a:avLst/>
-          </a:prstGeom>
-          <a:noFill/>
-        </p:spPr>
-        <p:txBody>
-          <a:bodyPr wrap="square">
-            <a:normAutofit/>
-          </a:bodyPr>
-          <a:lstStyle/>
-          <a:p>
-            <a:pPr algn="r"/>
-            <a:r>
-              <a:rPr sz="900" b="0" i="0">
-                <a:solidFill>
-                  <a:srgbClr val="7B7FA0"/>
-                </a:solidFill>
-                <a:latin typeface="Courier New"/>
-              </a:rPr>
-              <a:t>III · TYPISCHE LATENTE BEDARFSFELDER</a:t>
-            </a:r>
-          </a:p>
-        </p:txBody>
-      </p:sp>
-      <p:sp>
-        <p:nvSpPr>
-          <p:cNvPr id="4" name="TextBox 3"/>
-          <p:cNvSpPr txBox="1"/>
-          <p:nvPr/>
-        </p:nvSpPr>
-        <p:spPr>
-          <a:xfrm>
-            <a:off x="609600" y="6426200"/>
-            <a:ext cx="10972800" cy="228600"/>
-          </a:xfrm>
-          <a:prstGeom prst="rect">
-            <a:avLst/>
-          </a:prstGeom>
-          <a:noFill/>
-        </p:spPr>
-        <p:txBody>
-          <a:bodyPr wrap="square">
-            <a:normAutofit/>
-          </a:bodyPr>
-          <a:lstStyle/>
-          <a:p>
-            <a:pPr algn="r"/>
-            <a:r>
-              <a:rPr sz="900" b="0" i="0">
-                <a:solidFill>
-                  <a:srgbClr val="7B7FA0"/>
-                </a:solidFill>
-                <a:latin typeface="Courier New"/>
-              </a:rPr>
-              <a:t>09</a:t>
-            </a:r>
-          </a:p>
-        </p:txBody>
-      </p:sp>
-      <p:sp>
-        <p:nvSpPr>
-          <p:cNvPr id="5" name="Rectangle 4"/>
+          <p:cNvPr id="2" name="Rectangle 1"/>
           <p:cNvSpPr/>
           <p:nvPr/>
         </p:nvSpPr>
         <p:spPr>
           <a:xfrm>
-            <a:off x="609600" y="825500"/>
-            <a:ext cx="10972800" cy="6350"/>
+            <a:off x="0" y="0"/>
+            <a:ext cx="12188952" cy="6858000"/>
           </a:xfrm>
           <a:prstGeom prst="rect">
             <a:avLst/>
           </a:prstGeom>
           <a:solidFill>
-            <a:srgbClr val="191D2E"/>
+            <a:srgbClr val="EDEDF3"/>
           </a:solidFill>
           <a:ln>
             <a:noFill/>
@@ -6882,55 +7343,20 @@
       </p:sp>
       <p:sp>
         <p:nvSpPr>
-          <p:cNvPr id="6" name="TextBox 5"/>
-          <p:cNvSpPr txBox="1"/>
-          <p:nvPr/>
-        </p:nvSpPr>
-        <p:spPr>
-          <a:xfrm>
-            <a:off x="609600" y="920750"/>
-            <a:ext cx="10972800" cy="1778000"/>
-          </a:xfrm>
-          <a:prstGeom prst="rect">
-            <a:avLst/>
-          </a:prstGeom>
-          <a:noFill/>
-        </p:spPr>
-        <p:txBody>
-          <a:bodyPr wrap="square">
-            <a:normAutofit/>
-          </a:bodyPr>
-          <a:lstStyle/>
-          <a:p>
-            <a:pPr algn="l"/>
-            <a:r>
-              <a:rPr sz="3800" b="0" i="0">
-                <a:solidFill>
-                  <a:srgbClr val="191D2E"/>
-                </a:solidFill>
-                <a:latin typeface="Georgia"/>
-              </a:rPr>
-              <a:t>Sechs Bedarfsfelder mit hohem Latenz-Potenzial</a:t>
-            </a:r>
-          </a:p>
-        </p:txBody>
-      </p:sp>
-      <p:sp>
-        <p:nvSpPr>
-          <p:cNvPr id="7" name="Rectangle 6"/>
+          <p:cNvPr id="3" name="Rectangle 2"/>
           <p:cNvSpPr/>
           <p:nvPr/>
         </p:nvSpPr>
         <p:spPr>
           <a:xfrm>
-            <a:off x="609600" y="2762250"/>
-            <a:ext cx="10972800" cy="6350"/>
+            <a:off x="0" y="0"/>
+            <a:ext cx="12188952" cy="50292"/>
           </a:xfrm>
           <a:prstGeom prst="rect">
             <a:avLst/>
           </a:prstGeom>
           <a:solidFill>
-            <a:srgbClr val="E0E0E8"/>
+            <a:srgbClr val="1F2C56"/>
           </a:solidFill>
           <a:ln>
             <a:noFill/>
@@ -6960,14 +7386,170 @@
       </p:sp>
       <p:sp>
         <p:nvSpPr>
+          <p:cNvPr id="4" name="TextBox 3"/>
+          <p:cNvSpPr txBox="1"/>
+          <p:nvPr/>
+        </p:nvSpPr>
+        <p:spPr>
+          <a:xfrm>
+            <a:off x="685800" y="109728"/>
+            <a:ext cx="10817352" cy="228600"/>
+          </a:xfrm>
+          <a:prstGeom prst="rect">
+            <a:avLst/>
+          </a:prstGeom>
+          <a:noFill/>
+        </p:spPr>
+        <p:txBody>
+          <a:bodyPr wrap="none">
+            <a:spAutoFit/>
+          </a:bodyPr>
+          <a:lstStyle/>
+          <a:p>
+            <a:pPr algn="l"/>
+            <a:r>
+              <a:rPr sz="750">
+                <a:solidFill>
+                  <a:srgbClr val="78808C"/>
+                </a:solidFill>
+                <a:latin typeface="JetBrains Mono"/>
+              </a:rPr>
+              <a:t>M11  ·  INHALT</a:t>
+            </a:r>
+          </a:p>
+        </p:txBody>
+      </p:sp>
+      <p:sp>
+        <p:nvSpPr>
+          <p:cNvPr id="5" name="Rectangle 4"/>
+          <p:cNvSpPr/>
+          <p:nvPr/>
+        </p:nvSpPr>
+        <p:spPr>
+          <a:xfrm>
+            <a:off x="0" y="1234440"/>
+            <a:ext cx="12188952" cy="12700"/>
+          </a:xfrm>
+          <a:prstGeom prst="rect">
+            <a:avLst/>
+          </a:prstGeom>
+          <a:solidFill>
+            <a:srgbClr val="D8DFE4"/>
+          </a:solidFill>
+          <a:ln>
+            <a:noFill/>
+          </a:ln>
+        </p:spPr>
+        <p:style>
+          <a:lnRef idx="1">
+            <a:schemeClr val="accent1"/>
+          </a:lnRef>
+          <a:fillRef idx="3">
+            <a:schemeClr val="accent1"/>
+          </a:fillRef>
+          <a:effectRef idx="2">
+            <a:schemeClr val="accent1"/>
+          </a:effectRef>
+          <a:fontRef idx="minor">
+            <a:schemeClr val="lt1"/>
+          </a:fontRef>
+        </p:style>
+        <p:txBody>
+          <a:bodyPr rtlCol="0" anchor="ctr"/>
+          <a:lstStyle/>
+          <a:p>
+            <a:pPr algn="ctr"/>
+          </a:p>
+        </p:txBody>
+      </p:sp>
+      <p:sp>
+        <p:nvSpPr>
+          <p:cNvPr id="6" name="Rectangle 5"/>
+          <p:cNvSpPr/>
+          <p:nvPr/>
+        </p:nvSpPr>
+        <p:spPr>
+          <a:xfrm>
+            <a:off x="685800" y="502920"/>
+            <a:ext cx="36576" cy="658368"/>
+          </a:xfrm>
+          <a:prstGeom prst="rect">
+            <a:avLst/>
+          </a:prstGeom>
+          <a:solidFill>
+            <a:srgbClr val="D9C089"/>
+          </a:solidFill>
+          <a:ln>
+            <a:noFill/>
+          </a:ln>
+        </p:spPr>
+        <p:style>
+          <a:lnRef idx="1">
+            <a:schemeClr val="accent1"/>
+          </a:lnRef>
+          <a:fillRef idx="3">
+            <a:schemeClr val="accent1"/>
+          </a:fillRef>
+          <a:effectRef idx="2">
+            <a:schemeClr val="accent1"/>
+          </a:effectRef>
+          <a:fontRef idx="minor">
+            <a:schemeClr val="lt1"/>
+          </a:fontRef>
+        </p:style>
+        <p:txBody>
+          <a:bodyPr rtlCol="0" anchor="ctr"/>
+          <a:lstStyle/>
+          <a:p>
+            <a:pPr algn="ctr"/>
+          </a:p>
+        </p:txBody>
+      </p:sp>
+      <p:sp>
+        <p:nvSpPr>
+          <p:cNvPr id="7" name="TextBox 6"/>
+          <p:cNvSpPr txBox="1"/>
+          <p:nvPr/>
+        </p:nvSpPr>
+        <p:spPr>
+          <a:xfrm>
+            <a:off x="813816" y="502920"/>
+            <a:ext cx="10634472" cy="685800"/>
+          </a:xfrm>
+          <a:prstGeom prst="rect">
+            <a:avLst/>
+          </a:prstGeom>
+          <a:noFill/>
+        </p:spPr>
+        <p:txBody>
+          <a:bodyPr wrap="square">
+            <a:spAutoFit/>
+          </a:bodyPr>
+          <a:lstStyle/>
+          <a:p>
+            <a:pPr algn="l"/>
+            <a:r>
+              <a:rPr sz="2400" b="1" i="0">
+                <a:solidFill>
+                  <a:srgbClr val="1F2C56"/>
+                </a:solidFill>
+                <a:latin typeface="Source Serif 4"/>
+              </a:rPr>
+              <a:t>Arbeitsblatt A: SPIN-Fragen vorbereiten</a:t>
+            </a:r>
+          </a:p>
+        </p:txBody>
+      </p:sp>
+      <p:sp>
+        <p:nvSpPr>
           <p:cNvPr id="8" name="TextBox 7"/>
           <p:cNvSpPr txBox="1"/>
           <p:nvPr/>
         </p:nvSpPr>
         <p:spPr>
           <a:xfrm>
-            <a:off x="609600" y="2851150"/>
-            <a:ext cx="10972800" cy="3448050"/>
+            <a:off x="685800" y="1417320"/>
+            <a:ext cx="10817352" cy="5029200"/>
           </a:xfrm>
           <a:prstGeom prst="rect">
             <a:avLst/>
@@ -6976,121 +7558,161 @@
         </p:spPr>
         <p:txBody>
           <a:bodyPr wrap="square">
-            <a:normAutofit/>
+            <a:spAutoFit/>
           </a:bodyPr>
           <a:lstStyle/>
           <a:p>
             <a:pPr>
               <a:spcBef>
-                <a:spcPts val="600"/>
+                <a:spcPts val="400"/>
               </a:spcBef>
               <a:spcAft>
-                <a:spcPts val="600"/>
+                <a:spcPts val="200"/>
               </a:spcAft>
             </a:pPr>
             <a:r>
-              <a:rPr sz="1400">
-                <a:solidFill>
-                  <a:srgbClr val="191D2E"/>
-                </a:solidFill>
-                <a:latin typeface="Georgia"/>
-              </a:rPr>
-              <a:t>–  Nachfolge &amp; Übergabe: Thema, das viele GF verdrängen</a:t>
+              <a:rPr sz="1200">
+                <a:solidFill>
+                  <a:srgbClr val="3D5466"/>
+                </a:solidFill>
+                <a:latin typeface="Arial"/>
+              </a:rPr>
+              <a:t>Mein nächstes Kundengespräch: ___________________________</a:t>
             </a:r>
           </a:p>
           <a:p>
             <a:pPr>
               <a:spcBef>
-                <a:spcPts val="600"/>
+                <a:spcPts val="400"/>
               </a:spcBef>
               <a:spcAft>
-                <a:spcPts val="600"/>
+                <a:spcPts val="200"/>
               </a:spcAft>
             </a:pPr>
             <a:r>
-              <a:rPr sz="1400">
-                <a:solidFill>
-                  <a:srgbClr val="191D2E"/>
-                </a:solidFill>
-                <a:latin typeface="Georgia"/>
-              </a:rPr>
-              <a:t>–  Schlüsselpersonenabsicherung: Wer führt, wenn der GF ausfällt?</a:t>
+              <a:rPr sz="1200">
+                <a:solidFill>
+                  <a:srgbClr val="3D5466"/>
+                </a:solidFill>
+                <a:latin typeface="Arial"/>
+              </a:rPr>
+              <a:t>Bereiten Sie für jede SPIN-Kategorie mindestens zwei Fragen vor, die zu diesem Kunden passen:</a:t>
             </a:r>
           </a:p>
           <a:p>
             <a:pPr>
               <a:spcBef>
-                <a:spcPts val="600"/>
+                <a:spcPts val="400"/>
               </a:spcBef>
               <a:spcAft>
-                <a:spcPts val="600"/>
+                <a:spcPts val="200"/>
               </a:spcAft>
             </a:pPr>
             <a:r>
-              <a:rPr sz="1400">
-                <a:solidFill>
-                  <a:srgbClr val="191D2E"/>
-                </a:solidFill>
-                <a:latin typeface="Georgia"/>
-              </a:rPr>
-              <a:t>–  Betriebliche Altersversorgung: Mitarbeiterbindung und Steueroptimierung</a:t>
+              <a:rPr sz="1200">
+                <a:solidFill>
+                  <a:srgbClr val="3D5466"/>
+                </a:solidFill>
+                <a:latin typeface="Arial"/>
+              </a:rPr>
+              <a:t>Meine Hypothese: Welchen latenten Bedarf könnte dieser Kunde haben?</a:t>
             </a:r>
           </a:p>
           <a:p>
             <a:pPr>
               <a:spcBef>
-                <a:spcPts val="600"/>
+                <a:spcPts val="400"/>
               </a:spcBef>
               <a:spcAft>
-                <a:spcPts val="600"/>
+                <a:spcPts val="200"/>
               </a:spcAft>
             </a:pPr>
             <a:r>
-              <a:rPr sz="1400">
-                <a:solidFill>
-                  <a:srgbClr val="191D2E"/>
-                </a:solidFill>
-                <a:latin typeface="Georgia"/>
-              </a:rPr>
-              <a:t>–  Wachstumsfinanzierung: Oft erst angesprochen, wenn es eng wird</a:t>
-            </a:r>
-          </a:p>
-          <a:p>
-            <a:pPr>
-              <a:spcBef>
-                <a:spcPts val="600"/>
-              </a:spcBef>
-              <a:spcAft>
-                <a:spcPts val="600"/>
-              </a:spcAft>
-            </a:pPr>
-            <a:r>
-              <a:rPr sz="1400">
-                <a:solidFill>
-                  <a:srgbClr val="191D2E"/>
-                </a:solidFill>
-                <a:latin typeface="Georgia"/>
-              </a:rPr>
-              <a:t>–  Währungsrisiko bei Export: Kaum Absicherung bei KMU</a:t>
-            </a:r>
-          </a:p>
-          <a:p>
-            <a:pPr>
-              <a:spcBef>
-                <a:spcPts val="600"/>
-              </a:spcBef>
-              <a:spcAft>
-                <a:spcPts val="600"/>
-              </a:spcAft>
-            </a:pPr>
-            <a:r>
-              <a:rPr sz="1400">
-                <a:solidFill>
-                  <a:srgbClr val="191D2E"/>
-                </a:solidFill>
-                <a:latin typeface="Georgia"/>
-              </a:rPr>
-              <a:t>–  Digitalisierung / Investition: Zögern trotz Förderprogrammen</a:t>
+              <a:rPr sz="1200">
+                <a:solidFill>
+                  <a:srgbClr val="3D5466"/>
+                </a:solidFill>
+                <a:latin typeface="Arial"/>
+              </a:rPr>
+              <a:t>___________________________________________________________________________</a:t>
+            </a:r>
+          </a:p>
+        </p:txBody>
+      </p:sp>
+      <p:sp>
+        <p:nvSpPr>
+          <p:cNvPr id="9" name="Rectangle 8"/>
+          <p:cNvSpPr/>
+          <p:nvPr/>
+        </p:nvSpPr>
+        <p:spPr>
+          <a:xfrm>
+            <a:off x="0" y="6510528"/>
+            <a:ext cx="12188952" cy="347472"/>
+          </a:xfrm>
+          <a:prstGeom prst="rect">
+            <a:avLst/>
+          </a:prstGeom>
+          <a:solidFill>
+            <a:srgbClr val="0A1937"/>
+          </a:solidFill>
+          <a:ln>
+            <a:noFill/>
+          </a:ln>
+        </p:spPr>
+        <p:style>
+          <a:lnRef idx="1">
+            <a:schemeClr val="accent1"/>
+          </a:lnRef>
+          <a:fillRef idx="3">
+            <a:schemeClr val="accent1"/>
+          </a:fillRef>
+          <a:effectRef idx="2">
+            <a:schemeClr val="accent1"/>
+          </a:effectRef>
+          <a:fontRef idx="minor">
+            <a:schemeClr val="lt1"/>
+          </a:fontRef>
+        </p:style>
+        <p:txBody>
+          <a:bodyPr rtlCol="0" anchor="ctr"/>
+          <a:lstStyle/>
+          <a:p>
+            <a:pPr algn="ctr"/>
+          </a:p>
+        </p:txBody>
+      </p:sp>
+      <p:sp>
+        <p:nvSpPr>
+          <p:cNvPr id="10" name="TextBox 9"/>
+          <p:cNvSpPr txBox="1"/>
+          <p:nvPr/>
+        </p:nvSpPr>
+        <p:spPr>
+          <a:xfrm>
+            <a:off x="685800" y="6583680"/>
+            <a:ext cx="6490411" cy="256032"/>
+          </a:xfrm>
+          <a:prstGeom prst="rect">
+            <a:avLst/>
+          </a:prstGeom>
+          <a:noFill/>
+        </p:spPr>
+        <p:txBody>
+          <a:bodyPr wrap="none">
+            <a:spAutoFit/>
+          </a:bodyPr>
+          <a:lstStyle/>
+          <a:p>
+            <a:pPr algn="l"/>
+            <a:r>
+              <a:rPr sz="700">
+                <a:solidFill>
+                  <a:srgbClr val="A0B4D2"/>
+                </a:solidFill>
+                <a:latin typeface="JetBrains Mono"/>
+              </a:rPr>
+              <a:t>Benedikt Zoller Coaching  ·  FKB Campus  ·  M11</a:t>
             </a:r>
           </a:p>
         </p:txBody>

--- a/public/downloads/praesentation/M11.pptx
+++ b/public/downloads/praesentation/M11.pptx
@@ -3255,7 +3255,42 @@
       </p:sp>
       <p:sp>
         <p:nvSpPr>
-          <p:cNvPr id="6" name="Rectangle 5"/>
+          <p:cNvPr id="6" name="TextBox 5"/>
+          <p:cNvSpPr txBox="1"/>
+          <p:nvPr/>
+        </p:nvSpPr>
+        <p:spPr>
+          <a:xfrm>
+            <a:off x="685800" y="3977639"/>
+            <a:ext cx="10817352" cy="731520"/>
+          </a:xfrm>
+          <a:prstGeom prst="rect">
+            <a:avLst/>
+          </a:prstGeom>
+          <a:noFill/>
+        </p:spPr>
+        <p:txBody>
+          <a:bodyPr wrap="square">
+            <a:spAutoFit/>
+          </a:bodyPr>
+          <a:lstStyle/>
+          <a:p>
+            <a:pPr algn="l"/>
+            <a:r>
+              <a:rPr sz="1900" b="0" i="1">
+                <a:solidFill>
+                  <a:srgbClr val="BECDE6"/>
+                </a:solidFill>
+                <a:latin typeface="Source Serif 4"/>
+              </a:rPr>
+              <a:t>Implizite Kundenbedürfnisse durch SPIN-Fragetechnik und aktives Zuhören aufdecken</a:t>
+            </a:r>
+          </a:p>
+        </p:txBody>
+      </p:sp>
+      <p:sp>
+        <p:nvSpPr>
+          <p:cNvPr id="7" name="Rectangle 6"/>
           <p:cNvSpPr/>
           <p:nvPr/>
         </p:nvSpPr>
@@ -3298,14 +3333,14 @@
       </p:sp>
       <p:sp>
         <p:nvSpPr>
-          <p:cNvPr id="7" name="TextBox 6"/>
+          <p:cNvPr id="8" name="TextBox 7"/>
           <p:cNvSpPr txBox="1"/>
           <p:nvPr/>
         </p:nvSpPr>
         <p:spPr>
           <a:xfrm>
             <a:off x="685800" y="5193792"/>
-            <a:ext cx="5408676" cy="201168"/>
+            <a:ext cx="3605784" cy="201168"/>
           </a:xfrm>
           <a:prstGeom prst="rect">
             <a:avLst/>
@@ -3326,21 +3361,21 @@
                 </a:solidFill>
                 <a:latin typeface="JetBrains Mono"/>
               </a:rPr>
-              <a:t>KOMPETENZSTUFE</a:t>
-            </a:r>
-          </a:p>
-        </p:txBody>
-      </p:sp>
-      <p:sp>
-        <p:nvSpPr>
-          <p:cNvPr id="8" name="TextBox 7"/>
+              <a:t>KOMPETENZFELD</a:t>
+            </a:r>
+          </a:p>
+        </p:txBody>
+      </p:sp>
+      <p:sp>
+        <p:nvSpPr>
+          <p:cNvPr id="9" name="TextBox 8"/>
           <p:cNvSpPr txBox="1"/>
           <p:nvPr/>
         </p:nvSpPr>
         <p:spPr>
           <a:xfrm>
             <a:off x="685800" y="5394960"/>
-            <a:ext cx="5408676" cy="320040"/>
+            <a:ext cx="3605784" cy="320040"/>
           </a:xfrm>
           <a:prstGeom prst="rect">
             <a:avLst/>
@@ -3361,21 +3396,21 @@
                 </a:solidFill>
                 <a:latin typeface="Arial"/>
               </a:rPr>
-              <a:t>Sparring</a:t>
-            </a:r>
-          </a:p>
-        </p:txBody>
-      </p:sp>
-      <p:sp>
-        <p:nvSpPr>
-          <p:cNvPr id="9" name="TextBox 8"/>
+              <a:t>K-03 Gesprächsführung &amp; Beratung</a:t>
+            </a:r>
+          </a:p>
+        </p:txBody>
+      </p:sp>
+      <p:sp>
+        <p:nvSpPr>
+          <p:cNvPr id="10" name="TextBox 9"/>
           <p:cNvSpPr txBox="1"/>
           <p:nvPr/>
         </p:nvSpPr>
         <p:spPr>
           <a:xfrm>
-            <a:off x="6094476" y="5193792"/>
-            <a:ext cx="5408676" cy="201168"/>
+            <a:off x="4291584" y="5193792"/>
+            <a:ext cx="3605784" cy="201168"/>
           </a:xfrm>
           <a:prstGeom prst="rect">
             <a:avLst/>
@@ -3396,21 +3431,21 @@
                 </a:solidFill>
                 <a:latin typeface="JetBrains Mono"/>
               </a:rPr>
-              <a:t>VERSION</a:t>
-            </a:r>
-          </a:p>
-        </p:txBody>
-      </p:sp>
-      <p:sp>
-        <p:nvSpPr>
-          <p:cNvPr id="10" name="TextBox 9"/>
+              <a:t>KOMPETENZSTUFE</a:t>
+            </a:r>
+          </a:p>
+        </p:txBody>
+      </p:sp>
+      <p:sp>
+        <p:nvSpPr>
+          <p:cNvPr id="11" name="TextBox 10"/>
           <p:cNvSpPr txBox="1"/>
           <p:nvPr/>
         </p:nvSpPr>
         <p:spPr>
           <a:xfrm>
-            <a:off x="6094476" y="5394960"/>
-            <a:ext cx="5408676" cy="320040"/>
+            <a:off x="4291584" y="5394960"/>
+            <a:ext cx="3605784" cy="320040"/>
           </a:xfrm>
           <a:prstGeom prst="rect">
             <a:avLst/>
@@ -3431,6 +3466,76 @@
                 </a:solidFill>
                 <a:latin typeface="Arial"/>
               </a:rPr>
+              <a:t>Sparring</a:t>
+            </a:r>
+          </a:p>
+        </p:txBody>
+      </p:sp>
+      <p:sp>
+        <p:nvSpPr>
+          <p:cNvPr id="12" name="TextBox 11"/>
+          <p:cNvSpPr txBox="1"/>
+          <p:nvPr/>
+        </p:nvSpPr>
+        <p:spPr>
+          <a:xfrm>
+            <a:off x="7897368" y="5193792"/>
+            <a:ext cx="3605784" cy="201168"/>
+          </a:xfrm>
+          <a:prstGeom prst="rect">
+            <a:avLst/>
+          </a:prstGeom>
+          <a:noFill/>
+        </p:spPr>
+        <p:txBody>
+          <a:bodyPr wrap="none">
+            <a:spAutoFit/>
+          </a:bodyPr>
+          <a:lstStyle/>
+          <a:p>
+            <a:pPr algn="l"/>
+            <a:r>
+              <a:rPr sz="700">
+                <a:solidFill>
+                  <a:srgbClr val="A0B4D2"/>
+                </a:solidFill>
+                <a:latin typeface="JetBrains Mono"/>
+              </a:rPr>
+              <a:t>VERSION</a:t>
+            </a:r>
+          </a:p>
+        </p:txBody>
+      </p:sp>
+      <p:sp>
+        <p:nvSpPr>
+          <p:cNvPr id="13" name="TextBox 12"/>
+          <p:cNvSpPr txBox="1"/>
+          <p:nvPr/>
+        </p:nvSpPr>
+        <p:spPr>
+          <a:xfrm>
+            <a:off x="7897368" y="5394960"/>
+            <a:ext cx="3605784" cy="320040"/>
+          </a:xfrm>
+          <a:prstGeom prst="rect">
+            <a:avLst/>
+          </a:prstGeom>
+          <a:noFill/>
+        </p:spPr>
+        <p:txBody>
+          <a:bodyPr wrap="square">
+            <a:spAutoFit/>
+          </a:bodyPr>
+          <a:lstStyle/>
+          <a:p>
+            <a:pPr algn="l"/>
+            <a:r>
+              <a:rPr sz="1100" b="0" i="0">
+                <a:solidFill>
+                  <a:srgbClr val="FFFFFF"/>
+                </a:solidFill>
+                <a:latin typeface="Arial"/>
+              </a:rPr>
               <a:t>v0.2</a:t>
             </a:r>
           </a:p>
@@ -3438,7 +3543,7 @@
       </p:sp>
       <p:sp>
         <p:nvSpPr>
-          <p:cNvPr id="11" name="Rectangle 10"/>
+          <p:cNvPr id="14" name="Rectangle 13"/>
           <p:cNvSpPr/>
           <p:nvPr/>
         </p:nvSpPr>
@@ -3481,7 +3586,7 @@
       </p:sp>
       <p:sp>
         <p:nvSpPr>
-          <p:cNvPr id="12" name="TextBox 11"/>
+          <p:cNvPr id="15" name="TextBox 14"/>
           <p:cNvSpPr txBox="1"/>
           <p:nvPr/>
         </p:nvSpPr>
@@ -3516,7 +3621,7 @@
       </p:sp>
       <p:sp>
         <p:nvSpPr>
-          <p:cNvPr id="13" name="TextBox 12"/>
+          <p:cNvPr id="16" name="TextBox 15"/>
           <p:cNvSpPr txBox="1"/>
           <p:nvPr/>
         </p:nvSpPr>
